--- a/report/dist/property_shot_game_guide.pptx
+++ b/report/dist/property_shot_game_guide.pptx
@@ -2,29 +2,29 @@
 <file path=ppt/presentation.xml><?xml version="1.0" encoding="utf-8"?>
 <p:presentation xmlns:p="http://schemas.openxmlformats.org/presentationml/2006/main">
   <p:sldMasterIdLst>
-    <p:sldMasterId xmlns:r="http://schemas.openxmlformats.org/officeDocument/2006/relationships" id="2147483648" r:id="R40a33ed948d04f4e"/>
+    <p:sldMasterId xmlns:r="http://schemas.openxmlformats.org/officeDocument/2006/relationships" id="2147483648" r:id="Rfdacde8612e443c7"/>
   </p:sldMasterIdLst>
   <p:notesMasterIdLst>
-    <p:notesMasterId xmlns:r="http://schemas.openxmlformats.org/officeDocument/2006/relationships" r:id="R0703c330630a40ec"/>
+    <p:notesMasterId xmlns:r="http://schemas.openxmlformats.org/officeDocument/2006/relationships" r:id="Rdf4467e972ec44a8"/>
   </p:notesMasterIdLst>
   <p:sldIdLst>
-    <p:sldId xmlns:r="http://schemas.openxmlformats.org/officeDocument/2006/relationships" id="256" r:id="R059aea8a669d4041"/>
-    <p:sldId xmlns:r="http://schemas.openxmlformats.org/officeDocument/2006/relationships" id="257" r:id="R0bc5898241c14165"/>
-    <p:sldId xmlns:r="http://schemas.openxmlformats.org/officeDocument/2006/relationships" id="258" r:id="R21445965e39849e0"/>
-    <p:sldId xmlns:r="http://schemas.openxmlformats.org/officeDocument/2006/relationships" id="259" r:id="R02ef398624a240ca"/>
-    <p:sldId xmlns:r="http://schemas.openxmlformats.org/officeDocument/2006/relationships" id="260" r:id="R8b9e73c07daa49e6"/>
-    <p:sldId xmlns:r="http://schemas.openxmlformats.org/officeDocument/2006/relationships" id="261" r:id="R5c7523ffb0ac4965"/>
-    <p:sldId xmlns:r="http://schemas.openxmlformats.org/officeDocument/2006/relationships" id="262" r:id="Ra710692834464527"/>
-    <p:sldId xmlns:r="http://schemas.openxmlformats.org/officeDocument/2006/relationships" id="263" r:id="R457473a335a14c72"/>
-    <p:sldId xmlns:r="http://schemas.openxmlformats.org/officeDocument/2006/relationships" id="264" r:id="R78d0e935bc084368"/>
-    <p:sldId xmlns:r="http://schemas.openxmlformats.org/officeDocument/2006/relationships" id="265" r:id="Rff42eb89e031417d"/>
-    <p:sldId xmlns:r="http://schemas.openxmlformats.org/officeDocument/2006/relationships" id="266" r:id="R3d9b9fafb32c415f"/>
-    <p:sldId xmlns:r="http://schemas.openxmlformats.org/officeDocument/2006/relationships" id="267" r:id="Rc422f096aceb43d3"/>
-    <p:sldId xmlns:r="http://schemas.openxmlformats.org/officeDocument/2006/relationships" id="268" r:id="R3acd996abae1400c"/>
-    <p:sldId xmlns:r="http://schemas.openxmlformats.org/officeDocument/2006/relationships" id="269" r:id="Rd6753cb5fa034c72"/>
-    <p:sldId xmlns:r="http://schemas.openxmlformats.org/officeDocument/2006/relationships" id="270" r:id="R47d29a6f1eb745e4"/>
-    <p:sldId xmlns:r="http://schemas.openxmlformats.org/officeDocument/2006/relationships" id="271" r:id="Raec3b8b71d9d42ca"/>
-    <p:sldId xmlns:r="http://schemas.openxmlformats.org/officeDocument/2006/relationships" id="272" r:id="R88cf496393ee44ad"/>
+    <p:sldId xmlns:r="http://schemas.openxmlformats.org/officeDocument/2006/relationships" id="256" r:id="Rbf6e44e90e714d16"/>
+    <p:sldId xmlns:r="http://schemas.openxmlformats.org/officeDocument/2006/relationships" id="257" r:id="R00609143ebc143d4"/>
+    <p:sldId xmlns:r="http://schemas.openxmlformats.org/officeDocument/2006/relationships" id="258" r:id="R252bbe06f9a54c26"/>
+    <p:sldId xmlns:r="http://schemas.openxmlformats.org/officeDocument/2006/relationships" id="259" r:id="R755bc1dd3086473e"/>
+    <p:sldId xmlns:r="http://schemas.openxmlformats.org/officeDocument/2006/relationships" id="260" r:id="R88a68a42bd4b421a"/>
+    <p:sldId xmlns:r="http://schemas.openxmlformats.org/officeDocument/2006/relationships" id="261" r:id="R2081dc0d16874b76"/>
+    <p:sldId xmlns:r="http://schemas.openxmlformats.org/officeDocument/2006/relationships" id="262" r:id="R66871013f4544b1a"/>
+    <p:sldId xmlns:r="http://schemas.openxmlformats.org/officeDocument/2006/relationships" id="263" r:id="R155bb32438ea490f"/>
+    <p:sldId xmlns:r="http://schemas.openxmlformats.org/officeDocument/2006/relationships" id="264" r:id="R3094e9b3d9c341e4"/>
+    <p:sldId xmlns:r="http://schemas.openxmlformats.org/officeDocument/2006/relationships" id="265" r:id="Rdfb0d7dae9d04872"/>
+    <p:sldId xmlns:r="http://schemas.openxmlformats.org/officeDocument/2006/relationships" id="266" r:id="Ra4b6af57bf10463d"/>
+    <p:sldId xmlns:r="http://schemas.openxmlformats.org/officeDocument/2006/relationships" id="267" r:id="Rb7a4a444c74b4e3d"/>
+    <p:sldId xmlns:r="http://schemas.openxmlformats.org/officeDocument/2006/relationships" id="268" r:id="Rdfa0a6d1ec0e47da"/>
+    <p:sldId xmlns:r="http://schemas.openxmlformats.org/officeDocument/2006/relationships" id="269" r:id="R696a953c37094de9"/>
+    <p:sldId xmlns:r="http://schemas.openxmlformats.org/officeDocument/2006/relationships" id="270" r:id="R6accdc3b59d54100"/>
+    <p:sldId xmlns:r="http://schemas.openxmlformats.org/officeDocument/2006/relationships" id="271" r:id="R523871870a694067"/>
+    <p:sldId xmlns:r="http://schemas.openxmlformats.org/officeDocument/2006/relationships" id="272" r:id="Ra53504fa32ab4396"/>
   </p:sldIdLst>
   <p:sldSz cx="7562850" cy="10696575"/>
   <p:notesSz cx="6858000" cy="9144000"/>
@@ -878,7 +878,7 @@
           </a:p>
           <a:p xmlns:a="http://schemas.openxmlformats.org/drawingml/2006/main">
             <a:r>
-              <a:t>- https://github.com/good5229/Property_shot/actions/runs/31315470165</a:t>
+              <a:t>- https://github.com/good5229/Property_shot/actions/runs/31373105599</a:t>
             </a:r>
           </a:p>
           <a:p xmlns:a="http://schemas.openxmlformats.org/drawingml/2006/main">
@@ -1806,7 +1806,7 @@
   </p:cSld>
   <p:clrMap bg1="lt1" tx1="dk1" bg2="lt2" tx2="dk2" accent1="accent1" accent2="accent2" accent3="accent3" accent4="accent4" accent5="accent5" accent6="accent6" hlink="hlink" folHlink="folHlink"/>
   <p:sldLayoutIdLst>
-    <p:sldLayoutId xmlns:r="http://schemas.openxmlformats.org/officeDocument/2006/relationships" id="2147483649" r:id="Rfa656408d7c14de6"/>
+    <p:sldLayoutId xmlns:r="http://schemas.openxmlformats.org/officeDocument/2006/relationships" id="2147483649" r:id="R6083f7f59f8d47e4"/>
   </p:sldLayoutIdLst>
   <p:txStyles>
     <p:titleStyle>
@@ -2357,7 +2357,7 @@
           <p:cNvPr id="9" name="cover-accent">
             <a:extLst xmlns:a="http://schemas.openxmlformats.org/drawingml/2006/main">
               <a:ext uri="{FF2B5EF4-FFF2-40B4-BE49-F238E27FC236}">
-                <a16:creationId xmlns:a16="http://schemas.microsoft.com/office/drawing/2014/main" id="{C228FA38-BD6A-4232-9F88-7425AD9DF2FF}"/>
+                <a16:creationId xmlns:a16="http://schemas.microsoft.com/office/drawing/2014/main" id="{24CF3D97-AFF6-41F3-9AFE-40E22A5CF0F8}"/>
               </a:ext>
             </a:extLst>
           </p:cNvPr>
@@ -2388,7 +2388,7 @@
           <p:cNvPr id="2" name="cover-kicker">
             <a:extLst xmlns:a="http://schemas.openxmlformats.org/drawingml/2006/main">
               <a:ext uri="{FF2B5EF4-FFF2-40B4-BE49-F238E27FC236}">
-                <a16:creationId xmlns:a16="http://schemas.microsoft.com/office/drawing/2014/main" id="{1E8121FD-D1D4-4DAA-9F97-EDAE13043DB2}"/>
+                <a16:creationId xmlns:a16="http://schemas.microsoft.com/office/drawing/2014/main" id="{FC98CCD3-A995-4F48-BE60-93E4A878663C}"/>
               </a:ext>
             </a:extLst>
           </p:cNvPr>
@@ -2450,7 +2450,7 @@
           <p:cNvPr id="3" name="cover-title">
             <a:extLst xmlns:a="http://schemas.openxmlformats.org/drawingml/2006/main">
               <a:ext uri="{FF2B5EF4-FFF2-40B4-BE49-F238E27FC236}">
-                <a16:creationId xmlns:a16="http://schemas.microsoft.com/office/drawing/2014/main" id="{52FDEAC0-FDA2-47D9-B10E-09980C25BB5E}"/>
+                <a16:creationId xmlns:a16="http://schemas.microsoft.com/office/drawing/2014/main" id="{57987E3D-D2AA-46FA-88F8-A83A539FF12B}"/>
               </a:ext>
             </a:extLst>
           </p:cNvPr>
@@ -2512,7 +2512,7 @@
           <p:cNvPr id="4" name="cover-subtitle">
             <a:extLst xmlns:a="http://schemas.openxmlformats.org/drawingml/2006/main">
               <a:ext uri="{FF2B5EF4-FFF2-40B4-BE49-F238E27FC236}">
-                <a16:creationId xmlns:a16="http://schemas.microsoft.com/office/drawing/2014/main" id="{5C8BA3DC-BF63-4D43-A436-677F669220A4}"/>
+                <a16:creationId xmlns:a16="http://schemas.microsoft.com/office/drawing/2014/main" id="{0E8F7548-357A-4A31-84BE-494A99DF7713}"/>
               </a:ext>
             </a:extLst>
           </p:cNvPr>
@@ -2574,7 +2574,7 @@
           <p:cNvPr id="5" name="cover-rule">
             <a:extLst xmlns:a="http://schemas.openxmlformats.org/drawingml/2006/main">
               <a:ext uri="{FF2B5EF4-FFF2-40B4-BE49-F238E27FC236}">
-                <a16:creationId xmlns:a16="http://schemas.microsoft.com/office/drawing/2014/main" id="{372DF86C-ADF4-4D6B-8B84-64B3581AAE4E}"/>
+                <a16:creationId xmlns:a16="http://schemas.microsoft.com/office/drawing/2014/main" id="{1ED67FE4-DB24-4534-BE8B-FEA2EDA0476C}"/>
               </a:ext>
             </a:extLst>
           </p:cNvPr>
@@ -2605,7 +2605,7 @@
           <p:cNvPr id="6" name="cover-description">
             <a:extLst xmlns:a="http://schemas.openxmlformats.org/drawingml/2006/main">
               <a:ext uri="{FF2B5EF4-FFF2-40B4-BE49-F238E27FC236}">
-                <a16:creationId xmlns:a16="http://schemas.microsoft.com/office/drawing/2014/main" id="{76814FDE-4D66-45D1-AE6A-A47A60D05806}"/>
+                <a16:creationId xmlns:a16="http://schemas.microsoft.com/office/drawing/2014/main" id="{2EDC39E9-0BD2-4668-B44B-EFEF4ADCAC02}"/>
               </a:ext>
             </a:extLst>
           </p:cNvPr>
@@ -2667,7 +2667,7 @@
           <p:cNvPr id="7" name="cover-meta">
             <a:extLst xmlns:a="http://schemas.openxmlformats.org/drawingml/2006/main">
               <a:ext uri="{FF2B5EF4-FFF2-40B4-BE49-F238E27FC236}">
-                <a16:creationId xmlns:a16="http://schemas.microsoft.com/office/drawing/2014/main" id="{0B97F42C-1A5F-4FC9-BAE3-CA1D82E8A81C}"/>
+                <a16:creationId xmlns:a16="http://schemas.microsoft.com/office/drawing/2014/main" id="{EA6AECF7-7020-4C71-A4AC-F9E32034C18A}"/>
               </a:ext>
             </a:extLst>
           </p:cNvPr>
@@ -2756,7 +2756,7 @@
           <p:cNvPr id="8" name="cover-page">
             <a:extLst xmlns:a="http://schemas.openxmlformats.org/drawingml/2006/main">
               <a:ext uri="{FF2B5EF4-FFF2-40B4-BE49-F238E27FC236}">
-                <a16:creationId xmlns:a16="http://schemas.microsoft.com/office/drawing/2014/main" id="{ED4D2DA6-118B-47DB-B0ED-D25C4B73CCA5}"/>
+                <a16:creationId xmlns:a16="http://schemas.microsoft.com/office/drawing/2014/main" id="{92566DE6-AC54-4891-8F7E-3E9505A7BC3E}"/>
               </a:ext>
             </a:extLst>
           </p:cNvPr>
@@ -2816,7 +2816,7 @@
     </p:spTree>
     <p:extLst>
       <p:ext uri="{BB962C8B-B14F-4D97-AF65-F5344CB8AC3E}">
-        <p14:creationId xmlns:p14="http://schemas.microsoft.com/office/powerpoint/2010/main" val="63586519"/>
+        <p14:creationId xmlns:p14="http://schemas.microsoft.com/office/powerpoint/2010/main" val="656045261"/>
       </p:ext>
     </p:extLst>
   </p:cSld>
@@ -2847,7 +2847,7 @@
           <p:cNvPr id="11" name="running-label">
             <a:extLst xmlns:a="http://schemas.openxmlformats.org/drawingml/2006/main">
               <a:ext uri="{FF2B5EF4-FFF2-40B4-BE49-F238E27FC236}">
-                <a16:creationId xmlns:a16="http://schemas.microsoft.com/office/drawing/2014/main" id="{E5742E40-A744-4040-8CF4-16AD7046C686}"/>
+                <a16:creationId xmlns:a16="http://schemas.microsoft.com/office/drawing/2014/main" id="{C427259E-DCFD-41B2-BADB-13C407B4545D}"/>
               </a:ext>
             </a:extLst>
           </p:cNvPr>
@@ -2909,7 +2909,7 @@
           <p:cNvPr id="2" name="page-number">
             <a:extLst xmlns:a="http://schemas.openxmlformats.org/drawingml/2006/main">
               <a:ext uri="{FF2B5EF4-FFF2-40B4-BE49-F238E27FC236}">
-                <a16:creationId xmlns:a16="http://schemas.microsoft.com/office/drawing/2014/main" id="{C70B8A5C-2512-438E-BEF0-FB05F1D5FB62}"/>
+                <a16:creationId xmlns:a16="http://schemas.microsoft.com/office/drawing/2014/main" id="{D43B5C75-98E2-4E3E-9EE7-D19947234DB2}"/>
               </a:ext>
             </a:extLst>
           </p:cNvPr>
@@ -2971,7 +2971,7 @@
           <p:cNvPr id="3" name="header-rule">
             <a:extLst xmlns:a="http://schemas.openxmlformats.org/drawingml/2006/main">
               <a:ext uri="{FF2B5EF4-FFF2-40B4-BE49-F238E27FC236}">
-                <a16:creationId xmlns:a16="http://schemas.microsoft.com/office/drawing/2014/main" id="{D1495F81-836C-4B61-9031-D0A31D2F8E65}"/>
+                <a16:creationId xmlns:a16="http://schemas.microsoft.com/office/drawing/2014/main" id="{FF4B9CCA-20CD-42D5-9C83-3B5DD9E172EF}"/>
               </a:ext>
             </a:extLst>
           </p:cNvPr>
@@ -3002,7 +3002,7 @@
           <p:cNvPr id="4" name="slide-title">
             <a:extLst xmlns:a="http://schemas.openxmlformats.org/drawingml/2006/main">
               <a:ext uri="{FF2B5EF4-FFF2-40B4-BE49-F238E27FC236}">
-                <a16:creationId xmlns:a16="http://schemas.microsoft.com/office/drawing/2014/main" id="{F4D786F6-BC1C-40C3-98C7-BB48F549F92A}"/>
+                <a16:creationId xmlns:a16="http://schemas.microsoft.com/office/drawing/2014/main" id="{D4E3C2FF-E690-4529-895E-E99785749C30}"/>
               </a:ext>
             </a:extLst>
           </p:cNvPr>
@@ -3068,7 +3068,7 @@
           <p:nvPr/>
         </p:nvPicPr>
         <p:blipFill>
-          <a:blip xmlns:r="http://schemas.openxmlformats.org/officeDocument/2006/relationships" xmlns:a="http://schemas.openxmlformats.org/drawingml/2006/main" r:embed="Rccc2b2e799c24ed2"/>
+          <a:blip xmlns:r="http://schemas.openxmlformats.org/officeDocument/2006/relationships" xmlns:a="http://schemas.openxmlformats.org/drawingml/2006/main" r:embed="R5da10a555ec342ee"/>
           <a:stretch xmlns:a="http://schemas.openxmlformats.org/drawingml/2006/main"/>
         </p:blipFill>
         <p:spPr>
@@ -3088,7 +3088,7 @@
           <p:cNvPr id="6" name="image-caption-140">
             <a:extLst xmlns:a="http://schemas.openxmlformats.org/drawingml/2006/main">
               <a:ext uri="{FF2B5EF4-FFF2-40B4-BE49-F238E27FC236}">
-                <a16:creationId xmlns:a16="http://schemas.microsoft.com/office/drawing/2014/main" id="{DDCAC011-7336-4B44-8FF7-178629DF40B0}"/>
+                <a16:creationId xmlns:a16="http://schemas.microsoft.com/office/drawing/2014/main" id="{C96EE8AC-56E4-4372-826E-25F71BB6627D}"/>
               </a:ext>
             </a:extLst>
           </p:cNvPr>
@@ -3150,7 +3150,7 @@
           <p:cNvPr id="7" name="paragraph-524">
             <a:extLst xmlns:a="http://schemas.openxmlformats.org/drawingml/2006/main">
               <a:ext uri="{FF2B5EF4-FFF2-40B4-BE49-F238E27FC236}">
-                <a16:creationId xmlns:a16="http://schemas.microsoft.com/office/drawing/2014/main" id="{EC57FB66-DDEE-454D-9FB2-EEC511EFD2A7}"/>
+                <a16:creationId xmlns:a16="http://schemas.microsoft.com/office/drawing/2014/main" id="{9EB389B9-870B-4510-AABC-4C2A15B961A6}"/>
               </a:ext>
             </a:extLst>
           </p:cNvPr>
@@ -3216,7 +3216,7 @@
           <p:nvPr/>
         </p:nvPicPr>
         <p:blipFill>
-          <a:blip xmlns:r="http://schemas.openxmlformats.org/officeDocument/2006/relationships" xmlns:a="http://schemas.openxmlformats.org/drawingml/2006/main" r:embed="R00b2d2a6437a4b50"/>
+          <a:blip xmlns:r="http://schemas.openxmlformats.org/officeDocument/2006/relationships" xmlns:a="http://schemas.openxmlformats.org/drawingml/2006/main" r:embed="Rc3c3fbfb2b8d46f9"/>
           <a:stretch xmlns:a="http://schemas.openxmlformats.org/drawingml/2006/main"/>
         </p:blipFill>
         <p:spPr>
@@ -3236,7 +3236,7 @@
           <p:cNvPr id="9" name="image-caption-596.64">
             <a:extLst xmlns:a="http://schemas.openxmlformats.org/drawingml/2006/main">
               <a:ext uri="{FF2B5EF4-FFF2-40B4-BE49-F238E27FC236}">
-                <a16:creationId xmlns:a16="http://schemas.microsoft.com/office/drawing/2014/main" id="{1AB66982-A88C-4F0C-9D9E-F9D68730BD56}"/>
+                <a16:creationId xmlns:a16="http://schemas.microsoft.com/office/drawing/2014/main" id="{01684BAA-68EB-437F-913E-45A0D8C69B06}"/>
               </a:ext>
             </a:extLst>
           </p:cNvPr>
@@ -3298,7 +3298,7 @@
           <p:cNvPr id="10" name="subheading-980.64">
             <a:extLst xmlns:a="http://schemas.openxmlformats.org/drawingml/2006/main">
               <a:ext uri="{FF2B5EF4-FFF2-40B4-BE49-F238E27FC236}">
-                <a16:creationId xmlns:a16="http://schemas.microsoft.com/office/drawing/2014/main" id="{9A92B9B3-700C-443C-A403-32F14851B712}"/>
+                <a16:creationId xmlns:a16="http://schemas.microsoft.com/office/drawing/2014/main" id="{4C9E9B77-6DBE-4829-97BE-02D96F3BFCC7}"/>
               </a:ext>
             </a:extLst>
           </p:cNvPr>
@@ -3358,7 +3358,7 @@
     </p:spTree>
     <p:extLst>
       <p:ext uri="{BB962C8B-B14F-4D97-AF65-F5344CB8AC3E}">
-        <p14:creationId xmlns:p14="http://schemas.microsoft.com/office/powerpoint/2010/main" val="1079546798"/>
+        <p14:creationId xmlns:p14="http://schemas.microsoft.com/office/powerpoint/2010/main" val="409869941"/>
       </p:ext>
     </p:extLst>
   </p:cSld>
@@ -3389,7 +3389,7 @@
           <p:cNvPr id="9" name="running-label">
             <a:extLst xmlns:a="http://schemas.openxmlformats.org/drawingml/2006/main">
               <a:ext uri="{FF2B5EF4-FFF2-40B4-BE49-F238E27FC236}">
-                <a16:creationId xmlns:a16="http://schemas.microsoft.com/office/drawing/2014/main" id="{9197CC15-7D44-41B7-8725-AE0C51243193}"/>
+                <a16:creationId xmlns:a16="http://schemas.microsoft.com/office/drawing/2014/main" id="{2C7EE2BE-202E-47B7-AD4E-1848AD1D324C}"/>
               </a:ext>
             </a:extLst>
           </p:cNvPr>
@@ -3451,7 +3451,7 @@
           <p:cNvPr id="2" name="page-number">
             <a:extLst xmlns:a="http://schemas.openxmlformats.org/drawingml/2006/main">
               <a:ext uri="{FF2B5EF4-FFF2-40B4-BE49-F238E27FC236}">
-                <a16:creationId xmlns:a16="http://schemas.microsoft.com/office/drawing/2014/main" id="{2BE1280A-6194-41FD-B5CE-6E9467D1F8D9}"/>
+                <a16:creationId xmlns:a16="http://schemas.microsoft.com/office/drawing/2014/main" id="{09BBCE9F-6AED-46DC-BCC0-F6D34AA73B64}"/>
               </a:ext>
             </a:extLst>
           </p:cNvPr>
@@ -3513,7 +3513,7 @@
           <p:cNvPr id="3" name="header-rule">
             <a:extLst xmlns:a="http://schemas.openxmlformats.org/drawingml/2006/main">
               <a:ext uri="{FF2B5EF4-FFF2-40B4-BE49-F238E27FC236}">
-                <a16:creationId xmlns:a16="http://schemas.microsoft.com/office/drawing/2014/main" id="{7C952DEE-E049-40B5-9C79-54429AA6692D}"/>
+                <a16:creationId xmlns:a16="http://schemas.microsoft.com/office/drawing/2014/main" id="{9A330750-CE70-4A74-A279-57D22BB7BA8C}"/>
               </a:ext>
             </a:extLst>
           </p:cNvPr>
@@ -3544,7 +3544,7 @@
           <p:cNvPr id="4" name="slide-title">
             <a:extLst xmlns:a="http://schemas.openxmlformats.org/drawingml/2006/main">
               <a:ext uri="{FF2B5EF4-FFF2-40B4-BE49-F238E27FC236}">
-                <a16:creationId xmlns:a16="http://schemas.microsoft.com/office/drawing/2014/main" id="{0DC6F6E7-8078-4B78-A054-5AFCAB308562}"/>
+                <a16:creationId xmlns:a16="http://schemas.microsoft.com/office/drawing/2014/main" id="{7A076FC8-3D52-4B4D-B73D-59E9FCC4A8F6}"/>
               </a:ext>
             </a:extLst>
           </p:cNvPr>
@@ -3606,7 +3606,7 @@
           <p:cNvPr id="5" name="paragraph-140">
             <a:extLst xmlns:a="http://schemas.openxmlformats.org/drawingml/2006/main">
               <a:ext uri="{FF2B5EF4-FFF2-40B4-BE49-F238E27FC236}">
-                <a16:creationId xmlns:a16="http://schemas.microsoft.com/office/drawing/2014/main" id="{A961EF34-8461-4695-9FC7-CFFA57A528E6}"/>
+                <a16:creationId xmlns:a16="http://schemas.microsoft.com/office/drawing/2014/main" id="{428069A6-1FA6-4EB0-B6CC-CC6AE0B5A98B}"/>
               </a:ext>
             </a:extLst>
           </p:cNvPr>
@@ -3672,7 +3672,7 @@
           <p:nvPr/>
         </p:nvPicPr>
         <p:blipFill>
-          <a:blip xmlns:r="http://schemas.openxmlformats.org/officeDocument/2006/relationships" xmlns:a="http://schemas.openxmlformats.org/drawingml/2006/main" r:embed="R3ca316db04c84a5d"/>
+          <a:blip xmlns:r="http://schemas.openxmlformats.org/officeDocument/2006/relationships" xmlns:a="http://schemas.openxmlformats.org/drawingml/2006/main" r:embed="Rebf1c19822d44b33"/>
           <a:stretch xmlns:a="http://schemas.openxmlformats.org/drawingml/2006/main"/>
         </p:blipFill>
         <p:spPr>
@@ -3692,7 +3692,7 @@
           <p:cNvPr id="7" name="image-caption-261.28">
             <a:extLst xmlns:a="http://schemas.openxmlformats.org/drawingml/2006/main">
               <a:ext uri="{FF2B5EF4-FFF2-40B4-BE49-F238E27FC236}">
-                <a16:creationId xmlns:a16="http://schemas.microsoft.com/office/drawing/2014/main" id="{DF0AD0E6-6B78-49E3-87F3-5548621F918B}"/>
+                <a16:creationId xmlns:a16="http://schemas.microsoft.com/office/drawing/2014/main" id="{3C695003-963A-40C4-83A8-75477E3C6DD4}"/>
               </a:ext>
             </a:extLst>
           </p:cNvPr>
@@ -3754,7 +3754,7 @@
           <p:cNvPr id="8" name="paragraph-645.28">
             <a:extLst xmlns:a="http://schemas.openxmlformats.org/drawingml/2006/main">
               <a:ext uri="{FF2B5EF4-FFF2-40B4-BE49-F238E27FC236}">
-                <a16:creationId xmlns:a16="http://schemas.microsoft.com/office/drawing/2014/main" id="{356173A1-0B4A-4DA6-BEB6-3BF0966DCE3E}"/>
+                <a16:creationId xmlns:a16="http://schemas.microsoft.com/office/drawing/2014/main" id="{3762D2E5-3E49-4861-914F-551DB8A61DEC}"/>
               </a:ext>
             </a:extLst>
           </p:cNvPr>
@@ -3814,7 +3814,7 @@
     </p:spTree>
     <p:extLst>
       <p:ext uri="{BB962C8B-B14F-4D97-AF65-F5344CB8AC3E}">
-        <p14:creationId xmlns:p14="http://schemas.microsoft.com/office/powerpoint/2010/main" val="1726619785"/>
+        <p14:creationId xmlns:p14="http://schemas.microsoft.com/office/powerpoint/2010/main" val="1033285148"/>
       </p:ext>
     </p:extLst>
   </p:cSld>
@@ -3845,7 +3845,7 @@
           <p:cNvPr id="7" name="running-label">
             <a:extLst xmlns:a="http://schemas.openxmlformats.org/drawingml/2006/main">
               <a:ext uri="{FF2B5EF4-FFF2-40B4-BE49-F238E27FC236}">
-                <a16:creationId xmlns:a16="http://schemas.microsoft.com/office/drawing/2014/main" id="{05418087-2A1E-41C2-B4D6-77A78761A6DC}"/>
+                <a16:creationId xmlns:a16="http://schemas.microsoft.com/office/drawing/2014/main" id="{F8AADD33-A568-4414-B07A-8424C257858E}"/>
               </a:ext>
             </a:extLst>
           </p:cNvPr>
@@ -3907,7 +3907,7 @@
           <p:cNvPr id="2" name="page-number">
             <a:extLst xmlns:a="http://schemas.openxmlformats.org/drawingml/2006/main">
               <a:ext uri="{FF2B5EF4-FFF2-40B4-BE49-F238E27FC236}">
-                <a16:creationId xmlns:a16="http://schemas.microsoft.com/office/drawing/2014/main" id="{AE2B3DC7-7D36-4A31-A033-27D196932E04}"/>
+                <a16:creationId xmlns:a16="http://schemas.microsoft.com/office/drawing/2014/main" id="{76B6977A-282E-4013-A617-6B4A8FE15894}"/>
               </a:ext>
             </a:extLst>
           </p:cNvPr>
@@ -3969,7 +3969,7 @@
           <p:cNvPr id="3" name="header-rule">
             <a:extLst xmlns:a="http://schemas.openxmlformats.org/drawingml/2006/main">
               <a:ext uri="{FF2B5EF4-FFF2-40B4-BE49-F238E27FC236}">
-                <a16:creationId xmlns:a16="http://schemas.microsoft.com/office/drawing/2014/main" id="{F5EF0B19-31C4-41A4-85E5-D08758198C9E}"/>
+                <a16:creationId xmlns:a16="http://schemas.microsoft.com/office/drawing/2014/main" id="{68C871BB-8DAF-4098-A08F-F7619F0EBBFF}"/>
               </a:ext>
             </a:extLst>
           </p:cNvPr>
@@ -4000,7 +4000,7 @@
           <p:cNvPr id="4" name="slide-title">
             <a:extLst xmlns:a="http://schemas.openxmlformats.org/drawingml/2006/main">
               <a:ext uri="{FF2B5EF4-FFF2-40B4-BE49-F238E27FC236}">
-                <a16:creationId xmlns:a16="http://schemas.microsoft.com/office/drawing/2014/main" id="{97349161-9B7F-457C-89A4-12010169C9D6}"/>
+                <a16:creationId xmlns:a16="http://schemas.microsoft.com/office/drawing/2014/main" id="{87A6EF2A-5D68-4307-99A7-66EC40B48B44}"/>
               </a:ext>
             </a:extLst>
           </p:cNvPr>
@@ -4066,7 +4066,7 @@
           <p:nvPr/>
         </p:nvPicPr>
         <p:blipFill>
-          <a:blip xmlns:r="http://schemas.openxmlformats.org/officeDocument/2006/relationships" xmlns:a="http://schemas.openxmlformats.org/drawingml/2006/main" r:embed="R0cb567b90a844feb"/>
+          <a:blip xmlns:r="http://schemas.openxmlformats.org/officeDocument/2006/relationships" xmlns:a="http://schemas.openxmlformats.org/drawingml/2006/main" r:embed="R63ece1760ce14572"/>
           <a:stretch xmlns:a="http://schemas.openxmlformats.org/drawingml/2006/main"/>
         </p:blipFill>
         <p:spPr>
@@ -4086,7 +4086,7 @@
           <p:cNvPr id="6" name="image-caption-140">
             <a:extLst xmlns:a="http://schemas.openxmlformats.org/drawingml/2006/main">
               <a:ext uri="{FF2B5EF4-FFF2-40B4-BE49-F238E27FC236}">
-                <a16:creationId xmlns:a16="http://schemas.microsoft.com/office/drawing/2014/main" id="{D1FFA4DD-5240-402E-A10D-E6D3E9374E1E}"/>
+                <a16:creationId xmlns:a16="http://schemas.microsoft.com/office/drawing/2014/main" id="{2661E66E-345B-4095-8572-F4A1F1D32258}"/>
               </a:ext>
             </a:extLst>
           </p:cNvPr>
@@ -4146,7 +4146,7 @@
     </p:spTree>
     <p:extLst>
       <p:ext uri="{BB962C8B-B14F-4D97-AF65-F5344CB8AC3E}">
-        <p14:creationId xmlns:p14="http://schemas.microsoft.com/office/powerpoint/2010/main" val="760595223"/>
+        <p14:creationId xmlns:p14="http://schemas.microsoft.com/office/powerpoint/2010/main" val="380595302"/>
       </p:ext>
     </p:extLst>
   </p:cSld>
@@ -4177,7 +4177,7 @@
           <p:cNvPr id="72" name="running-label">
             <a:extLst xmlns:a="http://schemas.openxmlformats.org/drawingml/2006/main">
               <a:ext uri="{FF2B5EF4-FFF2-40B4-BE49-F238E27FC236}">
-                <a16:creationId xmlns:a16="http://schemas.microsoft.com/office/drawing/2014/main" id="{9D90F4AB-35DE-41CC-B9C8-1FFB02CA6C0B}"/>
+                <a16:creationId xmlns:a16="http://schemas.microsoft.com/office/drawing/2014/main" id="{DA6B4C89-B2C8-4337-9D7E-44421A38AE0B}"/>
               </a:ext>
             </a:extLst>
           </p:cNvPr>
@@ -4239,7 +4239,7 @@
           <p:cNvPr id="2" name="page-number">
             <a:extLst xmlns:a="http://schemas.openxmlformats.org/drawingml/2006/main">
               <a:ext uri="{FF2B5EF4-FFF2-40B4-BE49-F238E27FC236}">
-                <a16:creationId xmlns:a16="http://schemas.microsoft.com/office/drawing/2014/main" id="{FC63114A-23A1-4CE3-8C09-FEB25F09AE67}"/>
+                <a16:creationId xmlns:a16="http://schemas.microsoft.com/office/drawing/2014/main" id="{A0B1BFEF-D219-482B-9F8D-95D966F991BB}"/>
               </a:ext>
             </a:extLst>
           </p:cNvPr>
@@ -4301,7 +4301,7 @@
           <p:cNvPr id="3" name="header-rule">
             <a:extLst xmlns:a="http://schemas.openxmlformats.org/drawingml/2006/main">
               <a:ext uri="{FF2B5EF4-FFF2-40B4-BE49-F238E27FC236}">
-                <a16:creationId xmlns:a16="http://schemas.microsoft.com/office/drawing/2014/main" id="{3B2F0E8C-6098-4809-84A5-18F1F0B22049}"/>
+                <a16:creationId xmlns:a16="http://schemas.microsoft.com/office/drawing/2014/main" id="{4191D193-E2C4-4B05-919E-7DDC692ED798}"/>
               </a:ext>
             </a:extLst>
           </p:cNvPr>
@@ -4332,7 +4332,7 @@
           <p:cNvPr id="4" name="slide-title">
             <a:extLst xmlns:a="http://schemas.openxmlformats.org/drawingml/2006/main">
               <a:ext uri="{FF2B5EF4-FFF2-40B4-BE49-F238E27FC236}">
-                <a16:creationId xmlns:a16="http://schemas.microsoft.com/office/drawing/2014/main" id="{32DE040D-032B-40F6-92A7-72AFF78CFA28}"/>
+                <a16:creationId xmlns:a16="http://schemas.microsoft.com/office/drawing/2014/main" id="{11610231-5842-47C0-809C-576BDAA96474}"/>
               </a:ext>
             </a:extLst>
           </p:cNvPr>
@@ -4394,7 +4394,7 @@
           <p:cNvPr id="5" name="table-cell-140-0-0">
             <a:extLst xmlns:a="http://schemas.openxmlformats.org/drawingml/2006/main">
               <a:ext uri="{FF2B5EF4-FFF2-40B4-BE49-F238E27FC236}">
-                <a16:creationId xmlns:a16="http://schemas.microsoft.com/office/drawing/2014/main" id="{C2C098C6-E29C-4124-8E49-C4400EDAA917}"/>
+                <a16:creationId xmlns:a16="http://schemas.microsoft.com/office/drawing/2014/main" id="{2C92B17B-2CE9-47FB-8A46-EE07C38102C2}"/>
               </a:ext>
             </a:extLst>
           </p:cNvPr>
@@ -4427,7 +4427,7 @@
           <p:cNvPr id="6" name="table-text-140-0-0">
             <a:extLst xmlns:a="http://schemas.openxmlformats.org/drawingml/2006/main">
               <a:ext uri="{FF2B5EF4-FFF2-40B4-BE49-F238E27FC236}">
-                <a16:creationId xmlns:a16="http://schemas.microsoft.com/office/drawing/2014/main" id="{1320C917-CC82-49A3-8813-842609811269}"/>
+                <a16:creationId xmlns:a16="http://schemas.microsoft.com/office/drawing/2014/main" id="{0AE5301F-8BA7-4165-8275-BBE0CCF9AF65}"/>
               </a:ext>
             </a:extLst>
           </p:cNvPr>
@@ -4489,7 +4489,7 @@
           <p:cNvPr id="7" name="table-cell-140-0-1">
             <a:extLst xmlns:a="http://schemas.openxmlformats.org/drawingml/2006/main">
               <a:ext uri="{FF2B5EF4-FFF2-40B4-BE49-F238E27FC236}">
-                <a16:creationId xmlns:a16="http://schemas.microsoft.com/office/drawing/2014/main" id="{290BDF7D-21EC-44AA-9950-54249115CEB9}"/>
+                <a16:creationId xmlns:a16="http://schemas.microsoft.com/office/drawing/2014/main" id="{5686E473-C8D4-4500-9802-FA14145590A3}"/>
               </a:ext>
             </a:extLst>
           </p:cNvPr>
@@ -4522,7 +4522,7 @@
           <p:cNvPr id="8" name="table-text-140-0-1">
             <a:extLst xmlns:a="http://schemas.openxmlformats.org/drawingml/2006/main">
               <a:ext uri="{FF2B5EF4-FFF2-40B4-BE49-F238E27FC236}">
-                <a16:creationId xmlns:a16="http://schemas.microsoft.com/office/drawing/2014/main" id="{4FDEC227-1AD4-48D0-9B9A-19572E79DEAB}"/>
+                <a16:creationId xmlns:a16="http://schemas.microsoft.com/office/drawing/2014/main" id="{6E4968C5-BDCB-4C23-9F9C-7B09B423BD1B}"/>
               </a:ext>
             </a:extLst>
           </p:cNvPr>
@@ -4584,7 +4584,7 @@
           <p:cNvPr id="9" name="table-cell-140-0-2">
             <a:extLst xmlns:a="http://schemas.openxmlformats.org/drawingml/2006/main">
               <a:ext uri="{FF2B5EF4-FFF2-40B4-BE49-F238E27FC236}">
-                <a16:creationId xmlns:a16="http://schemas.microsoft.com/office/drawing/2014/main" id="{9AF09D58-72DE-45B5-B343-953FB7DC28C8}"/>
+                <a16:creationId xmlns:a16="http://schemas.microsoft.com/office/drawing/2014/main" id="{E3A5143F-10CA-4681-A925-E7B2D31698F3}"/>
               </a:ext>
             </a:extLst>
           </p:cNvPr>
@@ -4617,7 +4617,7 @@
           <p:cNvPr id="10" name="table-text-140-0-2">
             <a:extLst xmlns:a="http://schemas.openxmlformats.org/drawingml/2006/main">
               <a:ext uri="{FF2B5EF4-FFF2-40B4-BE49-F238E27FC236}">
-                <a16:creationId xmlns:a16="http://schemas.microsoft.com/office/drawing/2014/main" id="{5033A7D0-AB84-4AB9-A7AF-FDF5CF4E9D07}"/>
+                <a16:creationId xmlns:a16="http://schemas.microsoft.com/office/drawing/2014/main" id="{15D281ED-1FD0-4ED3-88C0-D7EB0EBC5A19}"/>
               </a:ext>
             </a:extLst>
           </p:cNvPr>
@@ -4679,7 +4679,7 @@
           <p:cNvPr id="11" name="table-cell-140-1-0">
             <a:extLst xmlns:a="http://schemas.openxmlformats.org/drawingml/2006/main">
               <a:ext uri="{FF2B5EF4-FFF2-40B4-BE49-F238E27FC236}">
-                <a16:creationId xmlns:a16="http://schemas.microsoft.com/office/drawing/2014/main" id="{662394C4-50F4-46A1-B033-D6C2EB9EBF69}"/>
+                <a16:creationId xmlns:a16="http://schemas.microsoft.com/office/drawing/2014/main" id="{8AB6A9A7-CBC6-44C6-9337-AB1EF590C485}"/>
               </a:ext>
             </a:extLst>
           </p:cNvPr>
@@ -4712,7 +4712,7 @@
           <p:cNvPr id="12" name="table-text-140-1-0">
             <a:extLst xmlns:a="http://schemas.openxmlformats.org/drawingml/2006/main">
               <a:ext uri="{FF2B5EF4-FFF2-40B4-BE49-F238E27FC236}">
-                <a16:creationId xmlns:a16="http://schemas.microsoft.com/office/drawing/2014/main" id="{C0797CA0-9B19-4C5C-B1B4-6790FAF1FF55}"/>
+                <a16:creationId xmlns:a16="http://schemas.microsoft.com/office/drawing/2014/main" id="{3EE623A4-B409-4EE7-BBF0-92AEBD42F618}"/>
               </a:ext>
             </a:extLst>
           </p:cNvPr>
@@ -4774,7 +4774,7 @@
           <p:cNvPr id="13" name="table-cell-140-1-1">
             <a:extLst xmlns:a="http://schemas.openxmlformats.org/drawingml/2006/main">
               <a:ext uri="{FF2B5EF4-FFF2-40B4-BE49-F238E27FC236}">
-                <a16:creationId xmlns:a16="http://schemas.microsoft.com/office/drawing/2014/main" id="{C36805CB-71B4-43C2-AC0F-EBDFA9DD01FF}"/>
+                <a16:creationId xmlns:a16="http://schemas.microsoft.com/office/drawing/2014/main" id="{162B1F65-9573-4253-A439-6D2781B76DE7}"/>
               </a:ext>
             </a:extLst>
           </p:cNvPr>
@@ -4807,7 +4807,7 @@
           <p:cNvPr id="14" name="table-text-140-1-1">
             <a:extLst xmlns:a="http://schemas.openxmlformats.org/drawingml/2006/main">
               <a:ext uri="{FF2B5EF4-FFF2-40B4-BE49-F238E27FC236}">
-                <a16:creationId xmlns:a16="http://schemas.microsoft.com/office/drawing/2014/main" id="{113D55D2-FBB1-4B95-AD11-93CCF78BCF2F}"/>
+                <a16:creationId xmlns:a16="http://schemas.microsoft.com/office/drawing/2014/main" id="{68E72687-DC34-4531-A101-C9FA29B02B14}"/>
               </a:ext>
             </a:extLst>
           </p:cNvPr>
@@ -4869,7 +4869,7 @@
           <p:cNvPr id="15" name="table-cell-140-1-2">
             <a:extLst xmlns:a="http://schemas.openxmlformats.org/drawingml/2006/main">
               <a:ext uri="{FF2B5EF4-FFF2-40B4-BE49-F238E27FC236}">
-                <a16:creationId xmlns:a16="http://schemas.microsoft.com/office/drawing/2014/main" id="{7C436983-32F0-460E-879A-36EE093ACBDC}"/>
+                <a16:creationId xmlns:a16="http://schemas.microsoft.com/office/drawing/2014/main" id="{EF21AA75-17AB-41DF-A313-C6B1EB2EDB95}"/>
               </a:ext>
             </a:extLst>
           </p:cNvPr>
@@ -4902,7 +4902,7 @@
           <p:cNvPr id="16" name="table-text-140-1-2">
             <a:extLst xmlns:a="http://schemas.openxmlformats.org/drawingml/2006/main">
               <a:ext uri="{FF2B5EF4-FFF2-40B4-BE49-F238E27FC236}">
-                <a16:creationId xmlns:a16="http://schemas.microsoft.com/office/drawing/2014/main" id="{63B65014-2A74-4B48-BB1A-283158278FA2}"/>
+                <a16:creationId xmlns:a16="http://schemas.microsoft.com/office/drawing/2014/main" id="{9064CFEA-3CDD-4BD6-91F2-3391765343ED}"/>
               </a:ext>
             </a:extLst>
           </p:cNvPr>
@@ -4964,7 +4964,7 @@
           <p:cNvPr id="17" name="table-cell-140-2-0">
             <a:extLst xmlns:a="http://schemas.openxmlformats.org/drawingml/2006/main">
               <a:ext uri="{FF2B5EF4-FFF2-40B4-BE49-F238E27FC236}">
-                <a16:creationId xmlns:a16="http://schemas.microsoft.com/office/drawing/2014/main" id="{1473EB63-EA75-4746-8F2E-E1E1ACB99971}"/>
+                <a16:creationId xmlns:a16="http://schemas.microsoft.com/office/drawing/2014/main" id="{1C6B4C0E-8CB3-44B3-929B-F647A7128D7B}"/>
               </a:ext>
             </a:extLst>
           </p:cNvPr>
@@ -4997,7 +4997,7 @@
           <p:cNvPr id="18" name="table-text-140-2-0">
             <a:extLst xmlns:a="http://schemas.openxmlformats.org/drawingml/2006/main">
               <a:ext uri="{FF2B5EF4-FFF2-40B4-BE49-F238E27FC236}">
-                <a16:creationId xmlns:a16="http://schemas.microsoft.com/office/drawing/2014/main" id="{2BD40245-D34F-47D5-9841-D256579C3F95}"/>
+                <a16:creationId xmlns:a16="http://schemas.microsoft.com/office/drawing/2014/main" id="{17F969B2-2ADF-46CB-8EF4-C4D4F83E1A71}"/>
               </a:ext>
             </a:extLst>
           </p:cNvPr>
@@ -5059,7 +5059,7 @@
           <p:cNvPr id="19" name="table-cell-140-2-1">
             <a:extLst xmlns:a="http://schemas.openxmlformats.org/drawingml/2006/main">
               <a:ext uri="{FF2B5EF4-FFF2-40B4-BE49-F238E27FC236}">
-                <a16:creationId xmlns:a16="http://schemas.microsoft.com/office/drawing/2014/main" id="{76B0E799-F97C-4043-AFAA-7FCE5493AC5E}"/>
+                <a16:creationId xmlns:a16="http://schemas.microsoft.com/office/drawing/2014/main" id="{36FFA99D-C486-477F-889F-AC170FF50341}"/>
               </a:ext>
             </a:extLst>
           </p:cNvPr>
@@ -5092,7 +5092,7 @@
           <p:cNvPr id="20" name="table-text-140-2-1">
             <a:extLst xmlns:a="http://schemas.openxmlformats.org/drawingml/2006/main">
               <a:ext uri="{FF2B5EF4-FFF2-40B4-BE49-F238E27FC236}">
-                <a16:creationId xmlns:a16="http://schemas.microsoft.com/office/drawing/2014/main" id="{368CC9E9-2CA1-499E-9CCF-468B182EB8D5}"/>
+                <a16:creationId xmlns:a16="http://schemas.microsoft.com/office/drawing/2014/main" id="{EF7F1BBE-64AF-43C1-AFD8-A050151B8617}"/>
               </a:ext>
             </a:extLst>
           </p:cNvPr>
@@ -5154,7 +5154,7 @@
           <p:cNvPr id="21" name="table-cell-140-2-2">
             <a:extLst xmlns:a="http://schemas.openxmlformats.org/drawingml/2006/main">
               <a:ext uri="{FF2B5EF4-FFF2-40B4-BE49-F238E27FC236}">
-                <a16:creationId xmlns:a16="http://schemas.microsoft.com/office/drawing/2014/main" id="{D5737BDE-E3F6-43D7-8425-DD6E7C43C6B2}"/>
+                <a16:creationId xmlns:a16="http://schemas.microsoft.com/office/drawing/2014/main" id="{F008BE3B-86CD-4A3C-B48B-D3E3787F57C1}"/>
               </a:ext>
             </a:extLst>
           </p:cNvPr>
@@ -5187,7 +5187,7 @@
           <p:cNvPr id="22" name="table-text-140-2-2">
             <a:extLst xmlns:a="http://schemas.openxmlformats.org/drawingml/2006/main">
               <a:ext uri="{FF2B5EF4-FFF2-40B4-BE49-F238E27FC236}">
-                <a16:creationId xmlns:a16="http://schemas.microsoft.com/office/drawing/2014/main" id="{282AFE70-3507-4267-B247-7A45FF1B8A04}"/>
+                <a16:creationId xmlns:a16="http://schemas.microsoft.com/office/drawing/2014/main" id="{5FB2E11C-BA38-45DD-9C00-BF26442E5A28}"/>
               </a:ext>
             </a:extLst>
           </p:cNvPr>
@@ -5249,7 +5249,7 @@
           <p:cNvPr id="23" name="table-cell-140-3-0">
             <a:extLst xmlns:a="http://schemas.openxmlformats.org/drawingml/2006/main">
               <a:ext uri="{FF2B5EF4-FFF2-40B4-BE49-F238E27FC236}">
-                <a16:creationId xmlns:a16="http://schemas.microsoft.com/office/drawing/2014/main" id="{D6F67263-4552-463E-A49F-4DDC6A560916}"/>
+                <a16:creationId xmlns:a16="http://schemas.microsoft.com/office/drawing/2014/main" id="{5684C346-C5CB-4A17-9658-D4D3FDCB7DF7}"/>
               </a:ext>
             </a:extLst>
           </p:cNvPr>
@@ -5282,7 +5282,7 @@
           <p:cNvPr id="24" name="table-text-140-3-0">
             <a:extLst xmlns:a="http://schemas.openxmlformats.org/drawingml/2006/main">
               <a:ext uri="{FF2B5EF4-FFF2-40B4-BE49-F238E27FC236}">
-                <a16:creationId xmlns:a16="http://schemas.microsoft.com/office/drawing/2014/main" id="{11A772B6-90B0-47A9-AF75-01B1E477ADBC}"/>
+                <a16:creationId xmlns:a16="http://schemas.microsoft.com/office/drawing/2014/main" id="{176060BC-D42E-4FD5-9B63-7A0FD6FEA48C}"/>
               </a:ext>
             </a:extLst>
           </p:cNvPr>
@@ -5344,7 +5344,7 @@
           <p:cNvPr id="25" name="table-cell-140-3-1">
             <a:extLst xmlns:a="http://schemas.openxmlformats.org/drawingml/2006/main">
               <a:ext uri="{FF2B5EF4-FFF2-40B4-BE49-F238E27FC236}">
-                <a16:creationId xmlns:a16="http://schemas.microsoft.com/office/drawing/2014/main" id="{1257433D-C9A3-47E3-A141-4862A501C8DB}"/>
+                <a16:creationId xmlns:a16="http://schemas.microsoft.com/office/drawing/2014/main" id="{AB308BF1-055C-48F7-8B92-1EF4AAC6F590}"/>
               </a:ext>
             </a:extLst>
           </p:cNvPr>
@@ -5377,7 +5377,7 @@
           <p:cNvPr id="26" name="table-text-140-3-1">
             <a:extLst xmlns:a="http://schemas.openxmlformats.org/drawingml/2006/main">
               <a:ext uri="{FF2B5EF4-FFF2-40B4-BE49-F238E27FC236}">
-                <a16:creationId xmlns:a16="http://schemas.microsoft.com/office/drawing/2014/main" id="{6D09FFFD-F325-43FD-9A23-F2657EAD679A}"/>
+                <a16:creationId xmlns:a16="http://schemas.microsoft.com/office/drawing/2014/main" id="{AE57D32A-43AA-4878-A757-875437F8E571}"/>
               </a:ext>
             </a:extLst>
           </p:cNvPr>
@@ -5439,7 +5439,7 @@
           <p:cNvPr id="27" name="table-cell-140-3-2">
             <a:extLst xmlns:a="http://schemas.openxmlformats.org/drawingml/2006/main">
               <a:ext uri="{FF2B5EF4-FFF2-40B4-BE49-F238E27FC236}">
-                <a16:creationId xmlns:a16="http://schemas.microsoft.com/office/drawing/2014/main" id="{3F99A173-667F-4563-A0BB-D1EA57F04F73}"/>
+                <a16:creationId xmlns:a16="http://schemas.microsoft.com/office/drawing/2014/main" id="{4DC3ECE4-341B-4829-B8F0-AF614AF4EF50}"/>
               </a:ext>
             </a:extLst>
           </p:cNvPr>
@@ -5472,7 +5472,7 @@
           <p:cNvPr id="28" name="table-text-140-3-2">
             <a:extLst xmlns:a="http://schemas.openxmlformats.org/drawingml/2006/main">
               <a:ext uri="{FF2B5EF4-FFF2-40B4-BE49-F238E27FC236}">
-                <a16:creationId xmlns:a16="http://schemas.microsoft.com/office/drawing/2014/main" id="{3807AEC3-C47F-4457-9706-741C8F0F9446}"/>
+                <a16:creationId xmlns:a16="http://schemas.microsoft.com/office/drawing/2014/main" id="{86B3FD7D-0266-4527-8845-B5E7D90873AF}"/>
               </a:ext>
             </a:extLst>
           </p:cNvPr>
@@ -5534,7 +5534,7 @@
           <p:cNvPr id="29" name="table-cell-140-4-0">
             <a:extLst xmlns:a="http://schemas.openxmlformats.org/drawingml/2006/main">
               <a:ext uri="{FF2B5EF4-FFF2-40B4-BE49-F238E27FC236}">
-                <a16:creationId xmlns:a16="http://schemas.microsoft.com/office/drawing/2014/main" id="{990F361D-C1DF-4AF7-B10B-632CCC9AEAA7}"/>
+                <a16:creationId xmlns:a16="http://schemas.microsoft.com/office/drawing/2014/main" id="{44503040-2F6B-4873-9F69-97DB07DCA50A}"/>
               </a:ext>
             </a:extLst>
           </p:cNvPr>
@@ -5567,7 +5567,7 @@
           <p:cNvPr id="30" name="table-text-140-4-0">
             <a:extLst xmlns:a="http://schemas.openxmlformats.org/drawingml/2006/main">
               <a:ext uri="{FF2B5EF4-FFF2-40B4-BE49-F238E27FC236}">
-                <a16:creationId xmlns:a16="http://schemas.microsoft.com/office/drawing/2014/main" id="{2E631620-5E49-468E-BD51-AD995D3E0C5A}"/>
+                <a16:creationId xmlns:a16="http://schemas.microsoft.com/office/drawing/2014/main" id="{0619E3D6-DBCC-464A-A020-465019D608C6}"/>
               </a:ext>
             </a:extLst>
           </p:cNvPr>
@@ -5629,7 +5629,7 @@
           <p:cNvPr id="31" name="table-cell-140-4-1">
             <a:extLst xmlns:a="http://schemas.openxmlformats.org/drawingml/2006/main">
               <a:ext uri="{FF2B5EF4-FFF2-40B4-BE49-F238E27FC236}">
-                <a16:creationId xmlns:a16="http://schemas.microsoft.com/office/drawing/2014/main" id="{122553A0-7177-4C13-99E0-C3575B9B2E50}"/>
+                <a16:creationId xmlns:a16="http://schemas.microsoft.com/office/drawing/2014/main" id="{C0C024C4-5D9F-4658-86F1-7A9855FC92FC}"/>
               </a:ext>
             </a:extLst>
           </p:cNvPr>
@@ -5662,7 +5662,7 @@
           <p:cNvPr id="32" name="table-text-140-4-1">
             <a:extLst xmlns:a="http://schemas.openxmlformats.org/drawingml/2006/main">
               <a:ext uri="{FF2B5EF4-FFF2-40B4-BE49-F238E27FC236}">
-                <a16:creationId xmlns:a16="http://schemas.microsoft.com/office/drawing/2014/main" id="{C9CA75F6-BDB4-473E-9847-301698AACC98}"/>
+                <a16:creationId xmlns:a16="http://schemas.microsoft.com/office/drawing/2014/main" id="{F9417232-A03E-40B2-9F67-F9ADD291C169}"/>
               </a:ext>
             </a:extLst>
           </p:cNvPr>
@@ -5724,7 +5724,7 @@
           <p:cNvPr id="33" name="table-cell-140-4-2">
             <a:extLst xmlns:a="http://schemas.openxmlformats.org/drawingml/2006/main">
               <a:ext uri="{FF2B5EF4-FFF2-40B4-BE49-F238E27FC236}">
-                <a16:creationId xmlns:a16="http://schemas.microsoft.com/office/drawing/2014/main" id="{B065C735-607E-41AA-9B23-004DEAEE6A99}"/>
+                <a16:creationId xmlns:a16="http://schemas.microsoft.com/office/drawing/2014/main" id="{4E71A7B6-D4C0-4301-B186-CDF14B7A6A48}"/>
               </a:ext>
             </a:extLst>
           </p:cNvPr>
@@ -5757,7 +5757,7 @@
           <p:cNvPr id="34" name="table-text-140-4-2">
             <a:extLst xmlns:a="http://schemas.openxmlformats.org/drawingml/2006/main">
               <a:ext uri="{FF2B5EF4-FFF2-40B4-BE49-F238E27FC236}">
-                <a16:creationId xmlns:a16="http://schemas.microsoft.com/office/drawing/2014/main" id="{D01304B3-377A-4114-AB45-8898A5F9E776}"/>
+                <a16:creationId xmlns:a16="http://schemas.microsoft.com/office/drawing/2014/main" id="{B568B5B9-8A3C-4EEF-A2D5-92D21828D645}"/>
               </a:ext>
             </a:extLst>
           </p:cNvPr>
@@ -5819,7 +5819,7 @@
           <p:cNvPr id="35" name="table-cell-140-5-0">
             <a:extLst xmlns:a="http://schemas.openxmlformats.org/drawingml/2006/main">
               <a:ext uri="{FF2B5EF4-FFF2-40B4-BE49-F238E27FC236}">
-                <a16:creationId xmlns:a16="http://schemas.microsoft.com/office/drawing/2014/main" id="{EFE7C04C-46B8-4FCC-9CE4-6E02EF9748E8}"/>
+                <a16:creationId xmlns:a16="http://schemas.microsoft.com/office/drawing/2014/main" id="{58E280A0-F20E-452C-97EA-F40C96265C94}"/>
               </a:ext>
             </a:extLst>
           </p:cNvPr>
@@ -5852,7 +5852,7 @@
           <p:cNvPr id="36" name="table-text-140-5-0">
             <a:extLst xmlns:a="http://schemas.openxmlformats.org/drawingml/2006/main">
               <a:ext uri="{FF2B5EF4-FFF2-40B4-BE49-F238E27FC236}">
-                <a16:creationId xmlns:a16="http://schemas.microsoft.com/office/drawing/2014/main" id="{81B98561-B00B-4BDF-B529-F4A34D695C1F}"/>
+                <a16:creationId xmlns:a16="http://schemas.microsoft.com/office/drawing/2014/main" id="{09F9CE1B-8C13-48A8-862F-506E0B8B8B77}"/>
               </a:ext>
             </a:extLst>
           </p:cNvPr>
@@ -5914,7 +5914,7 @@
           <p:cNvPr id="37" name="table-cell-140-5-1">
             <a:extLst xmlns:a="http://schemas.openxmlformats.org/drawingml/2006/main">
               <a:ext uri="{FF2B5EF4-FFF2-40B4-BE49-F238E27FC236}">
-                <a16:creationId xmlns:a16="http://schemas.microsoft.com/office/drawing/2014/main" id="{99D4E157-E4CB-4FD2-9518-2CF639F3553C}"/>
+                <a16:creationId xmlns:a16="http://schemas.microsoft.com/office/drawing/2014/main" id="{DEE1BAE0-A19F-4AE7-B061-CAC6EEC5FDB0}"/>
               </a:ext>
             </a:extLst>
           </p:cNvPr>
@@ -5947,7 +5947,7 @@
           <p:cNvPr id="38" name="table-text-140-5-1">
             <a:extLst xmlns:a="http://schemas.openxmlformats.org/drawingml/2006/main">
               <a:ext uri="{FF2B5EF4-FFF2-40B4-BE49-F238E27FC236}">
-                <a16:creationId xmlns:a16="http://schemas.microsoft.com/office/drawing/2014/main" id="{DDDC81CE-0FDF-416E-9737-0BB1DFF44E9C}"/>
+                <a16:creationId xmlns:a16="http://schemas.microsoft.com/office/drawing/2014/main" id="{4C251762-17CC-4A12-B7FD-3C53AC302ECA}"/>
               </a:ext>
             </a:extLst>
           </p:cNvPr>
@@ -6009,7 +6009,7 @@
           <p:cNvPr id="39" name="table-cell-140-5-2">
             <a:extLst xmlns:a="http://schemas.openxmlformats.org/drawingml/2006/main">
               <a:ext uri="{FF2B5EF4-FFF2-40B4-BE49-F238E27FC236}">
-                <a16:creationId xmlns:a16="http://schemas.microsoft.com/office/drawing/2014/main" id="{AE3AE724-1128-4244-ABC6-9937FEFA76D6}"/>
+                <a16:creationId xmlns:a16="http://schemas.microsoft.com/office/drawing/2014/main" id="{6EB7B5F8-8476-498D-AC72-8EF15F57D08A}"/>
               </a:ext>
             </a:extLst>
           </p:cNvPr>
@@ -6042,7 +6042,7 @@
           <p:cNvPr id="40" name="table-text-140-5-2">
             <a:extLst xmlns:a="http://schemas.openxmlformats.org/drawingml/2006/main">
               <a:ext uri="{FF2B5EF4-FFF2-40B4-BE49-F238E27FC236}">
-                <a16:creationId xmlns:a16="http://schemas.microsoft.com/office/drawing/2014/main" id="{8081BF55-C1BF-46C9-99F8-802BEF18DC1B}"/>
+                <a16:creationId xmlns:a16="http://schemas.microsoft.com/office/drawing/2014/main" id="{8FABB198-1E69-484F-BD92-F4BF7836F8E3}"/>
               </a:ext>
             </a:extLst>
           </p:cNvPr>
@@ -6104,7 +6104,7 @@
           <p:cNvPr id="41" name="table-cell-140-6-0">
             <a:extLst xmlns:a="http://schemas.openxmlformats.org/drawingml/2006/main">
               <a:ext uri="{FF2B5EF4-FFF2-40B4-BE49-F238E27FC236}">
-                <a16:creationId xmlns:a16="http://schemas.microsoft.com/office/drawing/2014/main" id="{8879161B-81FF-4A02-BD64-C7F5BDCE2C2A}"/>
+                <a16:creationId xmlns:a16="http://schemas.microsoft.com/office/drawing/2014/main" id="{AB703918-E47F-4B97-A022-36D011BAF67F}"/>
               </a:ext>
             </a:extLst>
           </p:cNvPr>
@@ -6137,7 +6137,7 @@
           <p:cNvPr id="42" name="table-text-140-6-0">
             <a:extLst xmlns:a="http://schemas.openxmlformats.org/drawingml/2006/main">
               <a:ext uri="{FF2B5EF4-FFF2-40B4-BE49-F238E27FC236}">
-                <a16:creationId xmlns:a16="http://schemas.microsoft.com/office/drawing/2014/main" id="{722AA425-F80B-42B1-A526-816C05A448C7}"/>
+                <a16:creationId xmlns:a16="http://schemas.microsoft.com/office/drawing/2014/main" id="{504041AE-BD72-410A-91A6-AD19FFE504D4}"/>
               </a:ext>
             </a:extLst>
           </p:cNvPr>
@@ -6199,7 +6199,7 @@
           <p:cNvPr id="43" name="table-cell-140-6-1">
             <a:extLst xmlns:a="http://schemas.openxmlformats.org/drawingml/2006/main">
               <a:ext uri="{FF2B5EF4-FFF2-40B4-BE49-F238E27FC236}">
-                <a16:creationId xmlns:a16="http://schemas.microsoft.com/office/drawing/2014/main" id="{E5C2DFE6-8D0B-41B9-B384-3C73A0461AD6}"/>
+                <a16:creationId xmlns:a16="http://schemas.microsoft.com/office/drawing/2014/main" id="{5152431D-CFD3-4697-82A3-0938D1291332}"/>
               </a:ext>
             </a:extLst>
           </p:cNvPr>
@@ -6232,7 +6232,7 @@
           <p:cNvPr id="44" name="table-text-140-6-1">
             <a:extLst xmlns:a="http://schemas.openxmlformats.org/drawingml/2006/main">
               <a:ext uri="{FF2B5EF4-FFF2-40B4-BE49-F238E27FC236}">
-                <a16:creationId xmlns:a16="http://schemas.microsoft.com/office/drawing/2014/main" id="{2540B70F-D336-46C3-8FF6-6765C115E5E3}"/>
+                <a16:creationId xmlns:a16="http://schemas.microsoft.com/office/drawing/2014/main" id="{B0002027-B587-4401-BA9C-359AA8CE3B79}"/>
               </a:ext>
             </a:extLst>
           </p:cNvPr>
@@ -6294,7 +6294,7 @@
           <p:cNvPr id="45" name="table-cell-140-6-2">
             <a:extLst xmlns:a="http://schemas.openxmlformats.org/drawingml/2006/main">
               <a:ext uri="{FF2B5EF4-FFF2-40B4-BE49-F238E27FC236}">
-                <a16:creationId xmlns:a16="http://schemas.microsoft.com/office/drawing/2014/main" id="{DB2D717C-FB84-4316-806D-DA589F2D03BE}"/>
+                <a16:creationId xmlns:a16="http://schemas.microsoft.com/office/drawing/2014/main" id="{4FE82DC4-12EA-4A87-B016-A85E1076786D}"/>
               </a:ext>
             </a:extLst>
           </p:cNvPr>
@@ -6327,7 +6327,7 @@
           <p:cNvPr id="46" name="table-text-140-6-2">
             <a:extLst xmlns:a="http://schemas.openxmlformats.org/drawingml/2006/main">
               <a:ext uri="{FF2B5EF4-FFF2-40B4-BE49-F238E27FC236}">
-                <a16:creationId xmlns:a16="http://schemas.microsoft.com/office/drawing/2014/main" id="{EA8E5F77-25DD-4730-9673-A075AD3C5EDC}"/>
+                <a16:creationId xmlns:a16="http://schemas.microsoft.com/office/drawing/2014/main" id="{1D06F29C-75A1-47A7-850F-13ABD8F34E08}"/>
               </a:ext>
             </a:extLst>
           </p:cNvPr>
@@ -6389,7 +6389,7 @@
           <p:cNvPr id="47" name="table-cell-140-7-0">
             <a:extLst xmlns:a="http://schemas.openxmlformats.org/drawingml/2006/main">
               <a:ext uri="{FF2B5EF4-FFF2-40B4-BE49-F238E27FC236}">
-                <a16:creationId xmlns:a16="http://schemas.microsoft.com/office/drawing/2014/main" id="{08D863E8-8ABF-4621-B87B-ED94E24B18D7}"/>
+                <a16:creationId xmlns:a16="http://schemas.microsoft.com/office/drawing/2014/main" id="{A3E34403-9167-4FFB-A566-786AF1E831DB}"/>
               </a:ext>
             </a:extLst>
           </p:cNvPr>
@@ -6422,7 +6422,7 @@
           <p:cNvPr id="48" name="table-text-140-7-0">
             <a:extLst xmlns:a="http://schemas.openxmlformats.org/drawingml/2006/main">
               <a:ext uri="{FF2B5EF4-FFF2-40B4-BE49-F238E27FC236}">
-                <a16:creationId xmlns:a16="http://schemas.microsoft.com/office/drawing/2014/main" id="{8DF78666-CAA5-4816-B629-74BA30993E43}"/>
+                <a16:creationId xmlns:a16="http://schemas.microsoft.com/office/drawing/2014/main" id="{D5A48EC0-9833-4A9E-B885-16B4BF3FFEDF}"/>
               </a:ext>
             </a:extLst>
           </p:cNvPr>
@@ -6484,7 +6484,7 @@
           <p:cNvPr id="49" name="table-cell-140-7-1">
             <a:extLst xmlns:a="http://schemas.openxmlformats.org/drawingml/2006/main">
               <a:ext uri="{FF2B5EF4-FFF2-40B4-BE49-F238E27FC236}">
-                <a16:creationId xmlns:a16="http://schemas.microsoft.com/office/drawing/2014/main" id="{3DDA3767-5039-41C1-9C87-3BB67B4D8A9E}"/>
+                <a16:creationId xmlns:a16="http://schemas.microsoft.com/office/drawing/2014/main" id="{46EDAD70-8906-486B-93CD-3DB583936B23}"/>
               </a:ext>
             </a:extLst>
           </p:cNvPr>
@@ -6517,7 +6517,7 @@
           <p:cNvPr id="50" name="table-text-140-7-1">
             <a:extLst xmlns:a="http://schemas.openxmlformats.org/drawingml/2006/main">
               <a:ext uri="{FF2B5EF4-FFF2-40B4-BE49-F238E27FC236}">
-                <a16:creationId xmlns:a16="http://schemas.microsoft.com/office/drawing/2014/main" id="{693DEA50-0882-4336-A8E8-AEAC6E89D098}"/>
+                <a16:creationId xmlns:a16="http://schemas.microsoft.com/office/drawing/2014/main" id="{C63700CC-BC85-4ECB-966B-DC5F6F74367D}"/>
               </a:ext>
             </a:extLst>
           </p:cNvPr>
@@ -6579,7 +6579,7 @@
           <p:cNvPr id="51" name="table-cell-140-7-2">
             <a:extLst xmlns:a="http://schemas.openxmlformats.org/drawingml/2006/main">
               <a:ext uri="{FF2B5EF4-FFF2-40B4-BE49-F238E27FC236}">
-                <a16:creationId xmlns:a16="http://schemas.microsoft.com/office/drawing/2014/main" id="{6C2C7F0E-AA8E-41CC-972A-CB6A073EF122}"/>
+                <a16:creationId xmlns:a16="http://schemas.microsoft.com/office/drawing/2014/main" id="{D440F8E7-F33F-47CB-8EF3-EF6FD4B5AF49}"/>
               </a:ext>
             </a:extLst>
           </p:cNvPr>
@@ -6612,7 +6612,7 @@
           <p:cNvPr id="52" name="table-text-140-7-2">
             <a:extLst xmlns:a="http://schemas.openxmlformats.org/drawingml/2006/main">
               <a:ext uri="{FF2B5EF4-FFF2-40B4-BE49-F238E27FC236}">
-                <a16:creationId xmlns:a16="http://schemas.microsoft.com/office/drawing/2014/main" id="{F86F8AC4-3C8D-4C1D-9921-27A694B7C758}"/>
+                <a16:creationId xmlns:a16="http://schemas.microsoft.com/office/drawing/2014/main" id="{93A8D741-6286-4F32-B67C-62C014512488}"/>
               </a:ext>
             </a:extLst>
           </p:cNvPr>
@@ -6637,7 +6637,7 @@
         </p:spPr>
         <p:txBody>
           <a:bodyPr xmlns:a="http://schemas.openxmlformats.org/drawingml/2006/main" lIns="0" tIns="0" rIns="0" bIns="0" anchor="t">
-            <a:normAutofit fontScale="100000"/>
+            <a:normAutofit fontScale="96825"/>
           </a:bodyPr>
           <a:lstStyle xmlns:a="http://schemas.openxmlformats.org/drawingml/2006/main"/>
           <a:p xmlns:a="http://schemas.openxmlformats.org/drawingml/2006/main">
@@ -6674,7 +6674,7 @@
           <p:cNvPr id="53" name="table-cell-140-8-0">
             <a:extLst xmlns:a="http://schemas.openxmlformats.org/drawingml/2006/main">
               <a:ext uri="{FF2B5EF4-FFF2-40B4-BE49-F238E27FC236}">
-                <a16:creationId xmlns:a16="http://schemas.microsoft.com/office/drawing/2014/main" id="{4DC516FF-723A-4717-938F-7A10E078FA24}"/>
+                <a16:creationId xmlns:a16="http://schemas.microsoft.com/office/drawing/2014/main" id="{09691AB2-FFCD-4544-B765-2D7B2FAAF2DC}"/>
               </a:ext>
             </a:extLst>
           </p:cNvPr>
@@ -6707,7 +6707,7 @@
           <p:cNvPr id="54" name="table-text-140-8-0">
             <a:extLst xmlns:a="http://schemas.openxmlformats.org/drawingml/2006/main">
               <a:ext uri="{FF2B5EF4-FFF2-40B4-BE49-F238E27FC236}">
-                <a16:creationId xmlns:a16="http://schemas.microsoft.com/office/drawing/2014/main" id="{1B71733C-308B-4F94-9716-EA4F7488AEC2}"/>
+                <a16:creationId xmlns:a16="http://schemas.microsoft.com/office/drawing/2014/main" id="{63C05F67-AB00-44FD-B874-7E7B45C24873}"/>
               </a:ext>
             </a:extLst>
           </p:cNvPr>
@@ -6769,7 +6769,7 @@
           <p:cNvPr id="55" name="table-cell-140-8-1">
             <a:extLst xmlns:a="http://schemas.openxmlformats.org/drawingml/2006/main">
               <a:ext uri="{FF2B5EF4-FFF2-40B4-BE49-F238E27FC236}">
-                <a16:creationId xmlns:a16="http://schemas.microsoft.com/office/drawing/2014/main" id="{F9F9ED1D-E94F-4260-B175-7BAA2378735F}"/>
+                <a16:creationId xmlns:a16="http://schemas.microsoft.com/office/drawing/2014/main" id="{9EE4429E-0C93-4046-B449-4D0AD4E1F1F9}"/>
               </a:ext>
             </a:extLst>
           </p:cNvPr>
@@ -6802,7 +6802,7 @@
           <p:cNvPr id="56" name="table-text-140-8-1">
             <a:extLst xmlns:a="http://schemas.openxmlformats.org/drawingml/2006/main">
               <a:ext uri="{FF2B5EF4-FFF2-40B4-BE49-F238E27FC236}">
-                <a16:creationId xmlns:a16="http://schemas.microsoft.com/office/drawing/2014/main" id="{445B068D-531C-42FD-9586-1A0CAA30AF7D}"/>
+                <a16:creationId xmlns:a16="http://schemas.microsoft.com/office/drawing/2014/main" id="{82AEF92C-3C11-4BBC-8921-817BC8EB157C}"/>
               </a:ext>
             </a:extLst>
           </p:cNvPr>
@@ -6864,7 +6864,7 @@
           <p:cNvPr id="57" name="table-cell-140-8-2">
             <a:extLst xmlns:a="http://schemas.openxmlformats.org/drawingml/2006/main">
               <a:ext uri="{FF2B5EF4-FFF2-40B4-BE49-F238E27FC236}">
-                <a16:creationId xmlns:a16="http://schemas.microsoft.com/office/drawing/2014/main" id="{BBC70359-DC1E-4F10-A93D-94BB2B977BBF}"/>
+                <a16:creationId xmlns:a16="http://schemas.microsoft.com/office/drawing/2014/main" id="{756335D4-4D93-4395-9A2E-406F73BBBD57}"/>
               </a:ext>
             </a:extLst>
           </p:cNvPr>
@@ -6897,7 +6897,7 @@
           <p:cNvPr id="58" name="table-text-140-8-2">
             <a:extLst xmlns:a="http://schemas.openxmlformats.org/drawingml/2006/main">
               <a:ext uri="{FF2B5EF4-FFF2-40B4-BE49-F238E27FC236}">
-                <a16:creationId xmlns:a16="http://schemas.microsoft.com/office/drawing/2014/main" id="{0AC30A94-2621-4C57-B56F-87A381AF7846}"/>
+                <a16:creationId xmlns:a16="http://schemas.microsoft.com/office/drawing/2014/main" id="{5F4516C4-6C3F-4078-819E-F3FBD413CE18}"/>
               </a:ext>
             </a:extLst>
           </p:cNvPr>
@@ -6959,7 +6959,7 @@
           <p:cNvPr id="59" name="table-cell-140-9-0">
             <a:extLst xmlns:a="http://schemas.openxmlformats.org/drawingml/2006/main">
               <a:ext uri="{FF2B5EF4-FFF2-40B4-BE49-F238E27FC236}">
-                <a16:creationId xmlns:a16="http://schemas.microsoft.com/office/drawing/2014/main" id="{A19F07AB-A4D1-4099-AF91-40F6EDEDA436}"/>
+                <a16:creationId xmlns:a16="http://schemas.microsoft.com/office/drawing/2014/main" id="{7B0FE07C-2E55-41CE-943B-7F6BB1B32558}"/>
               </a:ext>
             </a:extLst>
           </p:cNvPr>
@@ -6992,7 +6992,7 @@
           <p:cNvPr id="60" name="table-text-140-9-0">
             <a:extLst xmlns:a="http://schemas.openxmlformats.org/drawingml/2006/main">
               <a:ext uri="{FF2B5EF4-FFF2-40B4-BE49-F238E27FC236}">
-                <a16:creationId xmlns:a16="http://schemas.microsoft.com/office/drawing/2014/main" id="{E6F1B429-38DB-4562-AA04-7372B4C7238F}"/>
+                <a16:creationId xmlns:a16="http://schemas.microsoft.com/office/drawing/2014/main" id="{FE23660E-03C5-4810-8E85-C87E175EB70D}"/>
               </a:ext>
             </a:extLst>
           </p:cNvPr>
@@ -7054,7 +7054,7 @@
           <p:cNvPr id="61" name="table-cell-140-9-1">
             <a:extLst xmlns:a="http://schemas.openxmlformats.org/drawingml/2006/main">
               <a:ext uri="{FF2B5EF4-FFF2-40B4-BE49-F238E27FC236}">
-                <a16:creationId xmlns:a16="http://schemas.microsoft.com/office/drawing/2014/main" id="{9496BF8C-5810-435A-A933-D7BF79A0C6A5}"/>
+                <a16:creationId xmlns:a16="http://schemas.microsoft.com/office/drawing/2014/main" id="{52798D27-1D8B-4CF9-AF5F-4A1F7B64CA04}"/>
               </a:ext>
             </a:extLst>
           </p:cNvPr>
@@ -7087,7 +7087,7 @@
           <p:cNvPr id="62" name="table-text-140-9-1">
             <a:extLst xmlns:a="http://schemas.openxmlformats.org/drawingml/2006/main">
               <a:ext uri="{FF2B5EF4-FFF2-40B4-BE49-F238E27FC236}">
-                <a16:creationId xmlns:a16="http://schemas.microsoft.com/office/drawing/2014/main" id="{FD4484BE-E2F2-4B39-B8A0-62C5AB1CC379}"/>
+                <a16:creationId xmlns:a16="http://schemas.microsoft.com/office/drawing/2014/main" id="{1F99C839-6EAC-418C-80AE-239EA1CE2643}"/>
               </a:ext>
             </a:extLst>
           </p:cNvPr>
@@ -7149,7 +7149,7 @@
           <p:cNvPr id="63" name="table-cell-140-9-2">
             <a:extLst xmlns:a="http://schemas.openxmlformats.org/drawingml/2006/main">
               <a:ext uri="{FF2B5EF4-FFF2-40B4-BE49-F238E27FC236}">
-                <a16:creationId xmlns:a16="http://schemas.microsoft.com/office/drawing/2014/main" id="{839BC35D-7C94-42A9-BF08-CE48FD6DD248}"/>
+                <a16:creationId xmlns:a16="http://schemas.microsoft.com/office/drawing/2014/main" id="{EB8DC53D-C514-434F-860B-B74CA4A8005D}"/>
               </a:ext>
             </a:extLst>
           </p:cNvPr>
@@ -7182,7 +7182,7 @@
           <p:cNvPr id="64" name="table-text-140-9-2">
             <a:extLst xmlns:a="http://schemas.openxmlformats.org/drawingml/2006/main">
               <a:ext uri="{FF2B5EF4-FFF2-40B4-BE49-F238E27FC236}">
-                <a16:creationId xmlns:a16="http://schemas.microsoft.com/office/drawing/2014/main" id="{CCAD945E-6B97-4AE3-AD29-B5AD254E6750}"/>
+                <a16:creationId xmlns:a16="http://schemas.microsoft.com/office/drawing/2014/main" id="{4161B6D2-80C3-4F47-ACC3-8A09232453AE}"/>
               </a:ext>
             </a:extLst>
           </p:cNvPr>
@@ -7244,7 +7244,7 @@
           <p:cNvPr id="65" name="table-cell-140-10-0">
             <a:extLst xmlns:a="http://schemas.openxmlformats.org/drawingml/2006/main">
               <a:ext uri="{FF2B5EF4-FFF2-40B4-BE49-F238E27FC236}">
-                <a16:creationId xmlns:a16="http://schemas.microsoft.com/office/drawing/2014/main" id="{D099D4A7-0B18-49B7-9FDD-E25CAF4EFD90}"/>
+                <a16:creationId xmlns:a16="http://schemas.microsoft.com/office/drawing/2014/main" id="{5C58B6CD-D130-452B-8A45-2ED2B0E7D00A}"/>
               </a:ext>
             </a:extLst>
           </p:cNvPr>
@@ -7277,7 +7277,7 @@
           <p:cNvPr id="66" name="table-text-140-10-0">
             <a:extLst xmlns:a="http://schemas.openxmlformats.org/drawingml/2006/main">
               <a:ext uri="{FF2B5EF4-FFF2-40B4-BE49-F238E27FC236}">
-                <a16:creationId xmlns:a16="http://schemas.microsoft.com/office/drawing/2014/main" id="{CB04FC53-5A26-409A-87D9-484F5C7B0D26}"/>
+                <a16:creationId xmlns:a16="http://schemas.microsoft.com/office/drawing/2014/main" id="{E888060F-2485-418C-94AA-0C0D4DA1416C}"/>
               </a:ext>
             </a:extLst>
           </p:cNvPr>
@@ -7339,7 +7339,7 @@
           <p:cNvPr id="67" name="table-cell-140-10-1">
             <a:extLst xmlns:a="http://schemas.openxmlformats.org/drawingml/2006/main">
               <a:ext uri="{FF2B5EF4-FFF2-40B4-BE49-F238E27FC236}">
-                <a16:creationId xmlns:a16="http://schemas.microsoft.com/office/drawing/2014/main" id="{D0E86FD7-852F-48A9-962C-5678C7B9D033}"/>
+                <a16:creationId xmlns:a16="http://schemas.microsoft.com/office/drawing/2014/main" id="{EC36FB20-354F-4C07-809E-A13F6663D05C}"/>
               </a:ext>
             </a:extLst>
           </p:cNvPr>
@@ -7372,7 +7372,7 @@
           <p:cNvPr id="68" name="table-text-140-10-1">
             <a:extLst xmlns:a="http://schemas.openxmlformats.org/drawingml/2006/main">
               <a:ext uri="{FF2B5EF4-FFF2-40B4-BE49-F238E27FC236}">
-                <a16:creationId xmlns:a16="http://schemas.microsoft.com/office/drawing/2014/main" id="{7625C26A-2F62-4FB8-9D2F-A69D841981C3}"/>
+                <a16:creationId xmlns:a16="http://schemas.microsoft.com/office/drawing/2014/main" id="{4B8ED62D-75F6-42C5-A0CD-2B6138A411A7}"/>
               </a:ext>
             </a:extLst>
           </p:cNvPr>
@@ -7434,7 +7434,7 @@
           <p:cNvPr id="69" name="table-cell-140-10-2">
             <a:extLst xmlns:a="http://schemas.openxmlformats.org/drawingml/2006/main">
               <a:ext uri="{FF2B5EF4-FFF2-40B4-BE49-F238E27FC236}">
-                <a16:creationId xmlns:a16="http://schemas.microsoft.com/office/drawing/2014/main" id="{C9B21A18-5F47-4B01-B444-65A3C1568207}"/>
+                <a16:creationId xmlns:a16="http://schemas.microsoft.com/office/drawing/2014/main" id="{D59C71C2-D7A0-4F10-91FE-C39563ADCC0B}"/>
               </a:ext>
             </a:extLst>
           </p:cNvPr>
@@ -7467,7 +7467,7 @@
           <p:cNvPr id="70" name="table-text-140-10-2">
             <a:extLst xmlns:a="http://schemas.openxmlformats.org/drawingml/2006/main">
               <a:ext uri="{FF2B5EF4-FFF2-40B4-BE49-F238E27FC236}">
-                <a16:creationId xmlns:a16="http://schemas.microsoft.com/office/drawing/2014/main" id="{0F9965B0-F287-4B7A-91F0-455408BBE734}"/>
+                <a16:creationId xmlns:a16="http://schemas.microsoft.com/office/drawing/2014/main" id="{1BD57BDC-D30C-48ED-892C-C85C9D408582}"/>
               </a:ext>
             </a:extLst>
           </p:cNvPr>
@@ -7529,7 +7529,7 @@
           <p:cNvPr id="71" name="paragraph-624">
             <a:extLst xmlns:a="http://schemas.openxmlformats.org/drawingml/2006/main">
               <a:ext uri="{FF2B5EF4-FFF2-40B4-BE49-F238E27FC236}">
-                <a16:creationId xmlns:a16="http://schemas.microsoft.com/office/drawing/2014/main" id="{0BA3AE7B-FACA-48FD-91E3-1332C6050AF7}"/>
+                <a16:creationId xmlns:a16="http://schemas.microsoft.com/office/drawing/2014/main" id="{C8924A2E-71EC-43F6-860A-7B021E54E2E6}"/>
               </a:ext>
             </a:extLst>
           </p:cNvPr>
@@ -7589,7 +7589,7 @@
     </p:spTree>
     <p:extLst>
       <p:ext uri="{BB962C8B-B14F-4D97-AF65-F5344CB8AC3E}">
-        <p14:creationId xmlns:p14="http://schemas.microsoft.com/office/powerpoint/2010/main" val="1272446208"/>
+        <p14:creationId xmlns:p14="http://schemas.microsoft.com/office/powerpoint/2010/main" val="659730968"/>
       </p:ext>
     </p:extLst>
   </p:cSld>
@@ -7620,7 +7620,7 @@
           <p:cNvPr id="17" name="running-label">
             <a:extLst xmlns:a="http://schemas.openxmlformats.org/drawingml/2006/main">
               <a:ext uri="{FF2B5EF4-FFF2-40B4-BE49-F238E27FC236}">
-                <a16:creationId xmlns:a16="http://schemas.microsoft.com/office/drawing/2014/main" id="{CE25469C-B594-4E59-8541-B28037F9956D}"/>
+                <a16:creationId xmlns:a16="http://schemas.microsoft.com/office/drawing/2014/main" id="{9BA7D409-7E05-45D2-B2D4-D9487A807D65}"/>
               </a:ext>
             </a:extLst>
           </p:cNvPr>
@@ -7682,7 +7682,7 @@
           <p:cNvPr id="2" name="page-number">
             <a:extLst xmlns:a="http://schemas.openxmlformats.org/drawingml/2006/main">
               <a:ext uri="{FF2B5EF4-FFF2-40B4-BE49-F238E27FC236}">
-                <a16:creationId xmlns:a16="http://schemas.microsoft.com/office/drawing/2014/main" id="{DAF2874F-F820-4A56-AA82-8ABAABF3A5DB}"/>
+                <a16:creationId xmlns:a16="http://schemas.microsoft.com/office/drawing/2014/main" id="{1DFBCA4B-5378-4D48-B32F-659FBD185D71}"/>
               </a:ext>
             </a:extLst>
           </p:cNvPr>
@@ -7744,7 +7744,7 @@
           <p:cNvPr id="3" name="header-rule">
             <a:extLst xmlns:a="http://schemas.openxmlformats.org/drawingml/2006/main">
               <a:ext uri="{FF2B5EF4-FFF2-40B4-BE49-F238E27FC236}">
-                <a16:creationId xmlns:a16="http://schemas.microsoft.com/office/drawing/2014/main" id="{2711B39C-7532-416E-B7B2-8B0C65EA8D83}"/>
+                <a16:creationId xmlns:a16="http://schemas.microsoft.com/office/drawing/2014/main" id="{B8723590-A26C-46DC-A340-00EC4F045A69}"/>
               </a:ext>
             </a:extLst>
           </p:cNvPr>
@@ -7775,7 +7775,7 @@
           <p:cNvPr id="4" name="slide-title">
             <a:extLst xmlns:a="http://schemas.openxmlformats.org/drawingml/2006/main">
               <a:ext uri="{FF2B5EF4-FFF2-40B4-BE49-F238E27FC236}">
-                <a16:creationId xmlns:a16="http://schemas.microsoft.com/office/drawing/2014/main" id="{08ACAD0E-1F33-4136-96E0-F2C1D481588F}"/>
+                <a16:creationId xmlns:a16="http://schemas.microsoft.com/office/drawing/2014/main" id="{DD6181DE-94DD-47EB-ADEF-3BCCEC9DE6CD}"/>
               </a:ext>
             </a:extLst>
           </p:cNvPr>
@@ -7837,7 +7837,7 @@
           <p:cNvPr id="5" name="subheading-140">
             <a:extLst xmlns:a="http://schemas.openxmlformats.org/drawingml/2006/main">
               <a:ext uri="{FF2B5EF4-FFF2-40B4-BE49-F238E27FC236}">
-                <a16:creationId xmlns:a16="http://schemas.microsoft.com/office/drawing/2014/main" id="{44A43F68-4472-4951-8A71-CBC78C6E22C8}"/>
+                <a16:creationId xmlns:a16="http://schemas.microsoft.com/office/drawing/2014/main" id="{D5682609-0050-49A2-8C82-ED03AC0234D5}"/>
               </a:ext>
             </a:extLst>
           </p:cNvPr>
@@ -7899,7 +7899,7 @@
           <p:cNvPr id="6" name="bullets-194">
             <a:extLst xmlns:a="http://schemas.openxmlformats.org/drawingml/2006/main">
               <a:ext uri="{FF2B5EF4-FFF2-40B4-BE49-F238E27FC236}">
-                <a16:creationId xmlns:a16="http://schemas.microsoft.com/office/drawing/2014/main" id="{32CE49DC-1371-4738-B1A0-BF0F1BEF2E09}"/>
+                <a16:creationId xmlns:a16="http://schemas.microsoft.com/office/drawing/2014/main" id="{9D4463E3-89A1-4571-9FD8-C63599B24CE4}"/>
               </a:ext>
             </a:extLst>
           </p:cNvPr>
@@ -8014,7 +8014,7 @@
                 <a:ea typeface="NanumGothic"/>
                 <a:cs typeface="NanumGothic"/>
               </a:rPr>
-              <a:t>기능 기준 배포 워크플로 (https://github.com/good5229/Property_shot/actions/runs/31315470165)</a:t>
+              <a:t>기능 기준 배포 워크플로 (https://github.com/good5229/Property_shot/actions/runs/31373105599)</a:t>
             </a:r>
           </a:p>
         </p:txBody>
@@ -8024,7 +8024,7 @@
           <p:cNvPr id="7" name="subheading-345.28">
             <a:extLst xmlns:a="http://schemas.openxmlformats.org/drawingml/2006/main">
               <a:ext uri="{FF2B5EF4-FFF2-40B4-BE49-F238E27FC236}">
-                <a16:creationId xmlns:a16="http://schemas.microsoft.com/office/drawing/2014/main" id="{C99EB2B5-F500-40C1-BA69-2B93D8C9B90A}"/>
+                <a16:creationId xmlns:a16="http://schemas.microsoft.com/office/drawing/2014/main" id="{ABE36E1B-F3CE-4303-A9DB-54C6FDEC0270}"/>
               </a:ext>
             </a:extLst>
           </p:cNvPr>
@@ -8086,7 +8086,7 @@
           <p:cNvPr id="8" name="code-bg-399.28">
             <a:extLst xmlns:a="http://schemas.openxmlformats.org/drawingml/2006/main">
               <a:ext uri="{FF2B5EF4-FFF2-40B4-BE49-F238E27FC236}">
-                <a16:creationId xmlns:a16="http://schemas.microsoft.com/office/drawing/2014/main" id="{5F1C36B8-5C88-47B4-8448-C7D5961B92EE}"/>
+                <a16:creationId xmlns:a16="http://schemas.microsoft.com/office/drawing/2014/main" id="{B378D376-5F27-468F-8D67-7A5B93C37340}"/>
               </a:ext>
             </a:extLst>
           </p:cNvPr>
@@ -8121,7 +8121,7 @@
           <p:cNvPr id="9" name="code-399.28">
             <a:extLst xmlns:a="http://schemas.openxmlformats.org/drawingml/2006/main">
               <a:ext uri="{FF2B5EF4-FFF2-40B4-BE49-F238E27FC236}">
-                <a16:creationId xmlns:a16="http://schemas.microsoft.com/office/drawing/2014/main" id="{F09D274B-82FE-4F1B-B9A2-9608D72DA48C}"/>
+                <a16:creationId xmlns:a16="http://schemas.microsoft.com/office/drawing/2014/main" id="{0A5AC862-E0B7-4036-B40C-FD395F417E64}"/>
               </a:ext>
             </a:extLst>
           </p:cNvPr>
@@ -8291,7 +8291,7 @@
           <p:cNvPr id="10" name="paragraph-484.88">
             <a:extLst xmlns:a="http://schemas.openxmlformats.org/drawingml/2006/main">
               <a:ext uri="{FF2B5EF4-FFF2-40B4-BE49-F238E27FC236}">
-                <a16:creationId xmlns:a16="http://schemas.microsoft.com/office/drawing/2014/main" id="{F3B2FA7B-8AA9-4A81-964D-C9F57DCE4685}"/>
+                <a16:creationId xmlns:a16="http://schemas.microsoft.com/office/drawing/2014/main" id="{87C9BF80-7484-429E-9BA8-4097170C80F6}"/>
               </a:ext>
             </a:extLst>
           </p:cNvPr>
@@ -8353,7 +8353,7 @@
           <p:cNvPr id="11" name="code-bg-533.2">
             <a:extLst xmlns:a="http://schemas.openxmlformats.org/drawingml/2006/main">
               <a:ext uri="{FF2B5EF4-FFF2-40B4-BE49-F238E27FC236}">
-                <a16:creationId xmlns:a16="http://schemas.microsoft.com/office/drawing/2014/main" id="{B07D3867-41ED-4632-8A5F-7902033DC642}"/>
+                <a16:creationId xmlns:a16="http://schemas.microsoft.com/office/drawing/2014/main" id="{72051396-9BCF-416B-8A24-6EFF2A127C3B}"/>
               </a:ext>
             </a:extLst>
           </p:cNvPr>
@@ -8388,7 +8388,7 @@
           <p:cNvPr id="12" name="code-533.2">
             <a:extLst xmlns:a="http://schemas.openxmlformats.org/drawingml/2006/main">
               <a:ext uri="{FF2B5EF4-FFF2-40B4-BE49-F238E27FC236}">
-                <a16:creationId xmlns:a16="http://schemas.microsoft.com/office/drawing/2014/main" id="{31109BF2-07AF-48A1-9576-1D066DFAD4A1}"/>
+                <a16:creationId xmlns:a16="http://schemas.microsoft.com/office/drawing/2014/main" id="{2CD524D8-8A21-49D4-8EE5-F3905C80AD64}"/>
               </a:ext>
             </a:extLst>
           </p:cNvPr>
@@ -8450,7 +8450,7 @@
           <p:cNvPr id="13" name="subheading-596">
             <a:extLst xmlns:a="http://schemas.openxmlformats.org/drawingml/2006/main">
               <a:ext uri="{FF2B5EF4-FFF2-40B4-BE49-F238E27FC236}">
-                <a16:creationId xmlns:a16="http://schemas.microsoft.com/office/drawing/2014/main" id="{F45754F0-05C2-4832-9406-D7A0471B6DE0}"/>
+                <a16:creationId xmlns:a16="http://schemas.microsoft.com/office/drawing/2014/main" id="{A403D321-763D-4392-9474-5DA97B9A3A78}"/>
               </a:ext>
             </a:extLst>
           </p:cNvPr>
@@ -8512,7 +8512,7 @@
           <p:cNvPr id="14" name="code-bg-650">
             <a:extLst xmlns:a="http://schemas.openxmlformats.org/drawingml/2006/main">
               <a:ext uri="{FF2B5EF4-FFF2-40B4-BE49-F238E27FC236}">
-                <a16:creationId xmlns:a16="http://schemas.microsoft.com/office/drawing/2014/main" id="{6C6A4ED4-EB98-4A60-B82A-2BD79B09E77F}"/>
+                <a16:creationId xmlns:a16="http://schemas.microsoft.com/office/drawing/2014/main" id="{C0E4ECAD-483E-4E84-A0CD-57EE576795D4}"/>
               </a:ext>
             </a:extLst>
           </p:cNvPr>
@@ -8547,7 +8547,7 @@
           <p:cNvPr id="15" name="code-650">
             <a:extLst xmlns:a="http://schemas.openxmlformats.org/drawingml/2006/main">
               <a:ext uri="{FF2B5EF4-FFF2-40B4-BE49-F238E27FC236}">
-                <a16:creationId xmlns:a16="http://schemas.microsoft.com/office/drawing/2014/main" id="{D71FC794-3B25-4E42-B9D0-0B0FA698A1D1}"/>
+                <a16:creationId xmlns:a16="http://schemas.microsoft.com/office/drawing/2014/main" id="{D1E0CA28-B1FA-46E0-AC9E-F7FF0EE3A667}"/>
               </a:ext>
             </a:extLst>
           </p:cNvPr>
@@ -8609,7 +8609,7 @@
           <p:cNvPr id="16" name="paragraph-712.8">
             <a:extLst xmlns:a="http://schemas.openxmlformats.org/drawingml/2006/main">
               <a:ext uri="{FF2B5EF4-FFF2-40B4-BE49-F238E27FC236}">
-                <a16:creationId xmlns:a16="http://schemas.microsoft.com/office/drawing/2014/main" id="{9FBDC60C-2EEB-4C04-929D-88D0D80D2B50}"/>
+                <a16:creationId xmlns:a16="http://schemas.microsoft.com/office/drawing/2014/main" id="{21256655-F77C-45FF-A3A8-9DC40788714C}"/>
               </a:ext>
             </a:extLst>
           </p:cNvPr>
@@ -8661,7 +8661,7 @@
                 <a:ea typeface="NanumGothic"/>
                 <a:cs typeface="NanumGothic"/>
               </a:rPr>
-              <a:t>생성 파일은 build/app/outputs/flutter-apk/app-release.apk이며, 이번 검증 빌드는 63,261,407바이트(약 60.33MiB), SHA-256 f2a127039375d9a0d76d82e054c7d00a11955237d99566bb28a86bc49f146674다. Android 기기로 옮긴 뒤 알 수 없는 앱 설치 권한을 허용해 수동 설치할 수 있다. 공개 APK 다운로드 링크와 iOS TestFlight 링크는 제공하지 않는다.</a:t>
+              <a:t>생성 파일은 build/app/outputs/flutter-apk/app-release.apk이며, 이번 검증 빌드는 63,261,407바이트(약 60.33MiB), SHA-256 9560dcd76a98fa9b7ce5c140be8998f81eb7dea5e1833bb9f5fa39255ab31552다. Android 기기로 옮긴 뒤 알 수 없는 앱 설치 권한을 허용해 수동 설치할 수 있다. 공개 APK 다운로드 링크와 iOS TestFlight 링크는 제공하지 않는다.</a:t>
             </a:r>
           </a:p>
         </p:txBody>
@@ -8669,7 +8669,7 @@
     </p:spTree>
     <p:extLst>
       <p:ext uri="{BB962C8B-B14F-4D97-AF65-F5344CB8AC3E}">
-        <p14:creationId xmlns:p14="http://schemas.microsoft.com/office/powerpoint/2010/main" val="346848228"/>
+        <p14:creationId xmlns:p14="http://schemas.microsoft.com/office/powerpoint/2010/main" val="2125552029"/>
       </p:ext>
     </p:extLst>
   </p:cSld>
@@ -8700,7 +8700,7 @@
           <p:cNvPr id="7" name="running-label">
             <a:extLst xmlns:a="http://schemas.openxmlformats.org/drawingml/2006/main">
               <a:ext uri="{FF2B5EF4-FFF2-40B4-BE49-F238E27FC236}">
-                <a16:creationId xmlns:a16="http://schemas.microsoft.com/office/drawing/2014/main" id="{34B55564-AC7E-41DD-B805-B3B1096CC217}"/>
+                <a16:creationId xmlns:a16="http://schemas.microsoft.com/office/drawing/2014/main" id="{FA136AA7-D20E-416C-8B7C-2AB0BED3644B}"/>
               </a:ext>
             </a:extLst>
           </p:cNvPr>
@@ -8762,7 +8762,7 @@
           <p:cNvPr id="2" name="page-number">
             <a:extLst xmlns:a="http://schemas.openxmlformats.org/drawingml/2006/main">
               <a:ext uri="{FF2B5EF4-FFF2-40B4-BE49-F238E27FC236}">
-                <a16:creationId xmlns:a16="http://schemas.microsoft.com/office/drawing/2014/main" id="{CE1CF093-83C0-4BE6-A616-65A18D76E9EC}"/>
+                <a16:creationId xmlns:a16="http://schemas.microsoft.com/office/drawing/2014/main" id="{9F97171B-DBC4-4303-938D-9FD78C53E4A3}"/>
               </a:ext>
             </a:extLst>
           </p:cNvPr>
@@ -8824,7 +8824,7 @@
           <p:cNvPr id="3" name="header-rule">
             <a:extLst xmlns:a="http://schemas.openxmlformats.org/drawingml/2006/main">
               <a:ext uri="{FF2B5EF4-FFF2-40B4-BE49-F238E27FC236}">
-                <a16:creationId xmlns:a16="http://schemas.microsoft.com/office/drawing/2014/main" id="{99BF977F-7079-4674-80A7-E76E37182E0D}"/>
+                <a16:creationId xmlns:a16="http://schemas.microsoft.com/office/drawing/2014/main" id="{D43F0097-FF5D-4F08-BA72-946689D34C8C}"/>
               </a:ext>
             </a:extLst>
           </p:cNvPr>
@@ -8855,7 +8855,7 @@
           <p:cNvPr id="4" name="slide-title">
             <a:extLst xmlns:a="http://schemas.openxmlformats.org/drawingml/2006/main">
               <a:ext uri="{FF2B5EF4-FFF2-40B4-BE49-F238E27FC236}">
-                <a16:creationId xmlns:a16="http://schemas.microsoft.com/office/drawing/2014/main" id="{C803F967-DE8A-44B1-8167-F051A8E49DFD}"/>
+                <a16:creationId xmlns:a16="http://schemas.microsoft.com/office/drawing/2014/main" id="{A498C833-AF9E-40D1-A088-B47AA5D9D046}"/>
               </a:ext>
             </a:extLst>
           </p:cNvPr>
@@ -8917,7 +8917,7 @@
           <p:cNvPr id="5" name="bullets-140">
             <a:extLst xmlns:a="http://schemas.openxmlformats.org/drawingml/2006/main">
               <a:ext uri="{FF2B5EF4-FFF2-40B4-BE49-F238E27FC236}">
-                <a16:creationId xmlns:a16="http://schemas.microsoft.com/office/drawing/2014/main" id="{35311395-4788-4456-986C-AEDD6E0C37F9}"/>
+                <a16:creationId xmlns:a16="http://schemas.microsoft.com/office/drawing/2014/main" id="{CC44F3EE-7DB2-4BC6-8CE8-004020CCA79E}"/>
               </a:ext>
             </a:extLst>
           </p:cNvPr>
@@ -9102,7 +9102,7 @@
           <p:cNvPr id="6" name="bullets-534.16">
             <a:extLst xmlns:a="http://schemas.openxmlformats.org/drawingml/2006/main">
               <a:ext uri="{FF2B5EF4-FFF2-40B4-BE49-F238E27FC236}">
-                <a16:creationId xmlns:a16="http://schemas.microsoft.com/office/drawing/2014/main" id="{A080E124-71BC-4010-9F34-9BEEFFC229F9}"/>
+                <a16:creationId xmlns:a16="http://schemas.microsoft.com/office/drawing/2014/main" id="{E9B50614-15F4-440B-9217-E8B8E1A68D4F}"/>
               </a:ext>
             </a:extLst>
           </p:cNvPr>
@@ -9165,7 +9165,7 @@
     </p:spTree>
     <p:extLst>
       <p:ext uri="{BB962C8B-B14F-4D97-AF65-F5344CB8AC3E}">
-        <p14:creationId xmlns:p14="http://schemas.microsoft.com/office/powerpoint/2010/main" val="905215188"/>
+        <p14:creationId xmlns:p14="http://schemas.microsoft.com/office/powerpoint/2010/main" val="37670071"/>
       </p:ext>
     </p:extLst>
   </p:cSld>
@@ -9196,7 +9196,7 @@
           <p:cNvPr id="41" name="running-label">
             <a:extLst xmlns:a="http://schemas.openxmlformats.org/drawingml/2006/main">
               <a:ext uri="{FF2B5EF4-FFF2-40B4-BE49-F238E27FC236}">
-                <a16:creationId xmlns:a16="http://schemas.microsoft.com/office/drawing/2014/main" id="{9262C96A-4459-4658-94EB-031C950C8E2F}"/>
+                <a16:creationId xmlns:a16="http://schemas.microsoft.com/office/drawing/2014/main" id="{AAE0B42F-5EFA-4B41-BD27-52CF3AFC8076}"/>
               </a:ext>
             </a:extLst>
           </p:cNvPr>
@@ -9258,7 +9258,7 @@
           <p:cNvPr id="2" name="page-number">
             <a:extLst xmlns:a="http://schemas.openxmlformats.org/drawingml/2006/main">
               <a:ext uri="{FF2B5EF4-FFF2-40B4-BE49-F238E27FC236}">
-                <a16:creationId xmlns:a16="http://schemas.microsoft.com/office/drawing/2014/main" id="{BD58BF99-731E-4D7E-852D-573E3728AD4E}"/>
+                <a16:creationId xmlns:a16="http://schemas.microsoft.com/office/drawing/2014/main" id="{26124C6C-078D-403C-8A25-4BFA66F62898}"/>
               </a:ext>
             </a:extLst>
           </p:cNvPr>
@@ -9320,7 +9320,7 @@
           <p:cNvPr id="3" name="header-rule">
             <a:extLst xmlns:a="http://schemas.openxmlformats.org/drawingml/2006/main">
               <a:ext uri="{FF2B5EF4-FFF2-40B4-BE49-F238E27FC236}">
-                <a16:creationId xmlns:a16="http://schemas.microsoft.com/office/drawing/2014/main" id="{D8F059E9-81EF-413F-818B-0FE3059FBCB4}"/>
+                <a16:creationId xmlns:a16="http://schemas.microsoft.com/office/drawing/2014/main" id="{738F6F4B-44B6-4334-BCEC-AB5E2A181A72}"/>
               </a:ext>
             </a:extLst>
           </p:cNvPr>
@@ -9351,7 +9351,7 @@
           <p:cNvPr id="4" name="slide-title">
             <a:extLst xmlns:a="http://schemas.openxmlformats.org/drawingml/2006/main">
               <a:ext uri="{FF2B5EF4-FFF2-40B4-BE49-F238E27FC236}">
-                <a16:creationId xmlns:a16="http://schemas.microsoft.com/office/drawing/2014/main" id="{573497AF-3B1B-4771-A324-8270ED6DD3C7}"/>
+                <a16:creationId xmlns:a16="http://schemas.microsoft.com/office/drawing/2014/main" id="{C9E113EC-C998-4170-AFC2-C8643E53738B}"/>
               </a:ext>
             </a:extLst>
           </p:cNvPr>
@@ -9413,7 +9413,7 @@
           <p:cNvPr id="5" name="table-cell-140-0-0">
             <a:extLst xmlns:a="http://schemas.openxmlformats.org/drawingml/2006/main">
               <a:ext uri="{FF2B5EF4-FFF2-40B4-BE49-F238E27FC236}">
-                <a16:creationId xmlns:a16="http://schemas.microsoft.com/office/drawing/2014/main" id="{59C1554B-8649-4C89-929C-06E38C644F3F}"/>
+                <a16:creationId xmlns:a16="http://schemas.microsoft.com/office/drawing/2014/main" id="{13B29306-1EA4-41E3-BD8E-823DA21F314E}"/>
               </a:ext>
             </a:extLst>
           </p:cNvPr>
@@ -9446,7 +9446,7 @@
           <p:cNvPr id="6" name="table-text-140-0-0">
             <a:extLst xmlns:a="http://schemas.openxmlformats.org/drawingml/2006/main">
               <a:ext uri="{FF2B5EF4-FFF2-40B4-BE49-F238E27FC236}">
-                <a16:creationId xmlns:a16="http://schemas.microsoft.com/office/drawing/2014/main" id="{D7CC76B7-0FC0-4C72-B8D3-75DE2FEA7413}"/>
+                <a16:creationId xmlns:a16="http://schemas.microsoft.com/office/drawing/2014/main" id="{2FB82B39-87CF-46AB-A31E-B0350D417B5D}"/>
               </a:ext>
             </a:extLst>
           </p:cNvPr>
@@ -9508,7 +9508,7 @@
           <p:cNvPr id="7" name="table-cell-140-0-1">
             <a:extLst xmlns:a="http://schemas.openxmlformats.org/drawingml/2006/main">
               <a:ext uri="{FF2B5EF4-FFF2-40B4-BE49-F238E27FC236}">
-                <a16:creationId xmlns:a16="http://schemas.microsoft.com/office/drawing/2014/main" id="{229AC98A-B3EE-41F8-9B8B-D86EEA2ADE29}"/>
+                <a16:creationId xmlns:a16="http://schemas.microsoft.com/office/drawing/2014/main" id="{84F87E3B-29F8-4884-AA01-C8192BAA2A08}"/>
               </a:ext>
             </a:extLst>
           </p:cNvPr>
@@ -9541,7 +9541,7 @@
           <p:cNvPr id="8" name="table-text-140-0-1">
             <a:extLst xmlns:a="http://schemas.openxmlformats.org/drawingml/2006/main">
               <a:ext uri="{FF2B5EF4-FFF2-40B4-BE49-F238E27FC236}">
-                <a16:creationId xmlns:a16="http://schemas.microsoft.com/office/drawing/2014/main" id="{D7A1AE9F-8095-48CD-B724-7630EB173CBC}"/>
+                <a16:creationId xmlns:a16="http://schemas.microsoft.com/office/drawing/2014/main" id="{90D69EAB-1796-49D5-B096-E081FE2DFEEC}"/>
               </a:ext>
             </a:extLst>
           </p:cNvPr>
@@ -9603,7 +9603,7 @@
           <p:cNvPr id="9" name="table-cell-140-1-0">
             <a:extLst xmlns:a="http://schemas.openxmlformats.org/drawingml/2006/main">
               <a:ext uri="{FF2B5EF4-FFF2-40B4-BE49-F238E27FC236}">
-                <a16:creationId xmlns:a16="http://schemas.microsoft.com/office/drawing/2014/main" id="{9807B533-B4C3-4483-AAD0-BA42FD3DFFD6}"/>
+                <a16:creationId xmlns:a16="http://schemas.microsoft.com/office/drawing/2014/main" id="{668CF91F-FAC4-4A48-85EE-6DA3DCA20735}"/>
               </a:ext>
             </a:extLst>
           </p:cNvPr>
@@ -9615,7 +9615,7 @@
         <p:spPr>
           <a:xfrm xmlns:a="http://schemas.openxmlformats.org/drawingml/2006/main">
             <a:off x="533400" y="1790700"/>
-            <a:ext cx="3248025" cy="891540"/>
+            <a:ext cx="3248025" cy="711518"/>
           </a:xfrm>
           <a:prstGeom xmlns:a="http://schemas.openxmlformats.org/drawingml/2006/main" prst="rect">
             <a:avLst/>
@@ -9636,7 +9636,7 @@
           <p:cNvPr id="10" name="table-text-140-1-0">
             <a:extLst xmlns:a="http://schemas.openxmlformats.org/drawingml/2006/main">
               <a:ext uri="{FF2B5EF4-FFF2-40B4-BE49-F238E27FC236}">
-                <a16:creationId xmlns:a16="http://schemas.microsoft.com/office/drawing/2014/main" id="{0221E70B-2517-4D24-B592-9F35BB1C411B}"/>
+                <a16:creationId xmlns:a16="http://schemas.microsoft.com/office/drawing/2014/main" id="{81FB8850-4F8E-449A-ABBA-493ACF531394}"/>
               </a:ext>
             </a:extLst>
           </p:cNvPr>
@@ -9648,7 +9648,7 @@
         <p:spPr>
           <a:xfrm xmlns:a="http://schemas.openxmlformats.org/drawingml/2006/main">
             <a:off x="619125" y="1857375"/>
-            <a:ext cx="3076575" cy="758190"/>
+            <a:ext cx="3076575" cy="578168"/>
           </a:xfrm>
           <a:prstGeom xmlns:a="http://schemas.openxmlformats.org/drawingml/2006/main" prst="rect">
             <a:avLst/>
@@ -9698,7 +9698,7 @@
           <p:cNvPr id="11" name="table-cell-140-1-1">
             <a:extLst xmlns:a="http://schemas.openxmlformats.org/drawingml/2006/main">
               <a:ext uri="{FF2B5EF4-FFF2-40B4-BE49-F238E27FC236}">
-                <a16:creationId xmlns:a16="http://schemas.microsoft.com/office/drawing/2014/main" id="{2348FBC3-8111-4098-AD6E-F3474A6CBE37}"/>
+                <a16:creationId xmlns:a16="http://schemas.microsoft.com/office/drawing/2014/main" id="{8B8683E9-F7E6-4713-8F1D-E6228CAB7D19}"/>
               </a:ext>
             </a:extLst>
           </p:cNvPr>
@@ -9710,7 +9710,7 @@
         <p:spPr>
           <a:xfrm xmlns:a="http://schemas.openxmlformats.org/drawingml/2006/main">
             <a:off x="3781425" y="1790700"/>
-            <a:ext cx="3248025" cy="891540"/>
+            <a:ext cx="3248025" cy="711518"/>
           </a:xfrm>
           <a:prstGeom xmlns:a="http://schemas.openxmlformats.org/drawingml/2006/main" prst="rect">
             <a:avLst/>
@@ -9731,7 +9731,7 @@
           <p:cNvPr id="12" name="table-text-140-1-1">
             <a:extLst xmlns:a="http://schemas.openxmlformats.org/drawingml/2006/main">
               <a:ext uri="{FF2B5EF4-FFF2-40B4-BE49-F238E27FC236}">
-                <a16:creationId xmlns:a16="http://schemas.microsoft.com/office/drawing/2014/main" id="{76B50000-36B3-4A69-A13F-343027CEA7DE}"/>
+                <a16:creationId xmlns:a16="http://schemas.microsoft.com/office/drawing/2014/main" id="{A08AB9F0-7D22-4EE2-B606-A4DCD74C61F1}"/>
               </a:ext>
             </a:extLst>
           </p:cNvPr>
@@ -9743,7 +9743,7 @@
         <p:spPr>
           <a:xfrm xmlns:a="http://schemas.openxmlformats.org/drawingml/2006/main">
             <a:off x="3867150" y="1857375"/>
-            <a:ext cx="3076575" cy="758190"/>
+            <a:ext cx="3076575" cy="578168"/>
           </a:xfrm>
           <a:prstGeom xmlns:a="http://schemas.openxmlformats.org/drawingml/2006/main" prst="rect">
             <a:avLst/>
@@ -9756,7 +9756,7 @@
         </p:spPr>
         <p:txBody>
           <a:bodyPr xmlns:a="http://schemas.openxmlformats.org/drawingml/2006/main" lIns="0" tIns="0" rIns="0" bIns="0" anchor="t">
-            <a:normAutofit fontScale="87742"/>
+            <a:normAutofit fontScale="91261"/>
           </a:bodyPr>
           <a:lstStyle xmlns:a="http://schemas.openxmlformats.org/drawingml/2006/main"/>
           <a:p xmlns:a="http://schemas.openxmlformats.org/drawingml/2006/main">
@@ -9783,7 +9783,7 @@
                 <a:ea typeface="NanumGothic"/>
                 <a:cs typeface="NanumGothic"/>
               </a:rPr>
-              <a:t>단 한 번의 직렬 실행 1,062건 중 997건 통과·65건 실패. 실패는 최종 하단 문구가 반영되지 않은 Golden 61건과 레벨 7·10 리플레이 fixture 계열이었다. 정상 화면 대조 후 Golden 영향권 67/67, 리플레이·결정론 9/9, 변경 기능 핵심 묶음 239/239를 표적 재검증했다.</a:t>
+              <a:t>단 한 번의 직렬 실행 1,062건: 997 통과·65 실패(stale Golden 61, replay fixture 4). 분류·수정 후 Golden 67/67, replay·결정론 9/9, 핵심 변경 239/239 표적 재통과</a:t>
             </a:r>
           </a:p>
         </p:txBody>
@@ -9793,18 +9793,18 @@
           <p:cNvPr id="13" name="table-cell-140-2-0">
             <a:extLst xmlns:a="http://schemas.openxmlformats.org/drawingml/2006/main">
               <a:ext uri="{FF2B5EF4-FFF2-40B4-BE49-F238E27FC236}">
-                <a16:creationId xmlns:a16="http://schemas.microsoft.com/office/drawing/2014/main" id="{2FDD3487-9A73-49E2-8407-D6ED06991AB3}"/>
-              </a:ext>
-            </a:extLst>
-          </p:cNvPr>
-          <p:cNvSpPr>
-            <a:spLocks xmlns:a="http://schemas.openxmlformats.org/drawingml/2006/main" noGrp="1"/>
-          </p:cNvSpPr>
-          <p:nvPr/>
-        </p:nvSpPr>
-        <p:spPr>
-          <a:xfrm xmlns:a="http://schemas.openxmlformats.org/drawingml/2006/main">
-            <a:off x="533400" y="2682240"/>
+                <a16:creationId xmlns:a16="http://schemas.microsoft.com/office/drawing/2014/main" id="{EF847BD1-1AB5-4549-ABB2-9D08C6BBF9EF}"/>
+              </a:ext>
+            </a:extLst>
+          </p:cNvPr>
+          <p:cNvSpPr>
+            <a:spLocks xmlns:a="http://schemas.openxmlformats.org/drawingml/2006/main" noGrp="1"/>
+          </p:cNvSpPr>
+          <p:nvPr/>
+        </p:nvSpPr>
+        <p:spPr>
+          <a:xfrm xmlns:a="http://schemas.openxmlformats.org/drawingml/2006/main">
+            <a:off x="533400" y="2502218"/>
             <a:ext cx="3248025" cy="400050"/>
           </a:xfrm>
           <a:prstGeom xmlns:a="http://schemas.openxmlformats.org/drawingml/2006/main" prst="rect">
@@ -9826,18 +9826,18 @@
           <p:cNvPr id="14" name="table-text-140-2-0">
             <a:extLst xmlns:a="http://schemas.openxmlformats.org/drawingml/2006/main">
               <a:ext uri="{FF2B5EF4-FFF2-40B4-BE49-F238E27FC236}">
-                <a16:creationId xmlns:a16="http://schemas.microsoft.com/office/drawing/2014/main" id="{CE2AA52C-25AD-469F-A637-376F7CA5CEC1}"/>
-              </a:ext>
-            </a:extLst>
-          </p:cNvPr>
-          <p:cNvSpPr>
-            <a:spLocks xmlns:a="http://schemas.openxmlformats.org/drawingml/2006/main" noGrp="1"/>
-          </p:cNvSpPr>
-          <p:nvPr/>
-        </p:nvSpPr>
-        <p:spPr>
-          <a:xfrm xmlns:a="http://schemas.openxmlformats.org/drawingml/2006/main">
-            <a:off x="619125" y="2748915"/>
+                <a16:creationId xmlns:a16="http://schemas.microsoft.com/office/drawing/2014/main" id="{CC097A84-E785-45E0-BF37-900B292E22D5}"/>
+              </a:ext>
+            </a:extLst>
+          </p:cNvPr>
+          <p:cNvSpPr>
+            <a:spLocks xmlns:a="http://schemas.openxmlformats.org/drawingml/2006/main" noGrp="1"/>
+          </p:cNvSpPr>
+          <p:nvPr/>
+        </p:nvSpPr>
+        <p:spPr>
+          <a:xfrm xmlns:a="http://schemas.openxmlformats.org/drawingml/2006/main">
+            <a:off x="619125" y="2568893"/>
             <a:ext cx="3076575" cy="266700"/>
           </a:xfrm>
           <a:prstGeom xmlns:a="http://schemas.openxmlformats.org/drawingml/2006/main" prst="rect">
@@ -9888,18 +9888,18 @@
           <p:cNvPr id="15" name="table-cell-140-2-1">
             <a:extLst xmlns:a="http://schemas.openxmlformats.org/drawingml/2006/main">
               <a:ext uri="{FF2B5EF4-FFF2-40B4-BE49-F238E27FC236}">
-                <a16:creationId xmlns:a16="http://schemas.microsoft.com/office/drawing/2014/main" id="{B0E54BF2-EF61-4B05-AA98-4658D6E0F47D}"/>
-              </a:ext>
-            </a:extLst>
-          </p:cNvPr>
-          <p:cNvSpPr>
-            <a:spLocks xmlns:a="http://schemas.openxmlformats.org/drawingml/2006/main" noGrp="1"/>
-          </p:cNvSpPr>
-          <p:nvPr/>
-        </p:nvSpPr>
-        <p:spPr>
-          <a:xfrm xmlns:a="http://schemas.openxmlformats.org/drawingml/2006/main">
-            <a:off x="3781425" y="2682240"/>
+                <a16:creationId xmlns:a16="http://schemas.microsoft.com/office/drawing/2014/main" id="{42234626-E404-4A4C-BB98-4B0D4E2C38EC}"/>
+              </a:ext>
+            </a:extLst>
+          </p:cNvPr>
+          <p:cNvSpPr>
+            <a:spLocks xmlns:a="http://schemas.openxmlformats.org/drawingml/2006/main" noGrp="1"/>
+          </p:cNvSpPr>
+          <p:nvPr/>
+        </p:nvSpPr>
+        <p:spPr>
+          <a:xfrm xmlns:a="http://schemas.openxmlformats.org/drawingml/2006/main">
+            <a:off x="3781425" y="2502218"/>
             <a:ext cx="3248025" cy="400050"/>
           </a:xfrm>
           <a:prstGeom xmlns:a="http://schemas.openxmlformats.org/drawingml/2006/main" prst="rect">
@@ -9921,18 +9921,18 @@
           <p:cNvPr id="16" name="table-text-140-2-1">
             <a:extLst xmlns:a="http://schemas.openxmlformats.org/drawingml/2006/main">
               <a:ext uri="{FF2B5EF4-FFF2-40B4-BE49-F238E27FC236}">
-                <a16:creationId xmlns:a16="http://schemas.microsoft.com/office/drawing/2014/main" id="{EC09A95B-D61A-4F14-A258-CEFC21D8DDD1}"/>
-              </a:ext>
-            </a:extLst>
-          </p:cNvPr>
-          <p:cNvSpPr>
-            <a:spLocks xmlns:a="http://schemas.openxmlformats.org/drawingml/2006/main" noGrp="1"/>
-          </p:cNvSpPr>
-          <p:nvPr/>
-        </p:nvSpPr>
-        <p:spPr>
-          <a:xfrm xmlns:a="http://schemas.openxmlformats.org/drawingml/2006/main">
-            <a:off x="3867150" y="2748915"/>
+                <a16:creationId xmlns:a16="http://schemas.microsoft.com/office/drawing/2014/main" id="{D9A3F54B-3397-4C21-98DD-EE74984A7C2D}"/>
+              </a:ext>
+            </a:extLst>
+          </p:cNvPr>
+          <p:cNvSpPr>
+            <a:spLocks xmlns:a="http://schemas.openxmlformats.org/drawingml/2006/main" noGrp="1"/>
+          </p:cNvSpPr>
+          <p:nvPr/>
+        </p:nvSpPr>
+        <p:spPr>
+          <a:xfrm xmlns:a="http://schemas.openxmlformats.org/drawingml/2006/main">
+            <a:off x="3867150" y="2568893"/>
             <a:ext cx="3076575" cy="266700"/>
           </a:xfrm>
           <a:prstGeom xmlns:a="http://schemas.openxmlformats.org/drawingml/2006/main" prst="rect">
@@ -9983,19 +9983,19 @@
           <p:cNvPr id="17" name="table-cell-140-3-0">
             <a:extLst xmlns:a="http://schemas.openxmlformats.org/drawingml/2006/main">
               <a:ext uri="{FF2B5EF4-FFF2-40B4-BE49-F238E27FC236}">
-                <a16:creationId xmlns:a16="http://schemas.microsoft.com/office/drawing/2014/main" id="{DE6DB360-C64D-44C8-96DB-4E8665207234}"/>
-              </a:ext>
-            </a:extLst>
-          </p:cNvPr>
-          <p:cNvSpPr>
-            <a:spLocks xmlns:a="http://schemas.openxmlformats.org/drawingml/2006/main" noGrp="1"/>
-          </p:cNvSpPr>
-          <p:nvPr/>
-        </p:nvSpPr>
-        <p:spPr>
-          <a:xfrm xmlns:a="http://schemas.openxmlformats.org/drawingml/2006/main">
-            <a:off x="533400" y="3082290"/>
-            <a:ext cx="3248025" cy="400050"/>
+                <a16:creationId xmlns:a16="http://schemas.microsoft.com/office/drawing/2014/main" id="{F5749B35-A7C8-471B-A663-1356AF429113}"/>
+              </a:ext>
+            </a:extLst>
+          </p:cNvPr>
+          <p:cNvSpPr>
+            <a:spLocks xmlns:a="http://schemas.openxmlformats.org/drawingml/2006/main" noGrp="1"/>
+          </p:cNvSpPr>
+          <p:nvPr/>
+        </p:nvSpPr>
+        <p:spPr>
+          <a:xfrm xmlns:a="http://schemas.openxmlformats.org/drawingml/2006/main">
+            <a:off x="533400" y="2902268"/>
+            <a:ext cx="3248025" cy="531495"/>
           </a:xfrm>
           <a:prstGeom xmlns:a="http://schemas.openxmlformats.org/drawingml/2006/main" prst="rect">
             <a:avLst/>
@@ -10016,19 +10016,19 @@
           <p:cNvPr id="18" name="table-text-140-3-0">
             <a:extLst xmlns:a="http://schemas.openxmlformats.org/drawingml/2006/main">
               <a:ext uri="{FF2B5EF4-FFF2-40B4-BE49-F238E27FC236}">
-                <a16:creationId xmlns:a16="http://schemas.microsoft.com/office/drawing/2014/main" id="{B4827B50-4CC0-4C22-B1D0-AEBABC95C543}"/>
-              </a:ext>
-            </a:extLst>
-          </p:cNvPr>
-          <p:cNvSpPr>
-            <a:spLocks xmlns:a="http://schemas.openxmlformats.org/drawingml/2006/main" noGrp="1"/>
-          </p:cNvSpPr>
-          <p:nvPr/>
-        </p:nvSpPr>
-        <p:spPr>
-          <a:xfrm xmlns:a="http://schemas.openxmlformats.org/drawingml/2006/main">
-            <a:off x="619125" y="3148965"/>
-            <a:ext cx="3076575" cy="266700"/>
+                <a16:creationId xmlns:a16="http://schemas.microsoft.com/office/drawing/2014/main" id="{7B7B625F-80AF-451B-9330-57DE491923AF}"/>
+              </a:ext>
+            </a:extLst>
+          </p:cNvPr>
+          <p:cNvSpPr>
+            <a:spLocks xmlns:a="http://schemas.openxmlformats.org/drawingml/2006/main" noGrp="1"/>
+          </p:cNvSpPr>
+          <p:nvPr/>
+        </p:nvSpPr>
+        <p:spPr>
+          <a:xfrm xmlns:a="http://schemas.openxmlformats.org/drawingml/2006/main">
+            <a:off x="619125" y="2968943"/>
+            <a:ext cx="3076575" cy="398145"/>
           </a:xfrm>
           <a:prstGeom xmlns:a="http://schemas.openxmlformats.org/drawingml/2006/main" prst="rect">
             <a:avLst/>
@@ -10068,7 +10068,7 @@
                 <a:ea typeface="NanumGothic"/>
                 <a:cs typeface="NanumGothic"/>
               </a:rPr>
-              <a:t>Web 출시 빌드</a:t>
+              <a:t>Web 출시·공개 배포</a:t>
             </a:r>
           </a:p>
         </p:txBody>
@@ -10078,19 +10078,19 @@
           <p:cNvPr id="19" name="table-cell-140-3-1">
             <a:extLst xmlns:a="http://schemas.openxmlformats.org/drawingml/2006/main">
               <a:ext uri="{FF2B5EF4-FFF2-40B4-BE49-F238E27FC236}">
-                <a16:creationId xmlns:a16="http://schemas.microsoft.com/office/drawing/2014/main" id="{874ADF0A-9701-4777-A061-47441D24A825}"/>
-              </a:ext>
-            </a:extLst>
-          </p:cNvPr>
-          <p:cNvSpPr>
-            <a:spLocks xmlns:a="http://schemas.openxmlformats.org/drawingml/2006/main" noGrp="1"/>
-          </p:cNvSpPr>
-          <p:nvPr/>
-        </p:nvSpPr>
-        <p:spPr>
-          <a:xfrm xmlns:a="http://schemas.openxmlformats.org/drawingml/2006/main">
-            <a:off x="3781425" y="3082290"/>
-            <a:ext cx="3248025" cy="400050"/>
+                <a16:creationId xmlns:a16="http://schemas.microsoft.com/office/drawing/2014/main" id="{7D459F48-4155-4FB0-8BB4-4A9FE145FAFE}"/>
+              </a:ext>
+            </a:extLst>
+          </p:cNvPr>
+          <p:cNvSpPr>
+            <a:spLocks xmlns:a="http://schemas.openxmlformats.org/drawingml/2006/main" noGrp="1"/>
+          </p:cNvSpPr>
+          <p:nvPr/>
+        </p:nvSpPr>
+        <p:spPr>
+          <a:xfrm xmlns:a="http://schemas.openxmlformats.org/drawingml/2006/main">
+            <a:off x="3781425" y="2902268"/>
+            <a:ext cx="3248025" cy="531495"/>
           </a:xfrm>
           <a:prstGeom xmlns:a="http://schemas.openxmlformats.org/drawingml/2006/main" prst="rect">
             <a:avLst/>
@@ -10111,19 +10111,19 @@
           <p:cNvPr id="20" name="table-text-140-3-1">
             <a:extLst xmlns:a="http://schemas.openxmlformats.org/drawingml/2006/main">
               <a:ext uri="{FF2B5EF4-FFF2-40B4-BE49-F238E27FC236}">
-                <a16:creationId xmlns:a16="http://schemas.microsoft.com/office/drawing/2014/main" id="{7B5E01D0-57E8-47F7-9DF1-D756A12FCA21}"/>
-              </a:ext>
-            </a:extLst>
-          </p:cNvPr>
-          <p:cNvSpPr>
-            <a:spLocks xmlns:a="http://schemas.openxmlformats.org/drawingml/2006/main" noGrp="1"/>
-          </p:cNvSpPr>
-          <p:nvPr/>
-        </p:nvSpPr>
-        <p:spPr>
-          <a:xfrm xmlns:a="http://schemas.openxmlformats.org/drawingml/2006/main">
-            <a:off x="3867150" y="3148965"/>
-            <a:ext cx="3076575" cy="266700"/>
+                <a16:creationId xmlns:a16="http://schemas.microsoft.com/office/drawing/2014/main" id="{F566C725-77E8-4CF0-969D-904F297F8558}"/>
+              </a:ext>
+            </a:extLst>
+          </p:cNvPr>
+          <p:cNvSpPr>
+            <a:spLocks xmlns:a="http://schemas.openxmlformats.org/drawingml/2006/main" noGrp="1"/>
+          </p:cNvSpPr>
+          <p:nvPr/>
+        </p:nvSpPr>
+        <p:spPr>
+          <a:xfrm xmlns:a="http://schemas.openxmlformats.org/drawingml/2006/main">
+            <a:off x="3867150" y="2968943"/>
+            <a:ext cx="3076575" cy="398145"/>
           </a:xfrm>
           <a:prstGeom xmlns:a="http://schemas.openxmlformats.org/drawingml/2006/main" prst="rect">
             <a:avLst/>
@@ -10136,7 +10136,7 @@
         </p:spPr>
         <p:txBody>
           <a:bodyPr xmlns:a="http://schemas.openxmlformats.org/drawingml/2006/main" lIns="0" tIns="0" rIns="0" bIns="0" anchor="t">
-            <a:normAutofit fontScale="84596"/>
+            <a:normAutofit fontScale="83253"/>
           </a:bodyPr>
           <a:lstStyle xmlns:a="http://schemas.openxmlformats.org/drawingml/2006/main"/>
           <a:p xmlns:a="http://schemas.openxmlformats.org/drawingml/2006/main">
@@ -10163,7 +10163,7 @@
                 <a:ea typeface="NanumGothic"/>
                 <a:cs typeface="NanumGothic"/>
               </a:rPr>
-              <a:t>flutter build web --release --base-href /Property_shot/ — 통과</a:t>
+              <a:t>Pages run 31373105599 성공, 공개 URL HTTP 200. 배포 main.dart.js 3,709,337바이트, SHA-256 fd3f99ec…1718375</a:t>
             </a:r>
           </a:p>
         </p:txBody>
@@ -10173,19 +10173,19 @@
           <p:cNvPr id="21" name="table-cell-140-4-0">
             <a:extLst xmlns:a="http://schemas.openxmlformats.org/drawingml/2006/main">
               <a:ext uri="{FF2B5EF4-FFF2-40B4-BE49-F238E27FC236}">
-                <a16:creationId xmlns:a16="http://schemas.microsoft.com/office/drawing/2014/main" id="{E5CF849A-136D-4F6B-9D37-3CF86710030E}"/>
-              </a:ext>
-            </a:extLst>
-          </p:cNvPr>
-          <p:cNvSpPr>
-            <a:spLocks xmlns:a="http://schemas.openxmlformats.org/drawingml/2006/main" noGrp="1"/>
-          </p:cNvSpPr>
-          <p:nvPr/>
-        </p:nvSpPr>
-        <p:spPr>
-          <a:xfrm xmlns:a="http://schemas.openxmlformats.org/drawingml/2006/main">
-            <a:off x="533400" y="3482340"/>
-            <a:ext cx="3248025" cy="400050"/>
+                <a16:creationId xmlns:a16="http://schemas.microsoft.com/office/drawing/2014/main" id="{AD01156A-D240-49D4-A4A6-A4D11188D832}"/>
+              </a:ext>
+            </a:extLst>
+          </p:cNvPr>
+          <p:cNvSpPr>
+            <a:spLocks xmlns:a="http://schemas.openxmlformats.org/drawingml/2006/main" noGrp="1"/>
+          </p:cNvSpPr>
+          <p:nvPr/>
+        </p:nvSpPr>
+        <p:spPr>
+          <a:xfrm xmlns:a="http://schemas.openxmlformats.org/drawingml/2006/main">
+            <a:off x="533400" y="3433763"/>
+            <a:ext cx="3248025" cy="531495"/>
           </a:xfrm>
           <a:prstGeom xmlns:a="http://schemas.openxmlformats.org/drawingml/2006/main" prst="rect">
             <a:avLst/>
@@ -10206,19 +10206,19 @@
           <p:cNvPr id="22" name="table-text-140-4-0">
             <a:extLst xmlns:a="http://schemas.openxmlformats.org/drawingml/2006/main">
               <a:ext uri="{FF2B5EF4-FFF2-40B4-BE49-F238E27FC236}">
-                <a16:creationId xmlns:a16="http://schemas.microsoft.com/office/drawing/2014/main" id="{A3E52583-AB81-4599-9DCD-CBDC8FFA2E1A}"/>
-              </a:ext>
-            </a:extLst>
-          </p:cNvPr>
-          <p:cNvSpPr>
-            <a:spLocks xmlns:a="http://schemas.openxmlformats.org/drawingml/2006/main" noGrp="1"/>
-          </p:cNvSpPr>
-          <p:nvPr/>
-        </p:nvSpPr>
-        <p:spPr>
-          <a:xfrm xmlns:a="http://schemas.openxmlformats.org/drawingml/2006/main">
-            <a:off x="619125" y="3549015"/>
-            <a:ext cx="3076575" cy="266700"/>
+                <a16:creationId xmlns:a16="http://schemas.microsoft.com/office/drawing/2014/main" id="{1FE8CB63-AC3C-4DCF-969A-C86AEB133565}"/>
+              </a:ext>
+            </a:extLst>
+          </p:cNvPr>
+          <p:cNvSpPr>
+            <a:spLocks xmlns:a="http://schemas.openxmlformats.org/drawingml/2006/main" noGrp="1"/>
+          </p:cNvSpPr>
+          <p:nvPr/>
+        </p:nvSpPr>
+        <p:spPr>
+          <a:xfrm xmlns:a="http://schemas.openxmlformats.org/drawingml/2006/main">
+            <a:off x="619125" y="3500438"/>
+            <a:ext cx="3076575" cy="398145"/>
           </a:xfrm>
           <a:prstGeom xmlns:a="http://schemas.openxmlformats.org/drawingml/2006/main" prst="rect">
             <a:avLst/>
@@ -10268,19 +10268,19 @@
           <p:cNvPr id="23" name="table-cell-140-4-1">
             <a:extLst xmlns:a="http://schemas.openxmlformats.org/drawingml/2006/main">
               <a:ext uri="{FF2B5EF4-FFF2-40B4-BE49-F238E27FC236}">
-                <a16:creationId xmlns:a16="http://schemas.microsoft.com/office/drawing/2014/main" id="{50ED9448-371A-455C-9147-020ED7B9F736}"/>
-              </a:ext>
-            </a:extLst>
-          </p:cNvPr>
-          <p:cNvSpPr>
-            <a:spLocks xmlns:a="http://schemas.openxmlformats.org/drawingml/2006/main" noGrp="1"/>
-          </p:cNvSpPr>
-          <p:nvPr/>
-        </p:nvSpPr>
-        <p:spPr>
-          <a:xfrm xmlns:a="http://schemas.openxmlformats.org/drawingml/2006/main">
-            <a:off x="3781425" y="3482340"/>
-            <a:ext cx="3248025" cy="400050"/>
+                <a16:creationId xmlns:a16="http://schemas.microsoft.com/office/drawing/2014/main" id="{222F3CEF-3DA5-4150-AB7A-BBED7692DA54}"/>
+              </a:ext>
+            </a:extLst>
+          </p:cNvPr>
+          <p:cNvSpPr>
+            <a:spLocks xmlns:a="http://schemas.openxmlformats.org/drawingml/2006/main" noGrp="1"/>
+          </p:cNvSpPr>
+          <p:nvPr/>
+        </p:nvSpPr>
+        <p:spPr>
+          <a:xfrm xmlns:a="http://schemas.openxmlformats.org/drawingml/2006/main">
+            <a:off x="3781425" y="3433763"/>
+            <a:ext cx="3248025" cy="531495"/>
           </a:xfrm>
           <a:prstGeom xmlns:a="http://schemas.openxmlformats.org/drawingml/2006/main" prst="rect">
             <a:avLst/>
@@ -10301,19 +10301,19 @@
           <p:cNvPr id="24" name="table-text-140-4-1">
             <a:extLst xmlns:a="http://schemas.openxmlformats.org/drawingml/2006/main">
               <a:ext uri="{FF2B5EF4-FFF2-40B4-BE49-F238E27FC236}">
-                <a16:creationId xmlns:a16="http://schemas.microsoft.com/office/drawing/2014/main" id="{B78F814E-49CA-490F-9458-CDFA0F795855}"/>
-              </a:ext>
-            </a:extLst>
-          </p:cNvPr>
-          <p:cNvSpPr>
-            <a:spLocks xmlns:a="http://schemas.openxmlformats.org/drawingml/2006/main" noGrp="1"/>
-          </p:cNvSpPr>
-          <p:nvPr/>
-        </p:nvSpPr>
-        <p:spPr>
-          <a:xfrm xmlns:a="http://schemas.openxmlformats.org/drawingml/2006/main">
-            <a:off x="3867150" y="3549015"/>
-            <a:ext cx="3076575" cy="266700"/>
+                <a16:creationId xmlns:a16="http://schemas.microsoft.com/office/drawing/2014/main" id="{B7B92A45-30D7-43BA-9EBD-6A4B42C16DC1}"/>
+              </a:ext>
+            </a:extLst>
+          </p:cNvPr>
+          <p:cNvSpPr>
+            <a:spLocks xmlns:a="http://schemas.openxmlformats.org/drawingml/2006/main" noGrp="1"/>
+          </p:cNvSpPr>
+          <p:nvPr/>
+        </p:nvSpPr>
+        <p:spPr>
+          <a:xfrm xmlns:a="http://schemas.openxmlformats.org/drawingml/2006/main">
+            <a:off x="3867150" y="3500438"/>
+            <a:ext cx="3076575" cy="398145"/>
           </a:xfrm>
           <a:prstGeom xmlns:a="http://schemas.openxmlformats.org/drawingml/2006/main" prst="rect">
             <a:avLst/>
@@ -10326,7 +10326,7 @@
         </p:spPr>
         <p:txBody>
           <a:bodyPr xmlns:a="http://schemas.openxmlformats.org/drawingml/2006/main" lIns="0" tIns="0" rIns="0" bIns="0" anchor="t">
-            <a:normAutofit fontScale="80454"/>
+            <a:normAutofit fontScale="91811"/>
           </a:bodyPr>
           <a:lstStyle xmlns:a="http://schemas.openxmlformats.org/drawingml/2006/main"/>
           <a:p xmlns:a="http://schemas.openxmlformats.org/drawingml/2006/main">
@@ -10353,7 +10353,7 @@
                 <a:ea typeface="NanumGothic"/>
                 <a:cs typeface="NanumGothic"/>
               </a:rPr>
-              <a:t>flutter build apk --release — 통과, 63,261,407바이트(약 60.33MiB)</a:t>
+              <a:t>flutter build apk --release — 통과, 63,261,407바이트(약 60.33MiB), SHA-256 9560dcd7…31552</a:t>
             </a:r>
           </a:p>
         </p:txBody>
@@ -10363,18 +10363,18 @@
           <p:cNvPr id="25" name="table-cell-140-5-0">
             <a:extLst xmlns:a="http://schemas.openxmlformats.org/drawingml/2006/main">
               <a:ext uri="{FF2B5EF4-FFF2-40B4-BE49-F238E27FC236}">
-                <a16:creationId xmlns:a16="http://schemas.microsoft.com/office/drawing/2014/main" id="{A2490603-F023-4995-A204-326BA022030B}"/>
-              </a:ext>
-            </a:extLst>
-          </p:cNvPr>
-          <p:cNvSpPr>
-            <a:spLocks xmlns:a="http://schemas.openxmlformats.org/drawingml/2006/main" noGrp="1"/>
-          </p:cNvSpPr>
-          <p:nvPr/>
-        </p:nvSpPr>
-        <p:spPr>
-          <a:xfrm xmlns:a="http://schemas.openxmlformats.org/drawingml/2006/main">
-            <a:off x="533400" y="3882390"/>
+                <a16:creationId xmlns:a16="http://schemas.microsoft.com/office/drawing/2014/main" id="{6D4A388A-1299-4812-A03D-A9939DF6463B}"/>
+              </a:ext>
+            </a:extLst>
+          </p:cNvPr>
+          <p:cNvSpPr>
+            <a:spLocks xmlns:a="http://schemas.openxmlformats.org/drawingml/2006/main" noGrp="1"/>
+          </p:cNvSpPr>
+          <p:nvPr/>
+        </p:nvSpPr>
+        <p:spPr>
+          <a:xfrm xmlns:a="http://schemas.openxmlformats.org/drawingml/2006/main">
+            <a:off x="533400" y="3965258"/>
             <a:ext cx="3248025" cy="531495"/>
           </a:xfrm>
           <a:prstGeom xmlns:a="http://schemas.openxmlformats.org/drawingml/2006/main" prst="rect">
@@ -10396,18 +10396,18 @@
           <p:cNvPr id="26" name="table-text-140-5-0">
             <a:extLst xmlns:a="http://schemas.openxmlformats.org/drawingml/2006/main">
               <a:ext uri="{FF2B5EF4-FFF2-40B4-BE49-F238E27FC236}">
-                <a16:creationId xmlns:a16="http://schemas.microsoft.com/office/drawing/2014/main" id="{CACD7CB9-FC36-404D-87CA-F71168E3D7C6}"/>
-              </a:ext>
-            </a:extLst>
-          </p:cNvPr>
-          <p:cNvSpPr>
-            <a:spLocks xmlns:a="http://schemas.openxmlformats.org/drawingml/2006/main" noGrp="1"/>
-          </p:cNvSpPr>
-          <p:nvPr/>
-        </p:nvSpPr>
-        <p:spPr>
-          <a:xfrm xmlns:a="http://schemas.openxmlformats.org/drawingml/2006/main">
-            <a:off x="619125" y="3949065"/>
+                <a16:creationId xmlns:a16="http://schemas.microsoft.com/office/drawing/2014/main" id="{0D8A59E2-95A8-4E5F-A5DE-44C074FAD38C}"/>
+              </a:ext>
+            </a:extLst>
+          </p:cNvPr>
+          <p:cNvSpPr>
+            <a:spLocks xmlns:a="http://schemas.openxmlformats.org/drawingml/2006/main" noGrp="1"/>
+          </p:cNvSpPr>
+          <p:nvPr/>
+        </p:nvSpPr>
+        <p:spPr>
+          <a:xfrm xmlns:a="http://schemas.openxmlformats.org/drawingml/2006/main">
+            <a:off x="619125" y="4031933"/>
             <a:ext cx="3076575" cy="398145"/>
           </a:xfrm>
           <a:prstGeom xmlns:a="http://schemas.openxmlformats.org/drawingml/2006/main" prst="rect">
@@ -10458,18 +10458,18 @@
           <p:cNvPr id="27" name="table-cell-140-5-1">
             <a:extLst xmlns:a="http://schemas.openxmlformats.org/drawingml/2006/main">
               <a:ext uri="{FF2B5EF4-FFF2-40B4-BE49-F238E27FC236}">
-                <a16:creationId xmlns:a16="http://schemas.microsoft.com/office/drawing/2014/main" id="{51BE2C0E-7443-4240-B26F-CAAABBCC6E61}"/>
-              </a:ext>
-            </a:extLst>
-          </p:cNvPr>
-          <p:cNvSpPr>
-            <a:spLocks xmlns:a="http://schemas.openxmlformats.org/drawingml/2006/main" noGrp="1"/>
-          </p:cNvSpPr>
-          <p:nvPr/>
-        </p:nvSpPr>
-        <p:spPr>
-          <a:xfrm xmlns:a="http://schemas.openxmlformats.org/drawingml/2006/main">
-            <a:off x="3781425" y="3882390"/>
+                <a16:creationId xmlns:a16="http://schemas.microsoft.com/office/drawing/2014/main" id="{A4086A80-AD6E-4948-A37B-7A25A487E0BA}"/>
+              </a:ext>
+            </a:extLst>
+          </p:cNvPr>
+          <p:cNvSpPr>
+            <a:spLocks xmlns:a="http://schemas.openxmlformats.org/drawingml/2006/main" noGrp="1"/>
+          </p:cNvSpPr>
+          <p:nvPr/>
+        </p:nvSpPr>
+        <p:spPr>
+          <a:xfrm xmlns:a="http://schemas.openxmlformats.org/drawingml/2006/main">
+            <a:off x="3781425" y="3965258"/>
             <a:ext cx="3248025" cy="531495"/>
           </a:xfrm>
           <a:prstGeom xmlns:a="http://schemas.openxmlformats.org/drawingml/2006/main" prst="rect">
@@ -10491,18 +10491,18 @@
           <p:cNvPr id="28" name="table-text-140-5-1">
             <a:extLst xmlns:a="http://schemas.openxmlformats.org/drawingml/2006/main">
               <a:ext uri="{FF2B5EF4-FFF2-40B4-BE49-F238E27FC236}">
-                <a16:creationId xmlns:a16="http://schemas.microsoft.com/office/drawing/2014/main" id="{240B8C97-6D83-43B5-BDDD-0601243E73EE}"/>
-              </a:ext>
-            </a:extLst>
-          </p:cNvPr>
-          <p:cNvSpPr>
-            <a:spLocks xmlns:a="http://schemas.openxmlformats.org/drawingml/2006/main" noGrp="1"/>
-          </p:cNvSpPr>
-          <p:nvPr/>
-        </p:nvSpPr>
-        <p:spPr>
-          <a:xfrm xmlns:a="http://schemas.openxmlformats.org/drawingml/2006/main">
-            <a:off x="3867150" y="3949065"/>
+                <a16:creationId xmlns:a16="http://schemas.microsoft.com/office/drawing/2014/main" id="{853E5A30-80E5-4C4C-A406-BFA95CFE490F}"/>
+              </a:ext>
+            </a:extLst>
+          </p:cNvPr>
+          <p:cNvSpPr>
+            <a:spLocks xmlns:a="http://schemas.openxmlformats.org/drawingml/2006/main" noGrp="1"/>
+          </p:cNvSpPr>
+          <p:nvPr/>
+        </p:nvSpPr>
+        <p:spPr>
+          <a:xfrm xmlns:a="http://schemas.openxmlformats.org/drawingml/2006/main">
+            <a:off x="3867150" y="4031933"/>
             <a:ext cx="3076575" cy="398145"/>
           </a:xfrm>
           <a:prstGeom xmlns:a="http://schemas.openxmlformats.org/drawingml/2006/main" prst="rect">
@@ -10543,7 +10543,7 @@
                 <a:ea typeface="NanumGothic"/>
                 <a:cs typeface="NanumGothic"/>
               </a:rPr>
-              <a:t>실제 telemetry attestation·소스 freshness·60.000초 H.264/avc1·390×844·480프레임·identity transform·대표 27프레임 시각 검사 통과</a:t>
+              <a:t>실제 telemetry·소스 freshness·60.000초 H.264/avc1·390×844·480프레임·identity transform·대표 27프레임 검사 통과</a:t>
             </a:r>
           </a:p>
         </p:txBody>
@@ -10553,18 +10553,18 @@
           <p:cNvPr id="29" name="table-cell-140-6-0">
             <a:extLst xmlns:a="http://schemas.openxmlformats.org/drawingml/2006/main">
               <a:ext uri="{FF2B5EF4-FFF2-40B4-BE49-F238E27FC236}">
-                <a16:creationId xmlns:a16="http://schemas.microsoft.com/office/drawing/2014/main" id="{E4E971BA-E4FE-4040-82CF-702A2635F8FF}"/>
-              </a:ext>
-            </a:extLst>
-          </p:cNvPr>
-          <p:cNvSpPr>
-            <a:spLocks xmlns:a="http://schemas.openxmlformats.org/drawingml/2006/main" noGrp="1"/>
-          </p:cNvSpPr>
-          <p:nvPr/>
-        </p:nvSpPr>
-        <p:spPr>
-          <a:xfrm xmlns:a="http://schemas.openxmlformats.org/drawingml/2006/main">
-            <a:off x="533400" y="4413885"/>
+                <a16:creationId xmlns:a16="http://schemas.microsoft.com/office/drawing/2014/main" id="{7845010E-EE3D-403C-8287-E64EABFAA911}"/>
+              </a:ext>
+            </a:extLst>
+          </p:cNvPr>
+          <p:cNvSpPr>
+            <a:spLocks xmlns:a="http://schemas.openxmlformats.org/drawingml/2006/main" noGrp="1"/>
+          </p:cNvSpPr>
+          <p:nvPr/>
+        </p:nvSpPr>
+        <p:spPr>
+          <a:xfrm xmlns:a="http://schemas.openxmlformats.org/drawingml/2006/main">
+            <a:off x="533400" y="4496753"/>
             <a:ext cx="3248025" cy="531495"/>
           </a:xfrm>
           <a:prstGeom xmlns:a="http://schemas.openxmlformats.org/drawingml/2006/main" prst="rect">
@@ -10586,18 +10586,18 @@
           <p:cNvPr id="30" name="table-text-140-6-0">
             <a:extLst xmlns:a="http://schemas.openxmlformats.org/drawingml/2006/main">
               <a:ext uri="{FF2B5EF4-FFF2-40B4-BE49-F238E27FC236}">
-                <a16:creationId xmlns:a16="http://schemas.microsoft.com/office/drawing/2014/main" id="{CB5BEC06-6F4D-40B8-B21C-B44883C68924}"/>
-              </a:ext>
-            </a:extLst>
-          </p:cNvPr>
-          <p:cNvSpPr>
-            <a:spLocks xmlns:a="http://schemas.openxmlformats.org/drawingml/2006/main" noGrp="1"/>
-          </p:cNvSpPr>
-          <p:nvPr/>
-        </p:nvSpPr>
-        <p:spPr>
-          <a:xfrm xmlns:a="http://schemas.openxmlformats.org/drawingml/2006/main">
-            <a:off x="619125" y="4480560"/>
+                <a16:creationId xmlns:a16="http://schemas.microsoft.com/office/drawing/2014/main" id="{BFC82E33-D070-4BE1-94AE-DE044B2F1640}"/>
+              </a:ext>
+            </a:extLst>
+          </p:cNvPr>
+          <p:cNvSpPr>
+            <a:spLocks xmlns:a="http://schemas.openxmlformats.org/drawingml/2006/main" noGrp="1"/>
+          </p:cNvSpPr>
+          <p:nvPr/>
+        </p:nvSpPr>
+        <p:spPr>
+          <a:xfrm xmlns:a="http://schemas.openxmlformats.org/drawingml/2006/main">
+            <a:off x="619125" y="4563428"/>
             <a:ext cx="3076575" cy="398145"/>
           </a:xfrm>
           <a:prstGeom xmlns:a="http://schemas.openxmlformats.org/drawingml/2006/main" prst="rect">
@@ -10648,18 +10648,18 @@
           <p:cNvPr id="31" name="table-cell-140-6-1">
             <a:extLst xmlns:a="http://schemas.openxmlformats.org/drawingml/2006/main">
               <a:ext uri="{FF2B5EF4-FFF2-40B4-BE49-F238E27FC236}">
-                <a16:creationId xmlns:a16="http://schemas.microsoft.com/office/drawing/2014/main" id="{1E23EC2F-030E-4F99-971B-282E2DD37F60}"/>
-              </a:ext>
-            </a:extLst>
-          </p:cNvPr>
-          <p:cNvSpPr>
-            <a:spLocks xmlns:a="http://schemas.openxmlformats.org/drawingml/2006/main" noGrp="1"/>
-          </p:cNvSpPr>
-          <p:nvPr/>
-        </p:nvSpPr>
-        <p:spPr>
-          <a:xfrm xmlns:a="http://schemas.openxmlformats.org/drawingml/2006/main">
-            <a:off x="3781425" y="4413885"/>
+                <a16:creationId xmlns:a16="http://schemas.microsoft.com/office/drawing/2014/main" id="{7F3B22F5-5C80-4BDC-8CFF-68C981F02C6E}"/>
+              </a:ext>
+            </a:extLst>
+          </p:cNvPr>
+          <p:cNvSpPr>
+            <a:spLocks xmlns:a="http://schemas.openxmlformats.org/drawingml/2006/main" noGrp="1"/>
+          </p:cNvSpPr>
+          <p:nvPr/>
+        </p:nvSpPr>
+        <p:spPr>
+          <a:xfrm xmlns:a="http://schemas.openxmlformats.org/drawingml/2006/main">
+            <a:off x="3781425" y="4496753"/>
             <a:ext cx="3248025" cy="531495"/>
           </a:xfrm>
           <a:prstGeom xmlns:a="http://schemas.openxmlformats.org/drawingml/2006/main" prst="rect">
@@ -10681,18 +10681,18 @@
           <p:cNvPr id="32" name="table-text-140-6-1">
             <a:extLst xmlns:a="http://schemas.openxmlformats.org/drawingml/2006/main">
               <a:ext uri="{FF2B5EF4-FFF2-40B4-BE49-F238E27FC236}">
-                <a16:creationId xmlns:a16="http://schemas.microsoft.com/office/drawing/2014/main" id="{B0E3174C-009F-49D6-A907-1C2802C7FD78}"/>
-              </a:ext>
-            </a:extLst>
-          </p:cNvPr>
-          <p:cNvSpPr>
-            <a:spLocks xmlns:a="http://schemas.openxmlformats.org/drawingml/2006/main" noGrp="1"/>
-          </p:cNvSpPr>
-          <p:nvPr/>
-        </p:nvSpPr>
-        <p:spPr>
-          <a:xfrm xmlns:a="http://schemas.openxmlformats.org/drawingml/2006/main">
-            <a:off x="3867150" y="4480560"/>
+                <a16:creationId xmlns:a16="http://schemas.microsoft.com/office/drawing/2014/main" id="{FF109E6D-B3EE-464D-9FFB-4531F829E14D}"/>
+              </a:ext>
+            </a:extLst>
+          </p:cNvPr>
+          <p:cNvSpPr>
+            <a:spLocks xmlns:a="http://schemas.openxmlformats.org/drawingml/2006/main" noGrp="1"/>
+          </p:cNvSpPr>
+          <p:nvPr/>
+        </p:nvSpPr>
+        <p:spPr>
+          <a:xfrm xmlns:a="http://schemas.openxmlformats.org/drawingml/2006/main">
+            <a:off x="3867150" y="4563428"/>
             <a:ext cx="3076575" cy="398145"/>
           </a:xfrm>
           <a:prstGeom xmlns:a="http://schemas.openxmlformats.org/drawingml/2006/main" prst="rect">
@@ -10733,7 +10733,7 @@
                 <a:ea typeface="NanumGothic"/>
                 <a:cs typeface="NanumGothic"/>
               </a:rPr>
-              <a:t>실패 Golden 61장을 실제 렌더와 대조해 하단 단일행 문구 변경만 확인하고 67/67 표적 재통과</a:t>
+              <a:t>Golden 61장을 실제 렌더와 대조해 하단 단일행 문구 변경만 확인, 영향권 67/67 재통과</a:t>
             </a:r>
           </a:p>
         </p:txBody>
@@ -10743,18 +10743,18 @@
           <p:cNvPr id="33" name="table-cell-140-7-0">
             <a:extLst xmlns:a="http://schemas.openxmlformats.org/drawingml/2006/main">
               <a:ext uri="{FF2B5EF4-FFF2-40B4-BE49-F238E27FC236}">
-                <a16:creationId xmlns:a16="http://schemas.microsoft.com/office/drawing/2014/main" id="{E2C6CBF0-1A82-448E-9D39-A3570497C578}"/>
-              </a:ext>
-            </a:extLst>
-          </p:cNvPr>
-          <p:cNvSpPr>
-            <a:spLocks xmlns:a="http://schemas.openxmlformats.org/drawingml/2006/main" noGrp="1"/>
-          </p:cNvSpPr>
-          <p:nvPr/>
-        </p:nvSpPr>
-        <p:spPr>
-          <a:xfrm xmlns:a="http://schemas.openxmlformats.org/drawingml/2006/main">
-            <a:off x="533400" y="4945380"/>
+                <a16:creationId xmlns:a16="http://schemas.microsoft.com/office/drawing/2014/main" id="{A4E36CED-E81E-4396-8829-466F8F7174D0}"/>
+              </a:ext>
+            </a:extLst>
+          </p:cNvPr>
+          <p:cNvSpPr>
+            <a:spLocks xmlns:a="http://schemas.openxmlformats.org/drawingml/2006/main" noGrp="1"/>
+          </p:cNvSpPr>
+          <p:nvPr/>
+        </p:nvSpPr>
+        <p:spPr>
+          <a:xfrm xmlns:a="http://schemas.openxmlformats.org/drawingml/2006/main">
+            <a:off x="533400" y="5028248"/>
             <a:ext cx="3248025" cy="531495"/>
           </a:xfrm>
           <a:prstGeom xmlns:a="http://schemas.openxmlformats.org/drawingml/2006/main" prst="rect">
@@ -10776,18 +10776,18 @@
           <p:cNvPr id="34" name="table-text-140-7-0">
             <a:extLst xmlns:a="http://schemas.openxmlformats.org/drawingml/2006/main">
               <a:ext uri="{FF2B5EF4-FFF2-40B4-BE49-F238E27FC236}">
-                <a16:creationId xmlns:a16="http://schemas.microsoft.com/office/drawing/2014/main" id="{04E7A151-ABC7-46DB-8E7B-3A009CE1A732}"/>
-              </a:ext>
-            </a:extLst>
-          </p:cNvPr>
-          <p:cNvSpPr>
-            <a:spLocks xmlns:a="http://schemas.openxmlformats.org/drawingml/2006/main" noGrp="1"/>
-          </p:cNvSpPr>
-          <p:nvPr/>
-        </p:nvSpPr>
-        <p:spPr>
-          <a:xfrm xmlns:a="http://schemas.openxmlformats.org/drawingml/2006/main">
-            <a:off x="619125" y="5012055"/>
+                <a16:creationId xmlns:a16="http://schemas.microsoft.com/office/drawing/2014/main" id="{02740D93-DE34-434F-8ACC-E571E7CCD541}"/>
+              </a:ext>
+            </a:extLst>
+          </p:cNvPr>
+          <p:cNvSpPr>
+            <a:spLocks xmlns:a="http://schemas.openxmlformats.org/drawingml/2006/main" noGrp="1"/>
+          </p:cNvSpPr>
+          <p:nvPr/>
+        </p:nvSpPr>
+        <p:spPr>
+          <a:xfrm xmlns:a="http://schemas.openxmlformats.org/drawingml/2006/main">
+            <a:off x="619125" y="5094923"/>
             <a:ext cx="3076575" cy="398145"/>
           </a:xfrm>
           <a:prstGeom xmlns:a="http://schemas.openxmlformats.org/drawingml/2006/main" prst="rect">
@@ -10838,18 +10838,18 @@
           <p:cNvPr id="35" name="table-cell-140-7-1">
             <a:extLst xmlns:a="http://schemas.openxmlformats.org/drawingml/2006/main">
               <a:ext uri="{FF2B5EF4-FFF2-40B4-BE49-F238E27FC236}">
-                <a16:creationId xmlns:a16="http://schemas.microsoft.com/office/drawing/2014/main" id="{3DF406EE-D4E4-43CF-B24D-A368017DD90A}"/>
-              </a:ext>
-            </a:extLst>
-          </p:cNvPr>
-          <p:cNvSpPr>
-            <a:spLocks xmlns:a="http://schemas.openxmlformats.org/drawingml/2006/main" noGrp="1"/>
-          </p:cNvSpPr>
-          <p:nvPr/>
-        </p:nvSpPr>
-        <p:spPr>
-          <a:xfrm xmlns:a="http://schemas.openxmlformats.org/drawingml/2006/main">
-            <a:off x="3781425" y="4945380"/>
+                <a16:creationId xmlns:a16="http://schemas.microsoft.com/office/drawing/2014/main" id="{0FA70047-BDB1-4BA0-92B2-2B6A0C84E318}"/>
+              </a:ext>
+            </a:extLst>
+          </p:cNvPr>
+          <p:cNvSpPr>
+            <a:spLocks xmlns:a="http://schemas.openxmlformats.org/drawingml/2006/main" noGrp="1"/>
+          </p:cNvSpPr>
+          <p:nvPr/>
+        </p:nvSpPr>
+        <p:spPr>
+          <a:xfrm xmlns:a="http://schemas.openxmlformats.org/drawingml/2006/main">
+            <a:off x="3781425" y="5028248"/>
             <a:ext cx="3248025" cy="531495"/>
           </a:xfrm>
           <a:prstGeom xmlns:a="http://schemas.openxmlformats.org/drawingml/2006/main" prst="rect">
@@ -10871,18 +10871,18 @@
           <p:cNvPr id="36" name="table-text-140-7-1">
             <a:extLst xmlns:a="http://schemas.openxmlformats.org/drawingml/2006/main">
               <a:ext uri="{FF2B5EF4-FFF2-40B4-BE49-F238E27FC236}">
-                <a16:creationId xmlns:a16="http://schemas.microsoft.com/office/drawing/2014/main" id="{3DB37353-F4FE-4BF5-84DF-B5E1BCE9AC98}"/>
-              </a:ext>
-            </a:extLst>
-          </p:cNvPr>
-          <p:cNvSpPr>
-            <a:spLocks xmlns:a="http://schemas.openxmlformats.org/drawingml/2006/main" noGrp="1"/>
-          </p:cNvSpPr>
-          <p:nvPr/>
-        </p:nvSpPr>
-        <p:spPr>
-          <a:xfrm xmlns:a="http://schemas.openxmlformats.org/drawingml/2006/main">
-            <a:off x="3867150" y="5012055"/>
+                <a16:creationId xmlns:a16="http://schemas.microsoft.com/office/drawing/2014/main" id="{3DDEE21C-E582-41B0-84F1-2AF5801628C9}"/>
+              </a:ext>
+            </a:extLst>
+          </p:cNvPr>
+          <p:cNvSpPr>
+            <a:spLocks xmlns:a="http://schemas.openxmlformats.org/drawingml/2006/main" noGrp="1"/>
+          </p:cNvSpPr>
+          <p:nvPr/>
+        </p:nvSpPr>
+        <p:spPr>
+          <a:xfrm xmlns:a="http://schemas.openxmlformats.org/drawingml/2006/main">
+            <a:off x="3867150" y="5094923"/>
             <a:ext cx="3076575" cy="398145"/>
           </a:xfrm>
           <a:prstGeom xmlns:a="http://schemas.openxmlformats.org/drawingml/2006/main" prst="rect">
@@ -10933,18 +10933,18 @@
           <p:cNvPr id="37" name="table-cell-140-8-0">
             <a:extLst xmlns:a="http://schemas.openxmlformats.org/drawingml/2006/main">
               <a:ext uri="{FF2B5EF4-FFF2-40B4-BE49-F238E27FC236}">
-                <a16:creationId xmlns:a16="http://schemas.microsoft.com/office/drawing/2014/main" id="{624E0D8A-EE04-4D90-ADBC-4B6F140DA366}"/>
-              </a:ext>
-            </a:extLst>
-          </p:cNvPr>
-          <p:cNvSpPr>
-            <a:spLocks xmlns:a="http://schemas.openxmlformats.org/drawingml/2006/main" noGrp="1"/>
-          </p:cNvSpPr>
-          <p:nvPr/>
-        </p:nvSpPr>
-        <p:spPr>
-          <a:xfrm xmlns:a="http://schemas.openxmlformats.org/drawingml/2006/main">
-            <a:off x="533400" y="5476875"/>
+                <a16:creationId xmlns:a16="http://schemas.microsoft.com/office/drawing/2014/main" id="{CE1A19DB-61B0-49BE-ABBC-7A6C01DBAB7A}"/>
+              </a:ext>
+            </a:extLst>
+          </p:cNvPr>
+          <p:cNvSpPr>
+            <a:spLocks xmlns:a="http://schemas.openxmlformats.org/drawingml/2006/main" noGrp="1"/>
+          </p:cNvSpPr>
+          <p:nvPr/>
+        </p:nvSpPr>
+        <p:spPr>
+          <a:xfrm xmlns:a="http://schemas.openxmlformats.org/drawingml/2006/main">
+            <a:off x="533400" y="5559742"/>
             <a:ext cx="3248025" cy="531495"/>
           </a:xfrm>
           <a:prstGeom xmlns:a="http://schemas.openxmlformats.org/drawingml/2006/main" prst="rect">
@@ -10966,18 +10966,18 @@
           <p:cNvPr id="38" name="table-text-140-8-0">
             <a:extLst xmlns:a="http://schemas.openxmlformats.org/drawingml/2006/main">
               <a:ext uri="{FF2B5EF4-FFF2-40B4-BE49-F238E27FC236}">
-                <a16:creationId xmlns:a16="http://schemas.microsoft.com/office/drawing/2014/main" id="{5E0943EF-4C99-4612-B320-CEB7AF538B82}"/>
-              </a:ext>
-            </a:extLst>
-          </p:cNvPr>
-          <p:cNvSpPr>
-            <a:spLocks xmlns:a="http://schemas.openxmlformats.org/drawingml/2006/main" noGrp="1"/>
-          </p:cNvSpPr>
-          <p:nvPr/>
-        </p:nvSpPr>
-        <p:spPr>
-          <a:xfrm xmlns:a="http://schemas.openxmlformats.org/drawingml/2006/main">
-            <a:off x="619125" y="5543550"/>
+                <a16:creationId xmlns:a16="http://schemas.microsoft.com/office/drawing/2014/main" id="{57A80F8D-604F-4AAF-8193-A1298F073840}"/>
+              </a:ext>
+            </a:extLst>
+          </p:cNvPr>
+          <p:cNvSpPr>
+            <a:spLocks xmlns:a="http://schemas.openxmlformats.org/drawingml/2006/main" noGrp="1"/>
+          </p:cNvSpPr>
+          <p:nvPr/>
+        </p:nvSpPr>
+        <p:spPr>
+          <a:xfrm xmlns:a="http://schemas.openxmlformats.org/drawingml/2006/main">
+            <a:off x="619125" y="5626417"/>
             <a:ext cx="3076575" cy="398145"/>
           </a:xfrm>
           <a:prstGeom xmlns:a="http://schemas.openxmlformats.org/drawingml/2006/main" prst="rect">
@@ -11028,18 +11028,18 @@
           <p:cNvPr id="39" name="table-cell-140-8-1">
             <a:extLst xmlns:a="http://schemas.openxmlformats.org/drawingml/2006/main">
               <a:ext uri="{FF2B5EF4-FFF2-40B4-BE49-F238E27FC236}">
-                <a16:creationId xmlns:a16="http://schemas.microsoft.com/office/drawing/2014/main" id="{529FEAB9-2A03-4664-B2BC-023D2BAC4631}"/>
-              </a:ext>
-            </a:extLst>
-          </p:cNvPr>
-          <p:cNvSpPr>
-            <a:spLocks xmlns:a="http://schemas.openxmlformats.org/drawingml/2006/main" noGrp="1"/>
-          </p:cNvSpPr>
-          <p:nvPr/>
-        </p:nvSpPr>
-        <p:spPr>
-          <a:xfrm xmlns:a="http://schemas.openxmlformats.org/drawingml/2006/main">
-            <a:off x="3781425" y="5476875"/>
+                <a16:creationId xmlns:a16="http://schemas.microsoft.com/office/drawing/2014/main" id="{7D279DB7-6C64-4740-84BD-CABC74950FE9}"/>
+              </a:ext>
+            </a:extLst>
+          </p:cNvPr>
+          <p:cNvSpPr>
+            <a:spLocks xmlns:a="http://schemas.openxmlformats.org/drawingml/2006/main" noGrp="1"/>
+          </p:cNvSpPr>
+          <p:nvPr/>
+        </p:nvSpPr>
+        <p:spPr>
+          <a:xfrm xmlns:a="http://schemas.openxmlformats.org/drawingml/2006/main">
+            <a:off x="3781425" y="5559742"/>
             <a:ext cx="3248025" cy="531495"/>
           </a:xfrm>
           <a:prstGeom xmlns:a="http://schemas.openxmlformats.org/drawingml/2006/main" prst="rect">
@@ -11061,18 +11061,18 @@
           <p:cNvPr id="40" name="table-text-140-8-1">
             <a:extLst xmlns:a="http://schemas.openxmlformats.org/drawingml/2006/main">
               <a:ext uri="{FF2B5EF4-FFF2-40B4-BE49-F238E27FC236}">
-                <a16:creationId xmlns:a16="http://schemas.microsoft.com/office/drawing/2014/main" id="{19661BCD-417E-40FE-A7FF-F7F603AE7386}"/>
-              </a:ext>
-            </a:extLst>
-          </p:cNvPr>
-          <p:cNvSpPr>
-            <a:spLocks xmlns:a="http://schemas.openxmlformats.org/drawingml/2006/main" noGrp="1"/>
-          </p:cNvSpPr>
-          <p:nvPr/>
-        </p:nvSpPr>
-        <p:spPr>
-          <a:xfrm xmlns:a="http://schemas.openxmlformats.org/drawingml/2006/main">
-            <a:off x="3867150" y="5543550"/>
+                <a16:creationId xmlns:a16="http://schemas.microsoft.com/office/drawing/2014/main" id="{BAD1C249-3941-4C33-8026-5FC14249D448}"/>
+              </a:ext>
+            </a:extLst>
+          </p:cNvPr>
+          <p:cNvSpPr>
+            <a:spLocks xmlns:a="http://schemas.openxmlformats.org/drawingml/2006/main" noGrp="1"/>
+          </p:cNvSpPr>
+          <p:nvPr/>
+        </p:nvSpPr>
+        <p:spPr>
+          <a:xfrm xmlns:a="http://schemas.openxmlformats.org/drawingml/2006/main">
+            <a:off x="3867150" y="5626417"/>
             <a:ext cx="3076575" cy="398145"/>
           </a:xfrm>
           <a:prstGeom xmlns:a="http://schemas.openxmlformats.org/drawingml/2006/main" prst="rect">
@@ -11086,7 +11086,7 @@
         </p:spPr>
         <p:txBody>
           <a:bodyPr xmlns:a="http://schemas.openxmlformats.org/drawingml/2006/main" lIns="0" tIns="0" rIns="0" bIns="0" anchor="t">
-            <a:normAutofit fontScale="100000"/>
+            <a:normAutofit fontScale="99446"/>
           </a:bodyPr>
           <a:lstStyle xmlns:a="http://schemas.openxmlformats.org/drawingml/2006/main"/>
           <a:p xmlns:a="http://schemas.openxmlformats.org/drawingml/2006/main">
@@ -11113,7 +11113,7 @@
                 <a:ea typeface="NanumGothic"/>
                 <a:cs typeface="NanumGothic"/>
               </a:rPr>
-              <a:t>코드·레벨·영상 핵심 감사 통과. 최종 문서·배포 감사는 최신 산출물 재생성 및 Pages 배포 뒤 확정</a:t>
+              <a:t>코드·레벨·영상·문서 레이아웃 통과. telemetry shot_id 불일치를 수정하고 실제 발사 회귀·정적 분석 재통과</a:t>
             </a:r>
           </a:p>
         </p:txBody>
@@ -11121,7 +11121,7 @@
     </p:spTree>
     <p:extLst>
       <p:ext uri="{BB962C8B-B14F-4D97-AF65-F5344CB8AC3E}">
-        <p14:creationId xmlns:p14="http://schemas.microsoft.com/office/powerpoint/2010/main" val="1823943978"/>
+        <p14:creationId xmlns:p14="http://schemas.microsoft.com/office/powerpoint/2010/main" val="288388559"/>
       </p:ext>
     </p:extLst>
   </p:cSld>
@@ -11152,7 +11152,7 @@
           <p:cNvPr id="6" name="running-label">
             <a:extLst xmlns:a="http://schemas.openxmlformats.org/drawingml/2006/main">
               <a:ext uri="{FF2B5EF4-FFF2-40B4-BE49-F238E27FC236}">
-                <a16:creationId xmlns:a16="http://schemas.microsoft.com/office/drawing/2014/main" id="{9AE041BA-ECE2-42AA-9FFC-11C1CBC6BE04}"/>
+                <a16:creationId xmlns:a16="http://schemas.microsoft.com/office/drawing/2014/main" id="{FDE7C016-B6C2-4A71-9B93-994C2F04D3B9}"/>
               </a:ext>
             </a:extLst>
           </p:cNvPr>
@@ -11214,7 +11214,7 @@
           <p:cNvPr id="2" name="page-number">
             <a:extLst xmlns:a="http://schemas.openxmlformats.org/drawingml/2006/main">
               <a:ext uri="{FF2B5EF4-FFF2-40B4-BE49-F238E27FC236}">
-                <a16:creationId xmlns:a16="http://schemas.microsoft.com/office/drawing/2014/main" id="{4BE39FE6-E0CE-416F-978C-4C85009F4828}"/>
+                <a16:creationId xmlns:a16="http://schemas.microsoft.com/office/drawing/2014/main" id="{DFCECDFF-4616-481C-9B56-C9FBFB74F092}"/>
               </a:ext>
             </a:extLst>
           </p:cNvPr>
@@ -11276,7 +11276,7 @@
           <p:cNvPr id="3" name="header-rule">
             <a:extLst xmlns:a="http://schemas.openxmlformats.org/drawingml/2006/main">
               <a:ext uri="{FF2B5EF4-FFF2-40B4-BE49-F238E27FC236}">
-                <a16:creationId xmlns:a16="http://schemas.microsoft.com/office/drawing/2014/main" id="{E68AF2C2-756F-4B22-A8F2-9DCF05BFBD78}"/>
+                <a16:creationId xmlns:a16="http://schemas.microsoft.com/office/drawing/2014/main" id="{A0D34B69-5986-48A0-AB17-45F1F87275ED}"/>
               </a:ext>
             </a:extLst>
           </p:cNvPr>
@@ -11307,7 +11307,7 @@
           <p:cNvPr id="4" name="slide-title">
             <a:extLst xmlns:a="http://schemas.openxmlformats.org/drawingml/2006/main">
               <a:ext uri="{FF2B5EF4-FFF2-40B4-BE49-F238E27FC236}">
-                <a16:creationId xmlns:a16="http://schemas.microsoft.com/office/drawing/2014/main" id="{3980073E-2EB5-486D-A3D7-CF33498E684E}"/>
+                <a16:creationId xmlns:a16="http://schemas.microsoft.com/office/drawing/2014/main" id="{BDE7D60E-B8E1-43EC-B49A-BCB2FCB26B28}"/>
               </a:ext>
             </a:extLst>
           </p:cNvPr>
@@ -11369,7 +11369,7 @@
           <p:cNvPr id="5" name="bullets-140">
             <a:extLst xmlns:a="http://schemas.openxmlformats.org/drawingml/2006/main">
               <a:ext uri="{FF2B5EF4-FFF2-40B4-BE49-F238E27FC236}">
-                <a16:creationId xmlns:a16="http://schemas.microsoft.com/office/drawing/2014/main" id="{DFF7D150-F2BD-4653-9568-352E9299F766}"/>
+                <a16:creationId xmlns:a16="http://schemas.microsoft.com/office/drawing/2014/main" id="{D3F18F85-43F7-4FE9-BCC0-A291B86317EF}"/>
               </a:ext>
             </a:extLst>
           </p:cNvPr>
@@ -11381,7 +11381,7 @@
         <p:spPr>
           <a:xfrm xmlns:a="http://schemas.openxmlformats.org/drawingml/2006/main">
             <a:off x="533400" y="1333500"/>
-            <a:ext cx="6496050" cy="2154936"/>
+            <a:ext cx="6496050" cy="1577340"/>
           </a:xfrm>
           <a:prstGeom xmlns:a="http://schemas.openxmlformats.org/drawingml/2006/main" prst="rect">
             <a:avLst/>
@@ -11487,42 +11487,12 @@
               <a:t>생성형 이미지 애셋은 출처·해시를 기록했으나 상업 공개 전 최종 권리 검토가 필요하다.</a:t>
             </a:r>
           </a:p>
-          <a:p xmlns:a="http://schemas.openxmlformats.org/drawingml/2006/main">
-            <a:pPr marL="20" indent="-12">
-              <a:lnSpc>
-                <a:spcPct val="118000"/>
-              </a:lnSpc>
-              <a:spcAft>
-                <a:spcPts val="8"/>
-              </a:spcAft>
-              <a:buNone/>
-              <a:defRPr sz="1200">
-                <a:solidFill>
-                  <a:srgbClr val="173A3F"/>
-                </a:solidFill>
-                <a:latin typeface="NanumGothic"/>
-                <a:ea typeface="NanumGothic"/>
-                <a:cs typeface="NanumGothic"/>
-              </a:defRPr>
-            </a:pPr>
-            <a:r>
-              <a:rPr sz="1200">
-                <a:solidFill>
-                  <a:srgbClr val="173A3F"/>
-                </a:solidFill>
-                <a:latin typeface="NanumGothic"/>
-                <a:ea typeface="NanumGothic"/>
-                <a:cs typeface="NanumGothic"/>
-              </a:rPr>
-              <a:t>최신 변경판의 GitHub Pages 배포와 최종 커밋·푸시는 이 문서 재생성·감사 뒤 수행한다. 이 문서 생성 시점의 공개 링크는 이전 배포본이다.</a:t>
-            </a:r>
-          </a:p>
         </p:txBody>
       </p:sp>
     </p:spTree>
     <p:extLst>
       <p:ext uri="{BB962C8B-B14F-4D97-AF65-F5344CB8AC3E}">
-        <p14:creationId xmlns:p14="http://schemas.microsoft.com/office/powerpoint/2010/main" val="601236710"/>
+        <p14:creationId xmlns:p14="http://schemas.microsoft.com/office/powerpoint/2010/main" val="1220646252"/>
       </p:ext>
     </p:extLst>
   </p:cSld>
@@ -11553,7 +11523,7 @@
           <p:cNvPr id="6" name="running-label">
             <a:extLst xmlns:a="http://schemas.openxmlformats.org/drawingml/2006/main">
               <a:ext uri="{FF2B5EF4-FFF2-40B4-BE49-F238E27FC236}">
-                <a16:creationId xmlns:a16="http://schemas.microsoft.com/office/drawing/2014/main" id="{E18A2E00-C34B-4DAA-B972-51A2CA3AC41D}"/>
+                <a16:creationId xmlns:a16="http://schemas.microsoft.com/office/drawing/2014/main" id="{08CA3F5F-203D-4216-8B21-F7EAFD922A86}"/>
               </a:ext>
             </a:extLst>
           </p:cNvPr>
@@ -11615,7 +11585,7 @@
           <p:cNvPr id="2" name="page-number">
             <a:extLst xmlns:a="http://schemas.openxmlformats.org/drawingml/2006/main">
               <a:ext uri="{FF2B5EF4-FFF2-40B4-BE49-F238E27FC236}">
-                <a16:creationId xmlns:a16="http://schemas.microsoft.com/office/drawing/2014/main" id="{165B782D-1BD2-4B01-BA1E-32A15530B388}"/>
+                <a16:creationId xmlns:a16="http://schemas.microsoft.com/office/drawing/2014/main" id="{B745E23B-7E7A-4E5D-893C-80789D58564A}"/>
               </a:ext>
             </a:extLst>
           </p:cNvPr>
@@ -11677,7 +11647,7 @@
           <p:cNvPr id="3" name="header-rule">
             <a:extLst xmlns:a="http://schemas.openxmlformats.org/drawingml/2006/main">
               <a:ext uri="{FF2B5EF4-FFF2-40B4-BE49-F238E27FC236}">
-                <a16:creationId xmlns:a16="http://schemas.microsoft.com/office/drawing/2014/main" id="{140405DF-DDD2-49DB-BF0C-E7DD638843BD}"/>
+                <a16:creationId xmlns:a16="http://schemas.microsoft.com/office/drawing/2014/main" id="{364EE2D9-4846-478B-927F-13A0F284C1A4}"/>
               </a:ext>
             </a:extLst>
           </p:cNvPr>
@@ -11708,7 +11678,7 @@
           <p:cNvPr id="4" name="slide-title">
             <a:extLst xmlns:a="http://schemas.openxmlformats.org/drawingml/2006/main">
               <a:ext uri="{FF2B5EF4-FFF2-40B4-BE49-F238E27FC236}">
-                <a16:creationId xmlns:a16="http://schemas.microsoft.com/office/drawing/2014/main" id="{8D3189AD-9D9A-4900-9B6B-225ED6ECA54B}"/>
+                <a16:creationId xmlns:a16="http://schemas.microsoft.com/office/drawing/2014/main" id="{71277E39-674D-4441-82D6-D0B0548776FD}"/>
               </a:ext>
             </a:extLst>
           </p:cNvPr>
@@ -11770,7 +11740,7 @@
           <p:cNvPr id="5" name="paragraph-140">
             <a:extLst xmlns:a="http://schemas.openxmlformats.org/drawingml/2006/main">
               <a:ext uri="{FF2B5EF4-FFF2-40B4-BE49-F238E27FC236}">
-                <a16:creationId xmlns:a16="http://schemas.microsoft.com/office/drawing/2014/main" id="{FD0F0B77-B09E-41D9-BA2A-B9A8FF0DE8FB}"/>
+                <a16:creationId xmlns:a16="http://schemas.microsoft.com/office/drawing/2014/main" id="{7485CD2B-9B7D-4C26-A7C2-0DBEC1A2F4F2}"/>
               </a:ext>
             </a:extLst>
           </p:cNvPr>
@@ -11822,7 +11792,7 @@
                 <a:ea typeface="NanumGothic"/>
                 <a:cs typeface="NanumGothic"/>
               </a:rPr>
-              <a:t>작성일: 2026-08-10 KST 기능 기준: main 작업 트리 / 기반 커밋 bfb7a39734cad39b458273a6bca55a5485950d7c 제출 형식: 게임 소개 및 설명 PDF</a:t>
+              <a:t>작성일: 2026-08-10 KST 기능 기준: main / 배포 커밋 69744c6d3183b4933817066f80221c2f8fd69630 제출 형식: 게임 소개 및 설명 PDF</a:t>
             </a:r>
           </a:p>
         </p:txBody>
@@ -11830,7 +11800,7 @@
     </p:spTree>
     <p:extLst>
       <p:ext uri="{BB962C8B-B14F-4D97-AF65-F5344CB8AC3E}">
-        <p14:creationId xmlns:p14="http://schemas.microsoft.com/office/powerpoint/2010/main" val="1767208892"/>
+        <p14:creationId xmlns:p14="http://schemas.microsoft.com/office/powerpoint/2010/main" val="265745587"/>
       </p:ext>
     </p:extLst>
   </p:cSld>
@@ -11861,7 +11831,7 @@
           <p:cNvPr id="25" name="running-label">
             <a:extLst xmlns:a="http://schemas.openxmlformats.org/drawingml/2006/main">
               <a:ext uri="{FF2B5EF4-FFF2-40B4-BE49-F238E27FC236}">
-                <a16:creationId xmlns:a16="http://schemas.microsoft.com/office/drawing/2014/main" id="{D624E7E9-E1B1-4CD0-927D-AAE9003FFA99}"/>
+                <a16:creationId xmlns:a16="http://schemas.microsoft.com/office/drawing/2014/main" id="{2AEB5BB2-CC43-4BBD-8369-EEB75A23B1CD}"/>
               </a:ext>
             </a:extLst>
           </p:cNvPr>
@@ -11923,7 +11893,7 @@
           <p:cNvPr id="2" name="page-number">
             <a:extLst xmlns:a="http://schemas.openxmlformats.org/drawingml/2006/main">
               <a:ext uri="{FF2B5EF4-FFF2-40B4-BE49-F238E27FC236}">
-                <a16:creationId xmlns:a16="http://schemas.microsoft.com/office/drawing/2014/main" id="{49C83741-91E7-478D-9880-EFE97C206FDE}"/>
+                <a16:creationId xmlns:a16="http://schemas.microsoft.com/office/drawing/2014/main" id="{A1FC4977-17A3-4BFC-B875-738AAAB71C91}"/>
               </a:ext>
             </a:extLst>
           </p:cNvPr>
@@ -11985,7 +11955,7 @@
           <p:cNvPr id="3" name="header-rule">
             <a:extLst xmlns:a="http://schemas.openxmlformats.org/drawingml/2006/main">
               <a:ext uri="{FF2B5EF4-FFF2-40B4-BE49-F238E27FC236}">
-                <a16:creationId xmlns:a16="http://schemas.microsoft.com/office/drawing/2014/main" id="{7BFF28BB-852C-42DD-9F76-70C7A485CDAC}"/>
+                <a16:creationId xmlns:a16="http://schemas.microsoft.com/office/drawing/2014/main" id="{BDDC7507-7C30-46F3-9F86-9812BBE09534}"/>
               </a:ext>
             </a:extLst>
           </p:cNvPr>
@@ -12016,7 +11986,7 @@
           <p:cNvPr id="4" name="slide-title">
             <a:extLst xmlns:a="http://schemas.openxmlformats.org/drawingml/2006/main">
               <a:ext uri="{FF2B5EF4-FFF2-40B4-BE49-F238E27FC236}">
-                <a16:creationId xmlns:a16="http://schemas.microsoft.com/office/drawing/2014/main" id="{2D11F6F5-086B-4AAF-B396-2CCFD7B56E22}"/>
+                <a16:creationId xmlns:a16="http://schemas.microsoft.com/office/drawing/2014/main" id="{CB95A36E-32C3-4D07-BFE3-D340AA66346B}"/>
               </a:ext>
             </a:extLst>
           </p:cNvPr>
@@ -12078,7 +12048,7 @@
           <p:cNvPr id="5" name="bullets-140">
             <a:extLst xmlns:a="http://schemas.openxmlformats.org/drawingml/2006/main">
               <a:ext uri="{FF2B5EF4-FFF2-40B4-BE49-F238E27FC236}">
-                <a16:creationId xmlns:a16="http://schemas.microsoft.com/office/drawing/2014/main" id="{37806616-E578-4389-B3BE-5A12A1EC6EC3}"/>
+                <a16:creationId xmlns:a16="http://schemas.microsoft.com/office/drawing/2014/main" id="{9610DC75-BA2B-4FE4-840F-BE67DB87D0C5}"/>
               </a:ext>
             </a:extLst>
           </p:cNvPr>
@@ -12207,7 +12177,7 @@
           <p:nvPr/>
         </p:nvPicPr>
         <p:blipFill>
-          <a:blip xmlns:r="http://schemas.openxmlformats.org/officeDocument/2006/relationships" xmlns:a="http://schemas.openxmlformats.org/drawingml/2006/main" r:embed="R22ca40c6028149d8"/>
+          <a:blip xmlns:r="http://schemas.openxmlformats.org/officeDocument/2006/relationships" xmlns:a="http://schemas.openxmlformats.org/drawingml/2006/main" r:embed="R93cabfef0067452e"/>
           <a:stretch xmlns:a="http://schemas.openxmlformats.org/drawingml/2006/main"/>
         </p:blipFill>
         <p:spPr>
@@ -12227,7 +12197,7 @@
           <p:cNvPr id="7" name="image-caption-291.28">
             <a:extLst xmlns:a="http://schemas.openxmlformats.org/drawingml/2006/main">
               <a:ext uri="{FF2B5EF4-FFF2-40B4-BE49-F238E27FC236}">
-                <a16:creationId xmlns:a16="http://schemas.microsoft.com/office/drawing/2014/main" id="{85A0D5F2-B6B0-4F5D-931F-369F3355C108}"/>
+                <a16:creationId xmlns:a16="http://schemas.microsoft.com/office/drawing/2014/main" id="{C0FA5F5D-A3F7-4AA3-8ED6-CE630EBED8E4}"/>
               </a:ext>
             </a:extLst>
           </p:cNvPr>
@@ -12289,7 +12259,7 @@
           <p:cNvPr id="8" name="paragraph-675.28">
             <a:extLst xmlns:a="http://schemas.openxmlformats.org/drawingml/2006/main">
               <a:ext uri="{FF2B5EF4-FFF2-40B4-BE49-F238E27FC236}">
-                <a16:creationId xmlns:a16="http://schemas.microsoft.com/office/drawing/2014/main" id="{EB2C770C-C1E2-4B6C-972B-493E635E7146}"/>
+                <a16:creationId xmlns:a16="http://schemas.microsoft.com/office/drawing/2014/main" id="{6189EE06-24B3-41DF-8ED4-A21F7EB85E28}"/>
               </a:ext>
             </a:extLst>
           </p:cNvPr>
@@ -12351,7 +12321,7 @@
           <p:cNvPr id="9" name="table-cell-747.92-0-0">
             <a:extLst xmlns:a="http://schemas.openxmlformats.org/drawingml/2006/main">
               <a:ext uri="{FF2B5EF4-FFF2-40B4-BE49-F238E27FC236}">
-                <a16:creationId xmlns:a16="http://schemas.microsoft.com/office/drawing/2014/main" id="{882BA120-8FE2-4B19-8D3A-14CDEF261C81}"/>
+                <a16:creationId xmlns:a16="http://schemas.microsoft.com/office/drawing/2014/main" id="{81EAB6BD-CC46-4943-83D8-50E75F59B31E}"/>
               </a:ext>
             </a:extLst>
           </p:cNvPr>
@@ -12384,7 +12354,7 @@
           <p:cNvPr id="10" name="table-text-747.92-0-0">
             <a:extLst xmlns:a="http://schemas.openxmlformats.org/drawingml/2006/main">
               <a:ext uri="{FF2B5EF4-FFF2-40B4-BE49-F238E27FC236}">
-                <a16:creationId xmlns:a16="http://schemas.microsoft.com/office/drawing/2014/main" id="{0D4A1CEE-55AD-469A-A5A7-D9D56C492397}"/>
+                <a16:creationId xmlns:a16="http://schemas.microsoft.com/office/drawing/2014/main" id="{68232F8E-2741-44B4-A8E7-524B97CD8E03}"/>
               </a:ext>
             </a:extLst>
           </p:cNvPr>
@@ -12446,7 +12416,7 @@
           <p:cNvPr id="11" name="table-cell-747.92-0-1">
             <a:extLst xmlns:a="http://schemas.openxmlformats.org/drawingml/2006/main">
               <a:ext uri="{FF2B5EF4-FFF2-40B4-BE49-F238E27FC236}">
-                <a16:creationId xmlns:a16="http://schemas.microsoft.com/office/drawing/2014/main" id="{F32F3CC7-C43D-4717-A9CD-964EF87C4A92}"/>
+                <a16:creationId xmlns:a16="http://schemas.microsoft.com/office/drawing/2014/main" id="{034DAC04-AD68-4E75-9F81-35A40CF15CFC}"/>
               </a:ext>
             </a:extLst>
           </p:cNvPr>
@@ -12479,7 +12449,7 @@
           <p:cNvPr id="12" name="table-text-747.92-0-1">
             <a:extLst xmlns:a="http://schemas.openxmlformats.org/drawingml/2006/main">
               <a:ext uri="{FF2B5EF4-FFF2-40B4-BE49-F238E27FC236}">
-                <a16:creationId xmlns:a16="http://schemas.microsoft.com/office/drawing/2014/main" id="{F246CF60-D08B-49AA-98CA-22B35FDC0041}"/>
+                <a16:creationId xmlns:a16="http://schemas.microsoft.com/office/drawing/2014/main" id="{783D86D1-F57D-4649-80B9-7D5E14085D9E}"/>
               </a:ext>
             </a:extLst>
           </p:cNvPr>
@@ -12541,7 +12511,7 @@
           <p:cNvPr id="13" name="table-cell-747.92-1-0">
             <a:extLst xmlns:a="http://schemas.openxmlformats.org/drawingml/2006/main">
               <a:ext uri="{FF2B5EF4-FFF2-40B4-BE49-F238E27FC236}">
-                <a16:creationId xmlns:a16="http://schemas.microsoft.com/office/drawing/2014/main" id="{43F6B7BD-5D90-4FB7-9CC4-D8E162C2FFAA}"/>
+                <a16:creationId xmlns:a16="http://schemas.microsoft.com/office/drawing/2014/main" id="{53F6278F-6304-44AB-8CD3-F27EED2F7CE1}"/>
               </a:ext>
             </a:extLst>
           </p:cNvPr>
@@ -12574,7 +12544,7 @@
           <p:cNvPr id="14" name="table-text-747.92-1-0">
             <a:extLst xmlns:a="http://schemas.openxmlformats.org/drawingml/2006/main">
               <a:ext uri="{FF2B5EF4-FFF2-40B4-BE49-F238E27FC236}">
-                <a16:creationId xmlns:a16="http://schemas.microsoft.com/office/drawing/2014/main" id="{F6B5F330-E21B-4F9E-B3B9-C2A5A794C9B0}"/>
+                <a16:creationId xmlns:a16="http://schemas.microsoft.com/office/drawing/2014/main" id="{E4DB2482-7B5A-48AB-8A53-DCD2EBB7E3F7}"/>
               </a:ext>
             </a:extLst>
           </p:cNvPr>
@@ -12636,7 +12606,7 @@
           <p:cNvPr id="15" name="table-cell-747.92-1-1">
             <a:extLst xmlns:a="http://schemas.openxmlformats.org/drawingml/2006/main">
               <a:ext uri="{FF2B5EF4-FFF2-40B4-BE49-F238E27FC236}">
-                <a16:creationId xmlns:a16="http://schemas.microsoft.com/office/drawing/2014/main" id="{585B73C1-4D4F-418B-8741-ED970500692C}"/>
+                <a16:creationId xmlns:a16="http://schemas.microsoft.com/office/drawing/2014/main" id="{A0580437-BA78-4854-A2ED-B75A796BFB37}"/>
               </a:ext>
             </a:extLst>
           </p:cNvPr>
@@ -12669,7 +12639,7 @@
           <p:cNvPr id="16" name="table-text-747.92-1-1">
             <a:extLst xmlns:a="http://schemas.openxmlformats.org/drawingml/2006/main">
               <a:ext uri="{FF2B5EF4-FFF2-40B4-BE49-F238E27FC236}">
-                <a16:creationId xmlns:a16="http://schemas.microsoft.com/office/drawing/2014/main" id="{B52F5A14-99EA-4A07-A481-3F1EB82CAC10}"/>
+                <a16:creationId xmlns:a16="http://schemas.microsoft.com/office/drawing/2014/main" id="{D5B51FF2-FBC8-4518-ACD6-FFF65E666A8C}"/>
               </a:ext>
             </a:extLst>
           </p:cNvPr>
@@ -12731,7 +12701,7 @@
           <p:cNvPr id="17" name="table-cell-747.92-2-0">
             <a:extLst xmlns:a="http://schemas.openxmlformats.org/drawingml/2006/main">
               <a:ext uri="{FF2B5EF4-FFF2-40B4-BE49-F238E27FC236}">
-                <a16:creationId xmlns:a16="http://schemas.microsoft.com/office/drawing/2014/main" id="{40F8C88D-7A3F-4F14-A5DD-D0C590E4177C}"/>
+                <a16:creationId xmlns:a16="http://schemas.microsoft.com/office/drawing/2014/main" id="{BEA96841-CAFA-4CC0-AD67-A0B04AE858E5}"/>
               </a:ext>
             </a:extLst>
           </p:cNvPr>
@@ -12764,7 +12734,7 @@
           <p:cNvPr id="18" name="table-text-747.92-2-0">
             <a:extLst xmlns:a="http://schemas.openxmlformats.org/drawingml/2006/main">
               <a:ext uri="{FF2B5EF4-FFF2-40B4-BE49-F238E27FC236}">
-                <a16:creationId xmlns:a16="http://schemas.microsoft.com/office/drawing/2014/main" id="{A41BBB88-2F5F-4C01-B44B-9D60C0F1C657}"/>
+                <a16:creationId xmlns:a16="http://schemas.microsoft.com/office/drawing/2014/main" id="{F55101B5-87C2-4327-B048-00E675EE32CB}"/>
               </a:ext>
             </a:extLst>
           </p:cNvPr>
@@ -12826,7 +12796,7 @@
           <p:cNvPr id="19" name="table-cell-747.92-2-1">
             <a:extLst xmlns:a="http://schemas.openxmlformats.org/drawingml/2006/main">
               <a:ext uri="{FF2B5EF4-FFF2-40B4-BE49-F238E27FC236}">
-                <a16:creationId xmlns:a16="http://schemas.microsoft.com/office/drawing/2014/main" id="{C732C46A-2337-43BB-8058-2DB0DAC553BC}"/>
+                <a16:creationId xmlns:a16="http://schemas.microsoft.com/office/drawing/2014/main" id="{8B65D675-B8E0-43C5-9200-17BDCB0B4062}"/>
               </a:ext>
             </a:extLst>
           </p:cNvPr>
@@ -12859,7 +12829,7 @@
           <p:cNvPr id="20" name="table-text-747.92-2-1">
             <a:extLst xmlns:a="http://schemas.openxmlformats.org/drawingml/2006/main">
               <a:ext uri="{FF2B5EF4-FFF2-40B4-BE49-F238E27FC236}">
-                <a16:creationId xmlns:a16="http://schemas.microsoft.com/office/drawing/2014/main" id="{E83E1253-81FE-423A-AAF9-B3EE66E86487}"/>
+                <a16:creationId xmlns:a16="http://schemas.microsoft.com/office/drawing/2014/main" id="{BC786238-3C40-412A-AA25-A308111AD477}"/>
               </a:ext>
             </a:extLst>
           </p:cNvPr>
@@ -12884,7 +12854,7 @@
         </p:spPr>
         <p:txBody>
           <a:bodyPr xmlns:a="http://schemas.openxmlformats.org/drawingml/2006/main" lIns="0" tIns="0" rIns="0" bIns="0" anchor="t">
-            <a:normAutofit fontScale="100000"/>
+            <a:normAutofit fontScale="98118"/>
           </a:bodyPr>
           <a:lstStyle xmlns:a="http://schemas.openxmlformats.org/drawingml/2006/main"/>
           <a:p xmlns:a="http://schemas.openxmlformats.org/drawingml/2006/main">
@@ -12921,7 +12891,7 @@
           <p:cNvPr id="21" name="table-cell-747.92-3-0">
             <a:extLst xmlns:a="http://schemas.openxmlformats.org/drawingml/2006/main">
               <a:ext uri="{FF2B5EF4-FFF2-40B4-BE49-F238E27FC236}">
-                <a16:creationId xmlns:a16="http://schemas.microsoft.com/office/drawing/2014/main" id="{4D8DD652-2690-4865-925F-5A59B7FB586D}"/>
+                <a16:creationId xmlns:a16="http://schemas.microsoft.com/office/drawing/2014/main" id="{64FFC3F7-2BC7-461B-8611-E0B38255D65C}"/>
               </a:ext>
             </a:extLst>
           </p:cNvPr>
@@ -12954,7 +12924,7 @@
           <p:cNvPr id="22" name="table-text-747.92-3-0">
             <a:extLst xmlns:a="http://schemas.openxmlformats.org/drawingml/2006/main">
               <a:ext uri="{FF2B5EF4-FFF2-40B4-BE49-F238E27FC236}">
-                <a16:creationId xmlns:a16="http://schemas.microsoft.com/office/drawing/2014/main" id="{99C18633-837D-4FB3-B2A2-F3601893AE7B}"/>
+                <a16:creationId xmlns:a16="http://schemas.microsoft.com/office/drawing/2014/main" id="{5FBCA70C-3FA7-4FFF-8504-C78E741B3D37}"/>
               </a:ext>
             </a:extLst>
           </p:cNvPr>
@@ -13016,7 +12986,7 @@
           <p:cNvPr id="23" name="table-cell-747.92-3-1">
             <a:extLst xmlns:a="http://schemas.openxmlformats.org/drawingml/2006/main">
               <a:ext uri="{FF2B5EF4-FFF2-40B4-BE49-F238E27FC236}">
-                <a16:creationId xmlns:a16="http://schemas.microsoft.com/office/drawing/2014/main" id="{006E4A70-75D4-4F0C-ADF0-2C924D26E186}"/>
+                <a16:creationId xmlns:a16="http://schemas.microsoft.com/office/drawing/2014/main" id="{CCD7118E-8F04-492B-BAC3-D2C005AA0102}"/>
               </a:ext>
             </a:extLst>
           </p:cNvPr>
@@ -13049,7 +13019,7 @@
           <p:cNvPr id="24" name="table-text-747.92-3-1">
             <a:extLst xmlns:a="http://schemas.openxmlformats.org/drawingml/2006/main">
               <a:ext uri="{FF2B5EF4-FFF2-40B4-BE49-F238E27FC236}">
-                <a16:creationId xmlns:a16="http://schemas.microsoft.com/office/drawing/2014/main" id="{A102F7A5-120D-4148-AD70-D93B986AF12A}"/>
+                <a16:creationId xmlns:a16="http://schemas.microsoft.com/office/drawing/2014/main" id="{FF53964E-3FBA-471D-8E08-68CA13782C55}"/>
               </a:ext>
             </a:extLst>
           </p:cNvPr>
@@ -13074,7 +13044,7 @@
         </p:spPr>
         <p:txBody>
           <a:bodyPr xmlns:a="http://schemas.openxmlformats.org/drawingml/2006/main" lIns="0" tIns="0" rIns="0" bIns="0" anchor="t">
-            <a:normAutofit fontScale="92118"/>
+            <a:normAutofit fontScale="85468"/>
           </a:bodyPr>
           <a:lstStyle xmlns:a="http://schemas.openxmlformats.org/drawingml/2006/main"/>
           <a:p xmlns:a="http://schemas.openxmlformats.org/drawingml/2006/main">
@@ -13109,7 +13079,7 @@
     </p:spTree>
     <p:extLst>
       <p:ext uri="{BB962C8B-B14F-4D97-AF65-F5344CB8AC3E}">
-        <p14:creationId xmlns:p14="http://schemas.microsoft.com/office/powerpoint/2010/main" val="616630172"/>
+        <p14:creationId xmlns:p14="http://schemas.microsoft.com/office/powerpoint/2010/main" val="558714130"/>
       </p:ext>
     </p:extLst>
   </p:cSld>
@@ -13140,7 +13110,7 @@
           <p:cNvPr id="10" name="running-label">
             <a:extLst xmlns:a="http://schemas.openxmlformats.org/drawingml/2006/main">
               <a:ext uri="{FF2B5EF4-FFF2-40B4-BE49-F238E27FC236}">
-                <a16:creationId xmlns:a16="http://schemas.microsoft.com/office/drawing/2014/main" id="{2BAED904-5B58-4A18-A8AE-222B9431DA3E}"/>
+                <a16:creationId xmlns:a16="http://schemas.microsoft.com/office/drawing/2014/main" id="{D284A4E1-98A6-488F-B660-0B30722B60CD}"/>
               </a:ext>
             </a:extLst>
           </p:cNvPr>
@@ -13202,7 +13172,7 @@
           <p:cNvPr id="2" name="page-number">
             <a:extLst xmlns:a="http://schemas.openxmlformats.org/drawingml/2006/main">
               <a:ext uri="{FF2B5EF4-FFF2-40B4-BE49-F238E27FC236}">
-                <a16:creationId xmlns:a16="http://schemas.microsoft.com/office/drawing/2014/main" id="{759C34AC-480D-48BB-A6A8-58923D54D0AC}"/>
+                <a16:creationId xmlns:a16="http://schemas.microsoft.com/office/drawing/2014/main" id="{15288CF7-08ED-4C08-B033-39A6C9F487BA}"/>
               </a:ext>
             </a:extLst>
           </p:cNvPr>
@@ -13264,7 +13234,7 @@
           <p:cNvPr id="3" name="header-rule">
             <a:extLst xmlns:a="http://schemas.openxmlformats.org/drawingml/2006/main">
               <a:ext uri="{FF2B5EF4-FFF2-40B4-BE49-F238E27FC236}">
-                <a16:creationId xmlns:a16="http://schemas.microsoft.com/office/drawing/2014/main" id="{2BF436B6-5555-4761-A845-FADBDC21EF05}"/>
+                <a16:creationId xmlns:a16="http://schemas.microsoft.com/office/drawing/2014/main" id="{54F11E26-E393-4C58-9648-B792D2649722}"/>
               </a:ext>
             </a:extLst>
           </p:cNvPr>
@@ -13295,7 +13265,7 @@
           <p:cNvPr id="4" name="slide-title">
             <a:extLst xmlns:a="http://schemas.openxmlformats.org/drawingml/2006/main">
               <a:ext uri="{FF2B5EF4-FFF2-40B4-BE49-F238E27FC236}">
-                <a16:creationId xmlns:a16="http://schemas.microsoft.com/office/drawing/2014/main" id="{A834D749-1266-4AB0-91F1-85B2E481D831}"/>
+                <a16:creationId xmlns:a16="http://schemas.microsoft.com/office/drawing/2014/main" id="{A046ED91-7A9B-4AF6-9555-581CDC773D01}"/>
               </a:ext>
             </a:extLst>
           </p:cNvPr>
@@ -13357,7 +13327,7 @@
           <p:cNvPr id="5" name="subheading-140">
             <a:extLst xmlns:a="http://schemas.openxmlformats.org/drawingml/2006/main">
               <a:ext uri="{FF2B5EF4-FFF2-40B4-BE49-F238E27FC236}">
-                <a16:creationId xmlns:a16="http://schemas.microsoft.com/office/drawing/2014/main" id="{5F388E16-FE73-4B1D-93D7-E16D35D78B42}"/>
+                <a16:creationId xmlns:a16="http://schemas.microsoft.com/office/drawing/2014/main" id="{1B568433-05C1-478F-A118-4DB847678E40}"/>
               </a:ext>
             </a:extLst>
           </p:cNvPr>
@@ -13419,7 +13389,7 @@
           <p:cNvPr id="6" name="paragraph-194">
             <a:extLst xmlns:a="http://schemas.openxmlformats.org/drawingml/2006/main">
               <a:ext uri="{FF2B5EF4-FFF2-40B4-BE49-F238E27FC236}">
-                <a16:creationId xmlns:a16="http://schemas.microsoft.com/office/drawing/2014/main" id="{FB5CD2DE-50C4-47AE-B2B8-DC4C4E758BD6}"/>
+                <a16:creationId xmlns:a16="http://schemas.microsoft.com/office/drawing/2014/main" id="{410E7B5D-B776-4996-AD4A-538E494EFD39}"/>
               </a:ext>
             </a:extLst>
           </p:cNvPr>
@@ -13481,7 +13451,7 @@
           <p:cNvPr id="7" name="subheading-266.64">
             <a:extLst xmlns:a="http://schemas.openxmlformats.org/drawingml/2006/main">
               <a:ext uri="{FF2B5EF4-FFF2-40B4-BE49-F238E27FC236}">
-                <a16:creationId xmlns:a16="http://schemas.microsoft.com/office/drawing/2014/main" id="{4513A315-4BC9-42E8-AA29-E9653A68EC4A}"/>
+                <a16:creationId xmlns:a16="http://schemas.microsoft.com/office/drawing/2014/main" id="{A0F02758-A53B-4112-B559-B0ABF6F77052}"/>
               </a:ext>
             </a:extLst>
           </p:cNvPr>
@@ -13543,7 +13513,7 @@
           <p:cNvPr id="8" name="bullets-320.64">
             <a:extLst xmlns:a="http://schemas.openxmlformats.org/drawingml/2006/main">
               <a:ext uri="{FF2B5EF4-FFF2-40B4-BE49-F238E27FC236}">
-                <a16:creationId xmlns:a16="http://schemas.microsoft.com/office/drawing/2014/main" id="{A79F7167-1A9D-493A-AD00-F2D4ED407C34}"/>
+                <a16:creationId xmlns:a16="http://schemas.microsoft.com/office/drawing/2014/main" id="{65DE4B9E-5F84-48AF-9B2B-E5D30AD4EB0A}"/>
               </a:ext>
             </a:extLst>
           </p:cNvPr>
@@ -13728,7 +13698,7 @@
           <p:cNvPr id="9" name="bullets-593.2">
             <a:extLst xmlns:a="http://schemas.openxmlformats.org/drawingml/2006/main">
               <a:ext uri="{FF2B5EF4-FFF2-40B4-BE49-F238E27FC236}">
-                <a16:creationId xmlns:a16="http://schemas.microsoft.com/office/drawing/2014/main" id="{B2788156-6AF9-465C-84F9-3527B8C481A6}"/>
+                <a16:creationId xmlns:a16="http://schemas.microsoft.com/office/drawing/2014/main" id="{EEA91198-A9FD-40F0-9C75-7B1D8E5EF329}"/>
               </a:ext>
             </a:extLst>
           </p:cNvPr>
@@ -13791,7 +13761,7 @@
     </p:spTree>
     <p:extLst>
       <p:ext uri="{BB962C8B-B14F-4D97-AF65-F5344CB8AC3E}">
-        <p14:creationId xmlns:p14="http://schemas.microsoft.com/office/powerpoint/2010/main" val="118347157"/>
+        <p14:creationId xmlns:p14="http://schemas.microsoft.com/office/powerpoint/2010/main" val="191044683"/>
       </p:ext>
     </p:extLst>
   </p:cSld>
@@ -13822,7 +13792,7 @@
           <p:cNvPr id="9" name="running-label">
             <a:extLst xmlns:a="http://schemas.openxmlformats.org/drawingml/2006/main">
               <a:ext uri="{FF2B5EF4-FFF2-40B4-BE49-F238E27FC236}">
-                <a16:creationId xmlns:a16="http://schemas.microsoft.com/office/drawing/2014/main" id="{E4910F2B-0939-4396-AB8E-9360661E4AC0}"/>
+                <a16:creationId xmlns:a16="http://schemas.microsoft.com/office/drawing/2014/main" id="{05C9F711-A9E4-4C08-BEB7-DF9813E3DC54}"/>
               </a:ext>
             </a:extLst>
           </p:cNvPr>
@@ -13884,7 +13854,7 @@
           <p:cNvPr id="2" name="page-number">
             <a:extLst xmlns:a="http://schemas.openxmlformats.org/drawingml/2006/main">
               <a:ext uri="{FF2B5EF4-FFF2-40B4-BE49-F238E27FC236}">
-                <a16:creationId xmlns:a16="http://schemas.microsoft.com/office/drawing/2014/main" id="{1098EC39-3DCF-489D-9856-C8141B0E595A}"/>
+                <a16:creationId xmlns:a16="http://schemas.microsoft.com/office/drawing/2014/main" id="{1EAA765D-FB4A-4592-B04E-3491E90BE6A5}"/>
               </a:ext>
             </a:extLst>
           </p:cNvPr>
@@ -13946,7 +13916,7 @@
           <p:cNvPr id="3" name="header-rule">
             <a:extLst xmlns:a="http://schemas.openxmlformats.org/drawingml/2006/main">
               <a:ext uri="{FF2B5EF4-FFF2-40B4-BE49-F238E27FC236}">
-                <a16:creationId xmlns:a16="http://schemas.microsoft.com/office/drawing/2014/main" id="{2C39DD54-AD6B-4522-BAE3-C3DD07EB43A9}"/>
+                <a16:creationId xmlns:a16="http://schemas.microsoft.com/office/drawing/2014/main" id="{7F2BBD17-B7A2-409E-B8D4-5992A2C5953B}"/>
               </a:ext>
             </a:extLst>
           </p:cNvPr>
@@ -13977,7 +13947,7 @@
           <p:cNvPr id="4" name="slide-title">
             <a:extLst xmlns:a="http://schemas.openxmlformats.org/drawingml/2006/main">
               <a:ext uri="{FF2B5EF4-FFF2-40B4-BE49-F238E27FC236}">
-                <a16:creationId xmlns:a16="http://schemas.microsoft.com/office/drawing/2014/main" id="{8981F952-9A04-4903-A1E9-8CA0363B0FB0}"/>
+                <a16:creationId xmlns:a16="http://schemas.microsoft.com/office/drawing/2014/main" id="{F92EEE56-275C-473B-80CB-A8EC8B6ED19F}"/>
               </a:ext>
             </a:extLst>
           </p:cNvPr>
@@ -14043,7 +14013,7 @@
           <p:nvPr/>
         </p:nvPicPr>
         <p:blipFill>
-          <a:blip xmlns:r="http://schemas.openxmlformats.org/officeDocument/2006/relationships" xmlns:a="http://schemas.openxmlformats.org/drawingml/2006/main" r:embed="R299a52a98b184155"/>
+          <a:blip xmlns:r="http://schemas.openxmlformats.org/officeDocument/2006/relationships" xmlns:a="http://schemas.openxmlformats.org/drawingml/2006/main" r:embed="R85490ee31194474f"/>
           <a:stretch xmlns:a="http://schemas.openxmlformats.org/drawingml/2006/main"/>
         </p:blipFill>
         <p:spPr>
@@ -14063,7 +14033,7 @@
           <p:cNvPr id="6" name="image-caption-140">
             <a:extLst xmlns:a="http://schemas.openxmlformats.org/drawingml/2006/main">
               <a:ext uri="{FF2B5EF4-FFF2-40B4-BE49-F238E27FC236}">
-                <a16:creationId xmlns:a16="http://schemas.microsoft.com/office/drawing/2014/main" id="{5932503C-274A-4C6E-9018-E72C03843F3D}"/>
+                <a16:creationId xmlns:a16="http://schemas.microsoft.com/office/drawing/2014/main" id="{E648A651-9B4A-4347-9B4D-A842A35E247B}"/>
               </a:ext>
             </a:extLst>
           </p:cNvPr>
@@ -14125,7 +14095,7 @@
           <p:cNvPr id="7" name="subheading-524">
             <a:extLst xmlns:a="http://schemas.openxmlformats.org/drawingml/2006/main">
               <a:ext uri="{FF2B5EF4-FFF2-40B4-BE49-F238E27FC236}">
-                <a16:creationId xmlns:a16="http://schemas.microsoft.com/office/drawing/2014/main" id="{AA2273B4-DFC9-4735-BACC-7046DDAD9D07}"/>
+                <a16:creationId xmlns:a16="http://schemas.microsoft.com/office/drawing/2014/main" id="{5A689B61-DC7B-4C2C-9570-FD5A74DBD9DE}"/>
               </a:ext>
             </a:extLst>
           </p:cNvPr>
@@ -14187,7 +14157,7 @@
           <p:cNvPr id="8" name="bullets-578">
             <a:extLst xmlns:a="http://schemas.openxmlformats.org/drawingml/2006/main">
               <a:ext uri="{FF2B5EF4-FFF2-40B4-BE49-F238E27FC236}">
-                <a16:creationId xmlns:a16="http://schemas.microsoft.com/office/drawing/2014/main" id="{32F2B037-9F4E-4898-98BC-724589E51B22}"/>
+                <a16:creationId xmlns:a16="http://schemas.microsoft.com/office/drawing/2014/main" id="{D5B8FF61-71DF-4E26-8E11-B997619BBCE2}"/>
               </a:ext>
             </a:extLst>
           </p:cNvPr>
@@ -14340,7 +14310,7 @@
     </p:spTree>
     <p:extLst>
       <p:ext uri="{BB962C8B-B14F-4D97-AF65-F5344CB8AC3E}">
-        <p14:creationId xmlns:p14="http://schemas.microsoft.com/office/powerpoint/2010/main" val="570934275"/>
+        <p14:creationId xmlns:p14="http://schemas.microsoft.com/office/powerpoint/2010/main" val="973160223"/>
       </p:ext>
     </p:extLst>
   </p:cSld>
@@ -14371,7 +14341,7 @@
           <p:cNvPr id="13" name="running-label">
             <a:extLst xmlns:a="http://schemas.openxmlformats.org/drawingml/2006/main">
               <a:ext uri="{FF2B5EF4-FFF2-40B4-BE49-F238E27FC236}">
-                <a16:creationId xmlns:a16="http://schemas.microsoft.com/office/drawing/2014/main" id="{DA158C1D-3C22-44D2-8BDE-535382FE3755}"/>
+                <a16:creationId xmlns:a16="http://schemas.microsoft.com/office/drawing/2014/main" id="{B54518D8-E3F9-4100-A456-1BDC8D41AE42}"/>
               </a:ext>
             </a:extLst>
           </p:cNvPr>
@@ -14433,7 +14403,7 @@
           <p:cNvPr id="2" name="page-number">
             <a:extLst xmlns:a="http://schemas.openxmlformats.org/drawingml/2006/main">
               <a:ext uri="{FF2B5EF4-FFF2-40B4-BE49-F238E27FC236}">
-                <a16:creationId xmlns:a16="http://schemas.microsoft.com/office/drawing/2014/main" id="{60E28628-BFFA-4D1C-83CA-8F5B9D1CB936}"/>
+                <a16:creationId xmlns:a16="http://schemas.microsoft.com/office/drawing/2014/main" id="{1EC4CE4A-6B31-49AF-A1E5-071BE12AEBB5}"/>
               </a:ext>
             </a:extLst>
           </p:cNvPr>
@@ -14495,7 +14465,7 @@
           <p:cNvPr id="3" name="header-rule">
             <a:extLst xmlns:a="http://schemas.openxmlformats.org/drawingml/2006/main">
               <a:ext uri="{FF2B5EF4-FFF2-40B4-BE49-F238E27FC236}">
-                <a16:creationId xmlns:a16="http://schemas.microsoft.com/office/drawing/2014/main" id="{33FFB3D8-89B6-4B94-B3DD-6D52A89D0F62}"/>
+                <a16:creationId xmlns:a16="http://schemas.microsoft.com/office/drawing/2014/main" id="{5658A824-B1EB-4557-A886-C3F1FEB9702A}"/>
               </a:ext>
             </a:extLst>
           </p:cNvPr>
@@ -14526,7 +14496,7 @@
           <p:cNvPr id="4" name="slide-title">
             <a:extLst xmlns:a="http://schemas.openxmlformats.org/drawingml/2006/main">
               <a:ext uri="{FF2B5EF4-FFF2-40B4-BE49-F238E27FC236}">
-                <a16:creationId xmlns:a16="http://schemas.microsoft.com/office/drawing/2014/main" id="{D437FB13-26A4-4E80-94CB-AC51EE9116F9}"/>
+                <a16:creationId xmlns:a16="http://schemas.microsoft.com/office/drawing/2014/main" id="{FEF4ED0C-8409-44F0-B76F-0C0196DE9B9D}"/>
               </a:ext>
             </a:extLst>
           </p:cNvPr>
@@ -14588,7 +14558,7 @@
           <p:cNvPr id="5" name="subheading-140">
             <a:extLst xmlns:a="http://schemas.openxmlformats.org/drawingml/2006/main">
               <a:ext uri="{FF2B5EF4-FFF2-40B4-BE49-F238E27FC236}">
-                <a16:creationId xmlns:a16="http://schemas.microsoft.com/office/drawing/2014/main" id="{0C00D063-353C-4F64-9BC9-BCE5957A33BB}"/>
+                <a16:creationId xmlns:a16="http://schemas.microsoft.com/office/drawing/2014/main" id="{CF2E9D31-3FD4-423D-B843-42053752F2F9}"/>
               </a:ext>
             </a:extLst>
           </p:cNvPr>
@@ -14650,7 +14620,7 @@
           <p:cNvPr id="6" name="paragraph-194">
             <a:extLst xmlns:a="http://schemas.openxmlformats.org/drawingml/2006/main">
               <a:ext uri="{FF2B5EF4-FFF2-40B4-BE49-F238E27FC236}">
-                <a16:creationId xmlns:a16="http://schemas.microsoft.com/office/drawing/2014/main" id="{4ED8539E-271B-4042-8791-E9EF1AED34F7}"/>
+                <a16:creationId xmlns:a16="http://schemas.microsoft.com/office/drawing/2014/main" id="{38202652-B804-43B1-B0AF-B74BBA73A425}"/>
               </a:ext>
             </a:extLst>
           </p:cNvPr>
@@ -14712,7 +14682,7 @@
           <p:cNvPr id="7" name="subheading-266.64">
             <a:extLst xmlns:a="http://schemas.openxmlformats.org/drawingml/2006/main">
               <a:ext uri="{FF2B5EF4-FFF2-40B4-BE49-F238E27FC236}">
-                <a16:creationId xmlns:a16="http://schemas.microsoft.com/office/drawing/2014/main" id="{FC9FB8E9-4A2E-4CED-96B3-A8E0307BB19F}"/>
+                <a16:creationId xmlns:a16="http://schemas.microsoft.com/office/drawing/2014/main" id="{818D0FB4-5CAD-4661-8FFA-E150D9D36CF7}"/>
               </a:ext>
             </a:extLst>
           </p:cNvPr>
@@ -14774,7 +14744,7 @@
           <p:cNvPr id="8" name="paragraph-320.64">
             <a:extLst xmlns:a="http://schemas.openxmlformats.org/drawingml/2006/main">
               <a:ext uri="{FF2B5EF4-FFF2-40B4-BE49-F238E27FC236}">
-                <a16:creationId xmlns:a16="http://schemas.microsoft.com/office/drawing/2014/main" id="{8F1B8F8C-DCDE-446F-91E0-98F65B352AAC}"/>
+                <a16:creationId xmlns:a16="http://schemas.microsoft.com/office/drawing/2014/main" id="{CD3EAEC6-50BD-446D-B3BB-7656C80DE194}"/>
               </a:ext>
             </a:extLst>
           </p:cNvPr>
@@ -14836,7 +14806,7 @@
           <p:cNvPr id="9" name="paragraph-417.6">
             <a:extLst xmlns:a="http://schemas.openxmlformats.org/drawingml/2006/main">
               <a:ext uri="{FF2B5EF4-FFF2-40B4-BE49-F238E27FC236}">
-                <a16:creationId xmlns:a16="http://schemas.microsoft.com/office/drawing/2014/main" id="{F57B340F-F6B5-4A92-8ACF-BAE1C6770094}"/>
+                <a16:creationId xmlns:a16="http://schemas.microsoft.com/office/drawing/2014/main" id="{FBDE95F8-643D-41BA-8403-E01386CFB3E5}"/>
               </a:ext>
             </a:extLst>
           </p:cNvPr>
@@ -14902,7 +14872,7 @@
           <p:nvPr/>
         </p:nvPicPr>
         <p:blipFill>
-          <a:blip xmlns:r="http://schemas.openxmlformats.org/officeDocument/2006/relationships" xmlns:a="http://schemas.openxmlformats.org/drawingml/2006/main" r:embed="Rb910bddeda294bcc"/>
+          <a:blip xmlns:r="http://schemas.openxmlformats.org/officeDocument/2006/relationships" xmlns:a="http://schemas.openxmlformats.org/drawingml/2006/main" r:embed="R6dcce27c54c848fc"/>
           <a:stretch xmlns:a="http://schemas.openxmlformats.org/drawingml/2006/main"/>
         </p:blipFill>
         <p:spPr>
@@ -14922,7 +14892,7 @@
           <p:cNvPr id="11" name="image-caption-490.24">
             <a:extLst xmlns:a="http://schemas.openxmlformats.org/drawingml/2006/main">
               <a:ext uri="{FF2B5EF4-FFF2-40B4-BE49-F238E27FC236}">
-                <a16:creationId xmlns:a16="http://schemas.microsoft.com/office/drawing/2014/main" id="{EC2766EF-0E9C-41BA-8A63-706A6AF30057}"/>
+                <a16:creationId xmlns:a16="http://schemas.microsoft.com/office/drawing/2014/main" id="{9922B2BE-6DB4-4546-AC8A-A7928936C4F2}"/>
               </a:ext>
             </a:extLst>
           </p:cNvPr>
@@ -14984,7 +14954,7 @@
           <p:cNvPr id="12" name="subheading-874.24">
             <a:extLst xmlns:a="http://schemas.openxmlformats.org/drawingml/2006/main">
               <a:ext uri="{FF2B5EF4-FFF2-40B4-BE49-F238E27FC236}">
-                <a16:creationId xmlns:a16="http://schemas.microsoft.com/office/drawing/2014/main" id="{E91F7635-CEA0-46F8-A818-1BB1E45A85A5}"/>
+                <a16:creationId xmlns:a16="http://schemas.microsoft.com/office/drawing/2014/main" id="{7DA9310B-1567-4A8C-A4E8-D9F4E593A934}"/>
               </a:ext>
             </a:extLst>
           </p:cNvPr>
@@ -15044,7 +15014,7 @@
     </p:spTree>
     <p:extLst>
       <p:ext uri="{BB962C8B-B14F-4D97-AF65-F5344CB8AC3E}">
-        <p14:creationId xmlns:p14="http://schemas.microsoft.com/office/powerpoint/2010/main" val="1090779591"/>
+        <p14:creationId xmlns:p14="http://schemas.microsoft.com/office/powerpoint/2010/main" val="1320943871"/>
       </p:ext>
     </p:extLst>
   </p:cSld>
@@ -15075,7 +15045,7 @@
           <p:cNvPr id="9" name="running-label">
             <a:extLst xmlns:a="http://schemas.openxmlformats.org/drawingml/2006/main">
               <a:ext uri="{FF2B5EF4-FFF2-40B4-BE49-F238E27FC236}">
-                <a16:creationId xmlns:a16="http://schemas.microsoft.com/office/drawing/2014/main" id="{DA2296B9-BE7C-41F5-8AC7-7AAFFD1CACDC}"/>
+                <a16:creationId xmlns:a16="http://schemas.microsoft.com/office/drawing/2014/main" id="{0BB81F0D-BEAE-40E8-BCE5-080627823F47}"/>
               </a:ext>
             </a:extLst>
           </p:cNvPr>
@@ -15137,7 +15107,7 @@
           <p:cNvPr id="2" name="page-number">
             <a:extLst xmlns:a="http://schemas.openxmlformats.org/drawingml/2006/main">
               <a:ext uri="{FF2B5EF4-FFF2-40B4-BE49-F238E27FC236}">
-                <a16:creationId xmlns:a16="http://schemas.microsoft.com/office/drawing/2014/main" id="{5B93E86E-C41C-4EA0-918F-4A25D4F771D7}"/>
+                <a16:creationId xmlns:a16="http://schemas.microsoft.com/office/drawing/2014/main" id="{36093510-B225-44C9-9DFA-A552789EFA17}"/>
               </a:ext>
             </a:extLst>
           </p:cNvPr>
@@ -15199,7 +15169,7 @@
           <p:cNvPr id="3" name="header-rule">
             <a:extLst xmlns:a="http://schemas.openxmlformats.org/drawingml/2006/main">
               <a:ext uri="{FF2B5EF4-FFF2-40B4-BE49-F238E27FC236}">
-                <a16:creationId xmlns:a16="http://schemas.microsoft.com/office/drawing/2014/main" id="{479CA04F-AF36-47A4-B37E-BB8051E67C6E}"/>
+                <a16:creationId xmlns:a16="http://schemas.microsoft.com/office/drawing/2014/main" id="{41D0B4E4-B2C1-4441-900E-BB22F8F58924}"/>
               </a:ext>
             </a:extLst>
           </p:cNvPr>
@@ -15230,7 +15200,7 @@
           <p:cNvPr id="4" name="slide-title">
             <a:extLst xmlns:a="http://schemas.openxmlformats.org/drawingml/2006/main">
               <a:ext uri="{FF2B5EF4-FFF2-40B4-BE49-F238E27FC236}">
-                <a16:creationId xmlns:a16="http://schemas.microsoft.com/office/drawing/2014/main" id="{31F5667A-5F71-4C2F-ADDB-A250C1422BC1}"/>
+                <a16:creationId xmlns:a16="http://schemas.microsoft.com/office/drawing/2014/main" id="{6577A991-AB54-4320-AC22-E5E99CB80B6E}"/>
               </a:ext>
             </a:extLst>
           </p:cNvPr>
@@ -15292,7 +15262,7 @@
           <p:cNvPr id="5" name="paragraph-140">
             <a:extLst xmlns:a="http://schemas.openxmlformats.org/drawingml/2006/main">
               <a:ext uri="{FF2B5EF4-FFF2-40B4-BE49-F238E27FC236}">
-                <a16:creationId xmlns:a16="http://schemas.microsoft.com/office/drawing/2014/main" id="{D1D670FC-AC10-4929-BAEE-FE1AE6F10969}"/>
+                <a16:creationId xmlns:a16="http://schemas.microsoft.com/office/drawing/2014/main" id="{0C4D0FCA-FB98-44AD-BA13-19476C8EA02C}"/>
               </a:ext>
             </a:extLst>
           </p:cNvPr>
@@ -15354,7 +15324,7 @@
           <p:cNvPr id="6" name="subheading-261.28">
             <a:extLst xmlns:a="http://schemas.openxmlformats.org/drawingml/2006/main">
               <a:ext uri="{FF2B5EF4-FFF2-40B4-BE49-F238E27FC236}">
-                <a16:creationId xmlns:a16="http://schemas.microsoft.com/office/drawing/2014/main" id="{623A1E99-FA65-4D0D-8846-7CFE05FB1C40}"/>
+                <a16:creationId xmlns:a16="http://schemas.microsoft.com/office/drawing/2014/main" id="{DCDC14FB-46B2-4B04-BE93-9CF5900C99DD}"/>
               </a:ext>
             </a:extLst>
           </p:cNvPr>
@@ -15416,7 +15386,7 @@
           <p:cNvPr id="7" name="paragraph-315.28">
             <a:extLst xmlns:a="http://schemas.openxmlformats.org/drawingml/2006/main">
               <a:ext uri="{FF2B5EF4-FFF2-40B4-BE49-F238E27FC236}">
-                <a16:creationId xmlns:a16="http://schemas.microsoft.com/office/drawing/2014/main" id="{6F290D60-FFF7-4F56-A57F-BAA0C8EEC582}"/>
+                <a16:creationId xmlns:a16="http://schemas.microsoft.com/office/drawing/2014/main" id="{08632920-2558-4DA4-B7B1-7E0CB3874CAC}"/>
               </a:ext>
             </a:extLst>
           </p:cNvPr>
@@ -15478,7 +15448,7 @@
           <p:cNvPr id="8" name="paragraph-460.88">
             <a:extLst xmlns:a="http://schemas.openxmlformats.org/drawingml/2006/main">
               <a:ext uri="{FF2B5EF4-FFF2-40B4-BE49-F238E27FC236}">
-                <a16:creationId xmlns:a16="http://schemas.microsoft.com/office/drawing/2014/main" id="{C2713F24-9966-4C5F-A12F-C29744F141EC}"/>
+                <a16:creationId xmlns:a16="http://schemas.microsoft.com/office/drawing/2014/main" id="{B46709E0-D07D-43E8-AEE3-41F00EF31664}"/>
               </a:ext>
             </a:extLst>
           </p:cNvPr>
@@ -15538,7 +15508,7 @@
     </p:spTree>
     <p:extLst>
       <p:ext uri="{BB962C8B-B14F-4D97-AF65-F5344CB8AC3E}">
-        <p14:creationId xmlns:p14="http://schemas.microsoft.com/office/powerpoint/2010/main" val="1950824493"/>
+        <p14:creationId xmlns:p14="http://schemas.microsoft.com/office/powerpoint/2010/main" val="1218707831"/>
       </p:ext>
     </p:extLst>
   </p:cSld>
@@ -15569,7 +15539,7 @@
           <p:cNvPr id="10" name="running-label">
             <a:extLst xmlns:a="http://schemas.openxmlformats.org/drawingml/2006/main">
               <a:ext uri="{FF2B5EF4-FFF2-40B4-BE49-F238E27FC236}">
-                <a16:creationId xmlns:a16="http://schemas.microsoft.com/office/drawing/2014/main" id="{EFDEF6D3-4FE3-4F87-B1D5-1CC233F49999}"/>
+                <a16:creationId xmlns:a16="http://schemas.microsoft.com/office/drawing/2014/main" id="{8C49351E-D9AA-482A-9C43-284646DEF5BC}"/>
               </a:ext>
             </a:extLst>
           </p:cNvPr>
@@ -15631,7 +15601,7 @@
           <p:cNvPr id="2" name="page-number">
             <a:extLst xmlns:a="http://schemas.openxmlformats.org/drawingml/2006/main">
               <a:ext uri="{FF2B5EF4-FFF2-40B4-BE49-F238E27FC236}">
-                <a16:creationId xmlns:a16="http://schemas.microsoft.com/office/drawing/2014/main" id="{FE9B5AD1-9B96-4B80-869E-D169962B0781}"/>
+                <a16:creationId xmlns:a16="http://schemas.microsoft.com/office/drawing/2014/main" id="{B9915BAA-42C6-430C-B722-48328EE06A6C}"/>
               </a:ext>
             </a:extLst>
           </p:cNvPr>
@@ -15693,7 +15663,7 @@
           <p:cNvPr id="3" name="header-rule">
             <a:extLst xmlns:a="http://schemas.openxmlformats.org/drawingml/2006/main">
               <a:ext uri="{FF2B5EF4-FFF2-40B4-BE49-F238E27FC236}">
-                <a16:creationId xmlns:a16="http://schemas.microsoft.com/office/drawing/2014/main" id="{40F605B5-FACF-4654-A8B5-67AF9538DFC9}"/>
+                <a16:creationId xmlns:a16="http://schemas.microsoft.com/office/drawing/2014/main" id="{DB0DB796-9D66-4D35-9180-F9B242F22B5C}"/>
               </a:ext>
             </a:extLst>
           </p:cNvPr>
@@ -15724,7 +15694,7 @@
           <p:cNvPr id="4" name="slide-title">
             <a:extLst xmlns:a="http://schemas.openxmlformats.org/drawingml/2006/main">
               <a:ext uri="{FF2B5EF4-FFF2-40B4-BE49-F238E27FC236}">
-                <a16:creationId xmlns:a16="http://schemas.microsoft.com/office/drawing/2014/main" id="{02CF22FD-B1D1-4F56-8C95-03BE3E0ABC33}"/>
+                <a16:creationId xmlns:a16="http://schemas.microsoft.com/office/drawing/2014/main" id="{CE67DAA8-E8FF-4026-B70E-134F6697FFBE}"/>
               </a:ext>
             </a:extLst>
           </p:cNvPr>
@@ -15786,7 +15756,7 @@
           <p:cNvPr id="5" name="subheading-140">
             <a:extLst xmlns:a="http://schemas.openxmlformats.org/drawingml/2006/main">
               <a:ext uri="{FF2B5EF4-FFF2-40B4-BE49-F238E27FC236}">
-                <a16:creationId xmlns:a16="http://schemas.microsoft.com/office/drawing/2014/main" id="{BEA2D734-8F61-458D-9EC6-FAF2395EDC21}"/>
+                <a16:creationId xmlns:a16="http://schemas.microsoft.com/office/drawing/2014/main" id="{4FFA1B60-12DC-4FA1-BE66-97740C9FEE92}"/>
               </a:ext>
             </a:extLst>
           </p:cNvPr>
@@ -15852,7 +15822,7 @@
           <p:nvPr/>
         </p:nvPicPr>
         <p:blipFill>
-          <a:blip xmlns:r="http://schemas.openxmlformats.org/officeDocument/2006/relationships" xmlns:a="http://schemas.openxmlformats.org/drawingml/2006/main" r:embed="R7160b8be76c24be3"/>
+          <a:blip xmlns:r="http://schemas.openxmlformats.org/officeDocument/2006/relationships" xmlns:a="http://schemas.openxmlformats.org/drawingml/2006/main" r:embed="R6a3602c017434480"/>
           <a:stretch xmlns:a="http://schemas.openxmlformats.org/drawingml/2006/main"/>
         </p:blipFill>
         <p:spPr>
@@ -15872,7 +15842,7 @@
           <p:cNvPr id="7" name="image-caption-194">
             <a:extLst xmlns:a="http://schemas.openxmlformats.org/drawingml/2006/main">
               <a:ext uri="{FF2B5EF4-FFF2-40B4-BE49-F238E27FC236}">
-                <a16:creationId xmlns:a16="http://schemas.microsoft.com/office/drawing/2014/main" id="{F1421A08-9712-444D-A45A-F80BD41B77FA}"/>
+                <a16:creationId xmlns:a16="http://schemas.microsoft.com/office/drawing/2014/main" id="{CDCB7E49-D130-4358-A0A7-CA10EA5569C3}"/>
               </a:ext>
             </a:extLst>
           </p:cNvPr>
@@ -15934,7 +15904,7 @@
           <p:cNvPr id="8" name="paragraph-578">
             <a:extLst xmlns:a="http://schemas.openxmlformats.org/drawingml/2006/main">
               <a:ext uri="{FF2B5EF4-FFF2-40B4-BE49-F238E27FC236}">
-                <a16:creationId xmlns:a16="http://schemas.microsoft.com/office/drawing/2014/main" id="{81DA675B-05C4-4DEE-BF2A-F607CB81803C}"/>
+                <a16:creationId xmlns:a16="http://schemas.microsoft.com/office/drawing/2014/main" id="{481E3566-6020-4BA0-9219-83B90F360720}"/>
               </a:ext>
             </a:extLst>
           </p:cNvPr>
@@ -15996,7 +15966,7 @@
           <p:cNvPr id="9" name="subheading-650.64">
             <a:extLst xmlns:a="http://schemas.openxmlformats.org/drawingml/2006/main">
               <a:ext uri="{FF2B5EF4-FFF2-40B4-BE49-F238E27FC236}">
-                <a16:creationId xmlns:a16="http://schemas.microsoft.com/office/drawing/2014/main" id="{9676DA9C-07F4-4769-9C55-9D92A5315242}"/>
+                <a16:creationId xmlns:a16="http://schemas.microsoft.com/office/drawing/2014/main" id="{D71967B6-E122-4947-A94C-D56448F27D19}"/>
               </a:ext>
             </a:extLst>
           </p:cNvPr>
@@ -16056,7 +16026,7 @@
     </p:spTree>
     <p:extLst>
       <p:ext uri="{BB962C8B-B14F-4D97-AF65-F5344CB8AC3E}">
-        <p14:creationId xmlns:p14="http://schemas.microsoft.com/office/powerpoint/2010/main" val="1952334977"/>
+        <p14:creationId xmlns:p14="http://schemas.microsoft.com/office/powerpoint/2010/main" val="154655518"/>
       </p:ext>
     </p:extLst>
   </p:cSld>
@@ -16087,7 +16057,7 @@
           <p:cNvPr id="11" name="running-label">
             <a:extLst xmlns:a="http://schemas.openxmlformats.org/drawingml/2006/main">
               <a:ext uri="{FF2B5EF4-FFF2-40B4-BE49-F238E27FC236}">
-                <a16:creationId xmlns:a16="http://schemas.microsoft.com/office/drawing/2014/main" id="{70B31041-75F3-4F11-817F-F156BC2C1409}"/>
+                <a16:creationId xmlns:a16="http://schemas.microsoft.com/office/drawing/2014/main" id="{4827C370-9A19-4DEE-81DB-6A343DD904D1}"/>
               </a:ext>
             </a:extLst>
           </p:cNvPr>
@@ -16149,7 +16119,7 @@
           <p:cNvPr id="2" name="page-number">
             <a:extLst xmlns:a="http://schemas.openxmlformats.org/drawingml/2006/main">
               <a:ext uri="{FF2B5EF4-FFF2-40B4-BE49-F238E27FC236}">
-                <a16:creationId xmlns:a16="http://schemas.microsoft.com/office/drawing/2014/main" id="{094FDCB2-D8E6-4D56-BC3D-16A97B9AF060}"/>
+                <a16:creationId xmlns:a16="http://schemas.microsoft.com/office/drawing/2014/main" id="{214D080A-609C-4639-B121-8A25E6DC30E9}"/>
               </a:ext>
             </a:extLst>
           </p:cNvPr>
@@ -16211,7 +16181,7 @@
           <p:cNvPr id="3" name="header-rule">
             <a:extLst xmlns:a="http://schemas.openxmlformats.org/drawingml/2006/main">
               <a:ext uri="{FF2B5EF4-FFF2-40B4-BE49-F238E27FC236}">
-                <a16:creationId xmlns:a16="http://schemas.microsoft.com/office/drawing/2014/main" id="{546F249B-637E-440B-AAA8-891497CB235F}"/>
+                <a16:creationId xmlns:a16="http://schemas.microsoft.com/office/drawing/2014/main" id="{14F80F2E-1B63-4815-B9F3-9C9C80AFD6FC}"/>
               </a:ext>
             </a:extLst>
           </p:cNvPr>
@@ -16242,7 +16212,7 @@
           <p:cNvPr id="4" name="slide-title">
             <a:extLst xmlns:a="http://schemas.openxmlformats.org/drawingml/2006/main">
               <a:ext uri="{FF2B5EF4-FFF2-40B4-BE49-F238E27FC236}">
-                <a16:creationId xmlns:a16="http://schemas.microsoft.com/office/drawing/2014/main" id="{C8FFD8FF-6218-4400-A8B7-CD734C447514}"/>
+                <a16:creationId xmlns:a16="http://schemas.microsoft.com/office/drawing/2014/main" id="{FA0FA76C-F2CE-4042-A117-FD1C92E1BF88}"/>
               </a:ext>
             </a:extLst>
           </p:cNvPr>
@@ -16308,7 +16278,7 @@
           <p:nvPr/>
         </p:nvPicPr>
         <p:blipFill>
-          <a:blip xmlns:r="http://schemas.openxmlformats.org/officeDocument/2006/relationships" xmlns:a="http://schemas.openxmlformats.org/drawingml/2006/main" r:embed="R5625c4ea99b447ea"/>
+          <a:blip xmlns:r="http://schemas.openxmlformats.org/officeDocument/2006/relationships" xmlns:a="http://schemas.openxmlformats.org/drawingml/2006/main" r:embed="R4e2b41070d044a81"/>
           <a:stretch xmlns:a="http://schemas.openxmlformats.org/drawingml/2006/main"/>
         </p:blipFill>
         <p:spPr>
@@ -16328,7 +16298,7 @@
           <p:cNvPr id="6" name="image-caption-140">
             <a:extLst xmlns:a="http://schemas.openxmlformats.org/drawingml/2006/main">
               <a:ext uri="{FF2B5EF4-FFF2-40B4-BE49-F238E27FC236}">
-                <a16:creationId xmlns:a16="http://schemas.microsoft.com/office/drawing/2014/main" id="{1B9782E0-1E2E-4CFA-BF7E-A4EF3843FE85}"/>
+                <a16:creationId xmlns:a16="http://schemas.microsoft.com/office/drawing/2014/main" id="{67E46B9A-5888-43ED-A0A3-A9D93E7D38E9}"/>
               </a:ext>
             </a:extLst>
           </p:cNvPr>
@@ -16390,7 +16360,7 @@
           <p:cNvPr id="7" name="paragraph-524">
             <a:extLst xmlns:a="http://schemas.openxmlformats.org/drawingml/2006/main">
               <a:ext uri="{FF2B5EF4-FFF2-40B4-BE49-F238E27FC236}">
-                <a16:creationId xmlns:a16="http://schemas.microsoft.com/office/drawing/2014/main" id="{32022754-AC8B-439F-9B7E-84AD5D0905B0}"/>
+                <a16:creationId xmlns:a16="http://schemas.microsoft.com/office/drawing/2014/main" id="{C7D9D9A7-4EF9-4756-92D4-23CCBC552F31}"/>
               </a:ext>
             </a:extLst>
           </p:cNvPr>
@@ -16452,7 +16422,7 @@
           <p:cNvPr id="8" name="subheading-596.64">
             <a:extLst xmlns:a="http://schemas.openxmlformats.org/drawingml/2006/main">
               <a:ext uri="{FF2B5EF4-FFF2-40B4-BE49-F238E27FC236}">
-                <a16:creationId xmlns:a16="http://schemas.microsoft.com/office/drawing/2014/main" id="{855D283D-578A-44CE-8EF3-2C749EDAE922}"/>
+                <a16:creationId xmlns:a16="http://schemas.microsoft.com/office/drawing/2014/main" id="{FCA07929-B499-498A-B6DD-3785F39522E3}"/>
               </a:ext>
             </a:extLst>
           </p:cNvPr>
@@ -16518,7 +16488,7 @@
           <p:nvPr/>
         </p:nvPicPr>
         <p:blipFill>
-          <a:blip xmlns:r="http://schemas.openxmlformats.org/officeDocument/2006/relationships" xmlns:a="http://schemas.openxmlformats.org/drawingml/2006/main" r:embed="R32bdae4aa87c4ca1"/>
+          <a:blip xmlns:r="http://schemas.openxmlformats.org/officeDocument/2006/relationships" xmlns:a="http://schemas.openxmlformats.org/drawingml/2006/main" r:embed="R46e5aa603efa4251"/>
           <a:stretch xmlns:a="http://schemas.openxmlformats.org/drawingml/2006/main"/>
         </p:blipFill>
         <p:spPr>
@@ -16538,7 +16508,7 @@
           <p:cNvPr id="10" name="image-caption-650.64">
             <a:extLst xmlns:a="http://schemas.openxmlformats.org/drawingml/2006/main">
               <a:ext uri="{FF2B5EF4-FFF2-40B4-BE49-F238E27FC236}">
-                <a16:creationId xmlns:a16="http://schemas.microsoft.com/office/drawing/2014/main" id="{22AB29F1-7DA6-4E58-A7CB-95A0B1F58254}"/>
+                <a16:creationId xmlns:a16="http://schemas.microsoft.com/office/drawing/2014/main" id="{68D98F07-5BB0-43B4-B854-1A40D38156CC}"/>
               </a:ext>
             </a:extLst>
           </p:cNvPr>
@@ -16598,7 +16568,7 @@
     </p:spTree>
     <p:extLst>
       <p:ext uri="{BB962C8B-B14F-4D97-AF65-F5344CB8AC3E}">
-        <p14:creationId xmlns:p14="http://schemas.microsoft.com/office/powerpoint/2010/main" val="1671999686"/>
+        <p14:creationId xmlns:p14="http://schemas.microsoft.com/office/powerpoint/2010/main" val="733591507"/>
       </p:ext>
     </p:extLst>
   </p:cSld>

--- a/report/dist/property_shot_game_guide.pptx
+++ b/report/dist/property_shot_game_guide.pptx
@@ -2,24 +2,24 @@
 <file path=ppt/presentation.xml><?xml version="1.0" encoding="utf-8"?>
 <p:presentation xmlns:p="http://schemas.openxmlformats.org/presentationml/2006/main">
   <p:sldMasterIdLst>
-    <p:sldMasterId xmlns:r="http://schemas.openxmlformats.org/officeDocument/2006/relationships" id="2147483648" r:id="R368af97e49644dc2"/>
+    <p:sldMasterId xmlns:r="http://schemas.openxmlformats.org/officeDocument/2006/relationships" id="2147483648" r:id="Ree282ac16d75420f"/>
   </p:sldMasterIdLst>
   <p:notesMasterIdLst>
-    <p:notesMasterId xmlns:r="http://schemas.openxmlformats.org/officeDocument/2006/relationships" r:id="R6486938e4c994ee6"/>
+    <p:notesMasterId xmlns:r="http://schemas.openxmlformats.org/officeDocument/2006/relationships" r:id="R4f32809a8f0c4a79"/>
   </p:notesMasterIdLst>
   <p:sldIdLst>
-    <p:sldId xmlns:r="http://schemas.openxmlformats.org/officeDocument/2006/relationships" id="256" r:id="R73e975c69bf4435c"/>
-    <p:sldId xmlns:r="http://schemas.openxmlformats.org/officeDocument/2006/relationships" id="257" r:id="R131cabca8a824ccc"/>
-    <p:sldId xmlns:r="http://schemas.openxmlformats.org/officeDocument/2006/relationships" id="258" r:id="R61cd083110794d37"/>
-    <p:sldId xmlns:r="http://schemas.openxmlformats.org/officeDocument/2006/relationships" id="259" r:id="R65ec918b927f4e45"/>
-    <p:sldId xmlns:r="http://schemas.openxmlformats.org/officeDocument/2006/relationships" id="260" r:id="Rbb22814aa1dd4ef8"/>
-    <p:sldId xmlns:r="http://schemas.openxmlformats.org/officeDocument/2006/relationships" id="261" r:id="Rdc24087fb81448e0"/>
-    <p:sldId xmlns:r="http://schemas.openxmlformats.org/officeDocument/2006/relationships" id="262" r:id="R16ab52cda82247ed"/>
-    <p:sldId xmlns:r="http://schemas.openxmlformats.org/officeDocument/2006/relationships" id="263" r:id="Rb7684d2334d545e9"/>
-    <p:sldId xmlns:r="http://schemas.openxmlformats.org/officeDocument/2006/relationships" id="264" r:id="R08d62acf08c440d7"/>
-    <p:sldId xmlns:r="http://schemas.openxmlformats.org/officeDocument/2006/relationships" id="265" r:id="R1934462de58b41d7"/>
-    <p:sldId xmlns:r="http://schemas.openxmlformats.org/officeDocument/2006/relationships" id="266" r:id="Rd1d66fa2ab8b443b"/>
-    <p:sldId xmlns:r="http://schemas.openxmlformats.org/officeDocument/2006/relationships" id="267" r:id="R142f25d719734c58"/>
+    <p:sldId xmlns:r="http://schemas.openxmlformats.org/officeDocument/2006/relationships" id="256" r:id="R4d8bfd827231428d"/>
+    <p:sldId xmlns:r="http://schemas.openxmlformats.org/officeDocument/2006/relationships" id="257" r:id="R1ad65ab75c024eda"/>
+    <p:sldId xmlns:r="http://schemas.openxmlformats.org/officeDocument/2006/relationships" id="258" r:id="R72d5cbbfafbc420e"/>
+    <p:sldId xmlns:r="http://schemas.openxmlformats.org/officeDocument/2006/relationships" id="259" r:id="R8b103e558aaf4941"/>
+    <p:sldId xmlns:r="http://schemas.openxmlformats.org/officeDocument/2006/relationships" id="260" r:id="R2c31025a64cc40fe"/>
+    <p:sldId xmlns:r="http://schemas.openxmlformats.org/officeDocument/2006/relationships" id="261" r:id="R1b661c13074746d0"/>
+    <p:sldId xmlns:r="http://schemas.openxmlformats.org/officeDocument/2006/relationships" id="262" r:id="Ra001bf336db64287"/>
+    <p:sldId xmlns:r="http://schemas.openxmlformats.org/officeDocument/2006/relationships" id="263" r:id="Rbccddd095b6d4ca7"/>
+    <p:sldId xmlns:r="http://schemas.openxmlformats.org/officeDocument/2006/relationships" id="264" r:id="R2a87071d618a41b2"/>
+    <p:sldId xmlns:r="http://schemas.openxmlformats.org/officeDocument/2006/relationships" id="265" r:id="R3113e297d70d4c32"/>
+    <p:sldId xmlns:r="http://schemas.openxmlformats.org/officeDocument/2006/relationships" id="266" r:id="R4b777c2bc486434d"/>
+    <p:sldId xmlns:r="http://schemas.openxmlformats.org/officeDocument/2006/relationships" id="267" r:id="Rd041eadbec0c4e4e"/>
   </p:sldIdLst>
   <p:sldSz cx="7562850" cy="10696575"/>
   <p:notesSz cx="6858000" cy="9144000"/>
@@ -1406,7 +1406,7 @@
   </p:cSld>
   <p:clrMap bg1="lt1" tx1="dk1" bg2="lt2" tx2="dk2" accent1="accent1" accent2="accent2" accent3="accent3" accent4="accent4" accent5="accent5" accent6="accent6" hlink="hlink" folHlink="folHlink"/>
   <p:sldLayoutIdLst>
-    <p:sldLayoutId xmlns:r="http://schemas.openxmlformats.org/officeDocument/2006/relationships" id="2147483649" r:id="R91096985357b40cc"/>
+    <p:sldLayoutId xmlns:r="http://schemas.openxmlformats.org/officeDocument/2006/relationships" id="2147483649" r:id="R0bbb3ded0301492c"/>
   </p:sldLayoutIdLst>
   <p:txStyles>
     <p:titleStyle>
@@ -1954,10 +1954,10 @@
       </p:grpSpPr>
       <p:sp>
         <p:nvSpPr>
-          <p:cNvPr id="9" name="cover-accent">
-            <a:extLst xmlns:a="http://schemas.openxmlformats.org/drawingml/2006/main">
-              <a:ext uri="{FF2B5EF4-FFF2-40B4-BE49-F238E27FC236}">
-                <a16:creationId xmlns:a16="http://schemas.microsoft.com/office/drawing/2014/main" id="{605AD8F1-A673-415D-9573-CCD0247210F7}"/>
+          <p:cNvPr id="8" name="cover-accent">
+            <a:extLst xmlns:a="http://schemas.openxmlformats.org/drawingml/2006/main">
+              <a:ext uri="{FF2B5EF4-FFF2-40B4-BE49-F238E27FC236}">
+                <a16:creationId xmlns:a16="http://schemas.microsoft.com/office/drawing/2014/main" id="{4724B758-BB45-45C9-8A1F-6FFDCBFF806A}"/>
               </a:ext>
             </a:extLst>
           </p:cNvPr>
@@ -1988,7 +1988,7 @@
           <p:cNvPr id="2" name="cover-kicker">
             <a:extLst xmlns:a="http://schemas.openxmlformats.org/drawingml/2006/main">
               <a:ext uri="{FF2B5EF4-FFF2-40B4-BE49-F238E27FC236}">
-                <a16:creationId xmlns:a16="http://schemas.microsoft.com/office/drawing/2014/main" id="{E4E61D72-8AC1-4012-A146-6ADAAD4735B8}"/>
+                <a16:creationId xmlns:a16="http://schemas.microsoft.com/office/drawing/2014/main" id="{D5EFF48B-8441-4F56-B753-9645F2F3FE3B}"/>
               </a:ext>
             </a:extLst>
           </p:cNvPr>
@@ -2050,7 +2050,7 @@
           <p:cNvPr id="3" name="cover-title">
             <a:extLst xmlns:a="http://schemas.openxmlformats.org/drawingml/2006/main">
               <a:ext uri="{FF2B5EF4-FFF2-40B4-BE49-F238E27FC236}">
-                <a16:creationId xmlns:a16="http://schemas.microsoft.com/office/drawing/2014/main" id="{43ED7C57-2631-4033-B422-E3D8C93A730A}"/>
+                <a16:creationId xmlns:a16="http://schemas.microsoft.com/office/drawing/2014/main" id="{1ABB6B82-FD73-4ED2-A431-9AD46232B89D}"/>
               </a:ext>
             </a:extLst>
           </p:cNvPr>
@@ -2112,7 +2112,7 @@
           <p:cNvPr id="4" name="cover-rule">
             <a:extLst xmlns:a="http://schemas.openxmlformats.org/drawingml/2006/main">
               <a:ext uri="{FF2B5EF4-FFF2-40B4-BE49-F238E27FC236}">
-                <a16:creationId xmlns:a16="http://schemas.microsoft.com/office/drawing/2014/main" id="{B6A9B6FE-EE2E-4460-99A7-C0FAD5D49F1D}"/>
+                <a16:creationId xmlns:a16="http://schemas.microsoft.com/office/drawing/2014/main" id="{0AFE86AA-20E1-4E84-8BBC-C13E7AD8ED23}"/>
               </a:ext>
             </a:extLst>
           </p:cNvPr>
@@ -2138,83 +2138,21 @@
           </a:ln>
         </p:spPr>
       </p:sp>
-      <p:sp>
-        <p:nvSpPr>
-          <p:cNvPr id="5" name="cover-description">
-            <a:extLst xmlns:a="http://schemas.openxmlformats.org/drawingml/2006/main">
-              <a:ext uri="{FF2B5EF4-FFF2-40B4-BE49-F238E27FC236}">
-                <a16:creationId xmlns:a16="http://schemas.microsoft.com/office/drawing/2014/main" id="{4CAF1B77-CA17-4F1F-A48E-8A82ADB3CDAC}"/>
-              </a:ext>
-            </a:extLst>
-          </p:cNvPr>
-          <p:cNvSpPr>
-            <a:spLocks xmlns:a="http://schemas.openxmlformats.org/drawingml/2006/main" noGrp="1"/>
-          </p:cNvSpPr>
-          <p:nvPr/>
-        </p:nvSpPr>
-        <p:spPr>
-          <a:xfrm xmlns:a="http://schemas.openxmlformats.org/drawingml/2006/main">
-            <a:off x="742950" y="4552950"/>
-            <a:ext cx="3238500" cy="1524000"/>
-          </a:xfrm>
-          <a:prstGeom xmlns:a="http://schemas.openxmlformats.org/drawingml/2006/main" prst="rect">
-            <a:avLst/>
-          </a:prstGeom>
-          <a:noFill xmlns:a="http://schemas.openxmlformats.org/drawingml/2006/main"/>
-          <a:ln xmlns:a="http://schemas.openxmlformats.org/drawingml/2006/main" w="0">
-            <a:noFill/>
-            <a:prstDash val="solid"/>
-          </a:ln>
-        </p:spPr>
-        <p:txBody>
-          <a:bodyPr xmlns:a="http://schemas.openxmlformats.org/drawingml/2006/main" lIns="0" tIns="0" rIns="0" bIns="0" anchor="t">
-            <a:normAutofit fontScale="100000"/>
-          </a:bodyPr>
-          <a:lstStyle xmlns:a="http://schemas.openxmlformats.org/drawingml/2006/main"/>
-          <a:p xmlns:a="http://schemas.openxmlformats.org/drawingml/2006/main">
-            <a:pPr algn="l">
-              <a:lnSpc>
-                <a:spcPct val="125000"/>
-              </a:lnSpc>
-              <a:buNone/>
-              <a:defRPr sz="1650" b="0">
-                <a:solidFill>
-                  <a:srgbClr val="607477"/>
-                </a:solidFill>
-                <a:latin typeface="NanumGothic"/>
-                <a:ea typeface="NanumGothic"/>
-                <a:cs typeface="NanumGothic"/>
-              </a:defRPr>
-            </a:pPr>
-            <a:r>
-              <a:rPr sz="1650" b="0">
-                <a:solidFill>
-                  <a:srgbClr val="607477"/>
-                </a:solidFill>
-                <a:latin typeface="NanumGothic"/>
-                <a:ea typeface="NanumGothic"/>
-                <a:cs typeface="NanumGothic"/>
-              </a:rPr>
-              <a:t>속성을 옮기고, 실패까지 다음 해법으로 바꾸는 물리 퍼즐</a:t>
-            </a:r>
-          </a:p>
-        </p:txBody>
-      </p:sp>
       <p:pic>
         <p:nvPicPr>
-          <p:cNvPr id="14" name=""/>
+          <p:cNvPr id="12" name=""/>
           <p:cNvPicPr>
             <a:picLocks xmlns:a="http://schemas.openxmlformats.org/drawingml/2006/main" noChangeAspect="1"/>
           </p:cNvPicPr>
           <p:nvPr/>
         </p:nvPicPr>
         <p:blipFill>
-          <a:blip xmlns:r="http://schemas.openxmlformats.org/officeDocument/2006/relationships" xmlns:a="http://schemas.openxmlformats.org/drawingml/2006/main" r:embed="R06a9491bbc6e4312"/>
+          <a:blip xmlns:r="http://schemas.openxmlformats.org/officeDocument/2006/relationships" xmlns:a="http://schemas.openxmlformats.org/drawingml/2006/main" r:embed="R0bb0dafe3b774694"/>
           <a:stretch xmlns:a="http://schemas.openxmlformats.org/drawingml/2006/main"/>
         </p:blipFill>
         <p:spPr>
           <a:xfrm xmlns:a="http://schemas.openxmlformats.org/drawingml/2006/main">
-            <a:off x="4845900" y="4457700"/>
+            <a:off x="3055200" y="4457700"/>
             <a:ext cx="1452450" cy="3143250"/>
           </a:xfrm>
           <a:prstGeom xmlns:a="http://schemas.openxmlformats.org/drawingml/2006/main" prst="roundRect">
@@ -2226,10 +2164,10 @@
       </p:pic>
       <p:sp>
         <p:nvSpPr>
-          <p:cNvPr id="7" name="cover-meta">
-            <a:extLst xmlns:a="http://schemas.openxmlformats.org/drawingml/2006/main">
-              <a:ext uri="{FF2B5EF4-FFF2-40B4-BE49-F238E27FC236}">
-                <a16:creationId xmlns:a16="http://schemas.microsoft.com/office/drawing/2014/main" id="{292EE0A4-8833-43D8-8094-E8AB0C1EAC0C}"/>
+          <p:cNvPr id="6" name="cover-meta">
+            <a:extLst xmlns:a="http://schemas.openxmlformats.org/drawingml/2006/main">
+              <a:ext uri="{FF2B5EF4-FFF2-40B4-BE49-F238E27FC236}">
+                <a16:creationId xmlns:a16="http://schemas.microsoft.com/office/drawing/2014/main" id="{AE943181-3CD1-4974-8DCD-A59DE784D31C}"/>
               </a:ext>
             </a:extLst>
           </p:cNvPr>
@@ -2315,10 +2253,10 @@
       </p:sp>
       <p:sp>
         <p:nvSpPr>
-          <p:cNvPr id="8" name="cover-page">
-            <a:extLst xmlns:a="http://schemas.openxmlformats.org/drawingml/2006/main">
-              <a:ext uri="{FF2B5EF4-FFF2-40B4-BE49-F238E27FC236}">
-                <a16:creationId xmlns:a16="http://schemas.microsoft.com/office/drawing/2014/main" id="{FCE6C4F5-CEDC-40A9-B433-E87532787AFD}"/>
+          <p:cNvPr id="7" name="cover-page">
+            <a:extLst xmlns:a="http://schemas.openxmlformats.org/drawingml/2006/main">
+              <a:ext uri="{FF2B5EF4-FFF2-40B4-BE49-F238E27FC236}">
+                <a16:creationId xmlns:a16="http://schemas.microsoft.com/office/drawing/2014/main" id="{B6481D57-8A79-43A8-816D-F06E5DCEFEEC}"/>
               </a:ext>
             </a:extLst>
           </p:cNvPr>
@@ -2378,7 +2316,7 @@
     </p:spTree>
     <p:extLst>
       <p:ext uri="{BB962C8B-B14F-4D97-AF65-F5344CB8AC3E}">
-        <p14:creationId xmlns:p14="http://schemas.microsoft.com/office/powerpoint/2010/main" val="1767605553"/>
+        <p14:creationId xmlns:p14="http://schemas.microsoft.com/office/powerpoint/2010/main" val="390812442"/>
       </p:ext>
     </p:extLst>
   </p:cSld>
@@ -2409,7 +2347,7 @@
           <p:cNvPr id="10" name="running-label">
             <a:extLst xmlns:a="http://schemas.openxmlformats.org/drawingml/2006/main">
               <a:ext uri="{FF2B5EF4-FFF2-40B4-BE49-F238E27FC236}">
-                <a16:creationId xmlns:a16="http://schemas.microsoft.com/office/drawing/2014/main" id="{F51D6401-3F44-4F88-A962-489BA2267A7D}"/>
+                <a16:creationId xmlns:a16="http://schemas.microsoft.com/office/drawing/2014/main" id="{FC28CA8F-87A6-4B30-B761-9E3FBC6A1ABB}"/>
               </a:ext>
             </a:extLst>
           </p:cNvPr>
@@ -2471,7 +2409,7 @@
           <p:cNvPr id="2" name="page-number">
             <a:extLst xmlns:a="http://schemas.openxmlformats.org/drawingml/2006/main">
               <a:ext uri="{FF2B5EF4-FFF2-40B4-BE49-F238E27FC236}">
-                <a16:creationId xmlns:a16="http://schemas.microsoft.com/office/drawing/2014/main" id="{A051B96E-5F8C-47A1-A1AE-73BAE952B779}"/>
+                <a16:creationId xmlns:a16="http://schemas.microsoft.com/office/drawing/2014/main" id="{27C22B41-706B-4757-8CFE-26BF0ECDFC0B}"/>
               </a:ext>
             </a:extLst>
           </p:cNvPr>
@@ -2533,7 +2471,7 @@
           <p:cNvPr id="3" name="header-rule">
             <a:extLst xmlns:a="http://schemas.openxmlformats.org/drawingml/2006/main">
               <a:ext uri="{FF2B5EF4-FFF2-40B4-BE49-F238E27FC236}">
-                <a16:creationId xmlns:a16="http://schemas.microsoft.com/office/drawing/2014/main" id="{4355B4C0-22BA-4176-B5A1-A436944613E9}"/>
+                <a16:creationId xmlns:a16="http://schemas.microsoft.com/office/drawing/2014/main" id="{C88C919A-1B6F-42E9-9519-F0CC1F4BDD13}"/>
               </a:ext>
             </a:extLst>
           </p:cNvPr>
@@ -2564,7 +2502,7 @@
           <p:cNvPr id="4" name="slide-title">
             <a:extLst xmlns:a="http://schemas.openxmlformats.org/drawingml/2006/main">
               <a:ext uri="{FF2B5EF4-FFF2-40B4-BE49-F238E27FC236}">
-                <a16:creationId xmlns:a16="http://schemas.microsoft.com/office/drawing/2014/main" id="{7DF23D58-A6B4-489E-808D-BD22188C2972}"/>
+                <a16:creationId xmlns:a16="http://schemas.microsoft.com/office/drawing/2014/main" id="{B1FF041B-677D-427E-A717-EEDD7A8E8E89}"/>
               </a:ext>
             </a:extLst>
           </p:cNvPr>
@@ -2626,7 +2564,7 @@
           <p:cNvPr id="5" name="subheading-140">
             <a:extLst xmlns:a="http://schemas.openxmlformats.org/drawingml/2006/main">
               <a:ext uri="{FF2B5EF4-FFF2-40B4-BE49-F238E27FC236}">
-                <a16:creationId xmlns:a16="http://schemas.microsoft.com/office/drawing/2014/main" id="{0310B234-5B14-4D4F-B372-E62D7C5F7B24}"/>
+                <a16:creationId xmlns:a16="http://schemas.microsoft.com/office/drawing/2014/main" id="{DBFA952F-4F52-4681-AC4D-278857C4363C}"/>
               </a:ext>
             </a:extLst>
           </p:cNvPr>
@@ -2688,7 +2626,7 @@
           <p:cNvPr id="6" name="paragraph-194">
             <a:extLst xmlns:a="http://schemas.openxmlformats.org/drawingml/2006/main">
               <a:ext uri="{FF2B5EF4-FFF2-40B4-BE49-F238E27FC236}">
-                <a16:creationId xmlns:a16="http://schemas.microsoft.com/office/drawing/2014/main" id="{8B30C84D-D6FF-4B90-9F62-6ACEAE9AA9BC}"/>
+                <a16:creationId xmlns:a16="http://schemas.microsoft.com/office/drawing/2014/main" id="{C0259B48-F08C-4C44-8B28-88BBB52F7679}"/>
               </a:ext>
             </a:extLst>
           </p:cNvPr>
@@ -2750,7 +2688,7 @@
           <p:cNvPr id="7" name="subheading-290.96000000000004">
             <a:extLst xmlns:a="http://schemas.openxmlformats.org/drawingml/2006/main">
               <a:ext uri="{FF2B5EF4-FFF2-40B4-BE49-F238E27FC236}">
-                <a16:creationId xmlns:a16="http://schemas.microsoft.com/office/drawing/2014/main" id="{5AFF2B7B-AD6F-4E10-A75E-7BAA4140A9FC}"/>
+                <a16:creationId xmlns:a16="http://schemas.microsoft.com/office/drawing/2014/main" id="{7A2D29C2-B902-47E4-A152-73156F2350FF}"/>
               </a:ext>
             </a:extLst>
           </p:cNvPr>
@@ -2812,7 +2750,7 @@
           <p:cNvPr id="8" name="paragraph-344.96000000000004">
             <a:extLst xmlns:a="http://schemas.openxmlformats.org/drawingml/2006/main">
               <a:ext uri="{FF2B5EF4-FFF2-40B4-BE49-F238E27FC236}">
-                <a16:creationId xmlns:a16="http://schemas.microsoft.com/office/drawing/2014/main" id="{6FB86190-89CA-4E27-9BE4-1509A1B751AF}"/>
+                <a16:creationId xmlns:a16="http://schemas.microsoft.com/office/drawing/2014/main" id="{2CED0051-94B5-455F-BCFF-EBD3A6994F93}"/>
               </a:ext>
             </a:extLst>
           </p:cNvPr>
@@ -2874,7 +2812,7 @@
           <p:cNvPr id="9" name="paragraph-466.24">
             <a:extLst xmlns:a="http://schemas.openxmlformats.org/drawingml/2006/main">
               <a:ext uri="{FF2B5EF4-FFF2-40B4-BE49-F238E27FC236}">
-                <a16:creationId xmlns:a16="http://schemas.microsoft.com/office/drawing/2014/main" id="{36BA369B-9D8A-4FE2-8C05-5CFF72F02FE7}"/>
+                <a16:creationId xmlns:a16="http://schemas.microsoft.com/office/drawing/2014/main" id="{F2E97EE7-B636-4167-B8AA-B86AEFDA2E4B}"/>
               </a:ext>
             </a:extLst>
           </p:cNvPr>
@@ -2934,7 +2872,7 @@
     </p:spTree>
     <p:extLst>
       <p:ext uri="{BB962C8B-B14F-4D97-AF65-F5344CB8AC3E}">
-        <p14:creationId xmlns:p14="http://schemas.microsoft.com/office/powerpoint/2010/main" val="2070522580"/>
+        <p14:creationId xmlns:p14="http://schemas.microsoft.com/office/powerpoint/2010/main" val="975631698"/>
       </p:ext>
     </p:extLst>
   </p:cSld>
@@ -2965,7 +2903,7 @@
           <p:cNvPr id="10" name="running-label">
             <a:extLst xmlns:a="http://schemas.openxmlformats.org/drawingml/2006/main">
               <a:ext uri="{FF2B5EF4-FFF2-40B4-BE49-F238E27FC236}">
-                <a16:creationId xmlns:a16="http://schemas.microsoft.com/office/drawing/2014/main" id="{83F46B81-D785-485A-B2D2-FC37EAEDFBF4}"/>
+                <a16:creationId xmlns:a16="http://schemas.microsoft.com/office/drawing/2014/main" id="{8B4D891A-FD96-43F1-9266-984F51D48813}"/>
               </a:ext>
             </a:extLst>
           </p:cNvPr>
@@ -3027,7 +2965,7 @@
           <p:cNvPr id="2" name="page-number">
             <a:extLst xmlns:a="http://schemas.openxmlformats.org/drawingml/2006/main">
               <a:ext uri="{FF2B5EF4-FFF2-40B4-BE49-F238E27FC236}">
-                <a16:creationId xmlns:a16="http://schemas.microsoft.com/office/drawing/2014/main" id="{265BA90F-EFEE-44C3-A782-B3A90047C7E2}"/>
+                <a16:creationId xmlns:a16="http://schemas.microsoft.com/office/drawing/2014/main" id="{15F6E0DA-F2DF-447B-8745-168E33847DAC}"/>
               </a:ext>
             </a:extLst>
           </p:cNvPr>
@@ -3089,7 +3027,7 @@
           <p:cNvPr id="3" name="header-rule">
             <a:extLst xmlns:a="http://schemas.openxmlformats.org/drawingml/2006/main">
               <a:ext uri="{FF2B5EF4-FFF2-40B4-BE49-F238E27FC236}">
-                <a16:creationId xmlns:a16="http://schemas.microsoft.com/office/drawing/2014/main" id="{BB4BB484-848B-49A8-A9FC-7177DFC26B5E}"/>
+                <a16:creationId xmlns:a16="http://schemas.microsoft.com/office/drawing/2014/main" id="{EB919228-E080-4D78-8060-2A411763F88E}"/>
               </a:ext>
             </a:extLst>
           </p:cNvPr>
@@ -3120,7 +3058,7 @@
           <p:cNvPr id="4" name="slide-title">
             <a:extLst xmlns:a="http://schemas.openxmlformats.org/drawingml/2006/main">
               <a:ext uri="{FF2B5EF4-FFF2-40B4-BE49-F238E27FC236}">
-                <a16:creationId xmlns:a16="http://schemas.microsoft.com/office/drawing/2014/main" id="{CBA1B363-57EB-496B-910B-169913A9E773}"/>
+                <a16:creationId xmlns:a16="http://schemas.microsoft.com/office/drawing/2014/main" id="{9886ADD6-C9EA-4A84-BAE6-ACB5C9C02943}"/>
               </a:ext>
             </a:extLst>
           </p:cNvPr>
@@ -3182,7 +3120,7 @@
           <p:cNvPr id="5" name="subheading-140">
             <a:extLst xmlns:a="http://schemas.openxmlformats.org/drawingml/2006/main">
               <a:ext uri="{FF2B5EF4-FFF2-40B4-BE49-F238E27FC236}">
-                <a16:creationId xmlns:a16="http://schemas.microsoft.com/office/drawing/2014/main" id="{42828070-7FD3-4146-9AD4-DB56AB74C20A}"/>
+                <a16:creationId xmlns:a16="http://schemas.microsoft.com/office/drawing/2014/main" id="{1F38039D-1F35-4B6E-9FA0-6FE048691D33}"/>
               </a:ext>
             </a:extLst>
           </p:cNvPr>
@@ -3244,7 +3182,7 @@
           <p:cNvPr id="6" name="paragraph-194">
             <a:extLst xmlns:a="http://schemas.openxmlformats.org/drawingml/2006/main">
               <a:ext uri="{FF2B5EF4-FFF2-40B4-BE49-F238E27FC236}">
-                <a16:creationId xmlns:a16="http://schemas.microsoft.com/office/drawing/2014/main" id="{E29CF93B-C7BC-4094-B48B-F629FB824197}"/>
+                <a16:creationId xmlns:a16="http://schemas.microsoft.com/office/drawing/2014/main" id="{A0A0A4C5-4F4A-42B2-ADB5-A54B589A9B11}"/>
               </a:ext>
             </a:extLst>
           </p:cNvPr>
@@ -3306,7 +3244,7 @@
           <p:cNvPr id="7" name="paragraph-242.32">
             <a:extLst xmlns:a="http://schemas.openxmlformats.org/drawingml/2006/main">
               <a:ext uri="{FF2B5EF4-FFF2-40B4-BE49-F238E27FC236}">
-                <a16:creationId xmlns:a16="http://schemas.microsoft.com/office/drawing/2014/main" id="{4C5407EC-2576-4A34-84B1-F5BD3A41AFAA}"/>
+                <a16:creationId xmlns:a16="http://schemas.microsoft.com/office/drawing/2014/main" id="{0D44D0BD-BA4F-4E8C-84B6-96810C20AA42}"/>
               </a:ext>
             </a:extLst>
           </p:cNvPr>
@@ -3368,7 +3306,7 @@
           <p:cNvPr id="8" name="subheading-314.96">
             <a:extLst xmlns:a="http://schemas.openxmlformats.org/drawingml/2006/main">
               <a:ext uri="{FF2B5EF4-FFF2-40B4-BE49-F238E27FC236}">
-                <a16:creationId xmlns:a16="http://schemas.microsoft.com/office/drawing/2014/main" id="{33E67405-5C2A-4220-B7B7-B79E910757A4}"/>
+                <a16:creationId xmlns:a16="http://schemas.microsoft.com/office/drawing/2014/main" id="{C9246495-CE8D-4B55-85B6-AE1500504DAA}"/>
               </a:ext>
             </a:extLst>
           </p:cNvPr>
@@ -3430,7 +3368,7 @@
           <p:cNvPr id="9" name="paragraph-368.96">
             <a:extLst xmlns:a="http://schemas.openxmlformats.org/drawingml/2006/main">
               <a:ext uri="{FF2B5EF4-FFF2-40B4-BE49-F238E27FC236}">
-                <a16:creationId xmlns:a16="http://schemas.microsoft.com/office/drawing/2014/main" id="{563CD26D-98F0-4807-ACCB-95B543789D11}"/>
+                <a16:creationId xmlns:a16="http://schemas.microsoft.com/office/drawing/2014/main" id="{9CC45E7D-5977-40CC-A56B-E7CB14D364C1}"/>
               </a:ext>
             </a:extLst>
           </p:cNvPr>
@@ -3490,7 +3428,7 @@
     </p:spTree>
     <p:extLst>
       <p:ext uri="{BB962C8B-B14F-4D97-AF65-F5344CB8AC3E}">
-        <p14:creationId xmlns:p14="http://schemas.microsoft.com/office/powerpoint/2010/main" val="81872620"/>
+        <p14:creationId xmlns:p14="http://schemas.microsoft.com/office/powerpoint/2010/main" val="1036388248"/>
       </p:ext>
     </p:extLst>
   </p:cSld>
@@ -3521,7 +3459,7 @@
           <p:cNvPr id="25" name="running-label">
             <a:extLst xmlns:a="http://schemas.openxmlformats.org/drawingml/2006/main">
               <a:ext uri="{FF2B5EF4-FFF2-40B4-BE49-F238E27FC236}">
-                <a16:creationId xmlns:a16="http://schemas.microsoft.com/office/drawing/2014/main" id="{4646ED87-512D-4CE4-8458-77F852ACFB0D}"/>
+                <a16:creationId xmlns:a16="http://schemas.microsoft.com/office/drawing/2014/main" id="{37E3CEEC-8D8B-4F9D-8824-FFC5ED274EA6}"/>
               </a:ext>
             </a:extLst>
           </p:cNvPr>
@@ -3583,7 +3521,7 @@
           <p:cNvPr id="2" name="page-number">
             <a:extLst xmlns:a="http://schemas.openxmlformats.org/drawingml/2006/main">
               <a:ext uri="{FF2B5EF4-FFF2-40B4-BE49-F238E27FC236}">
-                <a16:creationId xmlns:a16="http://schemas.microsoft.com/office/drawing/2014/main" id="{BEC3CAB9-77ED-4FE8-B393-84285B69496E}"/>
+                <a16:creationId xmlns:a16="http://schemas.microsoft.com/office/drawing/2014/main" id="{6B0D723F-5B92-4483-B527-96872A125149}"/>
               </a:ext>
             </a:extLst>
           </p:cNvPr>
@@ -3645,7 +3583,7 @@
           <p:cNvPr id="3" name="header-rule">
             <a:extLst xmlns:a="http://schemas.openxmlformats.org/drawingml/2006/main">
               <a:ext uri="{FF2B5EF4-FFF2-40B4-BE49-F238E27FC236}">
-                <a16:creationId xmlns:a16="http://schemas.microsoft.com/office/drawing/2014/main" id="{D591CA33-7001-4C54-A850-9307A1F9F874}"/>
+                <a16:creationId xmlns:a16="http://schemas.microsoft.com/office/drawing/2014/main" id="{4B8BC1BC-D449-4AFB-930D-42DC1C8F7400}"/>
               </a:ext>
             </a:extLst>
           </p:cNvPr>
@@ -3676,7 +3614,7 @@
           <p:cNvPr id="4" name="slide-title">
             <a:extLst xmlns:a="http://schemas.openxmlformats.org/drawingml/2006/main">
               <a:ext uri="{FF2B5EF4-FFF2-40B4-BE49-F238E27FC236}">
-                <a16:creationId xmlns:a16="http://schemas.microsoft.com/office/drawing/2014/main" id="{46D60796-3E8E-4387-BE74-4803D0971158}"/>
+                <a16:creationId xmlns:a16="http://schemas.microsoft.com/office/drawing/2014/main" id="{301D6976-59D2-4F85-9AAA-CEE18EB22297}"/>
               </a:ext>
             </a:extLst>
           </p:cNvPr>
@@ -3738,7 +3676,7 @@
           <p:cNvPr id="5" name="table-cell-140-0-0">
             <a:extLst xmlns:a="http://schemas.openxmlformats.org/drawingml/2006/main">
               <a:ext uri="{FF2B5EF4-FFF2-40B4-BE49-F238E27FC236}">
-                <a16:creationId xmlns:a16="http://schemas.microsoft.com/office/drawing/2014/main" id="{90C80871-B940-44EF-8179-7A88493F0FA0}"/>
+                <a16:creationId xmlns:a16="http://schemas.microsoft.com/office/drawing/2014/main" id="{2D816BF0-57BE-4A77-84E2-7C84A84D608C}"/>
               </a:ext>
             </a:extLst>
           </p:cNvPr>
@@ -3771,7 +3709,7 @@
           <p:cNvPr id="6" name="table-text-140-0-0">
             <a:extLst xmlns:a="http://schemas.openxmlformats.org/drawingml/2006/main">
               <a:ext uri="{FF2B5EF4-FFF2-40B4-BE49-F238E27FC236}">
-                <a16:creationId xmlns:a16="http://schemas.microsoft.com/office/drawing/2014/main" id="{EE6FCFF6-5F47-4C23-B810-BA296E5EAFA0}"/>
+                <a16:creationId xmlns:a16="http://schemas.microsoft.com/office/drawing/2014/main" id="{5BA2D542-553B-43AF-B24B-1B6208F182D1}"/>
               </a:ext>
             </a:extLst>
           </p:cNvPr>
@@ -3833,7 +3771,7 @@
           <p:cNvPr id="7" name="table-cell-140-0-1">
             <a:extLst xmlns:a="http://schemas.openxmlformats.org/drawingml/2006/main">
               <a:ext uri="{FF2B5EF4-FFF2-40B4-BE49-F238E27FC236}">
-                <a16:creationId xmlns:a16="http://schemas.microsoft.com/office/drawing/2014/main" id="{3452E89C-8370-41F1-9B01-F19C4BC5B2DA}"/>
+                <a16:creationId xmlns:a16="http://schemas.microsoft.com/office/drawing/2014/main" id="{03632134-A7DA-4496-AF57-8410BC22B8A2}"/>
               </a:ext>
             </a:extLst>
           </p:cNvPr>
@@ -3866,7 +3804,7 @@
           <p:cNvPr id="8" name="table-text-140-0-1">
             <a:extLst xmlns:a="http://schemas.openxmlformats.org/drawingml/2006/main">
               <a:ext uri="{FF2B5EF4-FFF2-40B4-BE49-F238E27FC236}">
-                <a16:creationId xmlns:a16="http://schemas.microsoft.com/office/drawing/2014/main" id="{DA6F370C-409D-4478-83C8-7882DC9D0527}"/>
+                <a16:creationId xmlns:a16="http://schemas.microsoft.com/office/drawing/2014/main" id="{40D390D0-1A7D-4125-AC08-DC69D6FE870C}"/>
               </a:ext>
             </a:extLst>
           </p:cNvPr>
@@ -3928,7 +3866,7 @@
           <p:cNvPr id="9" name="table-cell-140-1-0">
             <a:extLst xmlns:a="http://schemas.openxmlformats.org/drawingml/2006/main">
               <a:ext uri="{FF2B5EF4-FFF2-40B4-BE49-F238E27FC236}">
-                <a16:creationId xmlns:a16="http://schemas.microsoft.com/office/drawing/2014/main" id="{BF07576B-3337-4096-9366-398A0FF4C692}"/>
+                <a16:creationId xmlns:a16="http://schemas.microsoft.com/office/drawing/2014/main" id="{2796BBA7-C767-4C5A-9521-180BDFDD5406}"/>
               </a:ext>
             </a:extLst>
           </p:cNvPr>
@@ -3961,7 +3899,7 @@
           <p:cNvPr id="10" name="table-text-140-1-0">
             <a:extLst xmlns:a="http://schemas.openxmlformats.org/drawingml/2006/main">
               <a:ext uri="{FF2B5EF4-FFF2-40B4-BE49-F238E27FC236}">
-                <a16:creationId xmlns:a16="http://schemas.microsoft.com/office/drawing/2014/main" id="{3968CBC1-1F1A-42A6-ACFE-E205EB144B2B}"/>
+                <a16:creationId xmlns:a16="http://schemas.microsoft.com/office/drawing/2014/main" id="{BE67A96A-3766-4C00-93BE-22E8367E4BA1}"/>
               </a:ext>
             </a:extLst>
           </p:cNvPr>
@@ -4023,7 +3961,7 @@
           <p:cNvPr id="11" name="table-cell-140-1-1">
             <a:extLst xmlns:a="http://schemas.openxmlformats.org/drawingml/2006/main">
               <a:ext uri="{FF2B5EF4-FFF2-40B4-BE49-F238E27FC236}">
-                <a16:creationId xmlns:a16="http://schemas.microsoft.com/office/drawing/2014/main" id="{3345CEBC-9529-493A-A46F-7EAB01EBD69B}"/>
+                <a16:creationId xmlns:a16="http://schemas.microsoft.com/office/drawing/2014/main" id="{117EEEDB-2E41-4980-92F3-AC95335EB87A}"/>
               </a:ext>
             </a:extLst>
           </p:cNvPr>
@@ -4056,7 +3994,7 @@
           <p:cNvPr id="12" name="table-text-140-1-1">
             <a:extLst xmlns:a="http://schemas.openxmlformats.org/drawingml/2006/main">
               <a:ext uri="{FF2B5EF4-FFF2-40B4-BE49-F238E27FC236}">
-                <a16:creationId xmlns:a16="http://schemas.microsoft.com/office/drawing/2014/main" id="{49D759A2-6388-426D-B866-6EFE21552D93}"/>
+                <a16:creationId xmlns:a16="http://schemas.microsoft.com/office/drawing/2014/main" id="{FCEF644A-565A-42BD-B678-E0D3F57CE53A}"/>
               </a:ext>
             </a:extLst>
           </p:cNvPr>
@@ -4118,7 +4056,7 @@
           <p:cNvPr id="13" name="table-cell-140-2-0">
             <a:extLst xmlns:a="http://schemas.openxmlformats.org/drawingml/2006/main">
               <a:ext uri="{FF2B5EF4-FFF2-40B4-BE49-F238E27FC236}">
-                <a16:creationId xmlns:a16="http://schemas.microsoft.com/office/drawing/2014/main" id="{0F66796C-57B5-4EA3-945A-3758EA2FF1AB}"/>
+                <a16:creationId xmlns:a16="http://schemas.microsoft.com/office/drawing/2014/main" id="{DD31D35B-8F6F-4B24-9944-CFDBCC30AAB9}"/>
               </a:ext>
             </a:extLst>
           </p:cNvPr>
@@ -4151,7 +4089,7 @@
           <p:cNvPr id="14" name="table-text-140-2-0">
             <a:extLst xmlns:a="http://schemas.openxmlformats.org/drawingml/2006/main">
               <a:ext uri="{FF2B5EF4-FFF2-40B4-BE49-F238E27FC236}">
-                <a16:creationId xmlns:a16="http://schemas.microsoft.com/office/drawing/2014/main" id="{910E6AEE-F14B-4C8B-848D-758763CE7517}"/>
+                <a16:creationId xmlns:a16="http://schemas.microsoft.com/office/drawing/2014/main" id="{D63041F6-C0FF-4C60-AA03-B74E608088E6}"/>
               </a:ext>
             </a:extLst>
           </p:cNvPr>
@@ -4213,7 +4151,7 @@
           <p:cNvPr id="15" name="table-cell-140-2-1">
             <a:extLst xmlns:a="http://schemas.openxmlformats.org/drawingml/2006/main">
               <a:ext uri="{FF2B5EF4-FFF2-40B4-BE49-F238E27FC236}">
-                <a16:creationId xmlns:a16="http://schemas.microsoft.com/office/drawing/2014/main" id="{9F85ED77-9AA9-4281-AEBA-0A2D27A72D24}"/>
+                <a16:creationId xmlns:a16="http://schemas.microsoft.com/office/drawing/2014/main" id="{E17A2857-834D-4CDD-AE30-8D6358ACD7D6}"/>
               </a:ext>
             </a:extLst>
           </p:cNvPr>
@@ -4246,7 +4184,7 @@
           <p:cNvPr id="16" name="table-text-140-2-1">
             <a:extLst xmlns:a="http://schemas.openxmlformats.org/drawingml/2006/main">
               <a:ext uri="{FF2B5EF4-FFF2-40B4-BE49-F238E27FC236}">
-                <a16:creationId xmlns:a16="http://schemas.microsoft.com/office/drawing/2014/main" id="{64430B27-FF0A-43EA-BE62-0D61A444553E}"/>
+                <a16:creationId xmlns:a16="http://schemas.microsoft.com/office/drawing/2014/main" id="{1348001F-B2E4-48AD-8E87-933C00E481D2}"/>
               </a:ext>
             </a:extLst>
           </p:cNvPr>
@@ -4308,7 +4246,7 @@
           <p:cNvPr id="17" name="table-cell-140-3-0">
             <a:extLst xmlns:a="http://schemas.openxmlformats.org/drawingml/2006/main">
               <a:ext uri="{FF2B5EF4-FFF2-40B4-BE49-F238E27FC236}">
-                <a16:creationId xmlns:a16="http://schemas.microsoft.com/office/drawing/2014/main" id="{DD466924-6DB3-4D5A-AD2B-7ED759341671}"/>
+                <a16:creationId xmlns:a16="http://schemas.microsoft.com/office/drawing/2014/main" id="{96B35C03-B7B4-491F-A223-C52B1E714941}"/>
               </a:ext>
             </a:extLst>
           </p:cNvPr>
@@ -4341,7 +4279,7 @@
           <p:cNvPr id="18" name="table-text-140-3-0">
             <a:extLst xmlns:a="http://schemas.openxmlformats.org/drawingml/2006/main">
               <a:ext uri="{FF2B5EF4-FFF2-40B4-BE49-F238E27FC236}">
-                <a16:creationId xmlns:a16="http://schemas.microsoft.com/office/drawing/2014/main" id="{3FB74E18-7BE1-4802-9E4A-CB4E75174514}"/>
+                <a16:creationId xmlns:a16="http://schemas.microsoft.com/office/drawing/2014/main" id="{81D40971-D11C-449D-8AE5-462D49D9EDAC}"/>
               </a:ext>
             </a:extLst>
           </p:cNvPr>
@@ -4403,7 +4341,7 @@
           <p:cNvPr id="19" name="table-cell-140-3-1">
             <a:extLst xmlns:a="http://schemas.openxmlformats.org/drawingml/2006/main">
               <a:ext uri="{FF2B5EF4-FFF2-40B4-BE49-F238E27FC236}">
-                <a16:creationId xmlns:a16="http://schemas.microsoft.com/office/drawing/2014/main" id="{A441F087-279B-48FF-9244-9EE6197F8A8C}"/>
+                <a16:creationId xmlns:a16="http://schemas.microsoft.com/office/drawing/2014/main" id="{4BECD7A1-8BD5-4B46-BFBB-05ACCED83016}"/>
               </a:ext>
             </a:extLst>
           </p:cNvPr>
@@ -4436,7 +4374,7 @@
           <p:cNvPr id="20" name="table-text-140-3-1">
             <a:extLst xmlns:a="http://schemas.openxmlformats.org/drawingml/2006/main">
               <a:ext uri="{FF2B5EF4-FFF2-40B4-BE49-F238E27FC236}">
-                <a16:creationId xmlns:a16="http://schemas.microsoft.com/office/drawing/2014/main" id="{7249C5C6-E652-40AA-880C-95126C3B9087}"/>
+                <a16:creationId xmlns:a16="http://schemas.microsoft.com/office/drawing/2014/main" id="{38AC1BA7-8C92-49E0-B1AE-A50831DEF0DC}"/>
               </a:ext>
             </a:extLst>
           </p:cNvPr>
@@ -4498,7 +4436,7 @@
           <p:cNvPr id="21" name="table-cell-140-4-0">
             <a:extLst xmlns:a="http://schemas.openxmlformats.org/drawingml/2006/main">
               <a:ext uri="{FF2B5EF4-FFF2-40B4-BE49-F238E27FC236}">
-                <a16:creationId xmlns:a16="http://schemas.microsoft.com/office/drawing/2014/main" id="{B8E35C6E-B423-4721-9012-51869BB412C7}"/>
+                <a16:creationId xmlns:a16="http://schemas.microsoft.com/office/drawing/2014/main" id="{E4FEA142-B1C5-45F1-A19C-B37C4D8D2706}"/>
               </a:ext>
             </a:extLst>
           </p:cNvPr>
@@ -4531,7 +4469,7 @@
           <p:cNvPr id="22" name="table-text-140-4-0">
             <a:extLst xmlns:a="http://schemas.openxmlformats.org/drawingml/2006/main">
               <a:ext uri="{FF2B5EF4-FFF2-40B4-BE49-F238E27FC236}">
-                <a16:creationId xmlns:a16="http://schemas.microsoft.com/office/drawing/2014/main" id="{1038366D-2D22-4522-8434-E8DB319FE6AC}"/>
+                <a16:creationId xmlns:a16="http://schemas.microsoft.com/office/drawing/2014/main" id="{2FDF3A9B-4BFE-4EC4-BAC2-D534A6D7ADA8}"/>
               </a:ext>
             </a:extLst>
           </p:cNvPr>
@@ -4593,7 +4531,7 @@
           <p:cNvPr id="23" name="table-cell-140-4-1">
             <a:extLst xmlns:a="http://schemas.openxmlformats.org/drawingml/2006/main">
               <a:ext uri="{FF2B5EF4-FFF2-40B4-BE49-F238E27FC236}">
-                <a16:creationId xmlns:a16="http://schemas.microsoft.com/office/drawing/2014/main" id="{C18EFE15-1640-4DE1-ABD6-A673CB834363}"/>
+                <a16:creationId xmlns:a16="http://schemas.microsoft.com/office/drawing/2014/main" id="{0BC8CE94-5E41-41FE-AB2C-D438927B4509}"/>
               </a:ext>
             </a:extLst>
           </p:cNvPr>
@@ -4626,7 +4564,7 @@
           <p:cNvPr id="24" name="table-text-140-4-1">
             <a:extLst xmlns:a="http://schemas.openxmlformats.org/drawingml/2006/main">
               <a:ext uri="{FF2B5EF4-FFF2-40B4-BE49-F238E27FC236}">
-                <a16:creationId xmlns:a16="http://schemas.microsoft.com/office/drawing/2014/main" id="{E6973943-411A-4354-A183-365DB2B23095}"/>
+                <a16:creationId xmlns:a16="http://schemas.microsoft.com/office/drawing/2014/main" id="{03E8FB47-5B7B-4EE1-913F-CEF992C9DB5F}"/>
               </a:ext>
             </a:extLst>
           </p:cNvPr>
@@ -4686,7 +4624,7 @@
     </p:spTree>
     <p:extLst>
       <p:ext uri="{BB962C8B-B14F-4D97-AF65-F5344CB8AC3E}">
-        <p14:creationId xmlns:p14="http://schemas.microsoft.com/office/powerpoint/2010/main" val="1608344639"/>
+        <p14:creationId xmlns:p14="http://schemas.microsoft.com/office/powerpoint/2010/main" val="1172768387"/>
       </p:ext>
     </p:extLst>
   </p:cSld>
@@ -4717,7 +4655,7 @@
           <p:cNvPr id="28" name="running-label">
             <a:extLst xmlns:a="http://schemas.openxmlformats.org/drawingml/2006/main">
               <a:ext uri="{FF2B5EF4-FFF2-40B4-BE49-F238E27FC236}">
-                <a16:creationId xmlns:a16="http://schemas.microsoft.com/office/drawing/2014/main" id="{B984E977-841B-4662-9CDF-F55C68913727}"/>
+                <a16:creationId xmlns:a16="http://schemas.microsoft.com/office/drawing/2014/main" id="{6F7FE889-B874-4C45-BB8F-91C8BFCD4DC0}"/>
               </a:ext>
             </a:extLst>
           </p:cNvPr>
@@ -4779,7 +4717,7 @@
           <p:cNvPr id="2" name="page-number">
             <a:extLst xmlns:a="http://schemas.openxmlformats.org/drawingml/2006/main">
               <a:ext uri="{FF2B5EF4-FFF2-40B4-BE49-F238E27FC236}">
-                <a16:creationId xmlns:a16="http://schemas.microsoft.com/office/drawing/2014/main" id="{FABE1CD9-682A-49ED-860E-6A85EE1586AC}"/>
+                <a16:creationId xmlns:a16="http://schemas.microsoft.com/office/drawing/2014/main" id="{91B74107-C307-4457-94EF-142837D8593D}"/>
               </a:ext>
             </a:extLst>
           </p:cNvPr>
@@ -4841,7 +4779,7 @@
           <p:cNvPr id="3" name="header-rule">
             <a:extLst xmlns:a="http://schemas.openxmlformats.org/drawingml/2006/main">
               <a:ext uri="{FF2B5EF4-FFF2-40B4-BE49-F238E27FC236}">
-                <a16:creationId xmlns:a16="http://schemas.microsoft.com/office/drawing/2014/main" id="{F45C9762-1693-45EA-BAC9-6A8F40D4E298}"/>
+                <a16:creationId xmlns:a16="http://schemas.microsoft.com/office/drawing/2014/main" id="{2193F4FF-133C-4B72-ACF1-923D1143B9F4}"/>
               </a:ext>
             </a:extLst>
           </p:cNvPr>
@@ -4872,7 +4810,7 @@
           <p:cNvPr id="4" name="slide-title">
             <a:extLst xmlns:a="http://schemas.openxmlformats.org/drawingml/2006/main">
               <a:ext uri="{FF2B5EF4-FFF2-40B4-BE49-F238E27FC236}">
-                <a16:creationId xmlns:a16="http://schemas.microsoft.com/office/drawing/2014/main" id="{3F51FA50-DC1B-4B6A-8F77-CDC33329CB68}"/>
+                <a16:creationId xmlns:a16="http://schemas.microsoft.com/office/drawing/2014/main" id="{452A12B2-69A3-4FDD-9A2A-4CDC4521EB29}"/>
               </a:ext>
             </a:extLst>
           </p:cNvPr>
@@ -4934,7 +4872,7 @@
           <p:cNvPr id="5" name="paragraph-140">
             <a:extLst xmlns:a="http://schemas.openxmlformats.org/drawingml/2006/main">
               <a:ext uri="{FF2B5EF4-FFF2-40B4-BE49-F238E27FC236}">
-                <a16:creationId xmlns:a16="http://schemas.microsoft.com/office/drawing/2014/main" id="{0CEABB45-43AD-4579-A39E-DE7A819BE20E}"/>
+                <a16:creationId xmlns:a16="http://schemas.microsoft.com/office/drawing/2014/main" id="{527D3347-219E-4732-9AB3-8EEB1C719369}"/>
               </a:ext>
             </a:extLst>
           </p:cNvPr>
@@ -5000,7 +4938,7 @@
           <p:nvPr/>
         </p:nvPicPr>
         <p:blipFill>
-          <a:blip xmlns:r="http://schemas.openxmlformats.org/officeDocument/2006/relationships" xmlns:a="http://schemas.openxmlformats.org/drawingml/2006/main" r:embed="Re1fa09ebc8fa4e0d"/>
+          <a:blip xmlns:r="http://schemas.openxmlformats.org/officeDocument/2006/relationships" xmlns:a="http://schemas.openxmlformats.org/drawingml/2006/main" r:embed="Rfc258c40777f4c86"/>
           <a:stretch xmlns:a="http://schemas.openxmlformats.org/drawingml/2006/main"/>
         </p:blipFill>
         <p:spPr>
@@ -5020,7 +4958,7 @@
           <p:cNvPr id="7" name="image-caption-212.64">
             <a:extLst xmlns:a="http://schemas.openxmlformats.org/drawingml/2006/main">
               <a:ext uri="{FF2B5EF4-FFF2-40B4-BE49-F238E27FC236}">
-                <a16:creationId xmlns:a16="http://schemas.microsoft.com/office/drawing/2014/main" id="{201097C3-47F8-47EB-A171-A5682CC3CFD0}"/>
+                <a16:creationId xmlns:a16="http://schemas.microsoft.com/office/drawing/2014/main" id="{B42CD1B8-C368-4645-B48F-DD1DF36769CE}"/>
               </a:ext>
             </a:extLst>
           </p:cNvPr>
@@ -5082,7 +5020,7 @@
           <p:cNvPr id="8" name="table-cell-596.64-0-0">
             <a:extLst xmlns:a="http://schemas.openxmlformats.org/drawingml/2006/main">
               <a:ext uri="{FF2B5EF4-FFF2-40B4-BE49-F238E27FC236}">
-                <a16:creationId xmlns:a16="http://schemas.microsoft.com/office/drawing/2014/main" id="{8BFE894C-1F45-4B8A-B756-09932ECF6578}"/>
+                <a16:creationId xmlns:a16="http://schemas.microsoft.com/office/drawing/2014/main" id="{3B94C196-887B-43B3-A03C-785B6BB487E9}"/>
               </a:ext>
             </a:extLst>
           </p:cNvPr>
@@ -5115,7 +5053,7 @@
           <p:cNvPr id="9" name="table-text-596.64-0-0">
             <a:extLst xmlns:a="http://schemas.openxmlformats.org/drawingml/2006/main">
               <a:ext uri="{FF2B5EF4-FFF2-40B4-BE49-F238E27FC236}">
-                <a16:creationId xmlns:a16="http://schemas.microsoft.com/office/drawing/2014/main" id="{502DA039-FA4C-48E2-B3B1-F18E8ABC1F3C}"/>
+                <a16:creationId xmlns:a16="http://schemas.microsoft.com/office/drawing/2014/main" id="{CDC73385-F1D1-46AC-B163-D256C2055F9E}"/>
               </a:ext>
             </a:extLst>
           </p:cNvPr>
@@ -5177,7 +5115,7 @@
           <p:cNvPr id="10" name="table-cell-596.64-0-1">
             <a:extLst xmlns:a="http://schemas.openxmlformats.org/drawingml/2006/main">
               <a:ext uri="{FF2B5EF4-FFF2-40B4-BE49-F238E27FC236}">
-                <a16:creationId xmlns:a16="http://schemas.microsoft.com/office/drawing/2014/main" id="{AE85B7E5-511A-4724-BDA6-4B7E569CEDDD}"/>
+                <a16:creationId xmlns:a16="http://schemas.microsoft.com/office/drawing/2014/main" id="{38D31CF6-98E2-49A3-86EA-6D79CDF5F0F3}"/>
               </a:ext>
             </a:extLst>
           </p:cNvPr>
@@ -5210,7 +5148,7 @@
           <p:cNvPr id="11" name="table-text-596.64-0-1">
             <a:extLst xmlns:a="http://schemas.openxmlformats.org/drawingml/2006/main">
               <a:ext uri="{FF2B5EF4-FFF2-40B4-BE49-F238E27FC236}">
-                <a16:creationId xmlns:a16="http://schemas.microsoft.com/office/drawing/2014/main" id="{58593C2D-793E-4CB6-9361-34F6BA3C689E}"/>
+                <a16:creationId xmlns:a16="http://schemas.microsoft.com/office/drawing/2014/main" id="{B1ED4D95-5CE7-4DE6-8FF3-6CCF26EEC05B}"/>
               </a:ext>
             </a:extLst>
           </p:cNvPr>
@@ -5272,7 +5210,7 @@
           <p:cNvPr id="12" name="table-cell-596.64-1-0">
             <a:extLst xmlns:a="http://schemas.openxmlformats.org/drawingml/2006/main">
               <a:ext uri="{FF2B5EF4-FFF2-40B4-BE49-F238E27FC236}">
-                <a16:creationId xmlns:a16="http://schemas.microsoft.com/office/drawing/2014/main" id="{05C9543B-C120-4D0E-861A-7AB88D428FCB}"/>
+                <a16:creationId xmlns:a16="http://schemas.microsoft.com/office/drawing/2014/main" id="{FAE91728-DEC1-4339-BEE4-1266F45FC0B1}"/>
               </a:ext>
             </a:extLst>
           </p:cNvPr>
@@ -5305,7 +5243,7 @@
           <p:cNvPr id="13" name="table-text-596.64-1-0">
             <a:extLst xmlns:a="http://schemas.openxmlformats.org/drawingml/2006/main">
               <a:ext uri="{FF2B5EF4-FFF2-40B4-BE49-F238E27FC236}">
-                <a16:creationId xmlns:a16="http://schemas.microsoft.com/office/drawing/2014/main" id="{6F5E4A8B-485C-41EE-9A65-CE7C121E720E}"/>
+                <a16:creationId xmlns:a16="http://schemas.microsoft.com/office/drawing/2014/main" id="{7A4683FB-C3A4-4877-9417-BF26E30EBF7E}"/>
               </a:ext>
             </a:extLst>
           </p:cNvPr>
@@ -5367,7 +5305,7 @@
           <p:cNvPr id="14" name="table-cell-596.64-1-1">
             <a:extLst xmlns:a="http://schemas.openxmlformats.org/drawingml/2006/main">
               <a:ext uri="{FF2B5EF4-FFF2-40B4-BE49-F238E27FC236}">
-                <a16:creationId xmlns:a16="http://schemas.microsoft.com/office/drawing/2014/main" id="{B043B9FA-246F-4B64-8209-6660B5ACF741}"/>
+                <a16:creationId xmlns:a16="http://schemas.microsoft.com/office/drawing/2014/main" id="{C982B8F9-98C0-4EF7-BDEB-F13354959C43}"/>
               </a:ext>
             </a:extLst>
           </p:cNvPr>
@@ -5400,7 +5338,7 @@
           <p:cNvPr id="15" name="table-text-596.64-1-1">
             <a:extLst xmlns:a="http://schemas.openxmlformats.org/drawingml/2006/main">
               <a:ext uri="{FF2B5EF4-FFF2-40B4-BE49-F238E27FC236}">
-                <a16:creationId xmlns:a16="http://schemas.microsoft.com/office/drawing/2014/main" id="{ADA6AF23-6EB7-4426-98C6-2E4D23191564}"/>
+                <a16:creationId xmlns:a16="http://schemas.microsoft.com/office/drawing/2014/main" id="{94FEB157-3282-425B-916D-069625AE9B86}"/>
               </a:ext>
             </a:extLst>
           </p:cNvPr>
@@ -5462,7 +5400,7 @@
           <p:cNvPr id="16" name="table-cell-596.64-2-0">
             <a:extLst xmlns:a="http://schemas.openxmlformats.org/drawingml/2006/main">
               <a:ext uri="{FF2B5EF4-FFF2-40B4-BE49-F238E27FC236}">
-                <a16:creationId xmlns:a16="http://schemas.microsoft.com/office/drawing/2014/main" id="{AFCDFF80-102D-4F08-B9E2-B0B07C38950E}"/>
+                <a16:creationId xmlns:a16="http://schemas.microsoft.com/office/drawing/2014/main" id="{01AFEAAE-0956-40B4-A55F-A67245DB9057}"/>
               </a:ext>
             </a:extLst>
           </p:cNvPr>
@@ -5495,7 +5433,7 @@
           <p:cNvPr id="17" name="table-text-596.64-2-0">
             <a:extLst xmlns:a="http://schemas.openxmlformats.org/drawingml/2006/main">
               <a:ext uri="{FF2B5EF4-FFF2-40B4-BE49-F238E27FC236}">
-                <a16:creationId xmlns:a16="http://schemas.microsoft.com/office/drawing/2014/main" id="{ECAA6009-4A52-4107-B0AA-E81707C8F01B}"/>
+                <a16:creationId xmlns:a16="http://schemas.microsoft.com/office/drawing/2014/main" id="{6F086F18-2167-46C8-9CEC-9C278D5C9AB7}"/>
               </a:ext>
             </a:extLst>
           </p:cNvPr>
@@ -5557,7 +5495,7 @@
           <p:cNvPr id="18" name="table-cell-596.64-2-1">
             <a:extLst xmlns:a="http://schemas.openxmlformats.org/drawingml/2006/main">
               <a:ext uri="{FF2B5EF4-FFF2-40B4-BE49-F238E27FC236}">
-                <a16:creationId xmlns:a16="http://schemas.microsoft.com/office/drawing/2014/main" id="{66C348E0-4850-4150-8E40-CF8D4BFA6EAD}"/>
+                <a16:creationId xmlns:a16="http://schemas.microsoft.com/office/drawing/2014/main" id="{7424C1D2-91F9-4547-AB20-81D6D182E4D2}"/>
               </a:ext>
             </a:extLst>
           </p:cNvPr>
@@ -5590,7 +5528,7 @@
           <p:cNvPr id="19" name="table-text-596.64-2-1">
             <a:extLst xmlns:a="http://schemas.openxmlformats.org/drawingml/2006/main">
               <a:ext uri="{FF2B5EF4-FFF2-40B4-BE49-F238E27FC236}">
-                <a16:creationId xmlns:a16="http://schemas.microsoft.com/office/drawing/2014/main" id="{AAAE3DDC-31D7-4766-A666-5C781E3AA22C}"/>
+                <a16:creationId xmlns:a16="http://schemas.microsoft.com/office/drawing/2014/main" id="{1C8ACE7E-620F-4183-9077-0E9E5062831A}"/>
               </a:ext>
             </a:extLst>
           </p:cNvPr>
@@ -5652,7 +5590,7 @@
           <p:cNvPr id="20" name="table-cell-596.64-3-0">
             <a:extLst xmlns:a="http://schemas.openxmlformats.org/drawingml/2006/main">
               <a:ext uri="{FF2B5EF4-FFF2-40B4-BE49-F238E27FC236}">
-                <a16:creationId xmlns:a16="http://schemas.microsoft.com/office/drawing/2014/main" id="{29C725CD-7135-480D-A1C3-7FFD705DCC82}"/>
+                <a16:creationId xmlns:a16="http://schemas.microsoft.com/office/drawing/2014/main" id="{C941E46E-7735-4DA0-974C-F717F6C04635}"/>
               </a:ext>
             </a:extLst>
           </p:cNvPr>
@@ -5685,7 +5623,7 @@
           <p:cNvPr id="21" name="table-text-596.64-3-0">
             <a:extLst xmlns:a="http://schemas.openxmlformats.org/drawingml/2006/main">
               <a:ext uri="{FF2B5EF4-FFF2-40B4-BE49-F238E27FC236}">
-                <a16:creationId xmlns:a16="http://schemas.microsoft.com/office/drawing/2014/main" id="{CBF5201A-D866-47A2-BD19-829427AD5F58}"/>
+                <a16:creationId xmlns:a16="http://schemas.microsoft.com/office/drawing/2014/main" id="{3D4A9DEE-C595-4423-B7DE-082328A238ED}"/>
               </a:ext>
             </a:extLst>
           </p:cNvPr>
@@ -5747,7 +5685,7 @@
           <p:cNvPr id="22" name="table-cell-596.64-3-1">
             <a:extLst xmlns:a="http://schemas.openxmlformats.org/drawingml/2006/main">
               <a:ext uri="{FF2B5EF4-FFF2-40B4-BE49-F238E27FC236}">
-                <a16:creationId xmlns:a16="http://schemas.microsoft.com/office/drawing/2014/main" id="{665344B0-1ADB-4C7E-BC54-44AA5230B2D2}"/>
+                <a16:creationId xmlns:a16="http://schemas.microsoft.com/office/drawing/2014/main" id="{758F9FD1-F938-4211-B320-53695287A217}"/>
               </a:ext>
             </a:extLst>
           </p:cNvPr>
@@ -5780,7 +5718,7 @@
           <p:cNvPr id="23" name="table-text-596.64-3-1">
             <a:extLst xmlns:a="http://schemas.openxmlformats.org/drawingml/2006/main">
               <a:ext uri="{FF2B5EF4-FFF2-40B4-BE49-F238E27FC236}">
-                <a16:creationId xmlns:a16="http://schemas.microsoft.com/office/drawing/2014/main" id="{876F28F1-6D59-4B43-8736-991748298062}"/>
+                <a16:creationId xmlns:a16="http://schemas.microsoft.com/office/drawing/2014/main" id="{42692C8E-7F72-4BDE-B9B6-7CE33F30C7EF}"/>
               </a:ext>
             </a:extLst>
           </p:cNvPr>
@@ -5842,7 +5780,7 @@
           <p:cNvPr id="24" name="table-cell-596.64-4-0">
             <a:extLst xmlns:a="http://schemas.openxmlformats.org/drawingml/2006/main">
               <a:ext uri="{FF2B5EF4-FFF2-40B4-BE49-F238E27FC236}">
-                <a16:creationId xmlns:a16="http://schemas.microsoft.com/office/drawing/2014/main" id="{20C37673-FC82-490E-BC02-1682170CC2B7}"/>
+                <a16:creationId xmlns:a16="http://schemas.microsoft.com/office/drawing/2014/main" id="{18E5ADE9-D2DE-43D1-9259-FA6AA4C0042B}"/>
               </a:ext>
             </a:extLst>
           </p:cNvPr>
@@ -5875,7 +5813,7 @@
           <p:cNvPr id="25" name="table-text-596.64-4-0">
             <a:extLst xmlns:a="http://schemas.openxmlformats.org/drawingml/2006/main">
               <a:ext uri="{FF2B5EF4-FFF2-40B4-BE49-F238E27FC236}">
-                <a16:creationId xmlns:a16="http://schemas.microsoft.com/office/drawing/2014/main" id="{F3081EE3-FED9-479B-8E51-467F16CC0CB0}"/>
+                <a16:creationId xmlns:a16="http://schemas.microsoft.com/office/drawing/2014/main" id="{6819C956-35B3-4B5C-821F-145C71777FA2}"/>
               </a:ext>
             </a:extLst>
           </p:cNvPr>
@@ -5937,7 +5875,7 @@
           <p:cNvPr id="26" name="table-cell-596.64-4-1">
             <a:extLst xmlns:a="http://schemas.openxmlformats.org/drawingml/2006/main">
               <a:ext uri="{FF2B5EF4-FFF2-40B4-BE49-F238E27FC236}">
-                <a16:creationId xmlns:a16="http://schemas.microsoft.com/office/drawing/2014/main" id="{2110C325-4B58-4867-B3BF-8D54007DD10C}"/>
+                <a16:creationId xmlns:a16="http://schemas.microsoft.com/office/drawing/2014/main" id="{1DEA22FA-1C3F-4E37-8B6C-F70428941CFE}"/>
               </a:ext>
             </a:extLst>
           </p:cNvPr>
@@ -5970,7 +5908,7 @@
           <p:cNvPr id="27" name="table-text-596.64-4-1">
             <a:extLst xmlns:a="http://schemas.openxmlformats.org/drawingml/2006/main">
               <a:ext uri="{FF2B5EF4-FFF2-40B4-BE49-F238E27FC236}">
-                <a16:creationId xmlns:a16="http://schemas.microsoft.com/office/drawing/2014/main" id="{079ACBE9-4A24-4EF5-9EC4-07043BED8D7B}"/>
+                <a16:creationId xmlns:a16="http://schemas.microsoft.com/office/drawing/2014/main" id="{6EDDBC8F-CC56-46D6-A1A7-A91812E559CC}"/>
               </a:ext>
             </a:extLst>
           </p:cNvPr>
@@ -6030,7 +5968,7 @@
     </p:spTree>
     <p:extLst>
       <p:ext uri="{BB962C8B-B14F-4D97-AF65-F5344CB8AC3E}">
-        <p14:creationId xmlns:p14="http://schemas.microsoft.com/office/powerpoint/2010/main" val="119423051"/>
+        <p14:creationId xmlns:p14="http://schemas.microsoft.com/office/powerpoint/2010/main" val="1687427708"/>
       </p:ext>
     </p:extLst>
   </p:cSld>
@@ -6061,7 +5999,7 @@
           <p:cNvPr id="27" name="running-label">
             <a:extLst xmlns:a="http://schemas.openxmlformats.org/drawingml/2006/main">
               <a:ext uri="{FF2B5EF4-FFF2-40B4-BE49-F238E27FC236}">
-                <a16:creationId xmlns:a16="http://schemas.microsoft.com/office/drawing/2014/main" id="{ADEEE9A0-8686-4095-B988-B42803AD0F80}"/>
+                <a16:creationId xmlns:a16="http://schemas.microsoft.com/office/drawing/2014/main" id="{0A3CABA5-F18C-4C44-90B6-E095985AA6A5}"/>
               </a:ext>
             </a:extLst>
           </p:cNvPr>
@@ -6123,7 +6061,7 @@
           <p:cNvPr id="2" name="page-number">
             <a:extLst xmlns:a="http://schemas.openxmlformats.org/drawingml/2006/main">
               <a:ext uri="{FF2B5EF4-FFF2-40B4-BE49-F238E27FC236}">
-                <a16:creationId xmlns:a16="http://schemas.microsoft.com/office/drawing/2014/main" id="{8064BDA5-E00E-4402-8A54-74FE8386B001}"/>
+                <a16:creationId xmlns:a16="http://schemas.microsoft.com/office/drawing/2014/main" id="{92F63EB6-7004-4622-A9C7-ADF3F4A73A7B}"/>
               </a:ext>
             </a:extLst>
           </p:cNvPr>
@@ -6185,7 +6123,7 @@
           <p:cNvPr id="3" name="header-rule">
             <a:extLst xmlns:a="http://schemas.openxmlformats.org/drawingml/2006/main">
               <a:ext uri="{FF2B5EF4-FFF2-40B4-BE49-F238E27FC236}">
-                <a16:creationId xmlns:a16="http://schemas.microsoft.com/office/drawing/2014/main" id="{71D3AB29-DC4D-424B-AA14-C3662B956022}"/>
+                <a16:creationId xmlns:a16="http://schemas.microsoft.com/office/drawing/2014/main" id="{5052E62A-0EAE-43BB-B62B-D55AC3849BD8}"/>
               </a:ext>
             </a:extLst>
           </p:cNvPr>
@@ -6216,7 +6154,7 @@
           <p:cNvPr id="4" name="slide-title">
             <a:extLst xmlns:a="http://schemas.openxmlformats.org/drawingml/2006/main">
               <a:ext uri="{FF2B5EF4-FFF2-40B4-BE49-F238E27FC236}">
-                <a16:creationId xmlns:a16="http://schemas.microsoft.com/office/drawing/2014/main" id="{8467B32D-E652-4FBA-8086-C513AE54BDDD}"/>
+                <a16:creationId xmlns:a16="http://schemas.microsoft.com/office/drawing/2014/main" id="{FB8F02D9-8941-4C39-A71B-15BA63DEA263}"/>
               </a:ext>
             </a:extLst>
           </p:cNvPr>
@@ -6278,7 +6216,7 @@
           <p:cNvPr id="5" name="subheading-140">
             <a:extLst xmlns:a="http://schemas.openxmlformats.org/drawingml/2006/main">
               <a:ext uri="{FF2B5EF4-FFF2-40B4-BE49-F238E27FC236}">
-                <a16:creationId xmlns:a16="http://schemas.microsoft.com/office/drawing/2014/main" id="{465263AA-7E6B-41B7-B95D-74DAF64ABA9E}"/>
+                <a16:creationId xmlns:a16="http://schemas.microsoft.com/office/drawing/2014/main" id="{F08E893D-3B7D-42F0-ADD9-46C6B22C4DA7}"/>
               </a:ext>
             </a:extLst>
           </p:cNvPr>
@@ -6340,7 +6278,7 @@
           <p:cNvPr id="6" name="bullets-194">
             <a:extLst xmlns:a="http://schemas.openxmlformats.org/drawingml/2006/main">
               <a:ext uri="{FF2B5EF4-FFF2-40B4-BE49-F238E27FC236}">
-                <a16:creationId xmlns:a16="http://schemas.microsoft.com/office/drawing/2014/main" id="{862F70A6-7CE9-4E95-8BE2-BF1720AC3898}"/>
+                <a16:creationId xmlns:a16="http://schemas.microsoft.com/office/drawing/2014/main" id="{04B9A6C2-ABBD-4879-B337-F84403180AB7}"/>
               </a:ext>
             </a:extLst>
           </p:cNvPr>
@@ -6529,7 +6467,7 @@
           <p:nvPr/>
         </p:nvPicPr>
         <p:blipFill>
-          <a:blip xmlns:r="http://schemas.openxmlformats.org/officeDocument/2006/relationships" xmlns:a="http://schemas.openxmlformats.org/drawingml/2006/main" r:embed="R1adf2c451e3a45e7"/>
+          <a:blip xmlns:r="http://schemas.openxmlformats.org/officeDocument/2006/relationships" xmlns:a="http://schemas.openxmlformats.org/drawingml/2006/main" r:embed="Rd179475efcb44f43"/>
           <a:stretch xmlns:a="http://schemas.openxmlformats.org/drawingml/2006/main"/>
         </p:blipFill>
         <p:spPr>
@@ -6549,7 +6487,7 @@
           <p:cNvPr id="8" name="image-caption-417.92">
             <a:extLst xmlns:a="http://schemas.openxmlformats.org/drawingml/2006/main">
               <a:ext uri="{FF2B5EF4-FFF2-40B4-BE49-F238E27FC236}">
-                <a16:creationId xmlns:a16="http://schemas.microsoft.com/office/drawing/2014/main" id="{284B79E9-155D-4391-B4EC-8275194A9E58}"/>
+                <a16:creationId xmlns:a16="http://schemas.microsoft.com/office/drawing/2014/main" id="{8DF2D1C7-388D-41BB-8508-D7936035C7E0}"/>
               </a:ext>
             </a:extLst>
           </p:cNvPr>
@@ -6611,7 +6549,7 @@
           <p:cNvPr id="9" name="subheading-801.9200000000001">
             <a:extLst xmlns:a="http://schemas.openxmlformats.org/drawingml/2006/main">
               <a:ext uri="{FF2B5EF4-FFF2-40B4-BE49-F238E27FC236}">
-                <a16:creationId xmlns:a16="http://schemas.microsoft.com/office/drawing/2014/main" id="{FE0EC4D2-C169-4D2D-B842-4F9BF139577E}"/>
+                <a16:creationId xmlns:a16="http://schemas.microsoft.com/office/drawing/2014/main" id="{05BE9696-8242-426E-A7A0-E6AD97C61E17}"/>
               </a:ext>
             </a:extLst>
           </p:cNvPr>
@@ -6673,7 +6611,7 @@
           <p:cNvPr id="10" name="table-cell-855.9200000000001-0-0">
             <a:extLst xmlns:a="http://schemas.openxmlformats.org/drawingml/2006/main">
               <a:ext uri="{FF2B5EF4-FFF2-40B4-BE49-F238E27FC236}">
-                <a16:creationId xmlns:a16="http://schemas.microsoft.com/office/drawing/2014/main" id="{F4B485AC-C394-417B-BD94-72E7C3EA42C3}"/>
+                <a16:creationId xmlns:a16="http://schemas.microsoft.com/office/drawing/2014/main" id="{ACAC2B4E-CB25-4B7D-A91B-10C700984F39}"/>
               </a:ext>
             </a:extLst>
           </p:cNvPr>
@@ -6706,7 +6644,7 @@
           <p:cNvPr id="11" name="table-text-855.9200000000001-0-0">
             <a:extLst xmlns:a="http://schemas.openxmlformats.org/drawingml/2006/main">
               <a:ext uri="{FF2B5EF4-FFF2-40B4-BE49-F238E27FC236}">
-                <a16:creationId xmlns:a16="http://schemas.microsoft.com/office/drawing/2014/main" id="{8EC836F3-E222-4BB5-BEE2-5256C2830048}"/>
+                <a16:creationId xmlns:a16="http://schemas.microsoft.com/office/drawing/2014/main" id="{13358B33-53D5-4BA5-8B14-8FF8670C462A}"/>
               </a:ext>
             </a:extLst>
           </p:cNvPr>
@@ -6768,7 +6706,7 @@
           <p:cNvPr id="12" name="table-cell-855.9200000000001-0-1">
             <a:extLst xmlns:a="http://schemas.openxmlformats.org/drawingml/2006/main">
               <a:ext uri="{FF2B5EF4-FFF2-40B4-BE49-F238E27FC236}">
-                <a16:creationId xmlns:a16="http://schemas.microsoft.com/office/drawing/2014/main" id="{E85C1CE4-A208-4889-B069-88568D939DE7}"/>
+                <a16:creationId xmlns:a16="http://schemas.microsoft.com/office/drawing/2014/main" id="{E90E3C4D-2FBC-474D-9579-C21E36E630B0}"/>
               </a:ext>
             </a:extLst>
           </p:cNvPr>
@@ -6801,7 +6739,7 @@
           <p:cNvPr id="13" name="table-text-855.9200000000001-0-1">
             <a:extLst xmlns:a="http://schemas.openxmlformats.org/drawingml/2006/main">
               <a:ext uri="{FF2B5EF4-FFF2-40B4-BE49-F238E27FC236}">
-                <a16:creationId xmlns:a16="http://schemas.microsoft.com/office/drawing/2014/main" id="{58F89C5A-7EDE-4242-8A5F-1DE20AF533B2}"/>
+                <a16:creationId xmlns:a16="http://schemas.microsoft.com/office/drawing/2014/main" id="{4AC94B15-178E-4DD0-A2F5-25EC919A2FFA}"/>
               </a:ext>
             </a:extLst>
           </p:cNvPr>
@@ -6863,7 +6801,7 @@
           <p:cNvPr id="14" name="table-cell-855.9200000000001-0-2">
             <a:extLst xmlns:a="http://schemas.openxmlformats.org/drawingml/2006/main">
               <a:ext uri="{FF2B5EF4-FFF2-40B4-BE49-F238E27FC236}">
-                <a16:creationId xmlns:a16="http://schemas.microsoft.com/office/drawing/2014/main" id="{B5121344-BE20-4D81-A773-B4A211233C7D}"/>
+                <a16:creationId xmlns:a16="http://schemas.microsoft.com/office/drawing/2014/main" id="{5DACD40E-F5C4-4D2D-B619-417B82E052F1}"/>
               </a:ext>
             </a:extLst>
           </p:cNvPr>
@@ -6896,7 +6834,7 @@
           <p:cNvPr id="15" name="table-text-855.9200000000001-0-2">
             <a:extLst xmlns:a="http://schemas.openxmlformats.org/drawingml/2006/main">
               <a:ext uri="{FF2B5EF4-FFF2-40B4-BE49-F238E27FC236}">
-                <a16:creationId xmlns:a16="http://schemas.microsoft.com/office/drawing/2014/main" id="{1217213A-6229-4E56-A3BE-C62838A0726C}"/>
+                <a16:creationId xmlns:a16="http://schemas.microsoft.com/office/drawing/2014/main" id="{132B7857-3C6B-484C-9825-70774F16788D}"/>
               </a:ext>
             </a:extLst>
           </p:cNvPr>
@@ -6958,7 +6896,7 @@
           <p:cNvPr id="16" name="table-cell-855.9200000000001-0-3">
             <a:extLst xmlns:a="http://schemas.openxmlformats.org/drawingml/2006/main">
               <a:ext uri="{FF2B5EF4-FFF2-40B4-BE49-F238E27FC236}">
-                <a16:creationId xmlns:a16="http://schemas.microsoft.com/office/drawing/2014/main" id="{90EF0A89-6AC9-4BB7-B837-CEF80192527F}"/>
+                <a16:creationId xmlns:a16="http://schemas.microsoft.com/office/drawing/2014/main" id="{E50777CD-5E8B-4F8E-814B-01E9ED4D3DED}"/>
               </a:ext>
             </a:extLst>
           </p:cNvPr>
@@ -6991,7 +6929,7 @@
           <p:cNvPr id="17" name="table-text-855.9200000000001-0-3">
             <a:extLst xmlns:a="http://schemas.openxmlformats.org/drawingml/2006/main">
               <a:ext uri="{FF2B5EF4-FFF2-40B4-BE49-F238E27FC236}">
-                <a16:creationId xmlns:a16="http://schemas.microsoft.com/office/drawing/2014/main" id="{767B8A21-5C16-4618-8F98-D0356064E9F8}"/>
+                <a16:creationId xmlns:a16="http://schemas.microsoft.com/office/drawing/2014/main" id="{A4E7E996-72ED-435D-81A3-FF95FCCAA1C4}"/>
               </a:ext>
             </a:extLst>
           </p:cNvPr>
@@ -7053,7 +6991,7 @@
           <p:cNvPr id="18" name="table-cell-855.9200000000001-1-0">
             <a:extLst xmlns:a="http://schemas.openxmlformats.org/drawingml/2006/main">
               <a:ext uri="{FF2B5EF4-FFF2-40B4-BE49-F238E27FC236}">
-                <a16:creationId xmlns:a16="http://schemas.microsoft.com/office/drawing/2014/main" id="{AA07414E-7A74-4AD1-967D-959F0495447A}"/>
+                <a16:creationId xmlns:a16="http://schemas.microsoft.com/office/drawing/2014/main" id="{615933B2-0BC0-4355-9E10-2C6CC42CBD3C}"/>
               </a:ext>
             </a:extLst>
           </p:cNvPr>
@@ -7086,7 +7024,7 @@
           <p:cNvPr id="19" name="table-text-855.9200000000001-1-0">
             <a:extLst xmlns:a="http://schemas.openxmlformats.org/drawingml/2006/main">
               <a:ext uri="{FF2B5EF4-FFF2-40B4-BE49-F238E27FC236}">
-                <a16:creationId xmlns:a16="http://schemas.microsoft.com/office/drawing/2014/main" id="{3D94912D-4971-41A8-8CED-560F309A9F31}"/>
+                <a16:creationId xmlns:a16="http://schemas.microsoft.com/office/drawing/2014/main" id="{429E6489-F4D0-4AB9-97B2-EB5171A83764}"/>
               </a:ext>
             </a:extLst>
           </p:cNvPr>
@@ -7148,7 +7086,7 @@
           <p:cNvPr id="20" name="table-cell-855.9200000000001-1-1">
             <a:extLst xmlns:a="http://schemas.openxmlformats.org/drawingml/2006/main">
               <a:ext uri="{FF2B5EF4-FFF2-40B4-BE49-F238E27FC236}">
-                <a16:creationId xmlns:a16="http://schemas.microsoft.com/office/drawing/2014/main" id="{6A97DDB4-4ADD-4C38-A786-74D28CDC9C16}"/>
+                <a16:creationId xmlns:a16="http://schemas.microsoft.com/office/drawing/2014/main" id="{A1960285-E2B2-45C9-A7F1-DA7F9D806671}"/>
               </a:ext>
             </a:extLst>
           </p:cNvPr>
@@ -7181,7 +7119,7 @@
           <p:cNvPr id="21" name="table-text-855.9200000000001-1-1">
             <a:extLst xmlns:a="http://schemas.openxmlformats.org/drawingml/2006/main">
               <a:ext uri="{FF2B5EF4-FFF2-40B4-BE49-F238E27FC236}">
-                <a16:creationId xmlns:a16="http://schemas.microsoft.com/office/drawing/2014/main" id="{D4248CB7-DCB2-4D3E-A4DA-FA08AE95FFA0}"/>
+                <a16:creationId xmlns:a16="http://schemas.microsoft.com/office/drawing/2014/main" id="{E892F79A-CAD8-4EE0-99E3-81CE97F5C02A}"/>
               </a:ext>
             </a:extLst>
           </p:cNvPr>
@@ -7243,7 +7181,7 @@
           <p:cNvPr id="22" name="table-cell-855.9200000000001-1-2">
             <a:extLst xmlns:a="http://schemas.openxmlformats.org/drawingml/2006/main">
               <a:ext uri="{FF2B5EF4-FFF2-40B4-BE49-F238E27FC236}">
-                <a16:creationId xmlns:a16="http://schemas.microsoft.com/office/drawing/2014/main" id="{333A67D0-F7A7-4161-B663-837E543720B6}"/>
+                <a16:creationId xmlns:a16="http://schemas.microsoft.com/office/drawing/2014/main" id="{54E803A2-4492-4E1B-82B1-1FC1762D1609}"/>
               </a:ext>
             </a:extLst>
           </p:cNvPr>
@@ -7276,7 +7214,7 @@
           <p:cNvPr id="23" name="table-text-855.9200000000001-1-2">
             <a:extLst xmlns:a="http://schemas.openxmlformats.org/drawingml/2006/main">
               <a:ext uri="{FF2B5EF4-FFF2-40B4-BE49-F238E27FC236}">
-                <a16:creationId xmlns:a16="http://schemas.microsoft.com/office/drawing/2014/main" id="{775CE437-593A-4E0C-9DDF-B286747E2DD7}"/>
+                <a16:creationId xmlns:a16="http://schemas.microsoft.com/office/drawing/2014/main" id="{E90863DC-938D-4AE9-9114-24A8BD212231}"/>
               </a:ext>
             </a:extLst>
           </p:cNvPr>
@@ -7338,7 +7276,7 @@
           <p:cNvPr id="24" name="table-cell-855.9200000000001-1-3">
             <a:extLst xmlns:a="http://schemas.openxmlformats.org/drawingml/2006/main">
               <a:ext uri="{FF2B5EF4-FFF2-40B4-BE49-F238E27FC236}">
-                <a16:creationId xmlns:a16="http://schemas.microsoft.com/office/drawing/2014/main" id="{56480564-D4AE-4BDB-84AE-BE892D6C31ED}"/>
+                <a16:creationId xmlns:a16="http://schemas.microsoft.com/office/drawing/2014/main" id="{3B86EC11-7461-4DDC-B832-42EEE200E3D0}"/>
               </a:ext>
             </a:extLst>
           </p:cNvPr>
@@ -7371,7 +7309,7 @@
           <p:cNvPr id="25" name="table-text-855.9200000000001-1-3">
             <a:extLst xmlns:a="http://schemas.openxmlformats.org/drawingml/2006/main">
               <a:ext uri="{FF2B5EF4-FFF2-40B4-BE49-F238E27FC236}">
-                <a16:creationId xmlns:a16="http://schemas.microsoft.com/office/drawing/2014/main" id="{00B5B9A6-364F-4808-8588-2748F52B091D}"/>
+                <a16:creationId xmlns:a16="http://schemas.microsoft.com/office/drawing/2014/main" id="{DB36D539-BF50-42EF-8AAB-CEAADC3B5BAE}"/>
               </a:ext>
             </a:extLst>
           </p:cNvPr>
@@ -7433,7 +7371,7 @@
           <p:cNvPr id="26" name="paragraph-973.0200000000001">
             <a:extLst xmlns:a="http://schemas.openxmlformats.org/drawingml/2006/main">
               <a:ext uri="{FF2B5EF4-FFF2-40B4-BE49-F238E27FC236}">
-                <a16:creationId xmlns:a16="http://schemas.microsoft.com/office/drawing/2014/main" id="{B5069237-0968-4DC7-AAC5-A97FD0AA8BBA}"/>
+                <a16:creationId xmlns:a16="http://schemas.microsoft.com/office/drawing/2014/main" id="{6A78F7C4-17B0-401C-B7D5-9FB5618F52AA}"/>
               </a:ext>
             </a:extLst>
           </p:cNvPr>
@@ -7493,7 +7431,7 @@
     </p:spTree>
     <p:extLst>
       <p:ext uri="{BB962C8B-B14F-4D97-AF65-F5344CB8AC3E}">
-        <p14:creationId xmlns:p14="http://schemas.microsoft.com/office/powerpoint/2010/main" val="1629849629"/>
+        <p14:creationId xmlns:p14="http://schemas.microsoft.com/office/powerpoint/2010/main" val="1680825391"/>
       </p:ext>
     </p:extLst>
   </p:cSld>
@@ -7524,7 +7462,7 @@
           <p:cNvPr id="38" name="running-label">
             <a:extLst xmlns:a="http://schemas.openxmlformats.org/drawingml/2006/main">
               <a:ext uri="{FF2B5EF4-FFF2-40B4-BE49-F238E27FC236}">
-                <a16:creationId xmlns:a16="http://schemas.microsoft.com/office/drawing/2014/main" id="{ACB6F05E-6B1F-4973-8C1B-E35514CE1CC0}"/>
+                <a16:creationId xmlns:a16="http://schemas.microsoft.com/office/drawing/2014/main" id="{D21CBFCD-5C89-41CC-AA31-303EDBE67BF4}"/>
               </a:ext>
             </a:extLst>
           </p:cNvPr>
@@ -7586,7 +7524,7 @@
           <p:cNvPr id="2" name="page-number">
             <a:extLst xmlns:a="http://schemas.openxmlformats.org/drawingml/2006/main">
               <a:ext uri="{FF2B5EF4-FFF2-40B4-BE49-F238E27FC236}">
-                <a16:creationId xmlns:a16="http://schemas.microsoft.com/office/drawing/2014/main" id="{063CD49D-98E9-46F7-9F9F-92F0F97DE692}"/>
+                <a16:creationId xmlns:a16="http://schemas.microsoft.com/office/drawing/2014/main" id="{499E85A3-3A1B-4AAD-93CC-85C5A755DF99}"/>
               </a:ext>
             </a:extLst>
           </p:cNvPr>
@@ -7648,7 +7586,7 @@
           <p:cNvPr id="3" name="header-rule">
             <a:extLst xmlns:a="http://schemas.openxmlformats.org/drawingml/2006/main">
               <a:ext uri="{FF2B5EF4-FFF2-40B4-BE49-F238E27FC236}">
-                <a16:creationId xmlns:a16="http://schemas.microsoft.com/office/drawing/2014/main" id="{5092235D-8C39-43E7-921F-4D5CCFB6396E}"/>
+                <a16:creationId xmlns:a16="http://schemas.microsoft.com/office/drawing/2014/main" id="{18A0DA0A-F15F-4AA5-95E4-8196ED82FC2C}"/>
               </a:ext>
             </a:extLst>
           </p:cNvPr>
@@ -7679,7 +7617,7 @@
           <p:cNvPr id="4" name="slide-title">
             <a:extLst xmlns:a="http://schemas.openxmlformats.org/drawingml/2006/main">
               <a:ext uri="{FF2B5EF4-FFF2-40B4-BE49-F238E27FC236}">
-                <a16:creationId xmlns:a16="http://schemas.microsoft.com/office/drawing/2014/main" id="{54E526B8-A53B-404B-A00E-D027E646596D}"/>
+                <a16:creationId xmlns:a16="http://schemas.microsoft.com/office/drawing/2014/main" id="{66C5E204-7944-4CFE-9F12-3DA54E7499CB}"/>
               </a:ext>
             </a:extLst>
           </p:cNvPr>
@@ -7741,7 +7679,7 @@
           <p:cNvPr id="5" name="subheading-140">
             <a:extLst xmlns:a="http://schemas.openxmlformats.org/drawingml/2006/main">
               <a:ext uri="{FF2B5EF4-FFF2-40B4-BE49-F238E27FC236}">
-                <a16:creationId xmlns:a16="http://schemas.microsoft.com/office/drawing/2014/main" id="{F4C0EF76-C388-40F3-B66E-4405F55A1631}"/>
+                <a16:creationId xmlns:a16="http://schemas.microsoft.com/office/drawing/2014/main" id="{BE49AC7F-99C3-41EB-91F3-D749798CE0DF}"/>
               </a:ext>
             </a:extLst>
           </p:cNvPr>
@@ -7803,7 +7741,7 @@
           <p:cNvPr id="6" name="table-cell-194-0-0">
             <a:extLst xmlns:a="http://schemas.openxmlformats.org/drawingml/2006/main">
               <a:ext uri="{FF2B5EF4-FFF2-40B4-BE49-F238E27FC236}">
-                <a16:creationId xmlns:a16="http://schemas.microsoft.com/office/drawing/2014/main" id="{02865826-202A-43D9-82D9-AD133EFE31CD}"/>
+                <a16:creationId xmlns:a16="http://schemas.microsoft.com/office/drawing/2014/main" id="{8CF7C067-6D89-4A29-BB80-51ED597058E5}"/>
               </a:ext>
             </a:extLst>
           </p:cNvPr>
@@ -7836,7 +7774,7 @@
           <p:cNvPr id="7" name="table-text-194-0-0">
             <a:extLst xmlns:a="http://schemas.openxmlformats.org/drawingml/2006/main">
               <a:ext uri="{FF2B5EF4-FFF2-40B4-BE49-F238E27FC236}">
-                <a16:creationId xmlns:a16="http://schemas.microsoft.com/office/drawing/2014/main" id="{2E0E157B-EB46-4F42-9353-B183FBF47343}"/>
+                <a16:creationId xmlns:a16="http://schemas.microsoft.com/office/drawing/2014/main" id="{0B5801B3-7E88-4756-BA74-2173E3A53BC1}"/>
               </a:ext>
             </a:extLst>
           </p:cNvPr>
@@ -7898,7 +7836,7 @@
           <p:cNvPr id="8" name="table-cell-194-0-1">
             <a:extLst xmlns:a="http://schemas.openxmlformats.org/drawingml/2006/main">
               <a:ext uri="{FF2B5EF4-FFF2-40B4-BE49-F238E27FC236}">
-                <a16:creationId xmlns:a16="http://schemas.microsoft.com/office/drawing/2014/main" id="{61E2EEBF-1118-43C3-96FF-318F70734EE8}"/>
+                <a16:creationId xmlns:a16="http://schemas.microsoft.com/office/drawing/2014/main" id="{C17524F3-4418-4D5E-A4D8-9F306DD174CA}"/>
               </a:ext>
             </a:extLst>
           </p:cNvPr>
@@ -7931,7 +7869,7 @@
           <p:cNvPr id="9" name="table-text-194-0-1">
             <a:extLst xmlns:a="http://schemas.openxmlformats.org/drawingml/2006/main">
               <a:ext uri="{FF2B5EF4-FFF2-40B4-BE49-F238E27FC236}">
-                <a16:creationId xmlns:a16="http://schemas.microsoft.com/office/drawing/2014/main" id="{30559D56-8413-4288-9F9F-19F4871E0E96}"/>
+                <a16:creationId xmlns:a16="http://schemas.microsoft.com/office/drawing/2014/main" id="{E40CBDED-A0F1-48A7-8990-163BE2D02DF7}"/>
               </a:ext>
             </a:extLst>
           </p:cNvPr>
@@ -7993,7 +7931,7 @@
           <p:cNvPr id="10" name="table-cell-194-0-2">
             <a:extLst xmlns:a="http://schemas.openxmlformats.org/drawingml/2006/main">
               <a:ext uri="{FF2B5EF4-FFF2-40B4-BE49-F238E27FC236}">
-                <a16:creationId xmlns:a16="http://schemas.microsoft.com/office/drawing/2014/main" id="{D452000A-A7A8-4ACA-8A59-DC4BA904ADA9}"/>
+                <a16:creationId xmlns:a16="http://schemas.microsoft.com/office/drawing/2014/main" id="{8B0A7A1D-01EC-45AF-8022-CF3791DC89F7}"/>
               </a:ext>
             </a:extLst>
           </p:cNvPr>
@@ -8026,7 +7964,7 @@
           <p:cNvPr id="11" name="table-text-194-0-2">
             <a:extLst xmlns:a="http://schemas.openxmlformats.org/drawingml/2006/main">
               <a:ext uri="{FF2B5EF4-FFF2-40B4-BE49-F238E27FC236}">
-                <a16:creationId xmlns:a16="http://schemas.microsoft.com/office/drawing/2014/main" id="{F7891835-68AA-44A8-B65F-7D0F26ACD9CF}"/>
+                <a16:creationId xmlns:a16="http://schemas.microsoft.com/office/drawing/2014/main" id="{AF2E921C-0F55-4748-8DA8-518B4F5A1789}"/>
               </a:ext>
             </a:extLst>
           </p:cNvPr>
@@ -8088,7 +8026,7 @@
           <p:cNvPr id="12" name="table-cell-194-1-0">
             <a:extLst xmlns:a="http://schemas.openxmlformats.org/drawingml/2006/main">
               <a:ext uri="{FF2B5EF4-FFF2-40B4-BE49-F238E27FC236}">
-                <a16:creationId xmlns:a16="http://schemas.microsoft.com/office/drawing/2014/main" id="{D739202B-4BAD-4386-8610-47908B27FB91}"/>
+                <a16:creationId xmlns:a16="http://schemas.microsoft.com/office/drawing/2014/main" id="{BFCE20E9-73CE-4806-86D4-6D7EB532F14F}"/>
               </a:ext>
             </a:extLst>
           </p:cNvPr>
@@ -8121,7 +8059,7 @@
           <p:cNvPr id="13" name="table-text-194-1-0">
             <a:extLst xmlns:a="http://schemas.openxmlformats.org/drawingml/2006/main">
               <a:ext uri="{FF2B5EF4-FFF2-40B4-BE49-F238E27FC236}">
-                <a16:creationId xmlns:a16="http://schemas.microsoft.com/office/drawing/2014/main" id="{DE325C2E-1C5B-4B69-B4C6-7A0C5AAE913D}"/>
+                <a16:creationId xmlns:a16="http://schemas.microsoft.com/office/drawing/2014/main" id="{727B9F7E-F2F3-47D5-A160-AC8F41B0BB68}"/>
               </a:ext>
             </a:extLst>
           </p:cNvPr>
@@ -8183,7 +8121,7 @@
           <p:cNvPr id="14" name="table-cell-194-1-1">
             <a:extLst xmlns:a="http://schemas.openxmlformats.org/drawingml/2006/main">
               <a:ext uri="{FF2B5EF4-FFF2-40B4-BE49-F238E27FC236}">
-                <a16:creationId xmlns:a16="http://schemas.microsoft.com/office/drawing/2014/main" id="{41077FBC-8868-42B8-A36A-463189A28883}"/>
+                <a16:creationId xmlns:a16="http://schemas.microsoft.com/office/drawing/2014/main" id="{EEF87FFF-91DA-441C-A116-82D5A24FC1A1}"/>
               </a:ext>
             </a:extLst>
           </p:cNvPr>
@@ -8216,7 +8154,7 @@
           <p:cNvPr id="15" name="table-text-194-1-1">
             <a:extLst xmlns:a="http://schemas.openxmlformats.org/drawingml/2006/main">
               <a:ext uri="{FF2B5EF4-FFF2-40B4-BE49-F238E27FC236}">
-                <a16:creationId xmlns:a16="http://schemas.microsoft.com/office/drawing/2014/main" id="{827DA344-C335-4413-A65B-DE67F7046572}"/>
+                <a16:creationId xmlns:a16="http://schemas.microsoft.com/office/drawing/2014/main" id="{B796AF94-E914-4F4E-BDAF-815DD4AC8F3F}"/>
               </a:ext>
             </a:extLst>
           </p:cNvPr>
@@ -8278,7 +8216,7 @@
           <p:cNvPr id="16" name="table-cell-194-1-2">
             <a:extLst xmlns:a="http://schemas.openxmlformats.org/drawingml/2006/main">
               <a:ext uri="{FF2B5EF4-FFF2-40B4-BE49-F238E27FC236}">
-                <a16:creationId xmlns:a16="http://schemas.microsoft.com/office/drawing/2014/main" id="{E98AE31D-CB65-4810-90CA-F8CF5795FF52}"/>
+                <a16:creationId xmlns:a16="http://schemas.microsoft.com/office/drawing/2014/main" id="{F348ACF1-A1E8-4FF6-AA2B-A1BD31B7C382}"/>
               </a:ext>
             </a:extLst>
           </p:cNvPr>
@@ -8311,7 +8249,7 @@
           <p:cNvPr id="17" name="table-text-194-1-2">
             <a:extLst xmlns:a="http://schemas.openxmlformats.org/drawingml/2006/main">
               <a:ext uri="{FF2B5EF4-FFF2-40B4-BE49-F238E27FC236}">
-                <a16:creationId xmlns:a16="http://schemas.microsoft.com/office/drawing/2014/main" id="{E5A941CA-A0AA-4552-9533-2D4CEBB37407}"/>
+                <a16:creationId xmlns:a16="http://schemas.microsoft.com/office/drawing/2014/main" id="{55F4347B-77A7-476D-8AC3-F685290A2368}"/>
               </a:ext>
             </a:extLst>
           </p:cNvPr>
@@ -8373,7 +8311,7 @@
           <p:cNvPr id="18" name="table-cell-194-2-0">
             <a:extLst xmlns:a="http://schemas.openxmlformats.org/drawingml/2006/main">
               <a:ext uri="{FF2B5EF4-FFF2-40B4-BE49-F238E27FC236}">
-                <a16:creationId xmlns:a16="http://schemas.microsoft.com/office/drawing/2014/main" id="{B49C61B2-2F33-48A2-B12F-429DC6AC82BF}"/>
+                <a16:creationId xmlns:a16="http://schemas.microsoft.com/office/drawing/2014/main" id="{8ECF1177-8142-407A-BCF0-115764BF9249}"/>
               </a:ext>
             </a:extLst>
           </p:cNvPr>
@@ -8406,7 +8344,7 @@
           <p:cNvPr id="19" name="table-text-194-2-0">
             <a:extLst xmlns:a="http://schemas.openxmlformats.org/drawingml/2006/main">
               <a:ext uri="{FF2B5EF4-FFF2-40B4-BE49-F238E27FC236}">
-                <a16:creationId xmlns:a16="http://schemas.microsoft.com/office/drawing/2014/main" id="{7A865949-C1AC-4594-9D2B-F4DDAC157121}"/>
+                <a16:creationId xmlns:a16="http://schemas.microsoft.com/office/drawing/2014/main" id="{BD6FEAE8-5D94-46C4-842E-6CA085017964}"/>
               </a:ext>
             </a:extLst>
           </p:cNvPr>
@@ -8468,7 +8406,7 @@
           <p:cNvPr id="20" name="table-cell-194-2-1">
             <a:extLst xmlns:a="http://schemas.openxmlformats.org/drawingml/2006/main">
               <a:ext uri="{FF2B5EF4-FFF2-40B4-BE49-F238E27FC236}">
-                <a16:creationId xmlns:a16="http://schemas.microsoft.com/office/drawing/2014/main" id="{D2FF9B61-B343-4148-9E31-040291230B98}"/>
+                <a16:creationId xmlns:a16="http://schemas.microsoft.com/office/drawing/2014/main" id="{F5E6A93E-2C4E-4504-943B-BA1508CDA676}"/>
               </a:ext>
             </a:extLst>
           </p:cNvPr>
@@ -8501,7 +8439,7 @@
           <p:cNvPr id="21" name="table-text-194-2-1">
             <a:extLst xmlns:a="http://schemas.openxmlformats.org/drawingml/2006/main">
               <a:ext uri="{FF2B5EF4-FFF2-40B4-BE49-F238E27FC236}">
-                <a16:creationId xmlns:a16="http://schemas.microsoft.com/office/drawing/2014/main" id="{929D91C9-837A-49B0-855D-BF42AB12F72B}"/>
+                <a16:creationId xmlns:a16="http://schemas.microsoft.com/office/drawing/2014/main" id="{0EE5FFD0-7840-460E-BFA9-316BA1986421}"/>
               </a:ext>
             </a:extLst>
           </p:cNvPr>
@@ -8563,7 +8501,7 @@
           <p:cNvPr id="22" name="table-cell-194-2-2">
             <a:extLst xmlns:a="http://schemas.openxmlformats.org/drawingml/2006/main">
               <a:ext uri="{FF2B5EF4-FFF2-40B4-BE49-F238E27FC236}">
-                <a16:creationId xmlns:a16="http://schemas.microsoft.com/office/drawing/2014/main" id="{02AFB72C-390D-4002-B60D-AC15F6AB84EB}"/>
+                <a16:creationId xmlns:a16="http://schemas.microsoft.com/office/drawing/2014/main" id="{82A0434E-078B-4DA4-B25C-79DFA2D65867}"/>
               </a:ext>
             </a:extLst>
           </p:cNvPr>
@@ -8596,7 +8534,7 @@
           <p:cNvPr id="23" name="table-text-194-2-2">
             <a:extLst xmlns:a="http://schemas.openxmlformats.org/drawingml/2006/main">
               <a:ext uri="{FF2B5EF4-FFF2-40B4-BE49-F238E27FC236}">
-                <a16:creationId xmlns:a16="http://schemas.microsoft.com/office/drawing/2014/main" id="{EC2558FB-8DBF-421C-906D-70CD9B65B2BD}"/>
+                <a16:creationId xmlns:a16="http://schemas.microsoft.com/office/drawing/2014/main" id="{1F8C95DA-F130-4C42-B40B-5C03BECFC09D}"/>
               </a:ext>
             </a:extLst>
           </p:cNvPr>
@@ -8658,7 +8596,7 @@
           <p:cNvPr id="24" name="table-cell-194-3-0">
             <a:extLst xmlns:a="http://schemas.openxmlformats.org/drawingml/2006/main">
               <a:ext uri="{FF2B5EF4-FFF2-40B4-BE49-F238E27FC236}">
-                <a16:creationId xmlns:a16="http://schemas.microsoft.com/office/drawing/2014/main" id="{95E82C93-E3AA-48A4-8091-B7737A1F8C73}"/>
+                <a16:creationId xmlns:a16="http://schemas.microsoft.com/office/drawing/2014/main" id="{18923242-DEA0-406E-8B3E-741ABF269586}"/>
               </a:ext>
             </a:extLst>
           </p:cNvPr>
@@ -8691,7 +8629,7 @@
           <p:cNvPr id="25" name="table-text-194-3-0">
             <a:extLst xmlns:a="http://schemas.openxmlformats.org/drawingml/2006/main">
               <a:ext uri="{FF2B5EF4-FFF2-40B4-BE49-F238E27FC236}">
-                <a16:creationId xmlns:a16="http://schemas.microsoft.com/office/drawing/2014/main" id="{F03FD298-176C-4C87-8AA3-5903B7047651}"/>
+                <a16:creationId xmlns:a16="http://schemas.microsoft.com/office/drawing/2014/main" id="{831790F1-1204-42C4-8A34-8F05F80DE6B9}"/>
               </a:ext>
             </a:extLst>
           </p:cNvPr>
@@ -8753,7 +8691,7 @@
           <p:cNvPr id="26" name="table-cell-194-3-1">
             <a:extLst xmlns:a="http://schemas.openxmlformats.org/drawingml/2006/main">
               <a:ext uri="{FF2B5EF4-FFF2-40B4-BE49-F238E27FC236}">
-                <a16:creationId xmlns:a16="http://schemas.microsoft.com/office/drawing/2014/main" id="{3879C48E-5C1C-435A-90DA-5A18F6607F81}"/>
+                <a16:creationId xmlns:a16="http://schemas.microsoft.com/office/drawing/2014/main" id="{76E845BE-7B5B-4D83-9688-38ADF0FCA471}"/>
               </a:ext>
             </a:extLst>
           </p:cNvPr>
@@ -8786,7 +8724,7 @@
           <p:cNvPr id="27" name="table-text-194-3-1">
             <a:extLst xmlns:a="http://schemas.openxmlformats.org/drawingml/2006/main">
               <a:ext uri="{FF2B5EF4-FFF2-40B4-BE49-F238E27FC236}">
-                <a16:creationId xmlns:a16="http://schemas.microsoft.com/office/drawing/2014/main" id="{D3CEDA8D-8E8D-4D58-8F15-B6D0D5D63E64}"/>
+                <a16:creationId xmlns:a16="http://schemas.microsoft.com/office/drawing/2014/main" id="{E4D29266-D821-4C5F-BECA-2BCD13ACEBCD}"/>
               </a:ext>
             </a:extLst>
           </p:cNvPr>
@@ -8848,7 +8786,7 @@
           <p:cNvPr id="28" name="table-cell-194-3-2">
             <a:extLst xmlns:a="http://schemas.openxmlformats.org/drawingml/2006/main">
               <a:ext uri="{FF2B5EF4-FFF2-40B4-BE49-F238E27FC236}">
-                <a16:creationId xmlns:a16="http://schemas.microsoft.com/office/drawing/2014/main" id="{DD3741E5-F43D-46A6-AE87-C5A6FDE5499C}"/>
+                <a16:creationId xmlns:a16="http://schemas.microsoft.com/office/drawing/2014/main" id="{F2D51CE5-753F-4A1F-8E3E-BFB4437C1896}"/>
               </a:ext>
             </a:extLst>
           </p:cNvPr>
@@ -8881,7 +8819,7 @@
           <p:cNvPr id="29" name="table-text-194-3-2">
             <a:extLst xmlns:a="http://schemas.openxmlformats.org/drawingml/2006/main">
               <a:ext uri="{FF2B5EF4-FFF2-40B4-BE49-F238E27FC236}">
-                <a16:creationId xmlns:a16="http://schemas.microsoft.com/office/drawing/2014/main" id="{CC4909C3-FBC8-4DCE-828B-3B100545681A}"/>
+                <a16:creationId xmlns:a16="http://schemas.microsoft.com/office/drawing/2014/main" id="{4748E944-3A17-4231-904F-0836F9D7A3D3}"/>
               </a:ext>
             </a:extLst>
           </p:cNvPr>
@@ -8943,7 +8881,7 @@
           <p:cNvPr id="30" name="table-cell-194-4-0">
             <a:extLst xmlns:a="http://schemas.openxmlformats.org/drawingml/2006/main">
               <a:ext uri="{FF2B5EF4-FFF2-40B4-BE49-F238E27FC236}">
-                <a16:creationId xmlns:a16="http://schemas.microsoft.com/office/drawing/2014/main" id="{4BD68259-297E-4DE2-9B47-1D442BFA86B3}"/>
+                <a16:creationId xmlns:a16="http://schemas.microsoft.com/office/drawing/2014/main" id="{C5733415-8038-41EB-8D50-F1D18A02DD25}"/>
               </a:ext>
             </a:extLst>
           </p:cNvPr>
@@ -8976,7 +8914,7 @@
           <p:cNvPr id="31" name="table-text-194-4-0">
             <a:extLst xmlns:a="http://schemas.openxmlformats.org/drawingml/2006/main">
               <a:ext uri="{FF2B5EF4-FFF2-40B4-BE49-F238E27FC236}">
-                <a16:creationId xmlns:a16="http://schemas.microsoft.com/office/drawing/2014/main" id="{31D9D66A-CB3A-469B-BA0A-D988ECF3AD76}"/>
+                <a16:creationId xmlns:a16="http://schemas.microsoft.com/office/drawing/2014/main" id="{CE11A12E-B4BC-4974-B3F3-1FF15DF43809}"/>
               </a:ext>
             </a:extLst>
           </p:cNvPr>
@@ -9038,7 +8976,7 @@
           <p:cNvPr id="32" name="table-cell-194-4-1">
             <a:extLst xmlns:a="http://schemas.openxmlformats.org/drawingml/2006/main">
               <a:ext uri="{FF2B5EF4-FFF2-40B4-BE49-F238E27FC236}">
-                <a16:creationId xmlns:a16="http://schemas.microsoft.com/office/drawing/2014/main" id="{FA306F34-B279-4A55-AEAE-01C8915A0648}"/>
+                <a16:creationId xmlns:a16="http://schemas.microsoft.com/office/drawing/2014/main" id="{4F9850A9-833C-4D74-9EA5-A0931F931756}"/>
               </a:ext>
             </a:extLst>
           </p:cNvPr>
@@ -9071,7 +9009,7 @@
           <p:cNvPr id="33" name="table-text-194-4-1">
             <a:extLst xmlns:a="http://schemas.openxmlformats.org/drawingml/2006/main">
               <a:ext uri="{FF2B5EF4-FFF2-40B4-BE49-F238E27FC236}">
-                <a16:creationId xmlns:a16="http://schemas.microsoft.com/office/drawing/2014/main" id="{11AD1138-5675-4CF6-A56C-D519C6FD1A41}"/>
+                <a16:creationId xmlns:a16="http://schemas.microsoft.com/office/drawing/2014/main" id="{BE45D178-519F-4ABE-B1F4-35047B4C6E65}"/>
               </a:ext>
             </a:extLst>
           </p:cNvPr>
@@ -9133,7 +9071,7 @@
           <p:cNvPr id="34" name="table-cell-194-4-2">
             <a:extLst xmlns:a="http://schemas.openxmlformats.org/drawingml/2006/main">
               <a:ext uri="{FF2B5EF4-FFF2-40B4-BE49-F238E27FC236}">
-                <a16:creationId xmlns:a16="http://schemas.microsoft.com/office/drawing/2014/main" id="{7174A7A2-BE66-416D-A891-26AE4CD2AC54}"/>
+                <a16:creationId xmlns:a16="http://schemas.microsoft.com/office/drawing/2014/main" id="{63D144BB-9CBE-45C4-80BA-7BAA061088F5}"/>
               </a:ext>
             </a:extLst>
           </p:cNvPr>
@@ -9166,7 +9104,7 @@
           <p:cNvPr id="35" name="table-text-194-4-2">
             <a:extLst xmlns:a="http://schemas.openxmlformats.org/drawingml/2006/main">
               <a:ext uri="{FF2B5EF4-FFF2-40B4-BE49-F238E27FC236}">
-                <a16:creationId xmlns:a16="http://schemas.microsoft.com/office/drawing/2014/main" id="{BB39E097-F72A-40D9-A58E-5E66F0D6A620}"/>
+                <a16:creationId xmlns:a16="http://schemas.microsoft.com/office/drawing/2014/main" id="{E8358849-C5BE-423D-8AAB-C9FE78F25CB3}"/>
               </a:ext>
             </a:extLst>
           </p:cNvPr>
@@ -9232,7 +9170,7 @@
           <p:nvPr/>
         </p:nvPicPr>
         <p:blipFill>
-          <a:blip xmlns:r="http://schemas.openxmlformats.org/officeDocument/2006/relationships" xmlns:a="http://schemas.openxmlformats.org/drawingml/2006/main" r:embed="R93f2f55e2ae24522"/>
+          <a:blip xmlns:r="http://schemas.openxmlformats.org/officeDocument/2006/relationships" xmlns:a="http://schemas.openxmlformats.org/drawingml/2006/main" r:embed="R8ebc3b427c7442ff"/>
           <a:stretch xmlns:a="http://schemas.openxmlformats.org/drawingml/2006/main"/>
         </p:blipFill>
         <p:spPr>
@@ -9252,7 +9190,7 @@
           <p:cNvPr id="37" name="image-caption-426">
             <a:extLst xmlns:a="http://schemas.openxmlformats.org/drawingml/2006/main">
               <a:ext uri="{FF2B5EF4-FFF2-40B4-BE49-F238E27FC236}">
-                <a16:creationId xmlns:a16="http://schemas.microsoft.com/office/drawing/2014/main" id="{86985AC7-06D3-4917-B99D-5BAF6A1D2AC3}"/>
+                <a16:creationId xmlns:a16="http://schemas.microsoft.com/office/drawing/2014/main" id="{4143FB9C-6559-45CA-BB1D-0EB36B3DF2DA}"/>
               </a:ext>
             </a:extLst>
           </p:cNvPr>
@@ -9312,7 +9250,7 @@
     </p:spTree>
     <p:extLst>
       <p:ext uri="{BB962C8B-B14F-4D97-AF65-F5344CB8AC3E}">
-        <p14:creationId xmlns:p14="http://schemas.microsoft.com/office/powerpoint/2010/main" val="2056349240"/>
+        <p14:creationId xmlns:p14="http://schemas.microsoft.com/office/powerpoint/2010/main" val="516232764"/>
       </p:ext>
     </p:extLst>
   </p:cSld>
@@ -9343,7 +9281,7 @@
           <p:cNvPr id="9" name="running-label">
             <a:extLst xmlns:a="http://schemas.openxmlformats.org/drawingml/2006/main">
               <a:ext uri="{FF2B5EF4-FFF2-40B4-BE49-F238E27FC236}">
-                <a16:creationId xmlns:a16="http://schemas.microsoft.com/office/drawing/2014/main" id="{CD971789-5269-497E-80A7-8EBE31F8F1F1}"/>
+                <a16:creationId xmlns:a16="http://schemas.microsoft.com/office/drawing/2014/main" id="{BA90B740-9729-4DFF-80D1-B14C9133B535}"/>
               </a:ext>
             </a:extLst>
           </p:cNvPr>
@@ -9405,7 +9343,7 @@
           <p:cNvPr id="2" name="page-number">
             <a:extLst xmlns:a="http://schemas.openxmlformats.org/drawingml/2006/main">
               <a:ext uri="{FF2B5EF4-FFF2-40B4-BE49-F238E27FC236}">
-                <a16:creationId xmlns:a16="http://schemas.microsoft.com/office/drawing/2014/main" id="{E2EB24E4-DAB2-4B9B-BE7F-C7DEAD02F91C}"/>
+                <a16:creationId xmlns:a16="http://schemas.microsoft.com/office/drawing/2014/main" id="{B5EAAE15-1D02-4D25-A5CE-BCADBBE6C0F0}"/>
               </a:ext>
             </a:extLst>
           </p:cNvPr>
@@ -9467,7 +9405,7 @@
           <p:cNvPr id="3" name="header-rule">
             <a:extLst xmlns:a="http://schemas.openxmlformats.org/drawingml/2006/main">
               <a:ext uri="{FF2B5EF4-FFF2-40B4-BE49-F238E27FC236}">
-                <a16:creationId xmlns:a16="http://schemas.microsoft.com/office/drawing/2014/main" id="{24132F12-C032-4DE3-93F3-E243F4E8E1C0}"/>
+                <a16:creationId xmlns:a16="http://schemas.microsoft.com/office/drawing/2014/main" id="{ED32C754-81CA-4900-BD62-B06853AC9528}"/>
               </a:ext>
             </a:extLst>
           </p:cNvPr>
@@ -9498,7 +9436,7 @@
           <p:cNvPr id="4" name="slide-title">
             <a:extLst xmlns:a="http://schemas.openxmlformats.org/drawingml/2006/main">
               <a:ext uri="{FF2B5EF4-FFF2-40B4-BE49-F238E27FC236}">
-                <a16:creationId xmlns:a16="http://schemas.microsoft.com/office/drawing/2014/main" id="{DB83454B-F54E-48F3-8190-3564C44192C2}"/>
+                <a16:creationId xmlns:a16="http://schemas.microsoft.com/office/drawing/2014/main" id="{F621D32E-B5DE-47EE-A92F-C3401D9BD8C9}"/>
               </a:ext>
             </a:extLst>
           </p:cNvPr>
@@ -9564,7 +9502,7 @@
           <p:nvPr/>
         </p:nvPicPr>
         <p:blipFill>
-          <a:blip xmlns:r="http://schemas.openxmlformats.org/officeDocument/2006/relationships" xmlns:a="http://schemas.openxmlformats.org/drawingml/2006/main" r:embed="R6029080ad77549b3"/>
+          <a:blip xmlns:r="http://schemas.openxmlformats.org/officeDocument/2006/relationships" xmlns:a="http://schemas.openxmlformats.org/drawingml/2006/main" r:embed="R24c32311650f40be"/>
           <a:stretch xmlns:a="http://schemas.openxmlformats.org/drawingml/2006/main"/>
         </p:blipFill>
         <p:spPr>
@@ -9584,7 +9522,7 @@
           <p:cNvPr id="6" name="image-caption-140">
             <a:extLst xmlns:a="http://schemas.openxmlformats.org/drawingml/2006/main">
               <a:ext uri="{FF2B5EF4-FFF2-40B4-BE49-F238E27FC236}">
-                <a16:creationId xmlns:a16="http://schemas.microsoft.com/office/drawing/2014/main" id="{2A9D5CBD-9A32-4616-8B23-5DCD8260F556}"/>
+                <a16:creationId xmlns:a16="http://schemas.microsoft.com/office/drawing/2014/main" id="{5BACDCB8-D761-4E52-8382-4FADA298E7E8}"/>
               </a:ext>
             </a:extLst>
           </p:cNvPr>
@@ -9650,7 +9588,7 @@
           <p:nvPr/>
         </p:nvPicPr>
         <p:blipFill>
-          <a:blip xmlns:r="http://schemas.openxmlformats.org/officeDocument/2006/relationships" xmlns:a="http://schemas.openxmlformats.org/drawingml/2006/main" r:embed="R0e784c99b28848ed"/>
+          <a:blip xmlns:r="http://schemas.openxmlformats.org/officeDocument/2006/relationships" xmlns:a="http://schemas.openxmlformats.org/drawingml/2006/main" r:embed="Rb93aadf0d62e4a5d"/>
           <a:stretch xmlns:a="http://schemas.openxmlformats.org/drawingml/2006/main"/>
         </p:blipFill>
         <p:spPr>
@@ -9670,7 +9608,7 @@
           <p:cNvPr id="8" name="image-caption-524">
             <a:extLst xmlns:a="http://schemas.openxmlformats.org/drawingml/2006/main">
               <a:ext uri="{FF2B5EF4-FFF2-40B4-BE49-F238E27FC236}">
-                <a16:creationId xmlns:a16="http://schemas.microsoft.com/office/drawing/2014/main" id="{7827E559-9676-4454-8235-EDFD7B346AD0}"/>
+                <a16:creationId xmlns:a16="http://schemas.microsoft.com/office/drawing/2014/main" id="{3A2817FD-0674-4A53-84AE-04DBEEBCCA90}"/>
               </a:ext>
             </a:extLst>
           </p:cNvPr>
@@ -9730,7 +9668,7 @@
     </p:spTree>
     <p:extLst>
       <p:ext uri="{BB962C8B-B14F-4D97-AF65-F5344CB8AC3E}">
-        <p14:creationId xmlns:p14="http://schemas.microsoft.com/office/powerpoint/2010/main" val="1990111449"/>
+        <p14:creationId xmlns:p14="http://schemas.microsoft.com/office/powerpoint/2010/main" val="1365758294"/>
       </p:ext>
     </p:extLst>
   </p:cSld>
@@ -9761,7 +9699,7 @@
           <p:cNvPr id="45" name="running-label">
             <a:extLst xmlns:a="http://schemas.openxmlformats.org/drawingml/2006/main">
               <a:ext uri="{FF2B5EF4-FFF2-40B4-BE49-F238E27FC236}">
-                <a16:creationId xmlns:a16="http://schemas.microsoft.com/office/drawing/2014/main" id="{0CB5A9E3-0C9A-4A14-959B-045C4C03EC11}"/>
+                <a16:creationId xmlns:a16="http://schemas.microsoft.com/office/drawing/2014/main" id="{275D85BD-7D4F-4725-BC1A-3DBCAA21CE76}"/>
               </a:ext>
             </a:extLst>
           </p:cNvPr>
@@ -9823,7 +9761,7 @@
           <p:cNvPr id="2" name="page-number">
             <a:extLst xmlns:a="http://schemas.openxmlformats.org/drawingml/2006/main">
               <a:ext uri="{FF2B5EF4-FFF2-40B4-BE49-F238E27FC236}">
-                <a16:creationId xmlns:a16="http://schemas.microsoft.com/office/drawing/2014/main" id="{8125510F-6837-4A31-8313-A9E4C60124DD}"/>
+                <a16:creationId xmlns:a16="http://schemas.microsoft.com/office/drawing/2014/main" id="{9B1A6EB6-E7B3-4B05-8C49-FACABCFEAB91}"/>
               </a:ext>
             </a:extLst>
           </p:cNvPr>
@@ -9885,7 +9823,7 @@
           <p:cNvPr id="3" name="header-rule">
             <a:extLst xmlns:a="http://schemas.openxmlformats.org/drawingml/2006/main">
               <a:ext uri="{FF2B5EF4-FFF2-40B4-BE49-F238E27FC236}">
-                <a16:creationId xmlns:a16="http://schemas.microsoft.com/office/drawing/2014/main" id="{377C8DDA-C1BC-4F74-AFA5-9FD54B9C64BB}"/>
+                <a16:creationId xmlns:a16="http://schemas.microsoft.com/office/drawing/2014/main" id="{6268DC42-3F51-4AFC-948C-64F2AC5072F1}"/>
               </a:ext>
             </a:extLst>
           </p:cNvPr>
@@ -9916,7 +9854,7 @@
           <p:cNvPr id="4" name="slide-title">
             <a:extLst xmlns:a="http://schemas.openxmlformats.org/drawingml/2006/main">
               <a:ext uri="{FF2B5EF4-FFF2-40B4-BE49-F238E27FC236}">
-                <a16:creationId xmlns:a16="http://schemas.microsoft.com/office/drawing/2014/main" id="{55D38AF8-ACDD-4909-A96B-E629B8700AAB}"/>
+                <a16:creationId xmlns:a16="http://schemas.microsoft.com/office/drawing/2014/main" id="{537659DC-05F9-4FE5-B255-C7C704832556}"/>
               </a:ext>
             </a:extLst>
           </p:cNvPr>
@@ -9982,7 +9920,7 @@
           <p:nvPr/>
         </p:nvPicPr>
         <p:blipFill>
-          <a:blip xmlns:r="http://schemas.openxmlformats.org/officeDocument/2006/relationships" xmlns:a="http://schemas.openxmlformats.org/drawingml/2006/main" r:embed="Red36327a14ba4a0a"/>
+          <a:blip xmlns:r="http://schemas.openxmlformats.org/officeDocument/2006/relationships" xmlns:a="http://schemas.openxmlformats.org/drawingml/2006/main" r:embed="Rb2a778a5232143c6"/>
           <a:stretch xmlns:a="http://schemas.openxmlformats.org/drawingml/2006/main"/>
         </p:blipFill>
         <p:spPr>
@@ -10002,7 +9940,7 @@
           <p:cNvPr id="6" name="image-caption-140">
             <a:extLst xmlns:a="http://schemas.openxmlformats.org/drawingml/2006/main">
               <a:ext uri="{FF2B5EF4-FFF2-40B4-BE49-F238E27FC236}">
-                <a16:creationId xmlns:a16="http://schemas.microsoft.com/office/drawing/2014/main" id="{3C6BBA28-26D5-42CC-AF11-715E70011099}"/>
+                <a16:creationId xmlns:a16="http://schemas.microsoft.com/office/drawing/2014/main" id="{4824738F-F13F-439A-B6EE-C3256C1828C1}"/>
               </a:ext>
             </a:extLst>
           </p:cNvPr>
@@ -10064,7 +10002,7 @@
           <p:cNvPr id="7" name="subheading-524">
             <a:extLst xmlns:a="http://schemas.openxmlformats.org/drawingml/2006/main">
               <a:ext uri="{FF2B5EF4-FFF2-40B4-BE49-F238E27FC236}">
-                <a16:creationId xmlns:a16="http://schemas.microsoft.com/office/drawing/2014/main" id="{F2406F23-89CB-446B-B778-AF9E960CA07C}"/>
+                <a16:creationId xmlns:a16="http://schemas.microsoft.com/office/drawing/2014/main" id="{96B975A0-5E9D-407E-8A4C-1C36A9A520F5}"/>
               </a:ext>
             </a:extLst>
           </p:cNvPr>
@@ -10126,7 +10064,7 @@
           <p:cNvPr id="8" name="table-cell-578-0-0">
             <a:extLst xmlns:a="http://schemas.openxmlformats.org/drawingml/2006/main">
               <a:ext uri="{FF2B5EF4-FFF2-40B4-BE49-F238E27FC236}">
-                <a16:creationId xmlns:a16="http://schemas.microsoft.com/office/drawing/2014/main" id="{8E4337B0-4F5D-4185-B485-2DB6185F9167}"/>
+                <a16:creationId xmlns:a16="http://schemas.microsoft.com/office/drawing/2014/main" id="{80F19F43-122B-46D9-ABE8-4F349B674440}"/>
               </a:ext>
             </a:extLst>
           </p:cNvPr>
@@ -10159,7 +10097,7 @@
           <p:cNvPr id="9" name="table-text-578-0-0">
             <a:extLst xmlns:a="http://schemas.openxmlformats.org/drawingml/2006/main">
               <a:ext uri="{FF2B5EF4-FFF2-40B4-BE49-F238E27FC236}">
-                <a16:creationId xmlns:a16="http://schemas.microsoft.com/office/drawing/2014/main" id="{8990D072-33D5-4721-9080-DB82E7F40C03}"/>
+                <a16:creationId xmlns:a16="http://schemas.microsoft.com/office/drawing/2014/main" id="{169A2889-FC50-4182-84A6-0AFBD8BA98AF}"/>
               </a:ext>
             </a:extLst>
           </p:cNvPr>
@@ -10221,7 +10159,7 @@
           <p:cNvPr id="10" name="table-cell-578-0-1">
             <a:extLst xmlns:a="http://schemas.openxmlformats.org/drawingml/2006/main">
               <a:ext uri="{FF2B5EF4-FFF2-40B4-BE49-F238E27FC236}">
-                <a16:creationId xmlns:a16="http://schemas.microsoft.com/office/drawing/2014/main" id="{31332730-639A-42DD-8A2D-29CF530D4916}"/>
+                <a16:creationId xmlns:a16="http://schemas.microsoft.com/office/drawing/2014/main" id="{7056463B-B12C-40D7-8A82-127C1A88F5B9}"/>
               </a:ext>
             </a:extLst>
           </p:cNvPr>
@@ -10254,7 +10192,7 @@
           <p:cNvPr id="11" name="table-text-578-0-1">
             <a:extLst xmlns:a="http://schemas.openxmlformats.org/drawingml/2006/main">
               <a:ext uri="{FF2B5EF4-FFF2-40B4-BE49-F238E27FC236}">
-                <a16:creationId xmlns:a16="http://schemas.microsoft.com/office/drawing/2014/main" id="{6AB7C106-F8BA-4388-BFDB-5EE5E8354AB1}"/>
+                <a16:creationId xmlns:a16="http://schemas.microsoft.com/office/drawing/2014/main" id="{D83125F1-8837-44DA-A1EE-46FBA615D59F}"/>
               </a:ext>
             </a:extLst>
           </p:cNvPr>
@@ -10316,7 +10254,7 @@
           <p:cNvPr id="12" name="table-cell-578-0-2">
             <a:extLst xmlns:a="http://schemas.openxmlformats.org/drawingml/2006/main">
               <a:ext uri="{FF2B5EF4-FFF2-40B4-BE49-F238E27FC236}">
-                <a16:creationId xmlns:a16="http://schemas.microsoft.com/office/drawing/2014/main" id="{7CF89653-00DC-4FF3-9D4D-67550CB24CCE}"/>
+                <a16:creationId xmlns:a16="http://schemas.microsoft.com/office/drawing/2014/main" id="{85183A8A-4B5B-4DEF-9BEC-7C4B9CBE87DC}"/>
               </a:ext>
             </a:extLst>
           </p:cNvPr>
@@ -10349,7 +10287,7 @@
           <p:cNvPr id="13" name="table-text-578-0-2">
             <a:extLst xmlns:a="http://schemas.openxmlformats.org/drawingml/2006/main">
               <a:ext uri="{FF2B5EF4-FFF2-40B4-BE49-F238E27FC236}">
-                <a16:creationId xmlns:a16="http://schemas.microsoft.com/office/drawing/2014/main" id="{CFD36D9F-EA96-461C-9253-321A34E2F539}"/>
+                <a16:creationId xmlns:a16="http://schemas.microsoft.com/office/drawing/2014/main" id="{9CD99561-177C-4D55-9699-0C80759ED6B1}"/>
               </a:ext>
             </a:extLst>
           </p:cNvPr>
@@ -10411,7 +10349,7 @@
           <p:cNvPr id="14" name="table-cell-578-1-0">
             <a:extLst xmlns:a="http://schemas.openxmlformats.org/drawingml/2006/main">
               <a:ext uri="{FF2B5EF4-FFF2-40B4-BE49-F238E27FC236}">
-                <a16:creationId xmlns:a16="http://schemas.microsoft.com/office/drawing/2014/main" id="{43C64762-D607-438E-A8DD-8E4198859178}"/>
+                <a16:creationId xmlns:a16="http://schemas.microsoft.com/office/drawing/2014/main" id="{7FFCCF85-43EE-4B8E-968C-68DCC1AB6C4A}"/>
               </a:ext>
             </a:extLst>
           </p:cNvPr>
@@ -10444,7 +10382,7 @@
           <p:cNvPr id="15" name="table-text-578-1-0">
             <a:extLst xmlns:a="http://schemas.openxmlformats.org/drawingml/2006/main">
               <a:ext uri="{FF2B5EF4-FFF2-40B4-BE49-F238E27FC236}">
-                <a16:creationId xmlns:a16="http://schemas.microsoft.com/office/drawing/2014/main" id="{FE7A765F-6BF2-4E7F-81DC-122126D3D8BC}"/>
+                <a16:creationId xmlns:a16="http://schemas.microsoft.com/office/drawing/2014/main" id="{084CD465-3B19-4536-9252-051E4DF95C33}"/>
               </a:ext>
             </a:extLst>
           </p:cNvPr>
@@ -10506,7 +10444,7 @@
           <p:cNvPr id="16" name="table-cell-578-1-1">
             <a:extLst xmlns:a="http://schemas.openxmlformats.org/drawingml/2006/main">
               <a:ext uri="{FF2B5EF4-FFF2-40B4-BE49-F238E27FC236}">
-                <a16:creationId xmlns:a16="http://schemas.microsoft.com/office/drawing/2014/main" id="{046DA95E-E02A-46E6-91F1-95C31BABB3A1}"/>
+                <a16:creationId xmlns:a16="http://schemas.microsoft.com/office/drawing/2014/main" id="{76999E7B-680F-4069-AFC7-8A4ED82270DE}"/>
               </a:ext>
             </a:extLst>
           </p:cNvPr>
@@ -10539,7 +10477,7 @@
           <p:cNvPr id="17" name="table-text-578-1-1">
             <a:extLst xmlns:a="http://schemas.openxmlformats.org/drawingml/2006/main">
               <a:ext uri="{FF2B5EF4-FFF2-40B4-BE49-F238E27FC236}">
-                <a16:creationId xmlns:a16="http://schemas.microsoft.com/office/drawing/2014/main" id="{547FFBF0-838A-4A69-A7D9-12C5411EA22E}"/>
+                <a16:creationId xmlns:a16="http://schemas.microsoft.com/office/drawing/2014/main" id="{E78EDB2C-4A32-489E-A2C8-C25F05305143}"/>
               </a:ext>
             </a:extLst>
           </p:cNvPr>
@@ -10601,7 +10539,7 @@
           <p:cNvPr id="18" name="table-cell-578-1-2">
             <a:extLst xmlns:a="http://schemas.openxmlformats.org/drawingml/2006/main">
               <a:ext uri="{FF2B5EF4-FFF2-40B4-BE49-F238E27FC236}">
-                <a16:creationId xmlns:a16="http://schemas.microsoft.com/office/drawing/2014/main" id="{975A6128-C2EA-4ECA-880A-D025243C3EE4}"/>
+                <a16:creationId xmlns:a16="http://schemas.microsoft.com/office/drawing/2014/main" id="{33B8ED01-91E2-4723-A254-76E46DACFD1D}"/>
               </a:ext>
             </a:extLst>
           </p:cNvPr>
@@ -10634,7 +10572,7 @@
           <p:cNvPr id="19" name="table-text-578-1-2">
             <a:extLst xmlns:a="http://schemas.openxmlformats.org/drawingml/2006/main">
               <a:ext uri="{FF2B5EF4-FFF2-40B4-BE49-F238E27FC236}">
-                <a16:creationId xmlns:a16="http://schemas.microsoft.com/office/drawing/2014/main" id="{DEF9F1A6-FF06-4F4C-9A33-2EFFE52C0776}"/>
+                <a16:creationId xmlns:a16="http://schemas.microsoft.com/office/drawing/2014/main" id="{6A6482EC-EF13-4881-9DB0-8A6501A508B7}"/>
               </a:ext>
             </a:extLst>
           </p:cNvPr>
@@ -10696,7 +10634,7 @@
           <p:cNvPr id="20" name="table-cell-578-2-0">
             <a:extLst xmlns:a="http://schemas.openxmlformats.org/drawingml/2006/main">
               <a:ext uri="{FF2B5EF4-FFF2-40B4-BE49-F238E27FC236}">
-                <a16:creationId xmlns:a16="http://schemas.microsoft.com/office/drawing/2014/main" id="{FE30FF46-BF84-4677-8A8C-475A11096B76}"/>
+                <a16:creationId xmlns:a16="http://schemas.microsoft.com/office/drawing/2014/main" id="{5FE8919A-53B1-45C1-9F54-D819AD6F0D35}"/>
               </a:ext>
             </a:extLst>
           </p:cNvPr>
@@ -10729,7 +10667,7 @@
           <p:cNvPr id="21" name="table-text-578-2-0">
             <a:extLst xmlns:a="http://schemas.openxmlformats.org/drawingml/2006/main">
               <a:ext uri="{FF2B5EF4-FFF2-40B4-BE49-F238E27FC236}">
-                <a16:creationId xmlns:a16="http://schemas.microsoft.com/office/drawing/2014/main" id="{D839FAC9-DEFC-4397-903D-5038B9C95320}"/>
+                <a16:creationId xmlns:a16="http://schemas.microsoft.com/office/drawing/2014/main" id="{B951895E-EB9E-40CC-86B3-F86C8B023D56}"/>
               </a:ext>
             </a:extLst>
           </p:cNvPr>
@@ -10791,7 +10729,7 @@
           <p:cNvPr id="22" name="table-cell-578-2-1">
             <a:extLst xmlns:a="http://schemas.openxmlformats.org/drawingml/2006/main">
               <a:ext uri="{FF2B5EF4-FFF2-40B4-BE49-F238E27FC236}">
-                <a16:creationId xmlns:a16="http://schemas.microsoft.com/office/drawing/2014/main" id="{9380877C-93F7-40CC-AA07-52B8C58F8CA3}"/>
+                <a16:creationId xmlns:a16="http://schemas.microsoft.com/office/drawing/2014/main" id="{3C3C5D4B-8D90-48A3-BDEB-E578AA711BAA}"/>
               </a:ext>
             </a:extLst>
           </p:cNvPr>
@@ -10824,7 +10762,7 @@
           <p:cNvPr id="23" name="table-text-578-2-1">
             <a:extLst xmlns:a="http://schemas.openxmlformats.org/drawingml/2006/main">
               <a:ext uri="{FF2B5EF4-FFF2-40B4-BE49-F238E27FC236}">
-                <a16:creationId xmlns:a16="http://schemas.microsoft.com/office/drawing/2014/main" id="{16E13F82-C7F7-442A-AFDA-8BC4E3787AC5}"/>
+                <a16:creationId xmlns:a16="http://schemas.microsoft.com/office/drawing/2014/main" id="{6777F150-1554-443F-A99C-88849139607F}"/>
               </a:ext>
             </a:extLst>
           </p:cNvPr>
@@ -10886,7 +10824,7 @@
           <p:cNvPr id="24" name="table-cell-578-2-2">
             <a:extLst xmlns:a="http://schemas.openxmlformats.org/drawingml/2006/main">
               <a:ext uri="{FF2B5EF4-FFF2-40B4-BE49-F238E27FC236}">
-                <a16:creationId xmlns:a16="http://schemas.microsoft.com/office/drawing/2014/main" id="{9CDF64A6-326A-4E73-8482-057C65567073}"/>
+                <a16:creationId xmlns:a16="http://schemas.microsoft.com/office/drawing/2014/main" id="{DDC165AE-7913-4705-93F1-729EF0ECC04E}"/>
               </a:ext>
             </a:extLst>
           </p:cNvPr>
@@ -10919,7 +10857,7 @@
           <p:cNvPr id="25" name="table-text-578-2-2">
             <a:extLst xmlns:a="http://schemas.openxmlformats.org/drawingml/2006/main">
               <a:ext uri="{FF2B5EF4-FFF2-40B4-BE49-F238E27FC236}">
-                <a16:creationId xmlns:a16="http://schemas.microsoft.com/office/drawing/2014/main" id="{1329B1A4-DA41-4EBF-8D07-88BE3BB9E411}"/>
+                <a16:creationId xmlns:a16="http://schemas.microsoft.com/office/drawing/2014/main" id="{F463ECB5-1F40-4AD0-8127-059B38C68E7C}"/>
               </a:ext>
             </a:extLst>
           </p:cNvPr>
@@ -10981,7 +10919,7 @@
           <p:cNvPr id="26" name="table-cell-578-3-0">
             <a:extLst xmlns:a="http://schemas.openxmlformats.org/drawingml/2006/main">
               <a:ext uri="{FF2B5EF4-FFF2-40B4-BE49-F238E27FC236}">
-                <a16:creationId xmlns:a16="http://schemas.microsoft.com/office/drawing/2014/main" id="{0D73CE7B-6ED4-4E3E-9789-00F2CBBE323F}"/>
+                <a16:creationId xmlns:a16="http://schemas.microsoft.com/office/drawing/2014/main" id="{87965AC0-9B49-4B01-9069-657B20E13B05}"/>
               </a:ext>
             </a:extLst>
           </p:cNvPr>
@@ -11014,7 +10952,7 @@
           <p:cNvPr id="27" name="table-text-578-3-0">
             <a:extLst xmlns:a="http://schemas.openxmlformats.org/drawingml/2006/main">
               <a:ext uri="{FF2B5EF4-FFF2-40B4-BE49-F238E27FC236}">
-                <a16:creationId xmlns:a16="http://schemas.microsoft.com/office/drawing/2014/main" id="{236F723A-2649-497D-A666-B239F3FE7089}"/>
+                <a16:creationId xmlns:a16="http://schemas.microsoft.com/office/drawing/2014/main" id="{9C234BB2-9B95-4FB0-B60F-62645B3489BF}"/>
               </a:ext>
             </a:extLst>
           </p:cNvPr>
@@ -11076,7 +11014,7 @@
           <p:cNvPr id="28" name="table-cell-578-3-1">
             <a:extLst xmlns:a="http://schemas.openxmlformats.org/drawingml/2006/main">
               <a:ext uri="{FF2B5EF4-FFF2-40B4-BE49-F238E27FC236}">
-                <a16:creationId xmlns:a16="http://schemas.microsoft.com/office/drawing/2014/main" id="{7D0D75C4-279C-47A7-A498-DD3BEA2C219D}"/>
+                <a16:creationId xmlns:a16="http://schemas.microsoft.com/office/drawing/2014/main" id="{DDD943D4-48DF-42D8-83C9-879287682064}"/>
               </a:ext>
             </a:extLst>
           </p:cNvPr>
@@ -11109,7 +11047,7 @@
           <p:cNvPr id="29" name="table-text-578-3-1">
             <a:extLst xmlns:a="http://schemas.openxmlformats.org/drawingml/2006/main">
               <a:ext uri="{FF2B5EF4-FFF2-40B4-BE49-F238E27FC236}">
-                <a16:creationId xmlns:a16="http://schemas.microsoft.com/office/drawing/2014/main" id="{4F572152-947E-42F9-B50A-1AFA6049FAA7}"/>
+                <a16:creationId xmlns:a16="http://schemas.microsoft.com/office/drawing/2014/main" id="{F1DC85EC-398C-491F-9C9E-6BF9360544E1}"/>
               </a:ext>
             </a:extLst>
           </p:cNvPr>
@@ -11171,7 +11109,7 @@
           <p:cNvPr id="30" name="table-cell-578-3-2">
             <a:extLst xmlns:a="http://schemas.openxmlformats.org/drawingml/2006/main">
               <a:ext uri="{FF2B5EF4-FFF2-40B4-BE49-F238E27FC236}">
-                <a16:creationId xmlns:a16="http://schemas.microsoft.com/office/drawing/2014/main" id="{4E24AED6-CC45-44E3-9A7A-E9B8FB78AA44}"/>
+                <a16:creationId xmlns:a16="http://schemas.microsoft.com/office/drawing/2014/main" id="{40FB4F8C-96FB-461F-A444-D2615433EBB5}"/>
               </a:ext>
             </a:extLst>
           </p:cNvPr>
@@ -11204,7 +11142,7 @@
           <p:cNvPr id="31" name="table-text-578-3-2">
             <a:extLst xmlns:a="http://schemas.openxmlformats.org/drawingml/2006/main">
               <a:ext uri="{FF2B5EF4-FFF2-40B4-BE49-F238E27FC236}">
-                <a16:creationId xmlns:a16="http://schemas.microsoft.com/office/drawing/2014/main" id="{C66F871A-DB92-49BB-8C1D-A0F493FB5187}"/>
+                <a16:creationId xmlns:a16="http://schemas.microsoft.com/office/drawing/2014/main" id="{94B45E5B-EA57-481B-B386-10BCE46437A2}"/>
               </a:ext>
             </a:extLst>
           </p:cNvPr>
@@ -11266,7 +11204,7 @@
           <p:cNvPr id="32" name="table-cell-578-4-0">
             <a:extLst xmlns:a="http://schemas.openxmlformats.org/drawingml/2006/main">
               <a:ext uri="{FF2B5EF4-FFF2-40B4-BE49-F238E27FC236}">
-                <a16:creationId xmlns:a16="http://schemas.microsoft.com/office/drawing/2014/main" id="{A90E93C2-B512-433E-8718-08E38F387A96}"/>
+                <a16:creationId xmlns:a16="http://schemas.microsoft.com/office/drawing/2014/main" id="{DC97FECB-404F-43FA-A5A8-F6251CF9DC3E}"/>
               </a:ext>
             </a:extLst>
           </p:cNvPr>
@@ -11299,7 +11237,7 @@
           <p:cNvPr id="33" name="table-text-578-4-0">
             <a:extLst xmlns:a="http://schemas.openxmlformats.org/drawingml/2006/main">
               <a:ext uri="{FF2B5EF4-FFF2-40B4-BE49-F238E27FC236}">
-                <a16:creationId xmlns:a16="http://schemas.microsoft.com/office/drawing/2014/main" id="{0E016AE5-B7B3-4D4B-B3B2-C9036BFD4F78}"/>
+                <a16:creationId xmlns:a16="http://schemas.microsoft.com/office/drawing/2014/main" id="{7767FA0A-42CE-4C41-B587-B5B00C81BC71}"/>
               </a:ext>
             </a:extLst>
           </p:cNvPr>
@@ -11361,7 +11299,7 @@
           <p:cNvPr id="34" name="table-cell-578-4-1">
             <a:extLst xmlns:a="http://schemas.openxmlformats.org/drawingml/2006/main">
               <a:ext uri="{FF2B5EF4-FFF2-40B4-BE49-F238E27FC236}">
-                <a16:creationId xmlns:a16="http://schemas.microsoft.com/office/drawing/2014/main" id="{BA6A6A07-CD95-454F-B88E-B04652CDF4A7}"/>
+                <a16:creationId xmlns:a16="http://schemas.microsoft.com/office/drawing/2014/main" id="{ACF85BEA-8A18-4C21-9A9E-4A39518F1B70}"/>
               </a:ext>
             </a:extLst>
           </p:cNvPr>
@@ -11394,7 +11332,7 @@
           <p:cNvPr id="35" name="table-text-578-4-1">
             <a:extLst xmlns:a="http://schemas.openxmlformats.org/drawingml/2006/main">
               <a:ext uri="{FF2B5EF4-FFF2-40B4-BE49-F238E27FC236}">
-                <a16:creationId xmlns:a16="http://schemas.microsoft.com/office/drawing/2014/main" id="{130CFA5C-7FF2-4519-AA81-40DEB9E346BA}"/>
+                <a16:creationId xmlns:a16="http://schemas.microsoft.com/office/drawing/2014/main" id="{970BE92E-9AE0-4F20-BB28-0047687710C4}"/>
               </a:ext>
             </a:extLst>
           </p:cNvPr>
@@ -11456,7 +11394,7 @@
           <p:cNvPr id="36" name="table-cell-578-4-2">
             <a:extLst xmlns:a="http://schemas.openxmlformats.org/drawingml/2006/main">
               <a:ext uri="{FF2B5EF4-FFF2-40B4-BE49-F238E27FC236}">
-                <a16:creationId xmlns:a16="http://schemas.microsoft.com/office/drawing/2014/main" id="{6B8165DD-3B62-4A4D-9C66-7B14B7EAA58E}"/>
+                <a16:creationId xmlns:a16="http://schemas.microsoft.com/office/drawing/2014/main" id="{ACED97F2-52C0-4C00-9C50-77A8F142EC6C}"/>
               </a:ext>
             </a:extLst>
           </p:cNvPr>
@@ -11489,7 +11427,7 @@
           <p:cNvPr id="37" name="table-text-578-4-2">
             <a:extLst xmlns:a="http://schemas.openxmlformats.org/drawingml/2006/main">
               <a:ext uri="{FF2B5EF4-FFF2-40B4-BE49-F238E27FC236}">
-                <a16:creationId xmlns:a16="http://schemas.microsoft.com/office/drawing/2014/main" id="{9C5A12D6-A87D-4C23-B3FB-A5694C1664DD}"/>
+                <a16:creationId xmlns:a16="http://schemas.microsoft.com/office/drawing/2014/main" id="{B7288D46-65A1-4171-912A-35041DC49C9A}"/>
               </a:ext>
             </a:extLst>
           </p:cNvPr>
@@ -11551,7 +11489,7 @@
           <p:cNvPr id="38" name="table-cell-578-5-0">
             <a:extLst xmlns:a="http://schemas.openxmlformats.org/drawingml/2006/main">
               <a:ext uri="{FF2B5EF4-FFF2-40B4-BE49-F238E27FC236}">
-                <a16:creationId xmlns:a16="http://schemas.microsoft.com/office/drawing/2014/main" id="{580D9BE7-153E-4E23-9A76-53CF968BDB0B}"/>
+                <a16:creationId xmlns:a16="http://schemas.microsoft.com/office/drawing/2014/main" id="{5A54B0E4-D714-4E5B-8F74-00605AB4A763}"/>
               </a:ext>
             </a:extLst>
           </p:cNvPr>
@@ -11584,7 +11522,7 @@
           <p:cNvPr id="39" name="table-text-578-5-0">
             <a:extLst xmlns:a="http://schemas.openxmlformats.org/drawingml/2006/main">
               <a:ext uri="{FF2B5EF4-FFF2-40B4-BE49-F238E27FC236}">
-                <a16:creationId xmlns:a16="http://schemas.microsoft.com/office/drawing/2014/main" id="{D19A8720-7D8D-41BB-8E3D-510A07ADE3ED}"/>
+                <a16:creationId xmlns:a16="http://schemas.microsoft.com/office/drawing/2014/main" id="{94211E37-5900-4A10-A9BD-9A7C1BA39C33}"/>
               </a:ext>
             </a:extLst>
           </p:cNvPr>
@@ -11646,7 +11584,7 @@
           <p:cNvPr id="40" name="table-cell-578-5-1">
             <a:extLst xmlns:a="http://schemas.openxmlformats.org/drawingml/2006/main">
               <a:ext uri="{FF2B5EF4-FFF2-40B4-BE49-F238E27FC236}">
-                <a16:creationId xmlns:a16="http://schemas.microsoft.com/office/drawing/2014/main" id="{D82F337E-7822-47BC-84E2-8AC080B8C983}"/>
+                <a16:creationId xmlns:a16="http://schemas.microsoft.com/office/drawing/2014/main" id="{A5BFB627-DDE5-42B8-A16B-9D6F2D2ADE06}"/>
               </a:ext>
             </a:extLst>
           </p:cNvPr>
@@ -11679,7 +11617,7 @@
           <p:cNvPr id="41" name="table-text-578-5-1">
             <a:extLst xmlns:a="http://schemas.openxmlformats.org/drawingml/2006/main">
               <a:ext uri="{FF2B5EF4-FFF2-40B4-BE49-F238E27FC236}">
-                <a16:creationId xmlns:a16="http://schemas.microsoft.com/office/drawing/2014/main" id="{BBE9D472-04F3-4B70-B7B6-17A5AA0353F6}"/>
+                <a16:creationId xmlns:a16="http://schemas.microsoft.com/office/drawing/2014/main" id="{42DD09EF-FA2B-43E9-A564-5C13A8D2329A}"/>
               </a:ext>
             </a:extLst>
           </p:cNvPr>
@@ -11741,7 +11679,7 @@
           <p:cNvPr id="42" name="table-cell-578-5-2">
             <a:extLst xmlns:a="http://schemas.openxmlformats.org/drawingml/2006/main">
               <a:ext uri="{FF2B5EF4-FFF2-40B4-BE49-F238E27FC236}">
-                <a16:creationId xmlns:a16="http://schemas.microsoft.com/office/drawing/2014/main" id="{6AD972D2-B77D-4249-BB5C-366F18E6DF0C}"/>
+                <a16:creationId xmlns:a16="http://schemas.microsoft.com/office/drawing/2014/main" id="{24D6069B-4DE6-4D5C-BD69-07C2070A6D52}"/>
               </a:ext>
             </a:extLst>
           </p:cNvPr>
@@ -11774,7 +11712,7 @@
           <p:cNvPr id="43" name="table-text-578-5-2">
             <a:extLst xmlns:a="http://schemas.openxmlformats.org/drawingml/2006/main">
               <a:ext uri="{FF2B5EF4-FFF2-40B4-BE49-F238E27FC236}">
-                <a16:creationId xmlns:a16="http://schemas.microsoft.com/office/drawing/2014/main" id="{5A4299A4-5A9D-4EC3-8230-CC2A84269BB1}"/>
+                <a16:creationId xmlns:a16="http://schemas.microsoft.com/office/drawing/2014/main" id="{523DE0E7-26E0-4855-95E9-B350D8176325}"/>
               </a:ext>
             </a:extLst>
           </p:cNvPr>
@@ -11836,7 +11774,7 @@
           <p:cNvPr id="44" name="paragraph-852">
             <a:extLst xmlns:a="http://schemas.openxmlformats.org/drawingml/2006/main">
               <a:ext uri="{FF2B5EF4-FFF2-40B4-BE49-F238E27FC236}">
-                <a16:creationId xmlns:a16="http://schemas.microsoft.com/office/drawing/2014/main" id="{FCB030E2-81A8-4D38-92DA-F8EBCD32D6F3}"/>
+                <a16:creationId xmlns:a16="http://schemas.microsoft.com/office/drawing/2014/main" id="{83C07C3B-C848-430E-9A59-BAA9F6976886}"/>
               </a:ext>
             </a:extLst>
           </p:cNvPr>
@@ -11896,7 +11834,7 @@
     </p:spTree>
     <p:extLst>
       <p:ext uri="{BB962C8B-B14F-4D97-AF65-F5344CB8AC3E}">
-        <p14:creationId xmlns:p14="http://schemas.microsoft.com/office/powerpoint/2010/main" val="2089170656"/>
+        <p14:creationId xmlns:p14="http://schemas.microsoft.com/office/powerpoint/2010/main" val="1519478569"/>
       </p:ext>
     </p:extLst>
   </p:cSld>
@@ -11927,7 +11865,7 @@
           <p:cNvPr id="11" name="running-label">
             <a:extLst xmlns:a="http://schemas.openxmlformats.org/drawingml/2006/main">
               <a:ext uri="{FF2B5EF4-FFF2-40B4-BE49-F238E27FC236}">
-                <a16:creationId xmlns:a16="http://schemas.microsoft.com/office/drawing/2014/main" id="{572CFD70-1EDE-4A3E-8845-000A6FBADD69}"/>
+                <a16:creationId xmlns:a16="http://schemas.microsoft.com/office/drawing/2014/main" id="{63A3AFBA-004C-43A7-AD10-5F9FF14B2815}"/>
               </a:ext>
             </a:extLst>
           </p:cNvPr>
@@ -11989,7 +11927,7 @@
           <p:cNvPr id="2" name="page-number">
             <a:extLst xmlns:a="http://schemas.openxmlformats.org/drawingml/2006/main">
               <a:ext uri="{FF2B5EF4-FFF2-40B4-BE49-F238E27FC236}">
-                <a16:creationId xmlns:a16="http://schemas.microsoft.com/office/drawing/2014/main" id="{E9E35E55-9B3E-462F-AED1-17CCE7016340}"/>
+                <a16:creationId xmlns:a16="http://schemas.microsoft.com/office/drawing/2014/main" id="{ECFCCF47-F373-45DD-84E6-E4DCB2147E5C}"/>
               </a:ext>
             </a:extLst>
           </p:cNvPr>
@@ -12051,7 +11989,7 @@
           <p:cNvPr id="3" name="header-rule">
             <a:extLst xmlns:a="http://schemas.openxmlformats.org/drawingml/2006/main">
               <a:ext uri="{FF2B5EF4-FFF2-40B4-BE49-F238E27FC236}">
-                <a16:creationId xmlns:a16="http://schemas.microsoft.com/office/drawing/2014/main" id="{F118032F-79CE-4319-899D-26A592E7C4FF}"/>
+                <a16:creationId xmlns:a16="http://schemas.microsoft.com/office/drawing/2014/main" id="{85912500-7A7D-4909-8D68-04C6BFAFB037}"/>
               </a:ext>
             </a:extLst>
           </p:cNvPr>
@@ -12082,7 +12020,7 @@
           <p:cNvPr id="4" name="slide-title">
             <a:extLst xmlns:a="http://schemas.openxmlformats.org/drawingml/2006/main">
               <a:ext uri="{FF2B5EF4-FFF2-40B4-BE49-F238E27FC236}">
-                <a16:creationId xmlns:a16="http://schemas.microsoft.com/office/drawing/2014/main" id="{A7E52301-D11A-4545-8DD1-BBFA042DC31C}"/>
+                <a16:creationId xmlns:a16="http://schemas.microsoft.com/office/drawing/2014/main" id="{11F3336C-3A31-4EE8-8F1D-2701A9C7BFD7}"/>
               </a:ext>
             </a:extLst>
           </p:cNvPr>
@@ -12144,7 +12082,7 @@
           <p:cNvPr id="5" name="subheading-140">
             <a:extLst xmlns:a="http://schemas.openxmlformats.org/drawingml/2006/main">
               <a:ext uri="{FF2B5EF4-FFF2-40B4-BE49-F238E27FC236}">
-                <a16:creationId xmlns:a16="http://schemas.microsoft.com/office/drawing/2014/main" id="{816C332E-B87D-4F4D-AECA-ADF3658108DA}"/>
+                <a16:creationId xmlns:a16="http://schemas.microsoft.com/office/drawing/2014/main" id="{BA33429A-2152-4E8D-AF6F-1A135A60AB21}"/>
               </a:ext>
             </a:extLst>
           </p:cNvPr>
@@ -12206,7 +12144,7 @@
           <p:cNvPr id="6" name="bullets-194">
             <a:extLst xmlns:a="http://schemas.openxmlformats.org/drawingml/2006/main">
               <a:ext uri="{FF2B5EF4-FFF2-40B4-BE49-F238E27FC236}">
-                <a16:creationId xmlns:a16="http://schemas.microsoft.com/office/drawing/2014/main" id="{48BF0041-8123-4FBA-837E-D7B956D477B6}"/>
+                <a16:creationId xmlns:a16="http://schemas.microsoft.com/office/drawing/2014/main" id="{F68D1468-47CB-4BC0-98A0-CEC245A76E3C}"/>
               </a:ext>
             </a:extLst>
           </p:cNvPr>
@@ -12395,7 +12333,7 @@
           <p:nvPr/>
         </p:nvPicPr>
         <p:blipFill>
-          <a:blip xmlns:r="http://schemas.openxmlformats.org/officeDocument/2006/relationships" xmlns:a="http://schemas.openxmlformats.org/drawingml/2006/main" r:embed="Rec054363a669451e"/>
+          <a:blip xmlns:r="http://schemas.openxmlformats.org/officeDocument/2006/relationships" xmlns:a="http://schemas.openxmlformats.org/drawingml/2006/main" r:embed="Rc2d9f38435104ce4"/>
           <a:stretch xmlns:a="http://schemas.openxmlformats.org/drawingml/2006/main"/>
         </p:blipFill>
         <p:spPr>
@@ -12415,7 +12353,7 @@
           <p:cNvPr id="8" name="image-caption-442.24">
             <a:extLst xmlns:a="http://schemas.openxmlformats.org/drawingml/2006/main">
               <a:ext uri="{FF2B5EF4-FFF2-40B4-BE49-F238E27FC236}">
-                <a16:creationId xmlns:a16="http://schemas.microsoft.com/office/drawing/2014/main" id="{DBFF1538-DC53-405C-878C-B0CE16D89356}"/>
+                <a16:creationId xmlns:a16="http://schemas.microsoft.com/office/drawing/2014/main" id="{B4EB4CB9-C2F0-4A09-A9FC-516E21F70A8F}"/>
               </a:ext>
             </a:extLst>
           </p:cNvPr>
@@ -12477,7 +12415,7 @@
           <p:cNvPr id="9" name="subheading-826.24">
             <a:extLst xmlns:a="http://schemas.openxmlformats.org/drawingml/2006/main">
               <a:ext uri="{FF2B5EF4-FFF2-40B4-BE49-F238E27FC236}">
-                <a16:creationId xmlns:a16="http://schemas.microsoft.com/office/drawing/2014/main" id="{B07A3532-3450-4EDC-99A3-023BA70969D6}"/>
+                <a16:creationId xmlns:a16="http://schemas.microsoft.com/office/drawing/2014/main" id="{156D3C30-BDF8-4F15-8CD3-20A6DAB49254}"/>
               </a:ext>
             </a:extLst>
           </p:cNvPr>
@@ -12539,7 +12477,7 @@
           <p:cNvPr id="10" name="paragraph-880.24">
             <a:extLst xmlns:a="http://schemas.openxmlformats.org/drawingml/2006/main">
               <a:ext uri="{FF2B5EF4-FFF2-40B4-BE49-F238E27FC236}">
-                <a16:creationId xmlns:a16="http://schemas.microsoft.com/office/drawing/2014/main" id="{71ACC2AF-CBCE-4A40-B299-4620ACE2DDE6}"/>
+                <a16:creationId xmlns:a16="http://schemas.microsoft.com/office/drawing/2014/main" id="{80140992-5E1E-483A-AC39-66DB16B5F0B5}"/>
               </a:ext>
             </a:extLst>
           </p:cNvPr>
@@ -12599,7 +12537,7 @@
     </p:spTree>
     <p:extLst>
       <p:ext uri="{BB962C8B-B14F-4D97-AF65-F5344CB8AC3E}">
-        <p14:creationId xmlns:p14="http://schemas.microsoft.com/office/powerpoint/2010/main" val="1683020507"/>
+        <p14:creationId xmlns:p14="http://schemas.microsoft.com/office/powerpoint/2010/main" val="2016967398"/>
       </p:ext>
     </p:extLst>
   </p:cSld>
@@ -12630,7 +12568,7 @@
           <p:cNvPr id="9" name="running-label">
             <a:extLst xmlns:a="http://schemas.openxmlformats.org/drawingml/2006/main">
               <a:ext uri="{FF2B5EF4-FFF2-40B4-BE49-F238E27FC236}">
-                <a16:creationId xmlns:a16="http://schemas.microsoft.com/office/drawing/2014/main" id="{14EE7F42-473C-42B8-83F0-84982B7581F2}"/>
+                <a16:creationId xmlns:a16="http://schemas.microsoft.com/office/drawing/2014/main" id="{F7FA8090-6E4A-4D2A-97E7-D9B60305322A}"/>
               </a:ext>
             </a:extLst>
           </p:cNvPr>
@@ -12692,7 +12630,7 @@
           <p:cNvPr id="2" name="page-number">
             <a:extLst xmlns:a="http://schemas.openxmlformats.org/drawingml/2006/main">
               <a:ext uri="{FF2B5EF4-FFF2-40B4-BE49-F238E27FC236}">
-                <a16:creationId xmlns:a16="http://schemas.microsoft.com/office/drawing/2014/main" id="{67C0F23E-1E9C-4DC8-9C02-23E3FEAC2020}"/>
+                <a16:creationId xmlns:a16="http://schemas.microsoft.com/office/drawing/2014/main" id="{29FCF0C5-3CD0-44FE-BCE6-2676E0E0021C}"/>
               </a:ext>
             </a:extLst>
           </p:cNvPr>
@@ -12754,7 +12692,7 @@
           <p:cNvPr id="3" name="header-rule">
             <a:extLst xmlns:a="http://schemas.openxmlformats.org/drawingml/2006/main">
               <a:ext uri="{FF2B5EF4-FFF2-40B4-BE49-F238E27FC236}">
-                <a16:creationId xmlns:a16="http://schemas.microsoft.com/office/drawing/2014/main" id="{4C402B94-F50C-4FF6-9431-E2EB536F5D9B}"/>
+                <a16:creationId xmlns:a16="http://schemas.microsoft.com/office/drawing/2014/main" id="{8A63C970-F9DC-4358-B8CC-AC625EB8C966}"/>
               </a:ext>
             </a:extLst>
           </p:cNvPr>
@@ -12785,7 +12723,7 @@
           <p:cNvPr id="4" name="slide-title">
             <a:extLst xmlns:a="http://schemas.openxmlformats.org/drawingml/2006/main">
               <a:ext uri="{FF2B5EF4-FFF2-40B4-BE49-F238E27FC236}">
-                <a16:creationId xmlns:a16="http://schemas.microsoft.com/office/drawing/2014/main" id="{2F553085-CB82-4171-99BF-611B9942E64B}"/>
+                <a16:creationId xmlns:a16="http://schemas.microsoft.com/office/drawing/2014/main" id="{F8E31A6A-11D2-4280-8A15-380C205179E3}"/>
               </a:ext>
             </a:extLst>
           </p:cNvPr>
@@ -12847,7 +12785,7 @@
           <p:cNvPr id="5" name="subheading-140">
             <a:extLst xmlns:a="http://schemas.openxmlformats.org/drawingml/2006/main">
               <a:ext uri="{FF2B5EF4-FFF2-40B4-BE49-F238E27FC236}">
-                <a16:creationId xmlns:a16="http://schemas.microsoft.com/office/drawing/2014/main" id="{5FA9A735-49D8-424F-AD18-FB1E4D16EC15}"/>
+                <a16:creationId xmlns:a16="http://schemas.microsoft.com/office/drawing/2014/main" id="{ADD6DE9B-E606-4044-A0D0-E1FB93555D1B}"/>
               </a:ext>
             </a:extLst>
           </p:cNvPr>
@@ -12909,7 +12847,7 @@
           <p:cNvPr id="6" name="paragraph-194">
             <a:extLst xmlns:a="http://schemas.openxmlformats.org/drawingml/2006/main">
               <a:ext uri="{FF2B5EF4-FFF2-40B4-BE49-F238E27FC236}">
-                <a16:creationId xmlns:a16="http://schemas.microsoft.com/office/drawing/2014/main" id="{B70DE555-7852-4197-939C-9EFBBA529BE9}"/>
+                <a16:creationId xmlns:a16="http://schemas.microsoft.com/office/drawing/2014/main" id="{029368A4-29F0-4A76-928E-8C53D55BFE67}"/>
               </a:ext>
             </a:extLst>
           </p:cNvPr>
@@ -12975,7 +12913,7 @@
           <p:nvPr/>
         </p:nvPicPr>
         <p:blipFill>
-          <a:blip xmlns:r="http://schemas.openxmlformats.org/officeDocument/2006/relationships" xmlns:a="http://schemas.openxmlformats.org/drawingml/2006/main" r:embed="R2568b3aca43743d1"/>
+          <a:blip xmlns:r="http://schemas.openxmlformats.org/officeDocument/2006/relationships" xmlns:a="http://schemas.openxmlformats.org/drawingml/2006/main" r:embed="R0bf3cb26dac14725"/>
           <a:stretch xmlns:a="http://schemas.openxmlformats.org/drawingml/2006/main"/>
         </p:blipFill>
         <p:spPr>
@@ -12995,7 +12933,7 @@
           <p:cNvPr id="8" name="image-caption-315.28">
             <a:extLst xmlns:a="http://schemas.openxmlformats.org/drawingml/2006/main">
               <a:ext uri="{FF2B5EF4-FFF2-40B4-BE49-F238E27FC236}">
-                <a16:creationId xmlns:a16="http://schemas.microsoft.com/office/drawing/2014/main" id="{AF4C1E98-691E-47D8-AE9F-C147201A3286}"/>
+                <a16:creationId xmlns:a16="http://schemas.microsoft.com/office/drawing/2014/main" id="{B81CFCB2-8601-4639-A263-8410D8C05062}"/>
               </a:ext>
             </a:extLst>
           </p:cNvPr>
@@ -13055,7 +12993,7 @@
     </p:spTree>
     <p:extLst>
       <p:ext uri="{BB962C8B-B14F-4D97-AF65-F5344CB8AC3E}">
-        <p14:creationId xmlns:p14="http://schemas.microsoft.com/office/powerpoint/2010/main" val="410302209"/>
+        <p14:creationId xmlns:p14="http://schemas.microsoft.com/office/powerpoint/2010/main" val="1491807475"/>
       </p:ext>
     </p:extLst>
   </p:cSld>
@@ -13086,7 +13024,7 @@
           <p:cNvPr id="8" name="running-label">
             <a:extLst xmlns:a="http://schemas.openxmlformats.org/drawingml/2006/main">
               <a:ext uri="{FF2B5EF4-FFF2-40B4-BE49-F238E27FC236}">
-                <a16:creationId xmlns:a16="http://schemas.microsoft.com/office/drawing/2014/main" id="{A5D8EFDA-421C-4070-AD10-195105D65483}"/>
+                <a16:creationId xmlns:a16="http://schemas.microsoft.com/office/drawing/2014/main" id="{06B30A6E-EB1A-4294-AA59-1CC5B933E8CE}"/>
               </a:ext>
             </a:extLst>
           </p:cNvPr>
@@ -13148,7 +13086,7 @@
           <p:cNvPr id="2" name="page-number">
             <a:extLst xmlns:a="http://schemas.openxmlformats.org/drawingml/2006/main">
               <a:ext uri="{FF2B5EF4-FFF2-40B4-BE49-F238E27FC236}">
-                <a16:creationId xmlns:a16="http://schemas.microsoft.com/office/drawing/2014/main" id="{326B8E8D-B994-4835-8CBD-29A7B61F57A2}"/>
+                <a16:creationId xmlns:a16="http://schemas.microsoft.com/office/drawing/2014/main" id="{A2732563-4BE0-4017-BD7C-03410FBB3A53}"/>
               </a:ext>
             </a:extLst>
           </p:cNvPr>
@@ -13210,7 +13148,7 @@
           <p:cNvPr id="3" name="header-rule">
             <a:extLst xmlns:a="http://schemas.openxmlformats.org/drawingml/2006/main">
               <a:ext uri="{FF2B5EF4-FFF2-40B4-BE49-F238E27FC236}">
-                <a16:creationId xmlns:a16="http://schemas.microsoft.com/office/drawing/2014/main" id="{EC51064E-1559-40AE-BBB8-CB91ACDED132}"/>
+                <a16:creationId xmlns:a16="http://schemas.microsoft.com/office/drawing/2014/main" id="{90A3BA39-202A-49AF-B3AE-A0F2D61332DB}"/>
               </a:ext>
             </a:extLst>
           </p:cNvPr>
@@ -13241,7 +13179,7 @@
           <p:cNvPr id="4" name="slide-title">
             <a:extLst xmlns:a="http://schemas.openxmlformats.org/drawingml/2006/main">
               <a:ext uri="{FF2B5EF4-FFF2-40B4-BE49-F238E27FC236}">
-                <a16:creationId xmlns:a16="http://schemas.microsoft.com/office/drawing/2014/main" id="{89472123-6359-4A4B-A978-466214807C5E}"/>
+                <a16:creationId xmlns:a16="http://schemas.microsoft.com/office/drawing/2014/main" id="{A370DEDF-59DC-49FC-9CCA-8A9934558E4B}"/>
               </a:ext>
             </a:extLst>
           </p:cNvPr>
@@ -13307,7 +13245,7 @@
           <p:nvPr/>
         </p:nvPicPr>
         <p:blipFill>
-          <a:blip xmlns:r="http://schemas.openxmlformats.org/officeDocument/2006/relationships" xmlns:a="http://schemas.openxmlformats.org/drawingml/2006/main" r:embed="Rb84102cf3cd940af"/>
+          <a:blip xmlns:r="http://schemas.openxmlformats.org/officeDocument/2006/relationships" xmlns:a="http://schemas.openxmlformats.org/drawingml/2006/main" r:embed="Rdb495323f0664230"/>
           <a:stretch xmlns:a="http://schemas.openxmlformats.org/drawingml/2006/main"/>
         </p:blipFill>
         <p:spPr>
@@ -13327,7 +13265,7 @@
           <p:cNvPr id="6" name="image-caption-140">
             <a:extLst xmlns:a="http://schemas.openxmlformats.org/drawingml/2006/main">
               <a:ext uri="{FF2B5EF4-FFF2-40B4-BE49-F238E27FC236}">
-                <a16:creationId xmlns:a16="http://schemas.microsoft.com/office/drawing/2014/main" id="{9A3641CE-DB2D-4F50-A4D7-536E4205A714}"/>
+                <a16:creationId xmlns:a16="http://schemas.microsoft.com/office/drawing/2014/main" id="{24EC01F6-657C-417F-9BE3-7498A676D29E}"/>
               </a:ext>
             </a:extLst>
           </p:cNvPr>
@@ -13389,7 +13327,7 @@
           <p:cNvPr id="7" name="paragraph-524">
             <a:extLst xmlns:a="http://schemas.openxmlformats.org/drawingml/2006/main">
               <a:ext uri="{FF2B5EF4-FFF2-40B4-BE49-F238E27FC236}">
-                <a16:creationId xmlns:a16="http://schemas.microsoft.com/office/drawing/2014/main" id="{6BFAA53B-59C9-4EA8-A115-3EC75C9F1678}"/>
+                <a16:creationId xmlns:a16="http://schemas.microsoft.com/office/drawing/2014/main" id="{BE94A4AF-6D0F-44B1-9C83-B9462FEBCD76}"/>
               </a:ext>
             </a:extLst>
           </p:cNvPr>
@@ -13449,7 +13387,7 @@
     </p:spTree>
     <p:extLst>
       <p:ext uri="{BB962C8B-B14F-4D97-AF65-F5344CB8AC3E}">
-        <p14:creationId xmlns:p14="http://schemas.microsoft.com/office/powerpoint/2010/main" val="164690411"/>
+        <p14:creationId xmlns:p14="http://schemas.microsoft.com/office/powerpoint/2010/main" val="1269535190"/>
       </p:ext>
     </p:extLst>
   </p:cSld>
